--- a/output/wordlabs-train-3day.pptx
+++ b/output/wordlabs-train-3day.pptx
@@ -4240,7 +4240,7 @@
                 <a:ea typeface="Calibri" pitchFamily="34" charset="-122"/>
                 <a:cs typeface="Calibri" pitchFamily="34" charset="-120"/>
               </a:rPr>
-              <a:t>"to teach or instruct"</a:t>
+              <a:t>"to teach or draw along"</a:t>
             </a:r>
             <a:endParaRPr lang="en-US" sz="2200" dirty="0"/>
           </a:p>
@@ -5288,7 +5288,7 @@
                 <a:ea typeface="Calibri" pitchFamily="34" charset="-122"/>
                 <a:cs typeface="Calibri" pitchFamily="34" charset="-120"/>
               </a:rPr>
-              <a:t>Word Labs  •  wordlabs.app  •  Root: 'train' = to teach or instruct</a:t>
+              <a:t>Word Labs  •  wordlabs.app  •  Root: 'train' = to teach or draw along</a:t>
             </a:r>
             <a:endParaRPr lang="en-US" sz="800" dirty="0"/>
           </a:p>
@@ -5622,7 +5622,7 @@
                 <a:ea typeface="Trebuchet MS" pitchFamily="34" charset="-122"/>
                 <a:cs typeface="Trebuchet MS" pitchFamily="34" charset="-120"/>
               </a:rPr>
-              <a:t>0</a:t>
+              <a:t>1</a:t>
             </a:r>
             <a:pPr algn="ctr" indent="0" marL="0">
               <a:buNone/>
@@ -5928,7 +5928,7 @@
                 <a:ea typeface="Calibri" pitchFamily="34" charset="-122"/>
                 <a:cs typeface="Calibri" pitchFamily="34" charset="-120"/>
               </a:rPr>
-              <a:t>Word Labs  •  wordlabs.app  •  Root: 'train' = to teach or instruct</a:t>
+              <a:t>Word Labs  •  wordlabs.app  •  Root: 'train' = to teach or draw along</a:t>
             </a:r>
             <a:endParaRPr lang="en-US" sz="800" dirty="0"/>
           </a:p>
@@ -6057,7 +6057,7 @@
                 <a:ea typeface="Calibri" pitchFamily="34" charset="-122"/>
                 <a:cs typeface="Calibri" pitchFamily="34" charset="-120"/>
               </a:rPr>
-              <a:t>trainer</a:t>
+              <a:t>trainee</a:t>
             </a:r>
             <a:pPr algn="l" indent="0" marL="0">
               <a:buNone/>
@@ -6071,7 +6071,7 @@
                 <a:ea typeface="Calibri" pitchFamily="34" charset="-122"/>
                 <a:cs typeface="Calibri" pitchFamily="34" charset="-120"/>
               </a:rPr>
-              <a:t> worked hard with the </a:t>
+              <a:t> was excited, but the </a:t>
             </a:r>
             <a:pPr algn="l" indent="0" marL="0">
               <a:buNone/>
@@ -6088,7 +6088,7 @@
                 <a:ea typeface="Calibri" pitchFamily="34" charset="-122"/>
                 <a:cs typeface="Calibri" pitchFamily="34" charset="-120"/>
               </a:rPr>
-              <a:t>trainee</a:t>
+              <a:t>trainer</a:t>
             </a:r>
             <a:pPr algn="l" indent="0" marL="0">
               <a:buNone/>
@@ -6102,7 +6102,7 @@
                 <a:ea typeface="Calibri" pitchFamily="34" charset="-122"/>
                 <a:cs typeface="Calibri" pitchFamily="34" charset="-120"/>
               </a:rPr>
-              <a:t> to make sure she was ready for her first competition.</a:t>
+              <a:t> reminded her to be patient during practice.</a:t>
             </a:r>
             <a:endParaRPr lang="en-US" sz="1800" dirty="0"/>
           </a:p>
@@ -6257,7 +6257,7 @@
                 <a:ea typeface="Trebuchet MS" pitchFamily="34" charset="-122"/>
                 <a:cs typeface="Trebuchet MS" pitchFamily="34" charset="-120"/>
               </a:rPr>
-              <a:t>trainer</a:t>
+              <a:t>trainee</a:t>
             </a:r>
             <a:endParaRPr lang="en-US" sz="1400" dirty="0"/>
           </a:p>
@@ -6385,7 +6385,7 @@
                 <a:ea typeface="Trebuchet MS" pitchFamily="34" charset="-122"/>
                 <a:cs typeface="Trebuchet MS" pitchFamily="34" charset="-120"/>
               </a:rPr>
-              <a:t>trainee</a:t>
+              <a:t>trainer</a:t>
             </a:r>
             <a:endParaRPr lang="en-US" sz="1400" dirty="0"/>
           </a:p>
@@ -6716,7 +6716,7 @@
                 <a:ea typeface="Calibri" pitchFamily="34" charset="-122"/>
                 <a:cs typeface="Calibri" pitchFamily="34" charset="-120"/>
               </a:rPr>
-              <a:t>Word Labs  •  wordlabs.app  •  Root: 'train' = to teach or instruct</a:t>
+              <a:t>Word Labs  •  wordlabs.app  •  Root: 'train' = to teach or draw along</a:t>
             </a:r>
             <a:endParaRPr lang="en-US" sz="800" dirty="0"/>
           </a:p>
@@ -6855,7 +6855,7 @@
                 <a:ea typeface="Trebuchet MS" pitchFamily="34" charset="-122"/>
                 <a:cs typeface="Trebuchet MS" pitchFamily="34" charset="-120"/>
               </a:rPr>
-              <a:t>trainer</a:t>
+              <a:t>trainee</a:t>
             </a:r>
             <a:endParaRPr lang="en-US" sz="2800" dirty="0"/>
           </a:p>
@@ -7543,7 +7543,7 @@
                 <a:ea typeface="Calibri" pitchFamily="34" charset="-122"/>
                 <a:cs typeface="Calibri" pitchFamily="34" charset="-120"/>
               </a:rPr>
-              <a:t>Word Labs  •  wordlabs.app  •  Root: 'train' = to teach or instruct</a:t>
+              <a:t>Word Labs  •  wordlabs.app  •  Root: 'train' = to teach or draw along</a:t>
             </a:r>
             <a:endParaRPr lang="en-US" sz="800" dirty="0"/>
           </a:p>
@@ -7682,7 +7682,7 @@
                 <a:ea typeface="Trebuchet MS" pitchFamily="34" charset="-122"/>
                 <a:cs typeface="Trebuchet MS" pitchFamily="34" charset="-120"/>
               </a:rPr>
-              <a:t>trainer</a:t>
+              <a:t>trainee</a:t>
             </a:r>
             <a:endParaRPr lang="en-US" sz="2800" dirty="0"/>
           </a:p>
@@ -7860,7 +7860,7 @@
                 <a:ea typeface="Calibri" pitchFamily="34" charset="-122"/>
                 <a:cs typeface="Calibri" pitchFamily="34" charset="-120"/>
               </a:rPr>
-              <a:t>to teach or instruct</a:t>
+              <a:t>to teach or draw along</a:t>
             </a:r>
             <a:endParaRPr lang="en-US" sz="850" dirty="0"/>
           </a:p>
@@ -7933,7 +7933,7 @@
                 <a:ea typeface="Trebuchet MS" pitchFamily="34" charset="-122"/>
                 <a:cs typeface="Trebuchet MS" pitchFamily="34" charset="-120"/>
               </a:rPr>
-              <a:t>er</a:t>
+              <a:t>ee</a:t>
             </a:r>
             <a:endParaRPr lang="en-US" sz="1300" dirty="0"/>
           </a:p>
@@ -7972,7 +7972,7 @@
                 <a:ea typeface="Calibri" pitchFamily="34" charset="-122"/>
                 <a:cs typeface="Calibri" pitchFamily="34" charset="-120"/>
               </a:rPr>
-              <a:t>a person who does something</a:t>
+              <a:t>a person who receives the action</a:t>
             </a:r>
             <a:endParaRPr lang="en-US" sz="850" dirty="0"/>
           </a:p>
@@ -8528,7 +8528,7 @@
                 <a:ea typeface="Calibri" pitchFamily="34" charset="-122"/>
                 <a:cs typeface="Calibri" pitchFamily="34" charset="-120"/>
               </a:rPr>
-              <a:t>Word Labs  •  wordlabs.app  •  Root: 'train' = to teach or instruct</a:t>
+              <a:t>Word Labs  •  wordlabs.app  •  Root: 'train' = to teach or draw along</a:t>
             </a:r>
             <a:endParaRPr lang="en-US" sz="800" dirty="0"/>
           </a:p>
@@ -8667,7 +8667,7 @@
                 <a:ea typeface="Trebuchet MS" pitchFamily="34" charset="-122"/>
                 <a:cs typeface="Trebuchet MS" pitchFamily="34" charset="-120"/>
               </a:rPr>
-              <a:t>trainer</a:t>
+              <a:t>trainee</a:t>
             </a:r>
             <a:endParaRPr lang="en-US" sz="2800" dirty="0"/>
           </a:p>
@@ -8845,7 +8845,7 @@
                 <a:ea typeface="Calibri" pitchFamily="34" charset="-122"/>
                 <a:cs typeface="Calibri" pitchFamily="34" charset="-120"/>
               </a:rPr>
-              <a:t>to teach or instruct</a:t>
+              <a:t>to teach or draw along</a:t>
             </a:r>
             <a:endParaRPr lang="en-US" sz="850" dirty="0"/>
           </a:p>
@@ -8918,7 +8918,7 @@
                 <a:ea typeface="Trebuchet MS" pitchFamily="34" charset="-122"/>
                 <a:cs typeface="Trebuchet MS" pitchFamily="34" charset="-120"/>
               </a:rPr>
-              <a:t>er</a:t>
+              <a:t>ee</a:t>
             </a:r>
             <a:endParaRPr lang="en-US" sz="1300" dirty="0"/>
           </a:p>
@@ -8957,7 +8957,7 @@
                 <a:ea typeface="Calibri" pitchFamily="34" charset="-122"/>
                 <a:cs typeface="Calibri" pitchFamily="34" charset="-120"/>
               </a:rPr>
-              <a:t>a person who does something</a:t>
+              <a:t>a person who receives the action</a:t>
             </a:r>
             <a:endParaRPr lang="en-US" sz="850" dirty="0"/>
           </a:p>
@@ -9221,7 +9221,7 @@
                 <a:ea typeface="Trebuchet MS" pitchFamily="34" charset="-122"/>
                 <a:cs typeface="Trebuchet MS" pitchFamily="34" charset="-120"/>
               </a:rPr>
-              <a:t>er</a:t>
+              <a:t>ee</a:t>
             </a:r>
             <a:endParaRPr lang="en-US" sz="1400" dirty="0"/>
           </a:p>
@@ -9645,7 +9645,7 @@
                 <a:ea typeface="Calibri" pitchFamily="34" charset="-122"/>
                 <a:cs typeface="Calibri" pitchFamily="34" charset="-120"/>
               </a:rPr>
-              <a:t>Word Labs  •  wordlabs.app  •  Root: 'train' = to teach or instruct</a:t>
+              <a:t>Word Labs  •  wordlabs.app  •  Root: 'train' = to teach or draw along</a:t>
             </a:r>
             <a:endParaRPr lang="en-US" sz="800" dirty="0"/>
           </a:p>
@@ -9784,7 +9784,7 @@
                 <a:ea typeface="Trebuchet MS" pitchFamily="34" charset="-122"/>
                 <a:cs typeface="Trebuchet MS" pitchFamily="34" charset="-120"/>
               </a:rPr>
-              <a:t>trainer</a:t>
+              <a:t>trainee</a:t>
             </a:r>
             <a:endParaRPr lang="en-US" sz="2800" dirty="0"/>
           </a:p>
@@ -9962,7 +9962,7 @@
                 <a:ea typeface="Calibri" pitchFamily="34" charset="-122"/>
                 <a:cs typeface="Calibri" pitchFamily="34" charset="-120"/>
               </a:rPr>
-              <a:t>to teach or instruct</a:t>
+              <a:t>to teach or draw along</a:t>
             </a:r>
             <a:endParaRPr lang="en-US" sz="850" dirty="0"/>
           </a:p>
@@ -10035,7 +10035,7 @@
                 <a:ea typeface="Trebuchet MS" pitchFamily="34" charset="-122"/>
                 <a:cs typeface="Trebuchet MS" pitchFamily="34" charset="-120"/>
               </a:rPr>
-              <a:t>er</a:t>
+              <a:t>ee</a:t>
             </a:r>
             <a:endParaRPr lang="en-US" sz="1300" dirty="0"/>
           </a:p>
@@ -10074,7 +10074,7 @@
                 <a:ea typeface="Calibri" pitchFamily="34" charset="-122"/>
                 <a:cs typeface="Calibri" pitchFamily="34" charset="-120"/>
               </a:rPr>
-              <a:t>a person who does something</a:t>
+              <a:t>a person who receives the action</a:t>
             </a:r>
             <a:endParaRPr lang="en-US" sz="850" dirty="0"/>
           </a:p>
@@ -10338,7 +10338,7 @@
                 <a:ea typeface="Trebuchet MS" pitchFamily="34" charset="-122"/>
                 <a:cs typeface="Trebuchet MS" pitchFamily="34" charset="-120"/>
               </a:rPr>
-              <a:t>er</a:t>
+              <a:t>ee</a:t>
             </a:r>
             <a:endParaRPr lang="en-US" sz="1400" dirty="0"/>
           </a:p>
@@ -10695,7 +10695,7 @@
                 <a:ea typeface="Trebuchet MS" pitchFamily="34" charset="-122"/>
                 <a:cs typeface="Trebuchet MS" pitchFamily="34" charset="-120"/>
               </a:rPr>
-              <a:t>er</a:t>
+              <a:t>ee</a:t>
             </a:r>
             <a:endParaRPr lang="en-US" sz="900" dirty="0"/>
           </a:p>
@@ -10987,7 +10987,7 @@
                 <a:ea typeface="Calibri" pitchFamily="34" charset="-122"/>
                 <a:cs typeface="Calibri" pitchFamily="34" charset="-120"/>
               </a:rPr>
-              <a:t>Word Labs  •  wordlabs.app  •  Root: 'train' = to teach or instruct</a:t>
+              <a:t>Word Labs  •  wordlabs.app  •  Root: 'train' = to teach or draw along</a:t>
             </a:r>
             <a:endParaRPr lang="en-US" sz="800" dirty="0"/>
           </a:p>
@@ -11126,7 +11126,7 @@
                 <a:ea typeface="Trebuchet MS" pitchFamily="34" charset="-122"/>
                 <a:cs typeface="Trebuchet MS" pitchFamily="34" charset="-120"/>
               </a:rPr>
-              <a:t>trainee</a:t>
+              <a:t>trainer</a:t>
             </a:r>
             <a:endParaRPr lang="en-US" sz="2800" dirty="0"/>
           </a:p>
@@ -11814,7 +11814,7 @@
                 <a:ea typeface="Calibri" pitchFamily="34" charset="-122"/>
                 <a:cs typeface="Calibri" pitchFamily="34" charset="-120"/>
               </a:rPr>
-              <a:t>Word Labs  •  wordlabs.app  •  Root: 'train' = to teach or instruct</a:t>
+              <a:t>Word Labs  •  wordlabs.app  •  Root: 'train' = to teach or draw along</a:t>
             </a:r>
             <a:endParaRPr lang="en-US" sz="800" dirty="0"/>
           </a:p>
@@ -11953,7 +11953,7 @@
                 <a:ea typeface="Trebuchet MS" pitchFamily="34" charset="-122"/>
                 <a:cs typeface="Trebuchet MS" pitchFamily="34" charset="-120"/>
               </a:rPr>
-              <a:t>trainee</a:t>
+              <a:t>trainer</a:t>
             </a:r>
             <a:endParaRPr lang="en-US" sz="2800" dirty="0"/>
           </a:p>
@@ -12131,7 +12131,7 @@
                 <a:ea typeface="Calibri" pitchFamily="34" charset="-122"/>
                 <a:cs typeface="Calibri" pitchFamily="34" charset="-120"/>
               </a:rPr>
-              <a:t>to teach or instruct</a:t>
+              <a:t>to teach or draw along</a:t>
             </a:r>
             <a:endParaRPr lang="en-US" sz="850" dirty="0"/>
           </a:p>
@@ -12204,7 +12204,7 @@
                 <a:ea typeface="Trebuchet MS" pitchFamily="34" charset="-122"/>
                 <a:cs typeface="Trebuchet MS" pitchFamily="34" charset="-120"/>
               </a:rPr>
-              <a:t>ee</a:t>
+              <a:t>er</a:t>
             </a:r>
             <a:endParaRPr lang="en-US" sz="1300" dirty="0"/>
           </a:p>
@@ -12243,7 +12243,7 @@
                 <a:ea typeface="Calibri" pitchFamily="34" charset="-122"/>
                 <a:cs typeface="Calibri" pitchFamily="34" charset="-120"/>
               </a:rPr>
-              <a:t>a person who receives an action</a:t>
+              <a:t>a person who does the action</a:t>
             </a:r>
             <a:endParaRPr lang="en-US" sz="850" dirty="0"/>
           </a:p>
@@ -12799,7 +12799,7 @@
                 <a:ea typeface="Calibri" pitchFamily="34" charset="-122"/>
                 <a:cs typeface="Calibri" pitchFamily="34" charset="-120"/>
               </a:rPr>
-              <a:t>Word Labs  •  wordlabs.app  •  Root: 'train' = to teach or instruct</a:t>
+              <a:t>Word Labs  •  wordlabs.app  •  Root: 'train' = to teach or draw along</a:t>
             </a:r>
             <a:endParaRPr lang="en-US" sz="800" dirty="0"/>
           </a:p>
@@ -12938,7 +12938,7 @@
                 <a:ea typeface="Trebuchet MS" pitchFamily="34" charset="-122"/>
                 <a:cs typeface="Trebuchet MS" pitchFamily="34" charset="-120"/>
               </a:rPr>
-              <a:t>trainee</a:t>
+              <a:t>trainer</a:t>
             </a:r>
             <a:endParaRPr lang="en-US" sz="2800" dirty="0"/>
           </a:p>
@@ -13116,7 +13116,7 @@
                 <a:ea typeface="Calibri" pitchFamily="34" charset="-122"/>
                 <a:cs typeface="Calibri" pitchFamily="34" charset="-120"/>
               </a:rPr>
-              <a:t>to teach or instruct</a:t>
+              <a:t>to teach or draw along</a:t>
             </a:r>
             <a:endParaRPr lang="en-US" sz="850" dirty="0"/>
           </a:p>
@@ -13189,7 +13189,7 @@
                 <a:ea typeface="Trebuchet MS" pitchFamily="34" charset="-122"/>
                 <a:cs typeface="Trebuchet MS" pitchFamily="34" charset="-120"/>
               </a:rPr>
-              <a:t>ee</a:t>
+              <a:t>er</a:t>
             </a:r>
             <a:endParaRPr lang="en-US" sz="1300" dirty="0"/>
           </a:p>
@@ -13228,7 +13228,7 @@
                 <a:ea typeface="Calibri" pitchFamily="34" charset="-122"/>
                 <a:cs typeface="Calibri" pitchFamily="34" charset="-120"/>
               </a:rPr>
-              <a:t>a person who receives an action</a:t>
+              <a:t>a person who does the action</a:t>
             </a:r>
             <a:endParaRPr lang="en-US" sz="850" dirty="0"/>
           </a:p>
@@ -13492,7 +13492,7 @@
                 <a:ea typeface="Trebuchet MS" pitchFamily="34" charset="-122"/>
                 <a:cs typeface="Trebuchet MS" pitchFamily="34" charset="-120"/>
               </a:rPr>
-              <a:t>ee</a:t>
+              <a:t>er</a:t>
             </a:r>
             <a:endParaRPr lang="en-US" sz="1400" dirty="0"/>
           </a:p>
@@ -13825,7 +13825,7 @@
                 <a:ea typeface="Calibri" pitchFamily="34" charset="-122"/>
                 <a:cs typeface="Calibri" pitchFamily="34" charset="-120"/>
               </a:rPr>
-              <a:t>Root 'train' — to teach or instruct</a:t>
+              <a:t>Root 'train' — to teach or draw along</a:t>
             </a:r>
             <a:endParaRPr lang="en-US" sz="1600" dirty="0"/>
           </a:p>
@@ -14181,7 +14181,7 @@
                 <a:ea typeface="Calibri" pitchFamily="34" charset="-122"/>
                 <a:cs typeface="Calibri" pitchFamily="34" charset="-120"/>
               </a:rPr>
-              <a:t>Word Labs  •  wordlabs.app  •  Root: 'train' = to teach or instruct</a:t>
+              <a:t>Word Labs  •  wordlabs.app  •  Root: 'train' = to teach or draw along</a:t>
             </a:r>
             <a:endParaRPr lang="en-US" sz="800" dirty="0"/>
           </a:p>
@@ -14320,7 +14320,7 @@
                 <a:ea typeface="Trebuchet MS" pitchFamily="34" charset="-122"/>
                 <a:cs typeface="Trebuchet MS" pitchFamily="34" charset="-120"/>
               </a:rPr>
-              <a:t>trainee</a:t>
+              <a:t>trainer</a:t>
             </a:r>
             <a:endParaRPr lang="en-US" sz="2800" dirty="0"/>
           </a:p>
@@ -14498,7 +14498,7 @@
                 <a:ea typeface="Calibri" pitchFamily="34" charset="-122"/>
                 <a:cs typeface="Calibri" pitchFamily="34" charset="-120"/>
               </a:rPr>
-              <a:t>to teach or instruct</a:t>
+              <a:t>to teach or draw along</a:t>
             </a:r>
             <a:endParaRPr lang="en-US" sz="850" dirty="0"/>
           </a:p>
@@ -14571,7 +14571,7 @@
                 <a:ea typeface="Trebuchet MS" pitchFamily="34" charset="-122"/>
                 <a:cs typeface="Trebuchet MS" pitchFamily="34" charset="-120"/>
               </a:rPr>
-              <a:t>ee</a:t>
+              <a:t>er</a:t>
             </a:r>
             <a:endParaRPr lang="en-US" sz="1300" dirty="0"/>
           </a:p>
@@ -14610,7 +14610,7 @@
                 <a:ea typeface="Calibri" pitchFamily="34" charset="-122"/>
                 <a:cs typeface="Calibri" pitchFamily="34" charset="-120"/>
               </a:rPr>
-              <a:t>a person who receives an action</a:t>
+              <a:t>a person who does the action</a:t>
             </a:r>
             <a:endParaRPr lang="en-US" sz="850" dirty="0"/>
           </a:p>
@@ -14874,7 +14874,7 @@
                 <a:ea typeface="Trebuchet MS" pitchFamily="34" charset="-122"/>
                 <a:cs typeface="Trebuchet MS" pitchFamily="34" charset="-120"/>
               </a:rPr>
-              <a:t>ee</a:t>
+              <a:t>er</a:t>
             </a:r>
             <a:endParaRPr lang="en-US" sz="1400" dirty="0"/>
           </a:p>
@@ -15231,7 +15231,7 @@
                 <a:ea typeface="Trebuchet MS" pitchFamily="34" charset="-122"/>
                 <a:cs typeface="Trebuchet MS" pitchFamily="34" charset="-120"/>
               </a:rPr>
-              <a:t>ee</a:t>
+              <a:t>er</a:t>
             </a:r>
             <a:endParaRPr lang="en-US" sz="900" dirty="0"/>
           </a:p>
@@ -15805,7 +15805,7 @@
                 <a:ea typeface="Calibri" pitchFamily="34" charset="-122"/>
                 <a:cs typeface="Calibri" pitchFamily="34" charset="-120"/>
               </a:rPr>
-              <a:t>Word Labs  •  wordlabs.app  •  Root: 'train' = to teach or instruct</a:t>
+              <a:t>Word Labs  •  wordlabs.app  •  Root: 'train' = to teach or draw along</a:t>
             </a:r>
             <a:endParaRPr lang="en-US" sz="800" dirty="0"/>
           </a:p>
@@ -16445,7 +16445,7 @@
                 <a:ea typeface="Calibri" pitchFamily="34" charset="-122"/>
                 <a:cs typeface="Calibri" pitchFamily="34" charset="-120"/>
               </a:rPr>
-              <a:t>Word Labs  •  wordlabs.app  •  Root: 'train' = to teach or instruct</a:t>
+              <a:t>Word Labs  •  wordlabs.app  •  Root: 'train' = to teach or draw along</a:t>
             </a:r>
             <a:endParaRPr lang="en-US" sz="800" dirty="0"/>
           </a:p>
@@ -16557,7 +16557,7 @@
                 <a:ea typeface="Calibri" pitchFamily="34" charset="-122"/>
                 <a:cs typeface="Calibri" pitchFamily="34" charset="-120"/>
               </a:rPr>
-              <a:t>During </a:t>
+              <a:t>The coach used </a:t>
             </a:r>
             <a:pPr algn="l" indent="0" marL="0">
               <a:buNone/>
@@ -16588,7 +16588,7 @@
                 <a:ea typeface="Calibri" pitchFamily="34" charset="-122"/>
                 <a:cs typeface="Calibri" pitchFamily="34" charset="-120"/>
               </a:rPr>
-              <a:t>, the </a:t>
+              <a:t> to help players overcome the </a:t>
             </a:r>
             <a:pPr algn="l" indent="0" marL="0">
               <a:buNone/>
@@ -16605,7 +16605,7 @@
                 <a:ea typeface="Calibri" pitchFamily="34" charset="-122"/>
                 <a:cs typeface="Calibri" pitchFamily="34" charset="-120"/>
               </a:rPr>
-              <a:t>trainer</a:t>
+              <a:t>constraint</a:t>
             </a:r>
             <a:pPr algn="l" indent="0" marL="0">
               <a:buNone/>
@@ -16619,7 +16619,7 @@
                 <a:ea typeface="Calibri" pitchFamily="34" charset="-122"/>
                 <a:cs typeface="Calibri" pitchFamily="34" charset="-120"/>
               </a:rPr>
-              <a:t> reminded the </a:t>
+              <a:t> of bad habits, which required real </a:t>
             </a:r>
             <a:pPr algn="l" indent="0" marL="0">
               <a:buNone/>
@@ -16636,7 +16636,7 @@
                 <a:ea typeface="Calibri" pitchFamily="34" charset="-122"/>
                 <a:cs typeface="Calibri" pitchFamily="34" charset="-120"/>
               </a:rPr>
-              <a:t>trainees</a:t>
+              <a:t>restraint</a:t>
             </a:r>
             <a:pPr algn="l" indent="0" marL="0">
               <a:buNone/>
@@ -16650,7 +16650,7 @@
                 <a:ea typeface="Calibri" pitchFamily="34" charset="-122"/>
                 <a:cs typeface="Calibri" pitchFamily="34" charset="-120"/>
               </a:rPr>
-              <a:t> that practising every day would help them improve.</a:t>
+              <a:t>.</a:t>
             </a:r>
             <a:endParaRPr lang="en-US" sz="1800" dirty="0"/>
           </a:p>
@@ -16933,7 +16933,7 @@
                 <a:ea typeface="Trebuchet MS" pitchFamily="34" charset="-122"/>
                 <a:cs typeface="Trebuchet MS" pitchFamily="34" charset="-120"/>
               </a:rPr>
-              <a:t>trainer</a:t>
+              <a:t>constraint</a:t>
             </a:r>
             <a:endParaRPr lang="en-US" sz="1400" dirty="0"/>
           </a:p>
@@ -17061,7 +17061,7 @@
                 <a:ea typeface="Trebuchet MS" pitchFamily="34" charset="-122"/>
                 <a:cs typeface="Trebuchet MS" pitchFamily="34" charset="-120"/>
               </a:rPr>
-              <a:t>trainees</a:t>
+              <a:t>restraint</a:t>
             </a:r>
             <a:endParaRPr lang="en-US" sz="1400" dirty="0"/>
           </a:p>
@@ -17392,7 +17392,7 @@
                 <a:ea typeface="Calibri" pitchFamily="34" charset="-122"/>
                 <a:cs typeface="Calibri" pitchFamily="34" charset="-120"/>
               </a:rPr>
-              <a:t>Word Labs  •  wordlabs.app  •  Root: 'train' = to teach or instruct</a:t>
+              <a:t>Word Labs  •  wordlabs.app  •  Root: 'train' = to teach or draw along</a:t>
             </a:r>
             <a:endParaRPr lang="en-US" sz="800" dirty="0"/>
           </a:p>
@@ -18219,7 +18219,7 @@
                 <a:ea typeface="Calibri" pitchFamily="34" charset="-122"/>
                 <a:cs typeface="Calibri" pitchFamily="34" charset="-120"/>
               </a:rPr>
-              <a:t>Word Labs  •  wordlabs.app  •  Root: 'train' = to teach or instruct</a:t>
+              <a:t>Word Labs  •  wordlabs.app  •  Root: 'train' = to teach or draw along</a:t>
             </a:r>
             <a:endParaRPr lang="en-US" sz="800" dirty="0"/>
           </a:p>
@@ -18648,7 +18648,7 @@
                 <a:ea typeface="Calibri" pitchFamily="34" charset="-122"/>
                 <a:cs typeface="Calibri" pitchFamily="34" charset="-120"/>
               </a:rPr>
-              <a:t>to teach or instruct</a:t>
+              <a:t>to teach or draw along</a:t>
             </a:r>
             <a:endParaRPr lang="en-US" sz="850" dirty="0"/>
           </a:p>
@@ -18760,7 +18760,7 @@
                 <a:ea typeface="Calibri" pitchFamily="34" charset="-122"/>
                 <a:cs typeface="Calibri" pitchFamily="34" charset="-120"/>
               </a:rPr>
-              <a:t>ongoing action or process</a:t>
+              <a:t>action happening now</a:t>
             </a:r>
             <a:endParaRPr lang="en-US" sz="850" dirty="0"/>
           </a:p>
@@ -19316,7 +19316,7 @@
                 <a:ea typeface="Calibri" pitchFamily="34" charset="-122"/>
                 <a:cs typeface="Calibri" pitchFamily="34" charset="-120"/>
               </a:rPr>
-              <a:t>Word Labs  •  wordlabs.app  •  Root: 'train' = to teach or instruct</a:t>
+              <a:t>Word Labs  •  wordlabs.app  •  Root: 'train' = to teach or draw along</a:t>
             </a:r>
             <a:endParaRPr lang="en-US" sz="800" dirty="0"/>
           </a:p>
@@ -19745,7 +19745,7 @@
                 <a:ea typeface="Calibri" pitchFamily="34" charset="-122"/>
                 <a:cs typeface="Calibri" pitchFamily="34" charset="-120"/>
               </a:rPr>
-              <a:t>to teach or instruct</a:t>
+              <a:t>to teach or draw along</a:t>
             </a:r>
             <a:endParaRPr lang="en-US" sz="850" dirty="0"/>
           </a:p>
@@ -19857,7 +19857,7 @@
                 <a:ea typeface="Calibri" pitchFamily="34" charset="-122"/>
                 <a:cs typeface="Calibri" pitchFamily="34" charset="-120"/>
               </a:rPr>
-              <a:t>ongoing action or process</a:t>
+              <a:t>action happening now</a:t>
             </a:r>
             <a:endParaRPr lang="en-US" sz="850" dirty="0"/>
           </a:p>
@@ -20650,7 +20650,7 @@
                 <a:ea typeface="Calibri" pitchFamily="34" charset="-122"/>
                 <a:cs typeface="Calibri" pitchFamily="34" charset="-120"/>
               </a:rPr>
-              <a:t>Word Labs  •  wordlabs.app  •  Root: 'train' = to teach or instruct</a:t>
+              <a:t>Word Labs  •  wordlabs.app  •  Root: 'train' = to teach or draw along</a:t>
             </a:r>
             <a:endParaRPr lang="en-US" sz="800" dirty="0"/>
           </a:p>
@@ -21079,7 +21079,7 @@
                 <a:ea typeface="Calibri" pitchFamily="34" charset="-122"/>
                 <a:cs typeface="Calibri" pitchFamily="34" charset="-120"/>
               </a:rPr>
-              <a:t>to teach or instruct</a:t>
+              <a:t>to teach or draw along</a:t>
             </a:r>
             <a:endParaRPr lang="en-US" sz="850" dirty="0"/>
           </a:p>
@@ -21191,7 +21191,7 @@
                 <a:ea typeface="Calibri" pitchFamily="34" charset="-122"/>
                 <a:cs typeface="Calibri" pitchFamily="34" charset="-120"/>
               </a:rPr>
-              <a:t>ongoing action or process</a:t>
+              <a:t>action happening now</a:t>
             </a:r>
             <a:endParaRPr lang="en-US" sz="850" dirty="0"/>
           </a:p>
@@ -21667,7 +21667,7 @@
         </p:nvSpPr>
         <p:spPr>
           <a:xfrm>
-            <a:off x="2124837" y="4169664"/>
+            <a:off x="2254649" y="4169664"/>
             <a:ext cx="685800" cy="475488"/>
           </a:xfrm>
           <a:prstGeom prst="rect">
@@ -21694,7 +21694,7 @@
         </p:nvSpPr>
         <p:spPr>
           <a:xfrm>
-            <a:off x="2124837" y="4169664"/>
+            <a:off x="2254649" y="4169664"/>
             <a:ext cx="685800" cy="475488"/>
           </a:xfrm>
           <a:prstGeom prst="rect">
@@ -21733,7 +21733,7 @@
         </p:nvSpPr>
         <p:spPr>
           <a:xfrm>
-            <a:off x="3033522" y="4169664"/>
+            <a:off x="3293146" y="4169664"/>
             <a:ext cx="685800" cy="475488"/>
           </a:xfrm>
           <a:prstGeom prst="rect">
@@ -21760,7 +21760,7 @@
         </p:nvSpPr>
         <p:spPr>
           <a:xfrm>
-            <a:off x="3033522" y="4169664"/>
+            <a:off x="3293146" y="4169664"/>
             <a:ext cx="685800" cy="475488"/>
           </a:xfrm>
           <a:prstGeom prst="rect">
@@ -21799,7 +21799,7 @@
         </p:nvSpPr>
         <p:spPr>
           <a:xfrm>
-            <a:off x="3942207" y="4169664"/>
+            <a:off x="4331643" y="4169664"/>
             <a:ext cx="685800" cy="475488"/>
           </a:xfrm>
           <a:prstGeom prst="rect">
@@ -21826,7 +21826,7 @@
         </p:nvSpPr>
         <p:spPr>
           <a:xfrm>
-            <a:off x="3942207" y="4169664"/>
+            <a:off x="4331643" y="4169664"/>
             <a:ext cx="685800" cy="475488"/>
           </a:xfrm>
           <a:prstGeom prst="rect">
@@ -21865,7 +21865,7 @@
         </p:nvSpPr>
         <p:spPr>
           <a:xfrm>
-            <a:off x="4850892" y="4169664"/>
+            <a:off x="5370141" y="4169664"/>
             <a:ext cx="685800" cy="475488"/>
           </a:xfrm>
           <a:prstGeom prst="rect">
@@ -21892,7 +21892,7 @@
         </p:nvSpPr>
         <p:spPr>
           <a:xfrm>
-            <a:off x="4850892" y="4169664"/>
+            <a:off x="5370141" y="4169664"/>
             <a:ext cx="685800" cy="475488"/>
           </a:xfrm>
           <a:prstGeom prst="rect">
@@ -21931,7 +21931,7 @@
         </p:nvSpPr>
         <p:spPr>
           <a:xfrm>
-            <a:off x="5759577" y="4169664"/>
+            <a:off x="6408638" y="4169664"/>
             <a:ext cx="685800" cy="475488"/>
           </a:xfrm>
           <a:prstGeom prst="rect">
@@ -21958,7 +21958,7 @@
         </p:nvSpPr>
         <p:spPr>
           <a:xfrm>
-            <a:off x="5759577" y="4169664"/>
+            <a:off x="6408638" y="4169664"/>
             <a:ext cx="685800" cy="475488"/>
           </a:xfrm>
           <a:prstGeom prst="rect">
@@ -21997,7 +21997,7 @@
         </p:nvSpPr>
         <p:spPr>
           <a:xfrm>
-            <a:off x="6668262" y="4169664"/>
+            <a:off x="7447135" y="4169664"/>
             <a:ext cx="685800" cy="475488"/>
           </a:xfrm>
           <a:prstGeom prst="rect">
@@ -22024,7 +22024,7 @@
         </p:nvSpPr>
         <p:spPr>
           <a:xfrm>
-            <a:off x="6668262" y="4169664"/>
+            <a:off x="7447135" y="4169664"/>
             <a:ext cx="685800" cy="475488"/>
           </a:xfrm>
           <a:prstGeom prst="rect">
@@ -22049,73 +22049,7 @@
                 <a:ea typeface="Trebuchet MS" pitchFamily="34" charset="-122"/>
                 <a:cs typeface="Trebuchet MS" pitchFamily="34" charset="-120"/>
               </a:rPr>
-              <a:t>i</a:t>
-            </a:r>
-            <a:endParaRPr lang="en-US" sz="900" dirty="0"/>
-          </a:p>
-        </p:txBody>
-      </p:sp>
-      <p:sp>
-        <p:nvSpPr>
-          <p:cNvPr id="51" name="Shape 49"/>
-          <p:cNvSpPr/>
-          <p:nvPr/>
-        </p:nvSpPr>
-        <p:spPr>
-          <a:xfrm>
-            <a:off x="7576947" y="4169664"/>
-            <a:ext cx="685800" cy="475488"/>
-          </a:xfrm>
-          <a:prstGeom prst="rect">
-            <a:avLst>
-              <a:gd name="adj" fmla="val 7692"/>
-            </a:avLst>
-          </a:prstGeom>
-          <a:solidFill>
-            <a:srgbClr val="FFFFFF"/>
-          </a:solidFill>
-          <a:ln w="12700">
-            <a:solidFill>
-              <a:srgbClr val="DB2777"/>
-            </a:solidFill>
-            <a:prstDash val="solid"/>
-          </a:ln>
-        </p:spPr>
-      </p:sp>
-      <p:sp>
-        <p:nvSpPr>
-          <p:cNvPr id="52" name="Text 50"/>
-          <p:cNvSpPr/>
-          <p:nvPr/>
-        </p:nvSpPr>
-        <p:spPr>
-          <a:xfrm>
-            <a:off x="7576947" y="4169664"/>
-            <a:ext cx="685800" cy="475488"/>
-          </a:xfrm>
-          <a:prstGeom prst="rect">
-            <a:avLst/>
-          </a:prstGeom>
-          <a:noFill/>
-          <a:ln/>
-        </p:spPr>
-        <p:txBody>
-          <a:bodyPr wrap="square" lIns="0" tIns="0" rIns="0" bIns="0" rtlCol="0" anchor="ctr"/>
-          <a:lstStyle/>
-          <a:p>
-            <a:pPr algn="ctr" indent="0" marL="0">
-              <a:buNone/>
-            </a:pPr>
-            <a:r>
-              <a:rPr lang="en-US" sz="900" b="1" dirty="0">
-                <a:solidFill>
-                  <a:srgbClr val="9D174D"/>
-                </a:solidFill>
-                <a:latin typeface="Trebuchet MS" pitchFamily="34" charset="0"/>
-                <a:ea typeface="Trebuchet MS" pitchFamily="34" charset="-122"/>
-                <a:cs typeface="Trebuchet MS" pitchFamily="34" charset="-120"/>
-              </a:rPr>
-              <a:t>ng</a:t>
+              <a:t>ing</a:t>
             </a:r>
             <a:endParaRPr lang="en-US" sz="900" dirty="0"/>
           </a:p>
@@ -22407,7 +22341,7 @@
                 <a:ea typeface="Calibri" pitchFamily="34" charset="-122"/>
                 <a:cs typeface="Calibri" pitchFamily="34" charset="-120"/>
               </a:rPr>
-              <a:t>Word Labs  •  wordlabs.app  •  Root: 'train' = to teach or instruct</a:t>
+              <a:t>Word Labs  •  wordlabs.app  •  Root: 'train' = to teach or draw along</a:t>
             </a:r>
             <a:endParaRPr lang="en-US" sz="800" dirty="0"/>
           </a:p>
@@ -22546,7 +22480,7 @@
                 <a:ea typeface="Trebuchet MS" pitchFamily="34" charset="-122"/>
                 <a:cs typeface="Trebuchet MS" pitchFamily="34" charset="-120"/>
               </a:rPr>
-              <a:t>trainer</a:t>
+              <a:t>constraint</a:t>
             </a:r>
             <a:endParaRPr lang="en-US" sz="2800" dirty="0"/>
           </a:p>
@@ -23234,7 +23168,7 @@
                 <a:ea typeface="Calibri" pitchFamily="34" charset="-122"/>
                 <a:cs typeface="Calibri" pitchFamily="34" charset="-120"/>
               </a:rPr>
-              <a:t>Word Labs  •  wordlabs.app  •  Root: 'train' = to teach or instruct</a:t>
+              <a:t>Word Labs  •  wordlabs.app  •  Root: 'train' = to teach or draw along</a:t>
             </a:r>
             <a:endParaRPr lang="en-US" sz="800" dirty="0"/>
           </a:p>
@@ -23373,7 +23307,7 @@
                 <a:ea typeface="Trebuchet MS" pitchFamily="34" charset="-122"/>
                 <a:cs typeface="Trebuchet MS" pitchFamily="34" charset="-120"/>
               </a:rPr>
-              <a:t>trainer</a:t>
+              <a:t>constraint</a:t>
             </a:r>
             <a:endParaRPr lang="en-US" sz="2800" dirty="0"/>
           </a:p>
@@ -23453,7 +23387,7 @@
         </p:nvSpPr>
         <p:spPr>
           <a:xfrm>
-            <a:off x="2938272" y="2258568"/>
+            <a:off x="2221992" y="2258568"/>
             <a:ext cx="1828800" cy="292608"/>
           </a:xfrm>
           <a:prstGeom prst="rect">
@@ -23462,11 +23396,11 @@
             </a:avLst>
           </a:prstGeom>
           <a:solidFill>
-            <a:srgbClr val="CCFBF1"/>
+            <a:srgbClr val="DDD6FE"/>
           </a:solidFill>
           <a:ln w="19050">
             <a:solidFill>
-              <a:srgbClr val="0D9488"/>
+              <a:srgbClr val="7C3AED"/>
             </a:solidFill>
             <a:prstDash val="solid"/>
           </a:ln>
@@ -23487,7 +23421,7 @@
         </p:nvSpPr>
         <p:spPr>
           <a:xfrm>
-            <a:off x="2938272" y="2258568"/>
+            <a:off x="2221992" y="2258568"/>
             <a:ext cx="1828800" cy="292608"/>
           </a:xfrm>
           <a:prstGeom prst="rect">
@@ -23506,13 +23440,13 @@
             <a:r>
               <a:rPr lang="en-US" sz="1300" b="1" dirty="0">
                 <a:solidFill>
-                  <a:srgbClr val="0F766E"/>
+                  <a:srgbClr val="4C1D95"/>
                 </a:solidFill>
                 <a:latin typeface="Trebuchet MS" pitchFamily="34" charset="0"/>
                 <a:ea typeface="Trebuchet MS" pitchFamily="34" charset="-122"/>
                 <a:cs typeface="Trebuchet MS" pitchFamily="34" charset="-120"/>
               </a:rPr>
-              <a:t>train</a:t>
+              <a:t>con</a:t>
             </a:r>
             <a:endParaRPr lang="en-US" sz="1300" dirty="0"/>
           </a:p>
@@ -23526,7 +23460,7 @@
         </p:nvSpPr>
         <p:spPr>
           <a:xfrm>
-            <a:off x="2938272" y="2569464"/>
+            <a:off x="2221992" y="2569464"/>
             <a:ext cx="1828800" cy="201168"/>
           </a:xfrm>
           <a:prstGeom prst="rect">
@@ -23551,7 +23485,7 @@
                 <a:ea typeface="Calibri" pitchFamily="34" charset="-122"/>
                 <a:cs typeface="Calibri" pitchFamily="34" charset="-120"/>
               </a:rPr>
-              <a:t>to teach or instruct</a:t>
+              <a:t>together or completely</a:t>
             </a:r>
             <a:endParaRPr lang="en-US" sz="850" dirty="0"/>
           </a:p>
@@ -23565,7 +23499,7 @@
         </p:nvSpPr>
         <p:spPr>
           <a:xfrm>
-            <a:off x="5803392" y="2258568"/>
+            <a:off x="4370832" y="2258568"/>
             <a:ext cx="1828800" cy="292608"/>
           </a:xfrm>
           <a:prstGeom prst="rect">
@@ -23599,7 +23533,7 @@
         </p:nvSpPr>
         <p:spPr>
           <a:xfrm>
-            <a:off x="5803392" y="2258568"/>
+            <a:off x="4370832" y="2258568"/>
             <a:ext cx="1828800" cy="292608"/>
           </a:xfrm>
           <a:prstGeom prst="rect">
@@ -23624,7 +23558,7 @@
                 <a:ea typeface="Trebuchet MS" pitchFamily="34" charset="-122"/>
                 <a:cs typeface="Trebuchet MS" pitchFamily="34" charset="-120"/>
               </a:rPr>
-              <a:t>er</a:t>
+              <a:t>strain</a:t>
             </a:r>
             <a:endParaRPr lang="en-US" sz="1300" dirty="0"/>
           </a:p>
@@ -23638,7 +23572,7 @@
         </p:nvSpPr>
         <p:spPr>
           <a:xfrm>
-            <a:off x="5803392" y="2569464"/>
+            <a:off x="4370832" y="2569464"/>
             <a:ext cx="1828800" cy="201168"/>
           </a:xfrm>
           <a:prstGeom prst="rect">
@@ -23663,7 +23597,7 @@
                 <a:ea typeface="Calibri" pitchFamily="34" charset="-122"/>
                 <a:cs typeface="Calibri" pitchFamily="34" charset="-120"/>
               </a:rPr>
-              <a:t>a person who does something</a:t>
+              <a:t>draw tight or pull</a:t>
             </a:r>
             <a:endParaRPr lang="en-US" sz="850" dirty="0"/>
           </a:p>
@@ -23672,6 +23606,118 @@
       <p:sp>
         <p:nvSpPr>
           <p:cNvPr id="22" name="Shape 20"/>
+          <p:cNvSpPr/>
+          <p:nvPr/>
+        </p:nvSpPr>
+        <p:spPr>
+          <a:xfrm>
+            <a:off x="6519672" y="2258568"/>
+            <a:ext cx="1828800" cy="292608"/>
+          </a:xfrm>
+          <a:prstGeom prst="rect">
+            <a:avLst>
+              <a:gd name="adj" fmla="val 25000"/>
+            </a:avLst>
+          </a:prstGeom>
+          <a:solidFill>
+            <a:srgbClr val="FCE7F3"/>
+          </a:solidFill>
+          <a:ln w="19050">
+            <a:solidFill>
+              <a:srgbClr val="DB2777"/>
+            </a:solidFill>
+            <a:prstDash val="solid"/>
+          </a:ln>
+          <a:effectLst>
+            <a:outerShdw sx="100000" sy="100000" kx="0" ky="0" algn="bl" rotWithShape="0" blurRad="101600" dist="38100" dir="8100000">
+              <a:srgbClr val="000000">
+                <a:alpha val="12000"/>
+              </a:srgbClr>
+            </a:outerShdw>
+          </a:effectLst>
+        </p:spPr>
+      </p:sp>
+      <p:sp>
+        <p:nvSpPr>
+          <p:cNvPr id="23" name="Text 21"/>
+          <p:cNvSpPr/>
+          <p:nvPr/>
+        </p:nvSpPr>
+        <p:spPr>
+          <a:xfrm>
+            <a:off x="6519672" y="2258568"/>
+            <a:ext cx="1828800" cy="292608"/>
+          </a:xfrm>
+          <a:prstGeom prst="rect">
+            <a:avLst/>
+          </a:prstGeom>
+          <a:noFill/>
+          <a:ln/>
+        </p:spPr>
+        <p:txBody>
+          <a:bodyPr wrap="square" lIns="0" tIns="0" rIns="0" bIns="0" rtlCol="0" anchor="ctr"/>
+          <a:lstStyle/>
+          <a:p>
+            <a:pPr algn="ctr" indent="0" marL="0">
+              <a:buNone/>
+            </a:pPr>
+            <a:r>
+              <a:rPr lang="en-US" sz="1300" b="1" dirty="0">
+                <a:solidFill>
+                  <a:srgbClr val="9D174D"/>
+                </a:solidFill>
+                <a:latin typeface="Trebuchet MS" pitchFamily="34" charset="0"/>
+                <a:ea typeface="Trebuchet MS" pitchFamily="34" charset="-122"/>
+                <a:cs typeface="Trebuchet MS" pitchFamily="34" charset="-120"/>
+              </a:rPr>
+              <a:t>t</a:t>
+            </a:r>
+            <a:endParaRPr lang="en-US" sz="1300" dirty="0"/>
+          </a:p>
+        </p:txBody>
+      </p:sp>
+      <p:sp>
+        <p:nvSpPr>
+          <p:cNvPr id="24" name="Text 22"/>
+          <p:cNvSpPr/>
+          <p:nvPr/>
+        </p:nvSpPr>
+        <p:spPr>
+          <a:xfrm>
+            <a:off x="6519672" y="2569464"/>
+            <a:ext cx="1828800" cy="201168"/>
+          </a:xfrm>
+          <a:prstGeom prst="rect">
+            <a:avLst/>
+          </a:prstGeom>
+          <a:noFill/>
+          <a:ln/>
+        </p:spPr>
+        <p:txBody>
+          <a:bodyPr wrap="square" lIns="0" tIns="0" rIns="0" bIns="0" rtlCol="0" anchor="t"/>
+          <a:lstStyle/>
+          <a:p>
+            <a:pPr algn="ctr" indent="0" marL="0">
+              <a:buNone/>
+            </a:pPr>
+            <a:r>
+              <a:rPr lang="en-US" sz="850" dirty="0">
+                <a:solidFill>
+                  <a:srgbClr val="475569"/>
+                </a:solidFill>
+                <a:latin typeface="Calibri" pitchFamily="34" charset="0"/>
+                <a:ea typeface="Calibri" pitchFamily="34" charset="-122"/>
+                <a:cs typeface="Calibri" pitchFamily="34" charset="-120"/>
+              </a:rPr>
+              <a:t>noun-forming ending</a:t>
+            </a:r>
+            <a:endParaRPr lang="en-US" sz="850" dirty="0"/>
+          </a:p>
+        </p:txBody>
+      </p:sp>
+      <p:sp>
+        <p:nvSpPr>
+          <p:cNvPr id="25" name="Shape 23"/>
           <p:cNvSpPr/>
           <p:nvPr/>
         </p:nvSpPr>
@@ -23698,7 +23744,7 @@
       </p:sp>
       <p:sp>
         <p:nvSpPr>
-          <p:cNvPr id="23" name="Text 21"/>
+          <p:cNvPr id="26" name="Text 24"/>
           <p:cNvSpPr/>
           <p:nvPr/>
         </p:nvSpPr>
@@ -23737,7 +23783,7 @@
       </p:sp>
       <p:sp>
         <p:nvSpPr>
-          <p:cNvPr id="24" name="Shape 22"/>
+          <p:cNvPr id="27" name="Shape 25"/>
           <p:cNvSpPr/>
           <p:nvPr/>
         </p:nvSpPr>
@@ -23764,7 +23810,7 @@
       </p:sp>
       <p:sp>
         <p:nvSpPr>
-          <p:cNvPr id="25" name="Text 23"/>
+          <p:cNvPr id="28" name="Text 26"/>
           <p:cNvSpPr/>
           <p:nvPr/>
         </p:nvSpPr>
@@ -23803,7 +23849,7 @@
       </p:sp>
       <p:sp>
         <p:nvSpPr>
-          <p:cNvPr id="26" name="Shape 24"/>
+          <p:cNvPr id="29" name="Shape 27"/>
           <p:cNvSpPr/>
           <p:nvPr/>
         </p:nvSpPr>
@@ -23830,7 +23876,7 @@
       </p:sp>
       <p:sp>
         <p:nvSpPr>
-          <p:cNvPr id="27" name="Text 25"/>
+          <p:cNvPr id="30" name="Text 28"/>
           <p:cNvSpPr/>
           <p:nvPr/>
         </p:nvSpPr>
@@ -23869,7 +23915,7 @@
       </p:sp>
       <p:sp>
         <p:nvSpPr>
-          <p:cNvPr id="28" name="Shape 26"/>
+          <p:cNvPr id="31" name="Shape 29"/>
           <p:cNvSpPr/>
           <p:nvPr/>
         </p:nvSpPr>
@@ -23896,7 +23942,7 @@
       </p:sp>
       <p:sp>
         <p:nvSpPr>
-          <p:cNvPr id="29" name="Text 27"/>
+          <p:cNvPr id="32" name="Text 30"/>
           <p:cNvSpPr/>
           <p:nvPr/>
         </p:nvSpPr>
@@ -24219,7 +24265,7 @@
                 <a:ea typeface="Calibri" pitchFamily="34" charset="-122"/>
                 <a:cs typeface="Calibri" pitchFamily="34" charset="-120"/>
               </a:rPr>
-              <a:t>Word Labs  •  wordlabs.app  •  Root: 'train' = to teach or instruct</a:t>
+              <a:t>Word Labs  •  wordlabs.app  •  Root: 'train' = to teach or draw along</a:t>
             </a:r>
             <a:endParaRPr lang="en-US" sz="800" dirty="0"/>
           </a:p>
@@ -24292,7 +24338,7 @@
                 <a:ea typeface="Trebuchet MS" pitchFamily="34" charset="-122"/>
                 <a:cs typeface="Trebuchet MS" pitchFamily="34" charset="-120"/>
               </a:rPr>
-              <a:t>We are learning that the root 'train' means 'to teach or instruct'.</a:t>
+              <a:t>We are learning that the root 'train' means 'to teach or draw along'.</a:t>
             </a:r>
             <a:endParaRPr lang="en-US" sz="2000" dirty="0"/>
           </a:p>
@@ -24938,7 +24984,7 @@
                 <a:ea typeface="Calibri" pitchFamily="34" charset="-122"/>
                 <a:cs typeface="Calibri" pitchFamily="34" charset="-120"/>
               </a:rPr>
-              <a:t>Word Labs  •  wordlabs.app  •  Root: 'train' = to teach or instruct</a:t>
+              <a:t>Word Labs  •  wordlabs.app  •  Root: 'train' = to teach or draw along</a:t>
             </a:r>
             <a:endParaRPr lang="en-US" sz="800" dirty="0"/>
           </a:p>
@@ -25077,7 +25123,7 @@
                 <a:ea typeface="Trebuchet MS" pitchFamily="34" charset="-122"/>
                 <a:cs typeface="Trebuchet MS" pitchFamily="34" charset="-120"/>
               </a:rPr>
-              <a:t>trainer</a:t>
+              <a:t>constraint</a:t>
             </a:r>
             <a:endParaRPr lang="en-US" sz="2800" dirty="0"/>
           </a:p>
@@ -25157,7 +25203,7 @@
         </p:nvSpPr>
         <p:spPr>
           <a:xfrm>
-            <a:off x="2938272" y="2258568"/>
+            <a:off x="2221992" y="2258568"/>
             <a:ext cx="1828800" cy="292608"/>
           </a:xfrm>
           <a:prstGeom prst="rect">
@@ -25166,11 +25212,11 @@
             </a:avLst>
           </a:prstGeom>
           <a:solidFill>
-            <a:srgbClr val="CCFBF1"/>
+            <a:srgbClr val="DDD6FE"/>
           </a:solidFill>
           <a:ln w="19050">
             <a:solidFill>
-              <a:srgbClr val="0D9488"/>
+              <a:srgbClr val="7C3AED"/>
             </a:solidFill>
             <a:prstDash val="solid"/>
           </a:ln>
@@ -25191,7 +25237,7 @@
         </p:nvSpPr>
         <p:spPr>
           <a:xfrm>
-            <a:off x="2938272" y="2258568"/>
+            <a:off x="2221992" y="2258568"/>
             <a:ext cx="1828800" cy="292608"/>
           </a:xfrm>
           <a:prstGeom prst="rect">
@@ -25210,13 +25256,13 @@
             <a:r>
               <a:rPr lang="en-US" sz="1300" b="1" dirty="0">
                 <a:solidFill>
-                  <a:srgbClr val="0F766E"/>
+                  <a:srgbClr val="4C1D95"/>
                 </a:solidFill>
                 <a:latin typeface="Trebuchet MS" pitchFamily="34" charset="0"/>
                 <a:ea typeface="Trebuchet MS" pitchFamily="34" charset="-122"/>
                 <a:cs typeface="Trebuchet MS" pitchFamily="34" charset="-120"/>
               </a:rPr>
-              <a:t>train</a:t>
+              <a:t>con</a:t>
             </a:r>
             <a:endParaRPr lang="en-US" sz="1300" dirty="0"/>
           </a:p>
@@ -25230,7 +25276,7 @@
         </p:nvSpPr>
         <p:spPr>
           <a:xfrm>
-            <a:off x="2938272" y="2569464"/>
+            <a:off x="2221992" y="2569464"/>
             <a:ext cx="1828800" cy="201168"/>
           </a:xfrm>
           <a:prstGeom prst="rect">
@@ -25255,7 +25301,7 @@
                 <a:ea typeface="Calibri" pitchFamily="34" charset="-122"/>
                 <a:cs typeface="Calibri" pitchFamily="34" charset="-120"/>
               </a:rPr>
-              <a:t>to teach or instruct</a:t>
+              <a:t>together or completely</a:t>
             </a:r>
             <a:endParaRPr lang="en-US" sz="850" dirty="0"/>
           </a:p>
@@ -25269,7 +25315,7 @@
         </p:nvSpPr>
         <p:spPr>
           <a:xfrm>
-            <a:off x="5803392" y="2258568"/>
+            <a:off x="4370832" y="2258568"/>
             <a:ext cx="1828800" cy="292608"/>
           </a:xfrm>
           <a:prstGeom prst="rect">
@@ -25303,7 +25349,7 @@
         </p:nvSpPr>
         <p:spPr>
           <a:xfrm>
-            <a:off x="5803392" y="2258568"/>
+            <a:off x="4370832" y="2258568"/>
             <a:ext cx="1828800" cy="292608"/>
           </a:xfrm>
           <a:prstGeom prst="rect">
@@ -25328,7 +25374,7 @@
                 <a:ea typeface="Trebuchet MS" pitchFamily="34" charset="-122"/>
                 <a:cs typeface="Trebuchet MS" pitchFamily="34" charset="-120"/>
               </a:rPr>
-              <a:t>er</a:t>
+              <a:t>strain</a:t>
             </a:r>
             <a:endParaRPr lang="en-US" sz="1300" dirty="0"/>
           </a:p>
@@ -25342,7 +25388,7 @@
         </p:nvSpPr>
         <p:spPr>
           <a:xfrm>
-            <a:off x="5803392" y="2569464"/>
+            <a:off x="4370832" y="2569464"/>
             <a:ext cx="1828800" cy="201168"/>
           </a:xfrm>
           <a:prstGeom prst="rect">
@@ -25367,7 +25413,7 @@
                 <a:ea typeface="Calibri" pitchFamily="34" charset="-122"/>
                 <a:cs typeface="Calibri" pitchFamily="34" charset="-120"/>
               </a:rPr>
-              <a:t>a person who does something</a:t>
+              <a:t>draw tight or pull</a:t>
             </a:r>
             <a:endParaRPr lang="en-US" sz="850" dirty="0"/>
           </a:p>
@@ -25376,6 +25422,118 @@
       <p:sp>
         <p:nvSpPr>
           <p:cNvPr id="22" name="Shape 20"/>
+          <p:cNvSpPr/>
+          <p:nvPr/>
+        </p:nvSpPr>
+        <p:spPr>
+          <a:xfrm>
+            <a:off x="6519672" y="2258568"/>
+            <a:ext cx="1828800" cy="292608"/>
+          </a:xfrm>
+          <a:prstGeom prst="rect">
+            <a:avLst>
+              <a:gd name="adj" fmla="val 25000"/>
+            </a:avLst>
+          </a:prstGeom>
+          <a:solidFill>
+            <a:srgbClr val="FCE7F3"/>
+          </a:solidFill>
+          <a:ln w="19050">
+            <a:solidFill>
+              <a:srgbClr val="DB2777"/>
+            </a:solidFill>
+            <a:prstDash val="solid"/>
+          </a:ln>
+          <a:effectLst>
+            <a:outerShdw sx="100000" sy="100000" kx="0" ky="0" algn="bl" rotWithShape="0" blurRad="101600" dist="38100" dir="8100000">
+              <a:srgbClr val="000000">
+                <a:alpha val="12000"/>
+              </a:srgbClr>
+            </a:outerShdw>
+          </a:effectLst>
+        </p:spPr>
+      </p:sp>
+      <p:sp>
+        <p:nvSpPr>
+          <p:cNvPr id="23" name="Text 21"/>
+          <p:cNvSpPr/>
+          <p:nvPr/>
+        </p:nvSpPr>
+        <p:spPr>
+          <a:xfrm>
+            <a:off x="6519672" y="2258568"/>
+            <a:ext cx="1828800" cy="292608"/>
+          </a:xfrm>
+          <a:prstGeom prst="rect">
+            <a:avLst/>
+          </a:prstGeom>
+          <a:noFill/>
+          <a:ln/>
+        </p:spPr>
+        <p:txBody>
+          <a:bodyPr wrap="square" lIns="0" tIns="0" rIns="0" bIns="0" rtlCol="0" anchor="ctr"/>
+          <a:lstStyle/>
+          <a:p>
+            <a:pPr algn="ctr" indent="0" marL="0">
+              <a:buNone/>
+            </a:pPr>
+            <a:r>
+              <a:rPr lang="en-US" sz="1300" b="1" dirty="0">
+                <a:solidFill>
+                  <a:srgbClr val="9D174D"/>
+                </a:solidFill>
+                <a:latin typeface="Trebuchet MS" pitchFamily="34" charset="0"/>
+                <a:ea typeface="Trebuchet MS" pitchFamily="34" charset="-122"/>
+                <a:cs typeface="Trebuchet MS" pitchFamily="34" charset="-120"/>
+              </a:rPr>
+              <a:t>t</a:t>
+            </a:r>
+            <a:endParaRPr lang="en-US" sz="1300" dirty="0"/>
+          </a:p>
+        </p:txBody>
+      </p:sp>
+      <p:sp>
+        <p:nvSpPr>
+          <p:cNvPr id="24" name="Text 22"/>
+          <p:cNvSpPr/>
+          <p:nvPr/>
+        </p:nvSpPr>
+        <p:spPr>
+          <a:xfrm>
+            <a:off x="6519672" y="2569464"/>
+            <a:ext cx="1828800" cy="201168"/>
+          </a:xfrm>
+          <a:prstGeom prst="rect">
+            <a:avLst/>
+          </a:prstGeom>
+          <a:noFill/>
+          <a:ln/>
+        </p:spPr>
+        <p:txBody>
+          <a:bodyPr wrap="square" lIns="0" tIns="0" rIns="0" bIns="0" rtlCol="0" anchor="t"/>
+          <a:lstStyle/>
+          <a:p>
+            <a:pPr algn="ctr" indent="0" marL="0">
+              <a:buNone/>
+            </a:pPr>
+            <a:r>
+              <a:rPr lang="en-US" sz="850" dirty="0">
+                <a:solidFill>
+                  <a:srgbClr val="475569"/>
+                </a:solidFill>
+                <a:latin typeface="Calibri" pitchFamily="34" charset="0"/>
+                <a:ea typeface="Calibri" pitchFamily="34" charset="-122"/>
+                <a:cs typeface="Calibri" pitchFamily="34" charset="-120"/>
+              </a:rPr>
+              <a:t>noun-forming ending</a:t>
+            </a:r>
+            <a:endParaRPr lang="en-US" sz="850" dirty="0"/>
+          </a:p>
+        </p:txBody>
+      </p:sp>
+      <p:sp>
+        <p:nvSpPr>
+          <p:cNvPr id="25" name="Shape 23"/>
           <p:cNvSpPr/>
           <p:nvPr/>
         </p:nvSpPr>
@@ -25402,7 +25560,7 @@
       </p:sp>
       <p:sp>
         <p:nvSpPr>
-          <p:cNvPr id="23" name="Text 21"/>
+          <p:cNvPr id="26" name="Text 24"/>
           <p:cNvSpPr/>
           <p:nvPr/>
         </p:nvSpPr>
@@ -25441,7 +25599,7 @@
       </p:sp>
       <p:sp>
         <p:nvSpPr>
-          <p:cNvPr id="24" name="Shape 22"/>
+          <p:cNvPr id="27" name="Shape 25"/>
           <p:cNvSpPr/>
           <p:nvPr/>
         </p:nvSpPr>
@@ -25468,7 +25626,7 @@
       </p:sp>
       <p:sp>
         <p:nvSpPr>
-          <p:cNvPr id="25" name="Shape 23"/>
+          <p:cNvPr id="28" name="Shape 26"/>
           <p:cNvSpPr/>
           <p:nvPr/>
         </p:nvSpPr>
@@ -25495,7 +25653,7 @@
       </p:sp>
       <p:sp>
         <p:nvSpPr>
-          <p:cNvPr id="26" name="Text 24"/>
+          <p:cNvPr id="29" name="Text 27"/>
           <p:cNvSpPr/>
           <p:nvPr/>
         </p:nvSpPr>
@@ -25526,7 +25684,7 @@
                 <a:ea typeface="Trebuchet MS" pitchFamily="34" charset="-122"/>
                 <a:cs typeface="Trebuchet MS" pitchFamily="34" charset="-120"/>
               </a:rPr>
-              <a:t>train</a:t>
+              <a:t>con</a:t>
             </a:r>
             <a:endParaRPr lang="en-US" sz="1400" dirty="0"/>
           </a:p>
@@ -25534,7 +25692,7 @@
       </p:sp>
       <p:sp>
         <p:nvSpPr>
-          <p:cNvPr id="27" name="Text 25"/>
+          <p:cNvPr id="30" name="Text 28"/>
           <p:cNvSpPr/>
           <p:nvPr/>
         </p:nvSpPr>
@@ -25573,7 +25731,7 @@
       </p:sp>
       <p:sp>
         <p:nvSpPr>
-          <p:cNvPr id="28" name="Shape 26"/>
+          <p:cNvPr id="31" name="Shape 29"/>
           <p:cNvSpPr/>
           <p:nvPr/>
         </p:nvSpPr>
@@ -25600,7 +25758,7 @@
       </p:sp>
       <p:sp>
         <p:nvSpPr>
-          <p:cNvPr id="29" name="Text 27"/>
+          <p:cNvPr id="32" name="Text 30"/>
           <p:cNvSpPr/>
           <p:nvPr/>
         </p:nvSpPr>
@@ -25631,7 +25789,7 @@
                 <a:ea typeface="Trebuchet MS" pitchFamily="34" charset="-122"/>
                 <a:cs typeface="Trebuchet MS" pitchFamily="34" charset="-120"/>
               </a:rPr>
-              <a:t>er</a:t>
+              <a:t>straint</a:t>
             </a:r>
             <a:endParaRPr lang="en-US" sz="1400" dirty="0"/>
           </a:p>
@@ -25639,7 +25797,7 @@
       </p:sp>
       <p:sp>
         <p:nvSpPr>
-          <p:cNvPr id="30" name="Shape 28"/>
+          <p:cNvPr id="33" name="Shape 31"/>
           <p:cNvSpPr/>
           <p:nvPr/>
         </p:nvSpPr>
@@ -25666,7 +25824,7 @@
       </p:sp>
       <p:sp>
         <p:nvSpPr>
-          <p:cNvPr id="31" name="Text 29"/>
+          <p:cNvPr id="34" name="Text 32"/>
           <p:cNvSpPr/>
           <p:nvPr/>
         </p:nvSpPr>
@@ -25705,7 +25863,7 @@
       </p:sp>
       <p:sp>
         <p:nvSpPr>
-          <p:cNvPr id="32" name="Shape 30"/>
+          <p:cNvPr id="35" name="Shape 33"/>
           <p:cNvSpPr/>
           <p:nvPr/>
         </p:nvSpPr>
@@ -25732,7 +25890,7 @@
       </p:sp>
       <p:sp>
         <p:nvSpPr>
-          <p:cNvPr id="33" name="Text 31"/>
+          <p:cNvPr id="36" name="Text 34"/>
           <p:cNvSpPr/>
           <p:nvPr/>
         </p:nvSpPr>
@@ -26055,7 +26213,7 @@
                 <a:ea typeface="Calibri" pitchFamily="34" charset="-122"/>
                 <a:cs typeface="Calibri" pitchFamily="34" charset="-120"/>
               </a:rPr>
-              <a:t>Word Labs  •  wordlabs.app  •  Root: 'train' = to teach or instruct</a:t>
+              <a:t>Word Labs  •  wordlabs.app  •  Root: 'train' = to teach or draw along</a:t>
             </a:r>
             <a:endParaRPr lang="en-US" sz="800" dirty="0"/>
           </a:p>
@@ -26194,7 +26352,7 @@
                 <a:ea typeface="Trebuchet MS" pitchFamily="34" charset="-122"/>
                 <a:cs typeface="Trebuchet MS" pitchFamily="34" charset="-120"/>
               </a:rPr>
-              <a:t>trainer</a:t>
+              <a:t>constraint</a:t>
             </a:r>
             <a:endParaRPr lang="en-US" sz="2800" dirty="0"/>
           </a:p>
@@ -26274,7 +26432,7 @@
         </p:nvSpPr>
         <p:spPr>
           <a:xfrm>
-            <a:off x="2938272" y="2258568"/>
+            <a:off x="2221992" y="2258568"/>
             <a:ext cx="1828800" cy="292608"/>
           </a:xfrm>
           <a:prstGeom prst="rect">
@@ -26283,11 +26441,11 @@
             </a:avLst>
           </a:prstGeom>
           <a:solidFill>
-            <a:srgbClr val="CCFBF1"/>
+            <a:srgbClr val="DDD6FE"/>
           </a:solidFill>
           <a:ln w="19050">
             <a:solidFill>
-              <a:srgbClr val="0D9488"/>
+              <a:srgbClr val="7C3AED"/>
             </a:solidFill>
             <a:prstDash val="solid"/>
           </a:ln>
@@ -26308,7 +26466,7 @@
         </p:nvSpPr>
         <p:spPr>
           <a:xfrm>
-            <a:off x="2938272" y="2258568"/>
+            <a:off x="2221992" y="2258568"/>
             <a:ext cx="1828800" cy="292608"/>
           </a:xfrm>
           <a:prstGeom prst="rect">
@@ -26327,13 +26485,13 @@
             <a:r>
               <a:rPr lang="en-US" sz="1300" b="1" dirty="0">
                 <a:solidFill>
-                  <a:srgbClr val="0F766E"/>
+                  <a:srgbClr val="4C1D95"/>
                 </a:solidFill>
                 <a:latin typeface="Trebuchet MS" pitchFamily="34" charset="0"/>
                 <a:ea typeface="Trebuchet MS" pitchFamily="34" charset="-122"/>
                 <a:cs typeface="Trebuchet MS" pitchFamily="34" charset="-120"/>
               </a:rPr>
-              <a:t>train</a:t>
+              <a:t>con</a:t>
             </a:r>
             <a:endParaRPr lang="en-US" sz="1300" dirty="0"/>
           </a:p>
@@ -26347,7 +26505,7 @@
         </p:nvSpPr>
         <p:spPr>
           <a:xfrm>
-            <a:off x="2938272" y="2569464"/>
+            <a:off x="2221992" y="2569464"/>
             <a:ext cx="1828800" cy="201168"/>
           </a:xfrm>
           <a:prstGeom prst="rect">
@@ -26372,7 +26530,7 @@
                 <a:ea typeface="Calibri" pitchFamily="34" charset="-122"/>
                 <a:cs typeface="Calibri" pitchFamily="34" charset="-120"/>
               </a:rPr>
-              <a:t>to teach or instruct</a:t>
+              <a:t>together or completely</a:t>
             </a:r>
             <a:endParaRPr lang="en-US" sz="850" dirty="0"/>
           </a:p>
@@ -26386,7 +26544,7 @@
         </p:nvSpPr>
         <p:spPr>
           <a:xfrm>
-            <a:off x="5803392" y="2258568"/>
+            <a:off x="4370832" y="2258568"/>
             <a:ext cx="1828800" cy="292608"/>
           </a:xfrm>
           <a:prstGeom prst="rect">
@@ -26420,7 +26578,7 @@
         </p:nvSpPr>
         <p:spPr>
           <a:xfrm>
-            <a:off x="5803392" y="2258568"/>
+            <a:off x="4370832" y="2258568"/>
             <a:ext cx="1828800" cy="292608"/>
           </a:xfrm>
           <a:prstGeom prst="rect">
@@ -26445,7 +26603,7 @@
                 <a:ea typeface="Trebuchet MS" pitchFamily="34" charset="-122"/>
                 <a:cs typeface="Trebuchet MS" pitchFamily="34" charset="-120"/>
               </a:rPr>
-              <a:t>er</a:t>
+              <a:t>strain</a:t>
             </a:r>
             <a:endParaRPr lang="en-US" sz="1300" dirty="0"/>
           </a:p>
@@ -26459,7 +26617,7 @@
         </p:nvSpPr>
         <p:spPr>
           <a:xfrm>
-            <a:off x="5803392" y="2569464"/>
+            <a:off x="4370832" y="2569464"/>
             <a:ext cx="1828800" cy="201168"/>
           </a:xfrm>
           <a:prstGeom prst="rect">
@@ -26484,7 +26642,7 @@
                 <a:ea typeface="Calibri" pitchFamily="34" charset="-122"/>
                 <a:cs typeface="Calibri" pitchFamily="34" charset="-120"/>
               </a:rPr>
-              <a:t>a person who does something</a:t>
+              <a:t>draw tight or pull</a:t>
             </a:r>
             <a:endParaRPr lang="en-US" sz="850" dirty="0"/>
           </a:p>
@@ -26493,6 +26651,118 @@
       <p:sp>
         <p:nvSpPr>
           <p:cNvPr id="22" name="Shape 20"/>
+          <p:cNvSpPr/>
+          <p:nvPr/>
+        </p:nvSpPr>
+        <p:spPr>
+          <a:xfrm>
+            <a:off x="6519672" y="2258568"/>
+            <a:ext cx="1828800" cy="292608"/>
+          </a:xfrm>
+          <a:prstGeom prst="rect">
+            <a:avLst>
+              <a:gd name="adj" fmla="val 25000"/>
+            </a:avLst>
+          </a:prstGeom>
+          <a:solidFill>
+            <a:srgbClr val="FCE7F3"/>
+          </a:solidFill>
+          <a:ln w="19050">
+            <a:solidFill>
+              <a:srgbClr val="DB2777"/>
+            </a:solidFill>
+            <a:prstDash val="solid"/>
+          </a:ln>
+          <a:effectLst>
+            <a:outerShdw sx="100000" sy="100000" kx="0" ky="0" algn="bl" rotWithShape="0" blurRad="101600" dist="38100" dir="8100000">
+              <a:srgbClr val="000000">
+                <a:alpha val="12000"/>
+              </a:srgbClr>
+            </a:outerShdw>
+          </a:effectLst>
+        </p:spPr>
+      </p:sp>
+      <p:sp>
+        <p:nvSpPr>
+          <p:cNvPr id="23" name="Text 21"/>
+          <p:cNvSpPr/>
+          <p:nvPr/>
+        </p:nvSpPr>
+        <p:spPr>
+          <a:xfrm>
+            <a:off x="6519672" y="2258568"/>
+            <a:ext cx="1828800" cy="292608"/>
+          </a:xfrm>
+          <a:prstGeom prst="rect">
+            <a:avLst/>
+          </a:prstGeom>
+          <a:noFill/>
+          <a:ln/>
+        </p:spPr>
+        <p:txBody>
+          <a:bodyPr wrap="square" lIns="0" tIns="0" rIns="0" bIns="0" rtlCol="0" anchor="ctr"/>
+          <a:lstStyle/>
+          <a:p>
+            <a:pPr algn="ctr" indent="0" marL="0">
+              <a:buNone/>
+            </a:pPr>
+            <a:r>
+              <a:rPr lang="en-US" sz="1300" b="1" dirty="0">
+                <a:solidFill>
+                  <a:srgbClr val="9D174D"/>
+                </a:solidFill>
+                <a:latin typeface="Trebuchet MS" pitchFamily="34" charset="0"/>
+                <a:ea typeface="Trebuchet MS" pitchFamily="34" charset="-122"/>
+                <a:cs typeface="Trebuchet MS" pitchFamily="34" charset="-120"/>
+              </a:rPr>
+              <a:t>t</a:t>
+            </a:r>
+            <a:endParaRPr lang="en-US" sz="1300" dirty="0"/>
+          </a:p>
+        </p:txBody>
+      </p:sp>
+      <p:sp>
+        <p:nvSpPr>
+          <p:cNvPr id="24" name="Text 22"/>
+          <p:cNvSpPr/>
+          <p:nvPr/>
+        </p:nvSpPr>
+        <p:spPr>
+          <a:xfrm>
+            <a:off x="6519672" y="2569464"/>
+            <a:ext cx="1828800" cy="201168"/>
+          </a:xfrm>
+          <a:prstGeom prst="rect">
+            <a:avLst/>
+          </a:prstGeom>
+          <a:noFill/>
+          <a:ln/>
+        </p:spPr>
+        <p:txBody>
+          <a:bodyPr wrap="square" lIns="0" tIns="0" rIns="0" bIns="0" rtlCol="0" anchor="t"/>
+          <a:lstStyle/>
+          <a:p>
+            <a:pPr algn="ctr" indent="0" marL="0">
+              <a:buNone/>
+            </a:pPr>
+            <a:r>
+              <a:rPr lang="en-US" sz="850" dirty="0">
+                <a:solidFill>
+                  <a:srgbClr val="475569"/>
+                </a:solidFill>
+                <a:latin typeface="Calibri" pitchFamily="34" charset="0"/>
+                <a:ea typeface="Calibri" pitchFamily="34" charset="-122"/>
+                <a:cs typeface="Calibri" pitchFamily="34" charset="-120"/>
+              </a:rPr>
+              <a:t>noun-forming ending</a:t>
+            </a:r>
+            <a:endParaRPr lang="en-US" sz="850" dirty="0"/>
+          </a:p>
+        </p:txBody>
+      </p:sp>
+      <p:sp>
+        <p:nvSpPr>
+          <p:cNvPr id="25" name="Shape 23"/>
           <p:cNvSpPr/>
           <p:nvPr/>
         </p:nvSpPr>
@@ -26519,7 +26789,7 @@
       </p:sp>
       <p:sp>
         <p:nvSpPr>
-          <p:cNvPr id="23" name="Text 21"/>
+          <p:cNvPr id="26" name="Text 24"/>
           <p:cNvSpPr/>
           <p:nvPr/>
         </p:nvSpPr>
@@ -26558,7 +26828,7 @@
       </p:sp>
       <p:sp>
         <p:nvSpPr>
-          <p:cNvPr id="24" name="Shape 22"/>
+          <p:cNvPr id="27" name="Shape 25"/>
           <p:cNvSpPr/>
           <p:nvPr/>
         </p:nvSpPr>
@@ -26585,7 +26855,7 @@
       </p:sp>
       <p:sp>
         <p:nvSpPr>
-          <p:cNvPr id="25" name="Shape 23"/>
+          <p:cNvPr id="28" name="Shape 26"/>
           <p:cNvSpPr/>
           <p:nvPr/>
         </p:nvSpPr>
@@ -26612,7 +26882,7 @@
       </p:sp>
       <p:sp>
         <p:nvSpPr>
-          <p:cNvPr id="26" name="Text 24"/>
+          <p:cNvPr id="29" name="Text 27"/>
           <p:cNvSpPr/>
           <p:nvPr/>
         </p:nvSpPr>
@@ -26643,7 +26913,7 @@
                 <a:ea typeface="Trebuchet MS" pitchFamily="34" charset="-122"/>
                 <a:cs typeface="Trebuchet MS" pitchFamily="34" charset="-120"/>
               </a:rPr>
-              <a:t>train</a:t>
+              <a:t>con</a:t>
             </a:r>
             <a:endParaRPr lang="en-US" sz="1400" dirty="0"/>
           </a:p>
@@ -26651,7 +26921,7 @@
       </p:sp>
       <p:sp>
         <p:nvSpPr>
-          <p:cNvPr id="27" name="Text 25"/>
+          <p:cNvPr id="30" name="Text 28"/>
           <p:cNvSpPr/>
           <p:nvPr/>
         </p:nvSpPr>
@@ -26690,7 +26960,7 @@
       </p:sp>
       <p:sp>
         <p:nvSpPr>
-          <p:cNvPr id="28" name="Shape 26"/>
+          <p:cNvPr id="31" name="Shape 29"/>
           <p:cNvSpPr/>
           <p:nvPr/>
         </p:nvSpPr>
@@ -26717,7 +26987,7 @@
       </p:sp>
       <p:sp>
         <p:nvSpPr>
-          <p:cNvPr id="29" name="Text 27"/>
+          <p:cNvPr id="32" name="Text 30"/>
           <p:cNvSpPr/>
           <p:nvPr/>
         </p:nvSpPr>
@@ -26748,7 +27018,7 @@
                 <a:ea typeface="Trebuchet MS" pitchFamily="34" charset="-122"/>
                 <a:cs typeface="Trebuchet MS" pitchFamily="34" charset="-120"/>
               </a:rPr>
-              <a:t>er</a:t>
+              <a:t>straint</a:t>
             </a:r>
             <a:endParaRPr lang="en-US" sz="1400" dirty="0"/>
           </a:p>
@@ -26756,7 +27026,7 @@
       </p:sp>
       <p:sp>
         <p:nvSpPr>
-          <p:cNvPr id="30" name="Shape 28"/>
+          <p:cNvPr id="33" name="Shape 31"/>
           <p:cNvSpPr/>
           <p:nvPr/>
         </p:nvSpPr>
@@ -26783,7 +27053,7 @@
       </p:sp>
       <p:sp>
         <p:nvSpPr>
-          <p:cNvPr id="31" name="Text 29"/>
+          <p:cNvPr id="34" name="Text 32"/>
           <p:cNvSpPr/>
           <p:nvPr/>
         </p:nvSpPr>
@@ -26822,18 +27092,18 @@
       </p:sp>
       <p:sp>
         <p:nvSpPr>
-          <p:cNvPr id="32" name="Shape 30"/>
+          <p:cNvPr id="35" name="Shape 33"/>
           <p:cNvSpPr/>
           <p:nvPr/>
         </p:nvSpPr>
         <p:spPr>
           <a:xfrm>
             <a:off x="1874520" y="4096512"/>
-            <a:ext cx="6903720" cy="658368"/>
+            <a:ext cx="6903720" cy="804672"/>
           </a:xfrm>
           <a:prstGeom prst="rect">
             <a:avLst>
-              <a:gd name="adj" fmla="val 8333"/>
+              <a:gd name="adj" fmla="val 6818"/>
             </a:avLst>
           </a:prstGeom>
           <a:solidFill>
@@ -26849,18 +27119,18 @@
       </p:sp>
       <p:sp>
         <p:nvSpPr>
-          <p:cNvPr id="33" name="Shape 31"/>
-          <p:cNvSpPr/>
-          <p:nvPr/>
-        </p:nvSpPr>
-        <p:spPr>
-          <a:xfrm>
-            <a:off x="2670048" y="4169664"/>
-            <a:ext cx="685800" cy="475488"/>
+          <p:cNvPr id="36" name="Shape 34"/>
+          <p:cNvSpPr/>
+          <p:nvPr/>
+        </p:nvSpPr>
+        <p:spPr>
+          <a:xfrm>
+            <a:off x="2124837" y="4169664"/>
+            <a:ext cx="685800" cy="384048"/>
           </a:xfrm>
           <a:prstGeom prst="rect">
             <a:avLst>
-              <a:gd name="adj" fmla="val 7692"/>
+              <a:gd name="adj" fmla="val 9524"/>
             </a:avLst>
           </a:prstGeom>
           <a:solidFill>
@@ -26876,14 +27146,14 @@
       </p:sp>
       <p:sp>
         <p:nvSpPr>
-          <p:cNvPr id="34" name="Text 32"/>
-          <p:cNvSpPr/>
-          <p:nvPr/>
-        </p:nvSpPr>
-        <p:spPr>
-          <a:xfrm>
-            <a:off x="2670048" y="4169664"/>
-            <a:ext cx="685800" cy="475488"/>
+          <p:cNvPr id="37" name="Text 35"/>
+          <p:cNvSpPr/>
+          <p:nvPr/>
+        </p:nvSpPr>
+        <p:spPr>
+          <a:xfrm>
+            <a:off x="2124837" y="4169664"/>
+            <a:ext cx="685800" cy="384048"/>
           </a:xfrm>
           <a:prstGeom prst="rect">
             <a:avLst/>
@@ -26907,7 +27177,7 @@
                 <a:ea typeface="Trebuchet MS" pitchFamily="34" charset="-122"/>
                 <a:cs typeface="Trebuchet MS" pitchFamily="34" charset="-120"/>
               </a:rPr>
-              <a:t>tr</a:t>
+              <a:t>c</a:t>
             </a:r>
             <a:endParaRPr lang="en-US" sz="900" dirty="0"/>
           </a:p>
@@ -26915,18 +27185,57 @@
       </p:sp>
       <p:sp>
         <p:nvSpPr>
-          <p:cNvPr id="35" name="Shape 33"/>
-          <p:cNvSpPr/>
-          <p:nvPr/>
-        </p:nvSpPr>
-        <p:spPr>
-          <a:xfrm>
-            <a:off x="4123944" y="4169664"/>
-            <a:ext cx="685800" cy="475488"/>
+          <p:cNvPr id="38" name="Text 36"/>
+          <p:cNvSpPr/>
+          <p:nvPr/>
+        </p:nvSpPr>
+        <p:spPr>
+          <a:xfrm>
+            <a:off x="2124837" y="4572000"/>
+            <a:ext cx="685800" cy="219456"/>
+          </a:xfrm>
+          <a:prstGeom prst="rect">
+            <a:avLst/>
+          </a:prstGeom>
+          <a:noFill/>
+          <a:ln/>
+        </p:spPr>
+        <p:txBody>
+          <a:bodyPr wrap="square" lIns="0" tIns="0" rIns="0" bIns="0" rtlCol="0" anchor="t"/>
+          <a:lstStyle/>
+          <a:p>
+            <a:pPr algn="ctr" indent="0" marL="0">
+              <a:buNone/>
+            </a:pPr>
+            <a:r>
+              <a:rPr lang="en-US" sz="750" i="1" dirty="0">
+                <a:solidFill>
+                  <a:srgbClr val="94A3B8"/>
+                </a:solidFill>
+                <a:latin typeface="Calibri" pitchFamily="34" charset="0"/>
+                <a:ea typeface="Calibri" pitchFamily="34" charset="-122"/>
+                <a:cs typeface="Calibri" pitchFamily="34" charset="-120"/>
+              </a:rPr>
+              <a:t>/k/</a:t>
+            </a:r>
+            <a:endParaRPr lang="en-US" sz="750" dirty="0"/>
+          </a:p>
+        </p:txBody>
+      </p:sp>
+      <p:sp>
+        <p:nvSpPr>
+          <p:cNvPr id="39" name="Shape 37"/>
+          <p:cNvSpPr/>
+          <p:nvPr/>
+        </p:nvSpPr>
+        <p:spPr>
+          <a:xfrm>
+            <a:off x="3033522" y="4169664"/>
+            <a:ext cx="685800" cy="384048"/>
           </a:xfrm>
           <a:prstGeom prst="rect">
             <a:avLst>
-              <a:gd name="adj" fmla="val 7692"/>
+              <a:gd name="adj" fmla="val 9524"/>
             </a:avLst>
           </a:prstGeom>
           <a:solidFill>
@@ -26942,14 +27251,14 @@
       </p:sp>
       <p:sp>
         <p:nvSpPr>
-          <p:cNvPr id="36" name="Text 34"/>
-          <p:cNvSpPr/>
-          <p:nvPr/>
-        </p:nvSpPr>
-        <p:spPr>
-          <a:xfrm>
-            <a:off x="4123944" y="4169664"/>
-            <a:ext cx="685800" cy="475488"/>
+          <p:cNvPr id="40" name="Text 38"/>
+          <p:cNvSpPr/>
+          <p:nvPr/>
+        </p:nvSpPr>
+        <p:spPr>
+          <a:xfrm>
+            <a:off x="3033522" y="4169664"/>
+            <a:ext cx="685800" cy="384048"/>
           </a:xfrm>
           <a:prstGeom prst="rect">
             <a:avLst/>
@@ -26973,7 +27282,7 @@
                 <a:ea typeface="Trebuchet MS" pitchFamily="34" charset="-122"/>
                 <a:cs typeface="Trebuchet MS" pitchFamily="34" charset="-120"/>
               </a:rPr>
-              <a:t>ai</a:t>
+              <a:t>o</a:t>
             </a:r>
             <a:endParaRPr lang="en-US" sz="900" dirty="0"/>
           </a:p>
@@ -26981,18 +27290,18 @@
       </p:sp>
       <p:sp>
         <p:nvSpPr>
-          <p:cNvPr id="37" name="Shape 35"/>
-          <p:cNvSpPr/>
-          <p:nvPr/>
-        </p:nvSpPr>
-        <p:spPr>
-          <a:xfrm>
-            <a:off x="5577840" y="4169664"/>
-            <a:ext cx="685800" cy="475488"/>
+          <p:cNvPr id="41" name="Shape 39"/>
+          <p:cNvSpPr/>
+          <p:nvPr/>
+        </p:nvSpPr>
+        <p:spPr>
+          <a:xfrm>
+            <a:off x="3942207" y="4169664"/>
+            <a:ext cx="685800" cy="384048"/>
           </a:xfrm>
           <a:prstGeom prst="rect">
             <a:avLst>
-              <a:gd name="adj" fmla="val 7692"/>
+              <a:gd name="adj" fmla="val 9524"/>
             </a:avLst>
           </a:prstGeom>
           <a:solidFill>
@@ -27008,14 +27317,14 @@
       </p:sp>
       <p:sp>
         <p:nvSpPr>
-          <p:cNvPr id="38" name="Text 36"/>
-          <p:cNvSpPr/>
-          <p:nvPr/>
-        </p:nvSpPr>
-        <p:spPr>
-          <a:xfrm>
-            <a:off x="5577840" y="4169664"/>
-            <a:ext cx="685800" cy="475488"/>
+          <p:cNvPr id="42" name="Text 40"/>
+          <p:cNvSpPr/>
+          <p:nvPr/>
+        </p:nvSpPr>
+        <p:spPr>
+          <a:xfrm>
+            <a:off x="3942207" y="4169664"/>
+            <a:ext cx="685800" cy="384048"/>
           </a:xfrm>
           <a:prstGeom prst="rect">
             <a:avLst/>
@@ -27047,18 +27356,18 @@
       </p:sp>
       <p:sp>
         <p:nvSpPr>
-          <p:cNvPr id="39" name="Shape 37"/>
-          <p:cNvSpPr/>
-          <p:nvPr/>
-        </p:nvSpPr>
-        <p:spPr>
-          <a:xfrm>
-            <a:off x="7031736" y="4169664"/>
-            <a:ext cx="685800" cy="475488"/>
+          <p:cNvPr id="43" name="Shape 41"/>
+          <p:cNvSpPr/>
+          <p:nvPr/>
+        </p:nvSpPr>
+        <p:spPr>
+          <a:xfrm>
+            <a:off x="4850892" y="4169664"/>
+            <a:ext cx="685800" cy="384048"/>
           </a:xfrm>
           <a:prstGeom prst="rect">
             <a:avLst>
-              <a:gd name="adj" fmla="val 7692"/>
+              <a:gd name="adj" fmla="val 9524"/>
             </a:avLst>
           </a:prstGeom>
           <a:solidFill>
@@ -27074,14 +27383,14 @@
       </p:sp>
       <p:sp>
         <p:nvSpPr>
-          <p:cNvPr id="40" name="Text 38"/>
-          <p:cNvSpPr/>
-          <p:nvPr/>
-        </p:nvSpPr>
-        <p:spPr>
-          <a:xfrm>
-            <a:off x="7031736" y="4169664"/>
-            <a:ext cx="685800" cy="475488"/>
+          <p:cNvPr id="44" name="Text 42"/>
+          <p:cNvSpPr/>
+          <p:nvPr/>
+        </p:nvSpPr>
+        <p:spPr>
+          <a:xfrm>
+            <a:off x="4850892" y="4169664"/>
+            <a:ext cx="685800" cy="384048"/>
           </a:xfrm>
           <a:prstGeom prst="rect">
             <a:avLst/>
@@ -27105,7 +27414,205 @@
                 <a:ea typeface="Trebuchet MS" pitchFamily="34" charset="-122"/>
                 <a:cs typeface="Trebuchet MS" pitchFamily="34" charset="-120"/>
               </a:rPr>
-              <a:t>er</a:t>
+              <a:t>str</a:t>
+            </a:r>
+            <a:endParaRPr lang="en-US" sz="900" dirty="0"/>
+          </a:p>
+        </p:txBody>
+      </p:sp>
+      <p:sp>
+        <p:nvSpPr>
+          <p:cNvPr id="45" name="Shape 43"/>
+          <p:cNvSpPr/>
+          <p:nvPr/>
+        </p:nvSpPr>
+        <p:spPr>
+          <a:xfrm>
+            <a:off x="5759577" y="4169664"/>
+            <a:ext cx="685800" cy="384048"/>
+          </a:xfrm>
+          <a:prstGeom prst="rect">
+            <a:avLst>
+              <a:gd name="adj" fmla="val 9524"/>
+            </a:avLst>
+          </a:prstGeom>
+          <a:solidFill>
+            <a:srgbClr val="FFFFFF"/>
+          </a:solidFill>
+          <a:ln w="12700">
+            <a:solidFill>
+              <a:srgbClr val="DB2777"/>
+            </a:solidFill>
+            <a:prstDash val="solid"/>
+          </a:ln>
+        </p:spPr>
+      </p:sp>
+      <p:sp>
+        <p:nvSpPr>
+          <p:cNvPr id="46" name="Text 44"/>
+          <p:cNvSpPr/>
+          <p:nvPr/>
+        </p:nvSpPr>
+        <p:spPr>
+          <a:xfrm>
+            <a:off x="5759577" y="4169664"/>
+            <a:ext cx="685800" cy="384048"/>
+          </a:xfrm>
+          <a:prstGeom prst="rect">
+            <a:avLst/>
+          </a:prstGeom>
+          <a:noFill/>
+          <a:ln/>
+        </p:spPr>
+        <p:txBody>
+          <a:bodyPr wrap="square" lIns="0" tIns="0" rIns="0" bIns="0" rtlCol="0" anchor="ctr"/>
+          <a:lstStyle/>
+          <a:p>
+            <a:pPr algn="ctr" indent="0" marL="0">
+              <a:buNone/>
+            </a:pPr>
+            <a:r>
+              <a:rPr lang="en-US" sz="900" b="1" dirty="0">
+                <a:solidFill>
+                  <a:srgbClr val="9D174D"/>
+                </a:solidFill>
+                <a:latin typeface="Trebuchet MS" pitchFamily="34" charset="0"/>
+                <a:ea typeface="Trebuchet MS" pitchFamily="34" charset="-122"/>
+                <a:cs typeface="Trebuchet MS" pitchFamily="34" charset="-120"/>
+              </a:rPr>
+              <a:t>ai</a:t>
+            </a:r>
+            <a:endParaRPr lang="en-US" sz="900" dirty="0"/>
+          </a:p>
+        </p:txBody>
+      </p:sp>
+      <p:sp>
+        <p:nvSpPr>
+          <p:cNvPr id="47" name="Shape 45"/>
+          <p:cNvSpPr/>
+          <p:nvPr/>
+        </p:nvSpPr>
+        <p:spPr>
+          <a:xfrm>
+            <a:off x="6668262" y="4169664"/>
+            <a:ext cx="685800" cy="384048"/>
+          </a:xfrm>
+          <a:prstGeom prst="rect">
+            <a:avLst>
+              <a:gd name="adj" fmla="val 9524"/>
+            </a:avLst>
+          </a:prstGeom>
+          <a:solidFill>
+            <a:srgbClr val="FFFFFF"/>
+          </a:solidFill>
+          <a:ln w="12700">
+            <a:solidFill>
+              <a:srgbClr val="DB2777"/>
+            </a:solidFill>
+            <a:prstDash val="solid"/>
+          </a:ln>
+        </p:spPr>
+      </p:sp>
+      <p:sp>
+        <p:nvSpPr>
+          <p:cNvPr id="48" name="Text 46"/>
+          <p:cNvSpPr/>
+          <p:nvPr/>
+        </p:nvSpPr>
+        <p:spPr>
+          <a:xfrm>
+            <a:off x="6668262" y="4169664"/>
+            <a:ext cx="685800" cy="384048"/>
+          </a:xfrm>
+          <a:prstGeom prst="rect">
+            <a:avLst/>
+          </a:prstGeom>
+          <a:noFill/>
+          <a:ln/>
+        </p:spPr>
+        <p:txBody>
+          <a:bodyPr wrap="square" lIns="0" tIns="0" rIns="0" bIns="0" rtlCol="0" anchor="ctr"/>
+          <a:lstStyle/>
+          <a:p>
+            <a:pPr algn="ctr" indent="0" marL="0">
+              <a:buNone/>
+            </a:pPr>
+            <a:r>
+              <a:rPr lang="en-US" sz="900" b="1" dirty="0">
+                <a:solidFill>
+                  <a:srgbClr val="9D174D"/>
+                </a:solidFill>
+                <a:latin typeface="Trebuchet MS" pitchFamily="34" charset="0"/>
+                <a:ea typeface="Trebuchet MS" pitchFamily="34" charset="-122"/>
+                <a:cs typeface="Trebuchet MS" pitchFamily="34" charset="-120"/>
+              </a:rPr>
+              <a:t>n</a:t>
+            </a:r>
+            <a:endParaRPr lang="en-US" sz="900" dirty="0"/>
+          </a:p>
+        </p:txBody>
+      </p:sp>
+      <p:sp>
+        <p:nvSpPr>
+          <p:cNvPr id="49" name="Shape 47"/>
+          <p:cNvSpPr/>
+          <p:nvPr/>
+        </p:nvSpPr>
+        <p:spPr>
+          <a:xfrm>
+            <a:off x="7576947" y="4169664"/>
+            <a:ext cx="685800" cy="384048"/>
+          </a:xfrm>
+          <a:prstGeom prst="rect">
+            <a:avLst>
+              <a:gd name="adj" fmla="val 9524"/>
+            </a:avLst>
+          </a:prstGeom>
+          <a:solidFill>
+            <a:srgbClr val="FFFFFF"/>
+          </a:solidFill>
+          <a:ln w="12700">
+            <a:solidFill>
+              <a:srgbClr val="DB2777"/>
+            </a:solidFill>
+            <a:prstDash val="solid"/>
+          </a:ln>
+        </p:spPr>
+      </p:sp>
+      <p:sp>
+        <p:nvSpPr>
+          <p:cNvPr id="50" name="Text 48"/>
+          <p:cNvSpPr/>
+          <p:nvPr/>
+        </p:nvSpPr>
+        <p:spPr>
+          <a:xfrm>
+            <a:off x="7576947" y="4169664"/>
+            <a:ext cx="685800" cy="384048"/>
+          </a:xfrm>
+          <a:prstGeom prst="rect">
+            <a:avLst/>
+          </a:prstGeom>
+          <a:noFill/>
+          <a:ln/>
+        </p:spPr>
+        <p:txBody>
+          <a:bodyPr wrap="square" lIns="0" tIns="0" rIns="0" bIns="0" rtlCol="0" anchor="ctr"/>
+          <a:lstStyle/>
+          <a:p>
+            <a:pPr algn="ctr" indent="0" marL="0">
+              <a:buNone/>
+            </a:pPr>
+            <a:r>
+              <a:rPr lang="en-US" sz="900" b="1" dirty="0">
+                <a:solidFill>
+                  <a:srgbClr val="9D174D"/>
+                </a:solidFill>
+                <a:latin typeface="Trebuchet MS" pitchFamily="34" charset="0"/>
+                <a:ea typeface="Trebuchet MS" pitchFamily="34" charset="-122"/>
+                <a:cs typeface="Trebuchet MS" pitchFamily="34" charset="-120"/>
+              </a:rPr>
+              <a:t>t</a:t>
             </a:r>
             <a:endParaRPr lang="en-US" sz="900" dirty="0"/>
           </a:p>
@@ -27397,7 +27904,7 @@
                 <a:ea typeface="Calibri" pitchFamily="34" charset="-122"/>
                 <a:cs typeface="Calibri" pitchFamily="34" charset="-120"/>
               </a:rPr>
-              <a:t>Word Labs  •  wordlabs.app  •  Root: 'train' = to teach or instruct</a:t>
+              <a:t>Word Labs  •  wordlabs.app  •  Root: 'train' = to teach or draw along</a:t>
             </a:r>
             <a:endParaRPr lang="en-US" sz="800" dirty="0"/>
           </a:p>
@@ -27536,7 +28043,7 @@
                 <a:ea typeface="Trebuchet MS" pitchFamily="34" charset="-122"/>
                 <a:cs typeface="Trebuchet MS" pitchFamily="34" charset="-120"/>
               </a:rPr>
-              <a:t>trainees</a:t>
+              <a:t>restraint</a:t>
             </a:r>
             <a:endParaRPr lang="en-US" sz="2800" dirty="0"/>
           </a:p>
@@ -28224,7 +28731,7 @@
                 <a:ea typeface="Calibri" pitchFamily="34" charset="-122"/>
                 <a:cs typeface="Calibri" pitchFamily="34" charset="-120"/>
               </a:rPr>
-              <a:t>Word Labs  •  wordlabs.app  •  Root: 'train' = to teach or instruct</a:t>
+              <a:t>Word Labs  •  wordlabs.app  •  Root: 'train' = to teach or draw along</a:t>
             </a:r>
             <a:endParaRPr lang="en-US" sz="800" dirty="0"/>
           </a:p>
@@ -28363,7 +28870,7 @@
                 <a:ea typeface="Trebuchet MS" pitchFamily="34" charset="-122"/>
                 <a:cs typeface="Trebuchet MS" pitchFamily="34" charset="-120"/>
               </a:rPr>
-              <a:t>trainees</a:t>
+              <a:t>restraint</a:t>
             </a:r>
             <a:endParaRPr lang="en-US" sz="2800" dirty="0"/>
           </a:p>
@@ -28452,11 +28959,11 @@
             </a:avLst>
           </a:prstGeom>
           <a:solidFill>
-            <a:srgbClr val="CCFBF1"/>
+            <a:srgbClr val="DDD6FE"/>
           </a:solidFill>
           <a:ln w="19050">
             <a:solidFill>
-              <a:srgbClr val="0D9488"/>
+              <a:srgbClr val="7C3AED"/>
             </a:solidFill>
             <a:prstDash val="solid"/>
           </a:ln>
@@ -28496,13 +29003,13 @@
             <a:r>
               <a:rPr lang="en-US" sz="1300" b="1" dirty="0">
                 <a:solidFill>
-                  <a:srgbClr val="0F766E"/>
+                  <a:srgbClr val="4C1D95"/>
                 </a:solidFill>
                 <a:latin typeface="Trebuchet MS" pitchFamily="34" charset="0"/>
                 <a:ea typeface="Trebuchet MS" pitchFamily="34" charset="-122"/>
                 <a:cs typeface="Trebuchet MS" pitchFamily="34" charset="-120"/>
               </a:rPr>
-              <a:t>train</a:t>
+              <a:t>re</a:t>
             </a:r>
             <a:endParaRPr lang="en-US" sz="1300" dirty="0"/>
           </a:p>
@@ -28541,7 +29048,7 @@
                 <a:ea typeface="Calibri" pitchFamily="34" charset="-122"/>
                 <a:cs typeface="Calibri" pitchFamily="34" charset="-120"/>
               </a:rPr>
-              <a:t>to teach or instruct</a:t>
+              <a:t>back or again</a:t>
             </a:r>
             <a:endParaRPr lang="en-US" sz="850" dirty="0"/>
           </a:p>
@@ -28614,7 +29121,7 @@
                 <a:ea typeface="Trebuchet MS" pitchFamily="34" charset="-122"/>
                 <a:cs typeface="Trebuchet MS" pitchFamily="34" charset="-120"/>
               </a:rPr>
-              <a:t>ee</a:t>
+              <a:t>strain</a:t>
             </a:r>
             <a:endParaRPr lang="en-US" sz="1300" dirty="0"/>
           </a:p>
@@ -28653,7 +29160,7 @@
                 <a:ea typeface="Calibri" pitchFamily="34" charset="-122"/>
                 <a:cs typeface="Calibri" pitchFamily="34" charset="-120"/>
               </a:rPr>
-              <a:t>a person who receives an action</a:t>
+              <a:t>draw tight or pull</a:t>
             </a:r>
             <a:endParaRPr lang="en-US" sz="850" dirty="0"/>
           </a:p>
@@ -28726,7 +29233,7 @@
                 <a:ea typeface="Trebuchet MS" pitchFamily="34" charset="-122"/>
                 <a:cs typeface="Trebuchet MS" pitchFamily="34" charset="-120"/>
               </a:rPr>
-              <a:t>s</a:t>
+              <a:t>t</a:t>
             </a:r>
             <a:endParaRPr lang="en-US" sz="1300" dirty="0"/>
           </a:p>
@@ -28765,7 +29272,7 @@
                 <a:ea typeface="Calibri" pitchFamily="34" charset="-122"/>
                 <a:cs typeface="Calibri" pitchFamily="34" charset="-120"/>
               </a:rPr>
-              <a:t>more than one</a:t>
+              <a:t>noun-forming ending</a:t>
             </a:r>
             <a:endParaRPr lang="en-US" sz="850" dirty="0"/>
           </a:p>
@@ -29321,7 +29828,7 @@
                 <a:ea typeface="Calibri" pitchFamily="34" charset="-122"/>
                 <a:cs typeface="Calibri" pitchFamily="34" charset="-120"/>
               </a:rPr>
-              <a:t>Word Labs  •  wordlabs.app  •  Root: 'train' = to teach or instruct</a:t>
+              <a:t>Word Labs  •  wordlabs.app  •  Root: 'train' = to teach or draw along</a:t>
             </a:r>
             <a:endParaRPr lang="en-US" sz="800" dirty="0"/>
           </a:p>
@@ -29460,7 +29967,7 @@
                 <a:ea typeface="Trebuchet MS" pitchFamily="34" charset="-122"/>
                 <a:cs typeface="Trebuchet MS" pitchFamily="34" charset="-120"/>
               </a:rPr>
-              <a:t>trainees</a:t>
+              <a:t>restraint</a:t>
             </a:r>
             <a:endParaRPr lang="en-US" sz="2800" dirty="0"/>
           </a:p>
@@ -29549,11 +30056,11 @@
             </a:avLst>
           </a:prstGeom>
           <a:solidFill>
-            <a:srgbClr val="CCFBF1"/>
+            <a:srgbClr val="DDD6FE"/>
           </a:solidFill>
           <a:ln w="19050">
             <a:solidFill>
-              <a:srgbClr val="0D9488"/>
+              <a:srgbClr val="7C3AED"/>
             </a:solidFill>
             <a:prstDash val="solid"/>
           </a:ln>
@@ -29593,13 +30100,13 @@
             <a:r>
               <a:rPr lang="en-US" sz="1300" b="1" dirty="0">
                 <a:solidFill>
-                  <a:srgbClr val="0F766E"/>
+                  <a:srgbClr val="4C1D95"/>
                 </a:solidFill>
                 <a:latin typeface="Trebuchet MS" pitchFamily="34" charset="0"/>
                 <a:ea typeface="Trebuchet MS" pitchFamily="34" charset="-122"/>
                 <a:cs typeface="Trebuchet MS" pitchFamily="34" charset="-120"/>
               </a:rPr>
-              <a:t>train</a:t>
+              <a:t>re</a:t>
             </a:r>
             <a:endParaRPr lang="en-US" sz="1300" dirty="0"/>
           </a:p>
@@ -29638,7 +30145,7 @@
                 <a:ea typeface="Calibri" pitchFamily="34" charset="-122"/>
                 <a:cs typeface="Calibri" pitchFamily="34" charset="-120"/>
               </a:rPr>
-              <a:t>to teach or instruct</a:t>
+              <a:t>back or again</a:t>
             </a:r>
             <a:endParaRPr lang="en-US" sz="850" dirty="0"/>
           </a:p>
@@ -29711,7 +30218,7 @@
                 <a:ea typeface="Trebuchet MS" pitchFamily="34" charset="-122"/>
                 <a:cs typeface="Trebuchet MS" pitchFamily="34" charset="-120"/>
               </a:rPr>
-              <a:t>ee</a:t>
+              <a:t>strain</a:t>
             </a:r>
             <a:endParaRPr lang="en-US" sz="1300" dirty="0"/>
           </a:p>
@@ -29750,7 +30257,7 @@
                 <a:ea typeface="Calibri" pitchFamily="34" charset="-122"/>
                 <a:cs typeface="Calibri" pitchFamily="34" charset="-120"/>
               </a:rPr>
-              <a:t>a person who receives an action</a:t>
+              <a:t>draw tight or pull</a:t>
             </a:r>
             <a:endParaRPr lang="en-US" sz="850" dirty="0"/>
           </a:p>
@@ -29823,7 +30330,7 @@
                 <a:ea typeface="Trebuchet MS" pitchFamily="34" charset="-122"/>
                 <a:cs typeface="Trebuchet MS" pitchFamily="34" charset="-120"/>
               </a:rPr>
-              <a:t>s</a:t>
+              <a:t>t</a:t>
             </a:r>
             <a:endParaRPr lang="en-US" sz="1300" dirty="0"/>
           </a:p>
@@ -29862,7 +30369,7 @@
                 <a:ea typeface="Calibri" pitchFamily="34" charset="-122"/>
                 <a:cs typeface="Calibri" pitchFamily="34" charset="-120"/>
               </a:rPr>
-              <a:t>more than one</a:t>
+              <a:t>noun-forming ending</a:t>
             </a:r>
             <a:endParaRPr lang="en-US" sz="850" dirty="0"/>
           </a:p>
@@ -30021,7 +30528,7 @@
                 <a:ea typeface="Trebuchet MS" pitchFamily="34" charset="-122"/>
                 <a:cs typeface="Trebuchet MS" pitchFamily="34" charset="-120"/>
               </a:rPr>
-              <a:t>train</a:t>
+              <a:t>re</a:t>
             </a:r>
             <a:endParaRPr lang="en-US" sz="1400" dirty="0"/>
           </a:p>
@@ -30126,7 +30633,7 @@
                 <a:ea typeface="Trebuchet MS" pitchFamily="34" charset="-122"/>
                 <a:cs typeface="Trebuchet MS" pitchFamily="34" charset="-120"/>
               </a:rPr>
-              <a:t>ees</a:t>
+              <a:t>straint</a:t>
             </a:r>
             <a:endParaRPr lang="en-US" sz="1400" dirty="0"/>
           </a:p>
@@ -30550,7 +31057,7 @@
                 <a:ea typeface="Calibri" pitchFamily="34" charset="-122"/>
                 <a:cs typeface="Calibri" pitchFamily="34" charset="-120"/>
               </a:rPr>
-              <a:t>Word Labs  •  wordlabs.app  •  Root: 'train' = to teach or instruct</a:t>
+              <a:t>Word Labs  •  wordlabs.app  •  Root: 'train' = to teach or draw along</a:t>
             </a:r>
             <a:endParaRPr lang="en-US" sz="800" dirty="0"/>
           </a:p>
@@ -30689,7 +31196,7 @@
                 <a:ea typeface="Trebuchet MS" pitchFamily="34" charset="-122"/>
                 <a:cs typeface="Trebuchet MS" pitchFamily="34" charset="-120"/>
               </a:rPr>
-              <a:t>trainees</a:t>
+              <a:t>restraint</a:t>
             </a:r>
             <a:endParaRPr lang="en-US" sz="2800" dirty="0"/>
           </a:p>
@@ -30778,11 +31285,11 @@
             </a:avLst>
           </a:prstGeom>
           <a:solidFill>
-            <a:srgbClr val="CCFBF1"/>
+            <a:srgbClr val="DDD6FE"/>
           </a:solidFill>
           <a:ln w="19050">
             <a:solidFill>
-              <a:srgbClr val="0D9488"/>
+              <a:srgbClr val="7C3AED"/>
             </a:solidFill>
             <a:prstDash val="solid"/>
           </a:ln>
@@ -30822,13 +31329,13 @@
             <a:r>
               <a:rPr lang="en-US" sz="1300" b="1" dirty="0">
                 <a:solidFill>
-                  <a:srgbClr val="0F766E"/>
+                  <a:srgbClr val="4C1D95"/>
                 </a:solidFill>
                 <a:latin typeface="Trebuchet MS" pitchFamily="34" charset="0"/>
                 <a:ea typeface="Trebuchet MS" pitchFamily="34" charset="-122"/>
                 <a:cs typeface="Trebuchet MS" pitchFamily="34" charset="-120"/>
               </a:rPr>
-              <a:t>train</a:t>
+              <a:t>re</a:t>
             </a:r>
             <a:endParaRPr lang="en-US" sz="1300" dirty="0"/>
           </a:p>
@@ -30867,7 +31374,7 @@
                 <a:ea typeface="Calibri" pitchFamily="34" charset="-122"/>
                 <a:cs typeface="Calibri" pitchFamily="34" charset="-120"/>
               </a:rPr>
-              <a:t>to teach or instruct</a:t>
+              <a:t>back or again</a:t>
             </a:r>
             <a:endParaRPr lang="en-US" sz="850" dirty="0"/>
           </a:p>
@@ -30940,7 +31447,7 @@
                 <a:ea typeface="Trebuchet MS" pitchFamily="34" charset="-122"/>
                 <a:cs typeface="Trebuchet MS" pitchFamily="34" charset="-120"/>
               </a:rPr>
-              <a:t>ee</a:t>
+              <a:t>strain</a:t>
             </a:r>
             <a:endParaRPr lang="en-US" sz="1300" dirty="0"/>
           </a:p>
@@ -30979,7 +31486,7 @@
                 <a:ea typeface="Calibri" pitchFamily="34" charset="-122"/>
                 <a:cs typeface="Calibri" pitchFamily="34" charset="-120"/>
               </a:rPr>
-              <a:t>a person who receives an action</a:t>
+              <a:t>draw tight or pull</a:t>
             </a:r>
             <a:endParaRPr lang="en-US" sz="850" dirty="0"/>
           </a:p>
@@ -31052,7 +31559,7 @@
                 <a:ea typeface="Trebuchet MS" pitchFamily="34" charset="-122"/>
                 <a:cs typeface="Trebuchet MS" pitchFamily="34" charset="-120"/>
               </a:rPr>
-              <a:t>s</a:t>
+              <a:t>t</a:t>
             </a:r>
             <a:endParaRPr lang="en-US" sz="1300" dirty="0"/>
           </a:p>
@@ -31091,7 +31598,7 @@
                 <a:ea typeface="Calibri" pitchFamily="34" charset="-122"/>
                 <a:cs typeface="Calibri" pitchFamily="34" charset="-120"/>
               </a:rPr>
-              <a:t>more than one</a:t>
+              <a:t>noun-forming ending</a:t>
             </a:r>
             <a:endParaRPr lang="en-US" sz="850" dirty="0"/>
           </a:p>
@@ -31250,7 +31757,7 @@
                 <a:ea typeface="Trebuchet MS" pitchFamily="34" charset="-122"/>
                 <a:cs typeface="Trebuchet MS" pitchFamily="34" charset="-120"/>
               </a:rPr>
-              <a:t>train</a:t>
+              <a:t>re</a:t>
             </a:r>
             <a:endParaRPr lang="en-US" sz="1400" dirty="0"/>
           </a:p>
@@ -31355,7 +31862,7 @@
                 <a:ea typeface="Trebuchet MS" pitchFamily="34" charset="-122"/>
                 <a:cs typeface="Trebuchet MS" pitchFamily="34" charset="-120"/>
               </a:rPr>
-              <a:t>ees</a:t>
+              <a:t>straint</a:t>
             </a:r>
             <a:endParaRPr lang="en-US" sz="1400" dirty="0"/>
           </a:p>
@@ -31462,7 +31969,7 @@
         </p:nvSpPr>
         <p:spPr>
           <a:xfrm>
-            <a:off x="2427732" y="4169664"/>
+            <a:off x="2254649" y="4169664"/>
             <a:ext cx="685800" cy="475488"/>
           </a:xfrm>
           <a:prstGeom prst="rect">
@@ -31489,7 +31996,7 @@
         </p:nvSpPr>
         <p:spPr>
           <a:xfrm>
-            <a:off x="2427732" y="4169664"/>
+            <a:off x="2254649" y="4169664"/>
             <a:ext cx="685800" cy="475488"/>
           </a:xfrm>
           <a:prstGeom prst="rect">
@@ -31514,7 +32021,7 @@
                 <a:ea typeface="Trebuchet MS" pitchFamily="34" charset="-122"/>
                 <a:cs typeface="Trebuchet MS" pitchFamily="34" charset="-120"/>
               </a:rPr>
-              <a:t>tr</a:t>
+              <a:t>r</a:t>
             </a:r>
             <a:endParaRPr lang="en-US" sz="900" dirty="0"/>
           </a:p>
@@ -31528,7 +32035,7 @@
         </p:nvSpPr>
         <p:spPr>
           <a:xfrm>
-            <a:off x="3639312" y="4169664"/>
+            <a:off x="3293146" y="4169664"/>
             <a:ext cx="685800" cy="475488"/>
           </a:xfrm>
           <a:prstGeom prst="rect">
@@ -31555,7 +32062,7 @@
         </p:nvSpPr>
         <p:spPr>
           <a:xfrm>
-            <a:off x="3639312" y="4169664"/>
+            <a:off x="3293146" y="4169664"/>
             <a:ext cx="685800" cy="475488"/>
           </a:xfrm>
           <a:prstGeom prst="rect">
@@ -31580,7 +32087,7 @@
                 <a:ea typeface="Trebuchet MS" pitchFamily="34" charset="-122"/>
                 <a:cs typeface="Trebuchet MS" pitchFamily="34" charset="-120"/>
               </a:rPr>
-              <a:t>ai</a:t>
+              <a:t>e</a:t>
             </a:r>
             <a:endParaRPr lang="en-US" sz="900" dirty="0"/>
           </a:p>
@@ -31594,7 +32101,7 @@
         </p:nvSpPr>
         <p:spPr>
           <a:xfrm>
-            <a:off x="4850892" y="4169664"/>
+            <a:off x="4331643" y="4169664"/>
             <a:ext cx="685800" cy="475488"/>
           </a:xfrm>
           <a:prstGeom prst="rect">
@@ -31621,7 +32128,7 @@
         </p:nvSpPr>
         <p:spPr>
           <a:xfrm>
-            <a:off x="4850892" y="4169664"/>
+            <a:off x="4331643" y="4169664"/>
             <a:ext cx="685800" cy="475488"/>
           </a:xfrm>
           <a:prstGeom prst="rect">
@@ -31646,7 +32153,7 @@
                 <a:ea typeface="Trebuchet MS" pitchFamily="34" charset="-122"/>
                 <a:cs typeface="Trebuchet MS" pitchFamily="34" charset="-120"/>
               </a:rPr>
-              <a:t>n</a:t>
+              <a:t>str</a:t>
             </a:r>
             <a:endParaRPr lang="en-US" sz="900" dirty="0"/>
           </a:p>
@@ -31660,7 +32167,7 @@
         </p:nvSpPr>
         <p:spPr>
           <a:xfrm>
-            <a:off x="6062472" y="4169664"/>
+            <a:off x="5370141" y="4169664"/>
             <a:ext cx="685800" cy="475488"/>
           </a:xfrm>
           <a:prstGeom prst="rect">
@@ -31687,7 +32194,7 @@
         </p:nvSpPr>
         <p:spPr>
           <a:xfrm>
-            <a:off x="6062472" y="4169664"/>
+            <a:off x="5370141" y="4169664"/>
             <a:ext cx="685800" cy="475488"/>
           </a:xfrm>
           <a:prstGeom prst="rect">
@@ -31712,7 +32219,7 @@
                 <a:ea typeface="Trebuchet MS" pitchFamily="34" charset="-122"/>
                 <a:cs typeface="Trebuchet MS" pitchFamily="34" charset="-120"/>
               </a:rPr>
-              <a:t>ee</a:t>
+              <a:t>ai</a:t>
             </a:r>
             <a:endParaRPr lang="en-US" sz="900" dirty="0"/>
           </a:p>
@@ -31726,7 +32233,7 @@
         </p:nvSpPr>
         <p:spPr>
           <a:xfrm>
-            <a:off x="7274052" y="4169664"/>
+            <a:off x="6408638" y="4169664"/>
             <a:ext cx="685800" cy="475488"/>
           </a:xfrm>
           <a:prstGeom prst="rect">
@@ -31753,7 +32260,7 @@
         </p:nvSpPr>
         <p:spPr>
           <a:xfrm>
-            <a:off x="7274052" y="4169664"/>
+            <a:off x="6408638" y="4169664"/>
             <a:ext cx="685800" cy="475488"/>
           </a:xfrm>
           <a:prstGeom prst="rect">
@@ -31778,7 +32285,73 @@
                 <a:ea typeface="Trebuchet MS" pitchFamily="34" charset="-122"/>
                 <a:cs typeface="Trebuchet MS" pitchFamily="34" charset="-120"/>
               </a:rPr>
-              <a:t>s</a:t>
+              <a:t>n</a:t>
+            </a:r>
+            <a:endParaRPr lang="en-US" sz="900" dirty="0"/>
+          </a:p>
+        </p:txBody>
+      </p:sp>
+      <p:sp>
+        <p:nvSpPr>
+          <p:cNvPr id="46" name="Shape 44"/>
+          <p:cNvSpPr/>
+          <p:nvPr/>
+        </p:nvSpPr>
+        <p:spPr>
+          <a:xfrm>
+            <a:off x="7447135" y="4169664"/>
+            <a:ext cx="685800" cy="475488"/>
+          </a:xfrm>
+          <a:prstGeom prst="rect">
+            <a:avLst>
+              <a:gd name="adj" fmla="val 7692"/>
+            </a:avLst>
+          </a:prstGeom>
+          <a:solidFill>
+            <a:srgbClr val="FFFFFF"/>
+          </a:solidFill>
+          <a:ln w="12700">
+            <a:solidFill>
+              <a:srgbClr val="DB2777"/>
+            </a:solidFill>
+            <a:prstDash val="solid"/>
+          </a:ln>
+        </p:spPr>
+      </p:sp>
+      <p:sp>
+        <p:nvSpPr>
+          <p:cNvPr id="47" name="Text 45"/>
+          <p:cNvSpPr/>
+          <p:nvPr/>
+        </p:nvSpPr>
+        <p:spPr>
+          <a:xfrm>
+            <a:off x="7447135" y="4169664"/>
+            <a:ext cx="685800" cy="475488"/>
+          </a:xfrm>
+          <a:prstGeom prst="rect">
+            <a:avLst/>
+          </a:prstGeom>
+          <a:noFill/>
+          <a:ln/>
+        </p:spPr>
+        <p:txBody>
+          <a:bodyPr wrap="square" lIns="0" tIns="0" rIns="0" bIns="0" rtlCol="0" anchor="ctr"/>
+          <a:lstStyle/>
+          <a:p>
+            <a:pPr algn="ctr" indent="0" marL="0">
+              <a:buNone/>
+            </a:pPr>
+            <a:r>
+              <a:rPr lang="en-US" sz="900" b="1" dirty="0">
+                <a:solidFill>
+                  <a:srgbClr val="9D174D"/>
+                </a:solidFill>
+                <a:latin typeface="Trebuchet MS" pitchFamily="34" charset="0"/>
+                <a:ea typeface="Trebuchet MS" pitchFamily="34" charset="-122"/>
+                <a:cs typeface="Trebuchet MS" pitchFamily="34" charset="-120"/>
+              </a:rPr>
+              <a:t>t</a:t>
             </a:r>
             <a:endParaRPr lang="en-US" sz="900" dirty="0"/>
           </a:p>
@@ -32070,7 +32643,7 @@
                 <a:ea typeface="Calibri" pitchFamily="34" charset="-122"/>
                 <a:cs typeface="Calibri" pitchFamily="34" charset="-120"/>
               </a:rPr>
-              <a:t>Word Labs  •  wordlabs.app  •  Root: 'train' = to teach or instruct</a:t>
+              <a:t>Word Labs  •  wordlabs.app  •  Root: 'train' = to teach or draw along</a:t>
             </a:r>
             <a:endParaRPr lang="en-US" sz="800" dirty="0"/>
           </a:p>
@@ -33239,7 +33812,7 @@
                 <a:ea typeface="Calibri" pitchFamily="34" charset="-122"/>
                 <a:cs typeface="Calibri" pitchFamily="34" charset="-120"/>
               </a:rPr>
-              <a:t>Word Labs  •  wordlabs.app  •  Root: 'train' = to teach or instruct</a:t>
+              <a:t>Word Labs  •  wordlabs.app  •  Root: 'train' = to teach or draw along</a:t>
             </a:r>
             <a:endParaRPr lang="en-US" sz="800" dirty="0"/>
           </a:p>
@@ -34038,7 +34611,7 @@
                 <a:ea typeface="Trebuchet MS" pitchFamily="34" charset="-122"/>
                 <a:cs typeface="Trebuchet MS" pitchFamily="34" charset="-120"/>
               </a:rPr>
-              <a:t>over-</a:t>
+              <a:t>de-</a:t>
             </a:r>
             <a:endParaRPr lang="en-US" sz="1300" dirty="0"/>
           </a:p>
@@ -34191,7 +34764,7 @@
                 <a:ea typeface="Trebuchet MS" pitchFamily="34" charset="-122"/>
                 <a:cs typeface="Trebuchet MS" pitchFamily="34" charset="-120"/>
               </a:rPr>
-              <a:t>mis-</a:t>
+              <a:t>over-</a:t>
             </a:r>
             <a:endParaRPr lang="en-US" sz="1300" dirty="0"/>
           </a:p>
@@ -34280,7 +34853,7 @@
                 <a:ea typeface="Trebuchet MS" pitchFamily="34" charset="-122"/>
                 <a:cs typeface="Trebuchet MS" pitchFamily="34" charset="-120"/>
               </a:rPr>
-              <a:t>-able</a:t>
+              <a:t>-ing</a:t>
             </a:r>
             <a:endParaRPr lang="en-US" sz="1300" dirty="0"/>
           </a:p>
@@ -34583,7 +35156,7 @@
                 <a:ea typeface="Trebuchet MS" pitchFamily="34" charset="-122"/>
                 <a:cs typeface="Trebuchet MS" pitchFamily="34" charset="-120"/>
               </a:rPr>
-              <a:t>retrain</a:t>
+              <a:t>retraining</a:t>
             </a:r>
             <a:endParaRPr lang="en-US" sz="1200" dirty="0"/>
           </a:p>
@@ -34649,7 +35222,7 @@
                 <a:ea typeface="Trebuchet MS" pitchFamily="34" charset="-122"/>
                 <a:cs typeface="Trebuchet MS" pitchFamily="34" charset="-120"/>
               </a:rPr>
-              <a:t>constrain</a:t>
+              <a:t>restraint</a:t>
             </a:r>
             <a:endParaRPr lang="en-US" sz="1200" dirty="0"/>
           </a:p>
@@ -34715,7 +35288,7 @@
                 <a:ea typeface="Trebuchet MS" pitchFamily="34" charset="-122"/>
                 <a:cs typeface="Trebuchet MS" pitchFamily="34" charset="-120"/>
               </a:rPr>
-              <a:t>restrain</a:t>
+              <a:t>constrain</a:t>
             </a:r>
             <a:endParaRPr lang="en-US" sz="1200" dirty="0"/>
           </a:p>
@@ -34781,7 +35354,7 @@
                 <a:ea typeface="Trebuchet MS" pitchFamily="34" charset="-122"/>
                 <a:cs typeface="Trebuchet MS" pitchFamily="34" charset="-120"/>
               </a:rPr>
-              <a:t>strain</a:t>
+              <a:t>constraint</a:t>
             </a:r>
             <a:endParaRPr lang="en-US" sz="1200" dirty="0"/>
           </a:p>
@@ -34847,7 +35420,7 @@
                 <a:ea typeface="Trebuchet MS" pitchFamily="34" charset="-122"/>
                 <a:cs typeface="Trebuchet MS" pitchFamily="34" charset="-120"/>
               </a:rPr>
-              <a:t>trainable</a:t>
+              <a:t>entraining</a:t>
             </a:r>
             <a:endParaRPr lang="en-US" sz="1200" dirty="0"/>
           </a:p>
@@ -35139,7 +35712,7 @@
                 <a:ea typeface="Calibri" pitchFamily="34" charset="-122"/>
                 <a:cs typeface="Calibri" pitchFamily="34" charset="-120"/>
               </a:rPr>
-              <a:t>Word Labs  •  wordlabs.app  •  Root: 'train' = to teach or instruct</a:t>
+              <a:t>Word Labs  •  wordlabs.app  •  Root: 'train' = to teach or draw along</a:t>
             </a:r>
             <a:endParaRPr lang="en-US" sz="800" dirty="0"/>
           </a:p>
@@ -35303,7 +35876,7 @@
                 <a:ea typeface="Calibri" pitchFamily="34" charset="-122"/>
                 <a:cs typeface="Calibri" pitchFamily="34" charset="-120"/>
               </a:rPr>
-              <a:t>The core part of a word carrying its basic meaning. For example, 'train' means 'to teach or instruct'.</a:t>
+              <a:t>The core part of a word carrying its basic meaning. For example, 'train' means 'to teach or draw along'.</a:t>
             </a:r>
             <a:endParaRPr lang="en-US" sz="1350" dirty="0"/>
           </a:p>
@@ -35923,7 +36496,7 @@
                 <a:ea typeface="Calibri" pitchFamily="34" charset="-122"/>
                 <a:cs typeface="Calibri" pitchFamily="34" charset="-120"/>
               </a:rPr>
-              <a:t>Word Labs  •  wordlabs.app  •  Root: 'train' = to teach or instruct</a:t>
+              <a:t>Word Labs  •  wordlabs.app  •  Root: 'train' = to teach or draw along</a:t>
             </a:r>
             <a:endParaRPr lang="en-US" sz="800" dirty="0"/>
           </a:p>
@@ -36035,7 +36608,7 @@
                 <a:ea typeface="Calibri" pitchFamily="34" charset="-122"/>
                 <a:cs typeface="Calibri" pitchFamily="34" charset="-120"/>
               </a:rPr>
-              <a:t>1.  The word 'trainee' refers to someone who is learning and being trained.</a:t>
+              <a:t>1.  A 'constraint' is something that limits or restricts what you can do.</a:t>
             </a:r>
             <a:endParaRPr lang="en-US" sz="1300" dirty="0"/>
           </a:p>
@@ -36174,7 +36747,7 @@
                 <a:ea typeface="Calibri" pitchFamily="34" charset="-122"/>
                 <a:cs typeface="Calibri" pitchFamily="34" charset="-120"/>
               </a:rPr>
-              <a:t>2.  The root 'train' comes from a Greek word.</a:t>
+              <a:t>2.  The root 'train' comes from a Latin word meaning to draw or pull along.</a:t>
             </a:r>
             <a:endParaRPr lang="en-US" sz="1300" dirty="0"/>
           </a:p>
@@ -36197,11 +36770,11 @@
             </a:avLst>
           </a:prstGeom>
           <a:solidFill>
-            <a:srgbClr val="FEE2E2"/>
-          </a:solidFill>
-          <a:ln w="12700">
-            <a:solidFill>
-              <a:srgbClr val="DC2626"/>
+            <a:srgbClr val="DCFCE7"/>
+          </a:solidFill>
+          <a:ln w="12700">
+            <a:solidFill>
+              <a:srgbClr val="16A34A"/>
             </a:solidFill>
             <a:prstDash val="solid"/>
           </a:ln>
@@ -36234,13 +36807,13 @@
             <a:r>
               <a:rPr lang="en-US" sz="1100" b="1" dirty="0">
                 <a:solidFill>
-                  <a:srgbClr val="DC2626"/>
+                  <a:srgbClr val="16A34A"/>
                 </a:solidFill>
                 <a:latin typeface="Trebuchet MS" pitchFamily="34" charset="0"/>
                 <a:ea typeface="Trebuchet MS" pitchFamily="34" charset="-122"/>
                 <a:cs typeface="Trebuchet MS" pitchFamily="34" charset="-120"/>
               </a:rPr>
-              <a:t>FALSE</a:t>
+              <a:t>TRUE</a:t>
             </a:r>
             <a:endParaRPr lang="en-US" sz="1100" dirty="0"/>
           </a:p>
@@ -36313,7 +36886,7 @@
                 <a:ea typeface="Calibri" pitchFamily="34" charset="-122"/>
                 <a:cs typeface="Calibri" pitchFamily="34" charset="-120"/>
               </a:rPr>
-              <a:t>3.  A 'trainer' is a person who helps others develop skills.</a:t>
+              <a:t>3.  Adding the prefix 're-' to 'train' makes the word 'retrain', meaning to train again.</a:t>
             </a:r>
             <a:endParaRPr lang="en-US" sz="1300" dirty="0"/>
           </a:p>
@@ -36452,7 +37025,7 @@
                 <a:ea typeface="Calibri" pitchFamily="34" charset="-122"/>
                 <a:cs typeface="Calibri" pitchFamily="34" charset="-120"/>
               </a:rPr>
-              <a:t>4.  The prefix 're-' in 'retrain' means to train again.</a:t>
+              <a:t>4.  The root 'train' originally comes from a Greek word.</a:t>
             </a:r>
             <a:endParaRPr lang="en-US" sz="1300" dirty="0"/>
           </a:p>
@@ -36475,11 +37048,11 @@
             </a:avLst>
           </a:prstGeom>
           <a:solidFill>
-            <a:srgbClr val="DCFCE7"/>
-          </a:solidFill>
-          <a:ln w="12700">
-            <a:solidFill>
-              <a:srgbClr val="16A34A"/>
+            <a:srgbClr val="FEE2E2"/>
+          </a:solidFill>
+          <a:ln w="12700">
+            <a:solidFill>
+              <a:srgbClr val="DC2626"/>
             </a:solidFill>
             <a:prstDash val="solid"/>
           </a:ln>
@@ -36512,13 +37085,13 @@
             <a:r>
               <a:rPr lang="en-US" sz="1100" b="1" dirty="0">
                 <a:solidFill>
-                  <a:srgbClr val="16A34A"/>
+                  <a:srgbClr val="DC2626"/>
                 </a:solidFill>
                 <a:latin typeface="Trebuchet MS" pitchFamily="34" charset="0"/>
                 <a:ea typeface="Trebuchet MS" pitchFamily="34" charset="-122"/>
                 <a:cs typeface="Trebuchet MS" pitchFamily="34" charset="-120"/>
               </a:rPr>
-              <a:t>TRUE</a:t>
+              <a:t>FALSE</a:t>
             </a:r>
             <a:endParaRPr lang="en-US" sz="1100" dirty="0"/>
           </a:p>
@@ -36591,7 +37164,7 @@
                 <a:ea typeface="Calibri" pitchFamily="34" charset="-122"/>
                 <a:cs typeface="Calibri" pitchFamily="34" charset="-120"/>
               </a:rPr>
-              <a:t>5.  The word 'constrain' means to encourage someone to do more.</a:t>
+              <a:t>5.  The word 'trainee' means someone who teaches others a new skill.</a:t>
             </a:r>
             <a:endParaRPr lang="en-US" sz="1300" dirty="0"/>
           </a:p>
@@ -36949,7 +37522,7 @@
                 <a:ea typeface="Calibri" pitchFamily="34" charset="-122"/>
                 <a:cs typeface="Calibri" pitchFamily="34" charset="-120"/>
               </a:rPr>
-              <a:t>Word Labs  •  wordlabs.app  •  Root: 'train' = to teach or instruct</a:t>
+              <a:t>Word Labs  •  wordlabs.app  •  Root: 'train' = to teach or draw along</a:t>
             </a:r>
             <a:endParaRPr lang="en-US" sz="800" dirty="0"/>
           </a:p>
@@ -37086,7 +37659,7 @@
                 <a:ea typeface="Trebuchet MS" pitchFamily="34" charset="-122"/>
                 <a:cs typeface="Trebuchet MS" pitchFamily="34" charset="-120"/>
               </a:rPr>
-              <a:t>to teach or instruct</a:t>
+              <a:t>to teach or draw along</a:t>
             </a:r>
             <a:endParaRPr lang="en-US" sz="2000" dirty="0"/>
           </a:p>
@@ -37428,7 +38001,7 @@
                 <a:ea typeface="Trebuchet MS" pitchFamily="34" charset="-122"/>
                 <a:cs typeface="Trebuchet MS" pitchFamily="34" charset="-120"/>
               </a:rPr>
-              <a:t>retrain</a:t>
+              <a:t>retraining</a:t>
             </a:r>
             <a:endParaRPr lang="en-US" sz="1300" dirty="0"/>
           </a:p>
@@ -37494,7 +38067,7 @@
                 <a:ea typeface="Trebuchet MS" pitchFamily="34" charset="-122"/>
                 <a:cs typeface="Trebuchet MS" pitchFamily="34" charset="-120"/>
               </a:rPr>
-              <a:t>constrain</a:t>
+              <a:t>restraint</a:t>
             </a:r>
             <a:endParaRPr lang="en-US" sz="1300" dirty="0"/>
           </a:p>
@@ -37560,7 +38133,7 @@
                 <a:ea typeface="Trebuchet MS" pitchFamily="34" charset="-122"/>
                 <a:cs typeface="Trebuchet MS" pitchFamily="34" charset="-120"/>
               </a:rPr>
-              <a:t>restrain</a:t>
+              <a:t>constrain</a:t>
             </a:r>
             <a:endParaRPr lang="en-US" sz="1300" dirty="0"/>
           </a:p>
@@ -37626,7 +38199,7 @@
                 <a:ea typeface="Trebuchet MS" pitchFamily="34" charset="-122"/>
                 <a:cs typeface="Trebuchet MS" pitchFamily="34" charset="-120"/>
               </a:rPr>
-              <a:t>strain</a:t>
+              <a:t>constraint</a:t>
             </a:r>
             <a:endParaRPr lang="en-US" sz="1300" dirty="0"/>
           </a:p>
@@ -37918,7 +38491,7 @@
                 <a:ea typeface="Calibri" pitchFamily="34" charset="-122"/>
                 <a:cs typeface="Calibri" pitchFamily="34" charset="-120"/>
               </a:rPr>
-              <a:t>Word Labs  •  wordlabs.app  •  Root: 'train' = to teach or instruct</a:t>
+              <a:t>Word Labs  •  wordlabs.app  •  Root: 'train' = to teach or draw along</a:t>
             </a:r>
             <a:endParaRPr lang="en-US" sz="800" dirty="0"/>
           </a:p>
@@ -38717,7 +39290,7 @@
                 <a:ea typeface="Trebuchet MS" pitchFamily="34" charset="-122"/>
                 <a:cs typeface="Trebuchet MS" pitchFamily="34" charset="-120"/>
               </a:rPr>
-              <a:t>over-</a:t>
+              <a:t>de-</a:t>
             </a:r>
             <a:endParaRPr lang="en-US" sz="1300" dirty="0"/>
           </a:p>
@@ -38870,7 +39443,7 @@
                 <a:ea typeface="Trebuchet MS" pitchFamily="34" charset="-122"/>
                 <a:cs typeface="Trebuchet MS" pitchFamily="34" charset="-120"/>
               </a:rPr>
-              <a:t>mis-</a:t>
+              <a:t>over-</a:t>
             </a:r>
             <a:endParaRPr lang="en-US" sz="1300" dirty="0"/>
           </a:p>
@@ -38959,7 +39532,7 @@
                 <a:ea typeface="Trebuchet MS" pitchFamily="34" charset="-122"/>
                 <a:cs typeface="Trebuchet MS" pitchFamily="34" charset="-120"/>
               </a:rPr>
-              <a:t>-able</a:t>
+              <a:t>-ing</a:t>
             </a:r>
             <a:endParaRPr lang="en-US" sz="1300" dirty="0"/>
           </a:p>
@@ -39692,7 +40265,7 @@
                 <a:ea typeface="Calibri" pitchFamily="34" charset="-122"/>
                 <a:cs typeface="Calibri" pitchFamily="34" charset="-120"/>
               </a:rPr>
-              <a:t>Word Labs  •  wordlabs.app  •  Root: 'train' = to teach or instruct</a:t>
+              <a:t>Word Labs  •  wordlabs.app  •  Root: 'train' = to teach or draw along</a:t>
             </a:r>
             <a:endParaRPr lang="en-US" sz="800" dirty="0"/>
           </a:p>
@@ -39870,7 +40443,7 @@
                 <a:ea typeface="Calibri" pitchFamily="34" charset="-122"/>
                 <a:cs typeface="Calibri" pitchFamily="34" charset="-120"/>
               </a:rPr>
-              <a:t>The process of learning skills or getting better at something through practice.</a:t>
+              <a:t>The process of learning skills or getting fit by practising regularly.</a:t>
             </a:r>
             <a:endParaRPr lang="en-US" sz="1200" dirty="0"/>
           </a:p>
@@ -40009,7 +40582,7 @@
                 <a:ea typeface="Calibri" pitchFamily="34" charset="-122"/>
                 <a:cs typeface="Calibri" pitchFamily="34" charset="-120"/>
               </a:rPr>
-              <a:t>Someone who is being taught how to do a job or skill.</a:t>
+              <a:t>Someone who is learning a new job or skill from someone more experienced.</a:t>
             </a:r>
             <a:endParaRPr lang="en-US" sz="1200" dirty="0"/>
           </a:p>
@@ -40148,7 +40721,7 @@
                 <a:ea typeface="Calibri" pitchFamily="34" charset="-122"/>
                 <a:cs typeface="Calibri" pitchFamily="34" charset="-120"/>
               </a:rPr>
-              <a:t>To stop someone or something from moving or acting freely.</a:t>
+              <a:t>To limit or restrict what someone is able to do.</a:t>
             </a:r>
             <a:endParaRPr lang="en-US" sz="1200" dirty="0"/>
           </a:p>
@@ -40221,7 +40794,7 @@
                 <a:ea typeface="Trebuchet MS" pitchFamily="34" charset="-122"/>
                 <a:cs typeface="Trebuchet MS" pitchFamily="34" charset="-120"/>
               </a:rPr>
-              <a:t>retrain</a:t>
+              <a:t>retraining</a:t>
             </a:r>
             <a:endParaRPr lang="en-US" sz="1200" dirty="0"/>
           </a:p>
@@ -40287,7 +40860,7 @@
                 <a:ea typeface="Calibri" pitchFamily="34" charset="-122"/>
                 <a:cs typeface="Calibri" pitchFamily="34" charset="-120"/>
               </a:rPr>
-              <a:t>To learn a new skill or job after already having been trained in something else.</a:t>
+              <a:t>Learning new skills again, often for a different job.</a:t>
             </a:r>
             <a:endParaRPr lang="en-US" sz="1200" dirty="0"/>
           </a:p>
@@ -40360,7 +40933,7 @@
                 <a:ea typeface="Trebuchet MS" pitchFamily="34" charset="-122"/>
                 <a:cs typeface="Trebuchet MS" pitchFamily="34" charset="-120"/>
               </a:rPr>
-              <a:t>constrain</a:t>
+              <a:t>restraint</a:t>
             </a:r>
             <a:endParaRPr lang="en-US" sz="1200" dirty="0"/>
           </a:p>
@@ -40426,7 +40999,7 @@
                 <a:ea typeface="Calibri" pitchFamily="34" charset="-122"/>
                 <a:cs typeface="Calibri" pitchFamily="34" charset="-120"/>
               </a:rPr>
-              <a:t>To hold someone back or stop them from doing what they want.</a:t>
+              <a:t>Something that holds you back or stops you from doing something freely.</a:t>
             </a:r>
             <a:endParaRPr lang="en-US" sz="1200" dirty="0"/>
           </a:p>
@@ -40499,7 +41072,7 @@
                 <a:ea typeface="Trebuchet MS" pitchFamily="34" charset="-122"/>
                 <a:cs typeface="Trebuchet MS" pitchFamily="34" charset="-120"/>
               </a:rPr>
-              <a:t>restrain</a:t>
+              <a:t>constrain</a:t>
             </a:r>
             <a:endParaRPr lang="en-US" sz="1200" dirty="0"/>
           </a:p>
@@ -40565,7 +41138,7 @@
                 <a:ea typeface="Calibri" pitchFamily="34" charset="-122"/>
                 <a:cs typeface="Calibri" pitchFamily="34" charset="-120"/>
               </a:rPr>
-              <a:t>To stretch or push something too hard, like straining a muscle during sport.</a:t>
+              <a:t>A rule or situation that limits what you can do.</a:t>
             </a:r>
             <a:endParaRPr lang="en-US" sz="1200" dirty="0"/>
           </a:p>
@@ -40638,7 +41211,7 @@
                 <a:ea typeface="Trebuchet MS" pitchFamily="34" charset="-122"/>
                 <a:cs typeface="Trebuchet MS" pitchFamily="34" charset="-120"/>
               </a:rPr>
-              <a:t>strain</a:t>
+              <a:t>constraint</a:t>
             </a:r>
             <a:endParaRPr lang="en-US" sz="1200" dirty="0"/>
           </a:p>
@@ -40704,7 +41277,7 @@
                 <a:ea typeface="Calibri" pitchFamily="34" charset="-122"/>
                 <a:cs typeface="Calibri" pitchFamily="34" charset="-120"/>
               </a:rPr>
-              <a:t>A person who teaches others skills, often in sport or fitness.</a:t>
+              <a:t>A person who teaches others skills or helps them get fit.</a:t>
             </a:r>
             <a:endParaRPr lang="en-US" sz="1200" dirty="0"/>
           </a:p>
@@ -40996,7 +41569,7 @@
                 <a:ea typeface="Calibri" pitchFamily="34" charset="-122"/>
                 <a:cs typeface="Calibri" pitchFamily="34" charset="-120"/>
               </a:rPr>
-              <a:t>Word Labs  •  wordlabs.app  •  Root: 'train' = to teach or instruct</a:t>
+              <a:t>Word Labs  •  wordlabs.app  •  Root: 'train' = to teach or draw along</a:t>
             </a:r>
             <a:endParaRPr lang="en-US" sz="800" dirty="0"/>
           </a:p>
@@ -41199,7 +41772,7 @@
                 <a:ea typeface="Calibri" pitchFamily="34" charset="-122"/>
                 <a:cs typeface="Calibri" pitchFamily="34" charset="-120"/>
               </a:rPr>
-              <a:t>The trainer showed the team new exercises to help them get stronger before the big game.</a:t>
+              <a:t>The trainer worked with the athletes every morning to help them prepare for the big race.</a:t>
             </a:r>
             <a:endParaRPr lang="en-US" sz="1500" dirty="0"/>
           </a:p>
@@ -41363,7 +41936,7 @@
                 <a:ea typeface="Calibri" pitchFamily="34" charset="-122"/>
                 <a:cs typeface="Calibri" pitchFamily="34" charset="-120"/>
               </a:rPr>
-              <a:t>After missing many weeks of school, she had to retrain herself to focus on her studies.</a:t>
+              <a:t>The new trainee watched carefully as the chef showed her how to prepare the meal.</a:t>
             </a:r>
             <a:endParaRPr lang="en-US" sz="1500" dirty="0"/>
           </a:p>
@@ -41527,7 +42100,7 @@
                 <a:ea typeface="Calibri" pitchFamily="34" charset="-122"/>
                 <a:cs typeface="Calibri" pitchFamily="34" charset="-120"/>
               </a:rPr>
-              <a:t>The young trainee was nervous on her first day but quickly learned the steps of the job.</a:t>
+              <a:t>Without proper training, it can be very hard to learn a difficult new skill.</a:t>
             </a:r>
             <a:endParaRPr lang="en-US" sz="1500" dirty="0"/>
           </a:p>

--- a/output/wordlabs-train-3day.pptx
+++ b/output/wordlabs-train-3day.pptx
@@ -4240,7 +4240,7 @@
                 <a:ea typeface="Calibri" pitchFamily="34" charset="-122"/>
                 <a:cs typeface="Calibri" pitchFamily="34" charset="-120"/>
               </a:rPr>
-              <a:t>"to teach or draw along"</a:t>
+              <a:t>"to practise to improve; to teach"</a:t>
             </a:r>
             <a:endParaRPr lang="en-US" sz="2200" dirty="0"/>
           </a:p>
@@ -4279,7 +4279,7 @@
                 <a:ea typeface="Calibri" pitchFamily="34" charset="-122"/>
                 <a:cs typeface="Calibri" pitchFamily="34" charset="-120"/>
               </a:rPr>
-              <a:t>Origin: Latin: trahere</a:t>
+              <a:t>Origin: Anglo-Saxon (Old English) root</a:t>
             </a:r>
             <a:endParaRPr lang="en-US" sz="1300" dirty="0"/>
           </a:p>
@@ -5288,7 +5288,7 @@
                 <a:ea typeface="Calibri" pitchFamily="34" charset="-122"/>
                 <a:cs typeface="Calibri" pitchFamily="34" charset="-120"/>
               </a:rPr>
-              <a:t>Word Labs  •  wordlabs.app  •  Root: 'train' = to teach or draw along</a:t>
+              <a:t>Word Labs  •  wordlabs.app  •  Root: 'train' = to practise to improve; to teach</a:t>
             </a:r>
             <a:endParaRPr lang="en-US" sz="800" dirty="0"/>
           </a:p>
@@ -5622,7 +5622,7 @@
                 <a:ea typeface="Trebuchet MS" pitchFamily="34" charset="-122"/>
                 <a:cs typeface="Trebuchet MS" pitchFamily="34" charset="-120"/>
               </a:rPr>
-              <a:t>1</a:t>
+              <a:t>0</a:t>
             </a:r>
             <a:pPr algn="ctr" indent="0" marL="0">
               <a:buNone/>
@@ -5928,7 +5928,7 @@
                 <a:ea typeface="Calibri" pitchFamily="34" charset="-122"/>
                 <a:cs typeface="Calibri" pitchFamily="34" charset="-120"/>
               </a:rPr>
-              <a:t>Word Labs  •  wordlabs.app  •  Root: 'train' = to teach or draw along</a:t>
+              <a:t>Word Labs  •  wordlabs.app  •  Root: 'train' = to practise to improve; to teach</a:t>
             </a:r>
             <a:endParaRPr lang="en-US" sz="800" dirty="0"/>
           </a:p>
@@ -6040,7 +6040,7 @@
                 <a:ea typeface="Calibri" pitchFamily="34" charset="-122"/>
                 <a:cs typeface="Calibri" pitchFamily="34" charset="-120"/>
               </a:rPr>
-              <a:t>The </a:t>
+              <a:t>The players arrived early for </a:t>
             </a:r>
             <a:pPr algn="l" indent="0" marL="0">
               <a:buNone/>
@@ -6057,7 +6057,7 @@
                 <a:ea typeface="Calibri" pitchFamily="34" charset="-122"/>
                 <a:cs typeface="Calibri" pitchFamily="34" charset="-120"/>
               </a:rPr>
-              <a:t>trainee</a:t>
+              <a:t>training</a:t>
             </a:r>
             <a:pPr algn="l" indent="0" marL="0">
               <a:buNone/>
@@ -6071,7 +6071,7 @@
                 <a:ea typeface="Calibri" pitchFamily="34" charset="-122"/>
                 <a:cs typeface="Calibri" pitchFamily="34" charset="-120"/>
               </a:rPr>
-              <a:t> was excited, but the </a:t>
+              <a:t> before the match. She </a:t>
             </a:r>
             <a:pPr algn="l" indent="0" marL="0">
               <a:buNone/>
@@ -6088,7 +6088,7 @@
                 <a:ea typeface="Calibri" pitchFamily="34" charset="-122"/>
                 <a:cs typeface="Calibri" pitchFamily="34" charset="-120"/>
               </a:rPr>
-              <a:t>trainer</a:t>
+              <a:t>retrained</a:t>
             </a:r>
             <a:pPr algn="l" indent="0" marL="0">
               <a:buNone/>
@@ -6102,7 +6102,7 @@
                 <a:ea typeface="Calibri" pitchFamily="34" charset="-122"/>
                 <a:cs typeface="Calibri" pitchFamily="34" charset="-120"/>
               </a:rPr>
-              <a:t> reminded her to be patient during practice.</a:t>
+              <a:t> as a nurse after ten years as a teacher.</a:t>
             </a:r>
             <a:endParaRPr lang="en-US" sz="1800" dirty="0"/>
           </a:p>
@@ -6257,7 +6257,7 @@
                 <a:ea typeface="Trebuchet MS" pitchFamily="34" charset="-122"/>
                 <a:cs typeface="Trebuchet MS" pitchFamily="34" charset="-120"/>
               </a:rPr>
-              <a:t>trainee</a:t>
+              <a:t>training</a:t>
             </a:r>
             <a:endParaRPr lang="en-US" sz="1400" dirty="0"/>
           </a:p>
@@ -6385,7 +6385,7 @@
                 <a:ea typeface="Trebuchet MS" pitchFamily="34" charset="-122"/>
                 <a:cs typeface="Trebuchet MS" pitchFamily="34" charset="-120"/>
               </a:rPr>
-              <a:t>trainer</a:t>
+              <a:t>retrained</a:t>
             </a:r>
             <a:endParaRPr lang="en-US" sz="1400" dirty="0"/>
           </a:p>
@@ -6716,7 +6716,7 @@
                 <a:ea typeface="Calibri" pitchFamily="34" charset="-122"/>
                 <a:cs typeface="Calibri" pitchFamily="34" charset="-120"/>
               </a:rPr>
-              <a:t>Word Labs  •  wordlabs.app  •  Root: 'train' = to teach or draw along</a:t>
+              <a:t>Word Labs  •  wordlabs.app  •  Root: 'train' = to practise to improve; to teach</a:t>
             </a:r>
             <a:endParaRPr lang="en-US" sz="800" dirty="0"/>
           </a:p>
@@ -6855,7 +6855,7 @@
                 <a:ea typeface="Trebuchet MS" pitchFamily="34" charset="-122"/>
                 <a:cs typeface="Trebuchet MS" pitchFamily="34" charset="-120"/>
               </a:rPr>
-              <a:t>trainee</a:t>
+              <a:t>training</a:t>
             </a:r>
             <a:endParaRPr lang="en-US" sz="2800" dirty="0"/>
           </a:p>
@@ -7543,7 +7543,7 @@
                 <a:ea typeface="Calibri" pitchFamily="34" charset="-122"/>
                 <a:cs typeface="Calibri" pitchFamily="34" charset="-120"/>
               </a:rPr>
-              <a:t>Word Labs  •  wordlabs.app  •  Root: 'train' = to teach or draw along</a:t>
+              <a:t>Word Labs  •  wordlabs.app  •  Root: 'train' = to practise to improve; to teach</a:t>
             </a:r>
             <a:endParaRPr lang="en-US" sz="800" dirty="0"/>
           </a:p>
@@ -7682,7 +7682,7 @@
                 <a:ea typeface="Trebuchet MS" pitchFamily="34" charset="-122"/>
                 <a:cs typeface="Trebuchet MS" pitchFamily="34" charset="-120"/>
               </a:rPr>
-              <a:t>trainee</a:t>
+              <a:t>training</a:t>
             </a:r>
             <a:endParaRPr lang="en-US" sz="2800" dirty="0"/>
           </a:p>
@@ -7860,7 +7860,7 @@
                 <a:ea typeface="Calibri" pitchFamily="34" charset="-122"/>
                 <a:cs typeface="Calibri" pitchFamily="34" charset="-120"/>
               </a:rPr>
-              <a:t>to teach or draw along</a:t>
+              <a:t>to practise to improve; to teach</a:t>
             </a:r>
             <a:endParaRPr lang="en-US" sz="850" dirty="0"/>
           </a:p>
@@ -7933,7 +7933,7 @@
                 <a:ea typeface="Trebuchet MS" pitchFamily="34" charset="-122"/>
                 <a:cs typeface="Trebuchet MS" pitchFamily="34" charset="-120"/>
               </a:rPr>
-              <a:t>ee</a:t>
+              <a:t>ing</a:t>
             </a:r>
             <a:endParaRPr lang="en-US" sz="1300" dirty="0"/>
           </a:p>
@@ -7972,7 +7972,7 @@
                 <a:ea typeface="Calibri" pitchFamily="34" charset="-122"/>
                 <a:cs typeface="Calibri" pitchFamily="34" charset="-120"/>
               </a:rPr>
-              <a:t>a person who receives the action</a:t>
+              <a:t>happening now</a:t>
             </a:r>
             <a:endParaRPr lang="en-US" sz="850" dirty="0"/>
           </a:p>
@@ -8528,7 +8528,7 @@
                 <a:ea typeface="Calibri" pitchFamily="34" charset="-122"/>
                 <a:cs typeface="Calibri" pitchFamily="34" charset="-120"/>
               </a:rPr>
-              <a:t>Word Labs  •  wordlabs.app  •  Root: 'train' = to teach or draw along</a:t>
+              <a:t>Word Labs  •  wordlabs.app  •  Root: 'train' = to practise to improve; to teach</a:t>
             </a:r>
             <a:endParaRPr lang="en-US" sz="800" dirty="0"/>
           </a:p>
@@ -8667,7 +8667,7 @@
                 <a:ea typeface="Trebuchet MS" pitchFamily="34" charset="-122"/>
                 <a:cs typeface="Trebuchet MS" pitchFamily="34" charset="-120"/>
               </a:rPr>
-              <a:t>trainee</a:t>
+              <a:t>training</a:t>
             </a:r>
             <a:endParaRPr lang="en-US" sz="2800" dirty="0"/>
           </a:p>
@@ -8845,7 +8845,7 @@
                 <a:ea typeface="Calibri" pitchFamily="34" charset="-122"/>
                 <a:cs typeface="Calibri" pitchFamily="34" charset="-120"/>
               </a:rPr>
-              <a:t>to teach or draw along</a:t>
+              <a:t>to practise to improve; to teach</a:t>
             </a:r>
             <a:endParaRPr lang="en-US" sz="850" dirty="0"/>
           </a:p>
@@ -8918,7 +8918,7 @@
                 <a:ea typeface="Trebuchet MS" pitchFamily="34" charset="-122"/>
                 <a:cs typeface="Trebuchet MS" pitchFamily="34" charset="-120"/>
               </a:rPr>
-              <a:t>ee</a:t>
+              <a:t>ing</a:t>
             </a:r>
             <a:endParaRPr lang="en-US" sz="1300" dirty="0"/>
           </a:p>
@@ -8957,7 +8957,7 @@
                 <a:ea typeface="Calibri" pitchFamily="34" charset="-122"/>
                 <a:cs typeface="Calibri" pitchFamily="34" charset="-120"/>
               </a:rPr>
-              <a:t>a person who receives the action</a:t>
+              <a:t>happening now</a:t>
             </a:r>
             <a:endParaRPr lang="en-US" sz="850" dirty="0"/>
           </a:p>
@@ -9221,7 +9221,7 @@
                 <a:ea typeface="Trebuchet MS" pitchFamily="34" charset="-122"/>
                 <a:cs typeface="Trebuchet MS" pitchFamily="34" charset="-120"/>
               </a:rPr>
-              <a:t>ee</a:t>
+              <a:t>ing</a:t>
             </a:r>
             <a:endParaRPr lang="en-US" sz="1400" dirty="0"/>
           </a:p>
@@ -9645,7 +9645,7 @@
                 <a:ea typeface="Calibri" pitchFamily="34" charset="-122"/>
                 <a:cs typeface="Calibri" pitchFamily="34" charset="-120"/>
               </a:rPr>
-              <a:t>Word Labs  •  wordlabs.app  •  Root: 'train' = to teach or draw along</a:t>
+              <a:t>Word Labs  •  wordlabs.app  •  Root: 'train' = to practise to improve; to teach</a:t>
             </a:r>
             <a:endParaRPr lang="en-US" sz="800" dirty="0"/>
           </a:p>
@@ -9784,7 +9784,7 @@
                 <a:ea typeface="Trebuchet MS" pitchFamily="34" charset="-122"/>
                 <a:cs typeface="Trebuchet MS" pitchFamily="34" charset="-120"/>
               </a:rPr>
-              <a:t>trainee</a:t>
+              <a:t>training</a:t>
             </a:r>
             <a:endParaRPr lang="en-US" sz="2800" dirty="0"/>
           </a:p>
@@ -9962,7 +9962,7 @@
                 <a:ea typeface="Calibri" pitchFamily="34" charset="-122"/>
                 <a:cs typeface="Calibri" pitchFamily="34" charset="-120"/>
               </a:rPr>
-              <a:t>to teach or draw along</a:t>
+              <a:t>to practise to improve; to teach</a:t>
             </a:r>
             <a:endParaRPr lang="en-US" sz="850" dirty="0"/>
           </a:p>
@@ -10035,7 +10035,7 @@
                 <a:ea typeface="Trebuchet MS" pitchFamily="34" charset="-122"/>
                 <a:cs typeface="Trebuchet MS" pitchFamily="34" charset="-120"/>
               </a:rPr>
-              <a:t>ee</a:t>
+              <a:t>ing</a:t>
             </a:r>
             <a:endParaRPr lang="en-US" sz="1300" dirty="0"/>
           </a:p>
@@ -10074,7 +10074,7 @@
                 <a:ea typeface="Calibri" pitchFamily="34" charset="-122"/>
                 <a:cs typeface="Calibri" pitchFamily="34" charset="-120"/>
               </a:rPr>
-              <a:t>a person who receives the action</a:t>
+              <a:t>happening now</a:t>
             </a:r>
             <a:endParaRPr lang="en-US" sz="850" dirty="0"/>
           </a:p>
@@ -10338,7 +10338,7 @@
                 <a:ea typeface="Trebuchet MS" pitchFamily="34" charset="-122"/>
                 <a:cs typeface="Trebuchet MS" pitchFamily="34" charset="-120"/>
               </a:rPr>
-              <a:t>ee</a:t>
+              <a:t>ing</a:t>
             </a:r>
             <a:endParaRPr lang="en-US" sz="1400" dirty="0"/>
           </a:p>
@@ -10445,7 +10445,7 @@
         </p:nvSpPr>
         <p:spPr>
           <a:xfrm>
-            <a:off x="2670048" y="4169664"/>
+            <a:off x="2254649" y="4169664"/>
             <a:ext cx="685800" cy="475488"/>
           </a:xfrm>
           <a:prstGeom prst="rect">
@@ -10472,7 +10472,7 @@
         </p:nvSpPr>
         <p:spPr>
           <a:xfrm>
-            <a:off x="2670048" y="4169664"/>
+            <a:off x="2254649" y="4169664"/>
             <a:ext cx="685800" cy="475488"/>
           </a:xfrm>
           <a:prstGeom prst="rect">
@@ -10497,7 +10497,7 @@
                 <a:ea typeface="Trebuchet MS" pitchFamily="34" charset="-122"/>
                 <a:cs typeface="Trebuchet MS" pitchFamily="34" charset="-120"/>
               </a:rPr>
-              <a:t>tr</a:t>
+              <a:t>t</a:t>
             </a:r>
             <a:endParaRPr lang="en-US" sz="900" dirty="0"/>
           </a:p>
@@ -10511,7 +10511,7 @@
         </p:nvSpPr>
         <p:spPr>
           <a:xfrm>
-            <a:off x="4123944" y="4169664"/>
+            <a:off x="3293146" y="4169664"/>
             <a:ext cx="685800" cy="475488"/>
           </a:xfrm>
           <a:prstGeom prst="rect">
@@ -10538,7 +10538,7 @@
         </p:nvSpPr>
         <p:spPr>
           <a:xfrm>
-            <a:off x="4123944" y="4169664"/>
+            <a:off x="3293146" y="4169664"/>
             <a:ext cx="685800" cy="475488"/>
           </a:xfrm>
           <a:prstGeom prst="rect">
@@ -10563,7 +10563,7 @@
                 <a:ea typeface="Trebuchet MS" pitchFamily="34" charset="-122"/>
                 <a:cs typeface="Trebuchet MS" pitchFamily="34" charset="-120"/>
               </a:rPr>
-              <a:t>ai</a:t>
+              <a:t>r</a:t>
             </a:r>
             <a:endParaRPr lang="en-US" sz="900" dirty="0"/>
           </a:p>
@@ -10577,7 +10577,7 @@
         </p:nvSpPr>
         <p:spPr>
           <a:xfrm>
-            <a:off x="5577840" y="4169664"/>
+            <a:off x="4331643" y="4169664"/>
             <a:ext cx="685800" cy="475488"/>
           </a:xfrm>
           <a:prstGeom prst="rect">
@@ -10604,7 +10604,7 @@
         </p:nvSpPr>
         <p:spPr>
           <a:xfrm>
-            <a:off x="5577840" y="4169664"/>
+            <a:off x="4331643" y="4169664"/>
             <a:ext cx="685800" cy="475488"/>
           </a:xfrm>
           <a:prstGeom prst="rect">
@@ -10629,7 +10629,7 @@
                 <a:ea typeface="Trebuchet MS" pitchFamily="34" charset="-122"/>
                 <a:cs typeface="Trebuchet MS" pitchFamily="34" charset="-120"/>
               </a:rPr>
-              <a:t>n</a:t>
+              <a:t>ai</a:t>
             </a:r>
             <a:endParaRPr lang="en-US" sz="900" dirty="0"/>
           </a:p>
@@ -10643,7 +10643,7 @@
         </p:nvSpPr>
         <p:spPr>
           <a:xfrm>
-            <a:off x="7031736" y="4169664"/>
+            <a:off x="5370141" y="4169664"/>
             <a:ext cx="685800" cy="475488"/>
           </a:xfrm>
           <a:prstGeom prst="rect">
@@ -10670,7 +10670,7 @@
         </p:nvSpPr>
         <p:spPr>
           <a:xfrm>
-            <a:off x="7031736" y="4169664"/>
+            <a:off x="5370141" y="4169664"/>
             <a:ext cx="685800" cy="475488"/>
           </a:xfrm>
           <a:prstGeom prst="rect">
@@ -10695,7 +10695,139 @@
                 <a:ea typeface="Trebuchet MS" pitchFamily="34" charset="-122"/>
                 <a:cs typeface="Trebuchet MS" pitchFamily="34" charset="-120"/>
               </a:rPr>
-              <a:t>ee</a:t>
+              <a:t>n</a:t>
+            </a:r>
+            <a:endParaRPr lang="en-US" sz="900" dirty="0"/>
+          </a:p>
+        </p:txBody>
+      </p:sp>
+      <p:sp>
+        <p:nvSpPr>
+          <p:cNvPr id="41" name="Shape 39"/>
+          <p:cNvSpPr/>
+          <p:nvPr/>
+        </p:nvSpPr>
+        <p:spPr>
+          <a:xfrm>
+            <a:off x="6408638" y="4169664"/>
+            <a:ext cx="685800" cy="475488"/>
+          </a:xfrm>
+          <a:prstGeom prst="rect">
+            <a:avLst>
+              <a:gd name="adj" fmla="val 7692"/>
+            </a:avLst>
+          </a:prstGeom>
+          <a:solidFill>
+            <a:srgbClr val="FFFFFF"/>
+          </a:solidFill>
+          <a:ln w="12700">
+            <a:solidFill>
+              <a:srgbClr val="DB2777"/>
+            </a:solidFill>
+            <a:prstDash val="solid"/>
+          </a:ln>
+        </p:spPr>
+      </p:sp>
+      <p:sp>
+        <p:nvSpPr>
+          <p:cNvPr id="42" name="Text 40"/>
+          <p:cNvSpPr/>
+          <p:nvPr/>
+        </p:nvSpPr>
+        <p:spPr>
+          <a:xfrm>
+            <a:off x="6408638" y="4169664"/>
+            <a:ext cx="685800" cy="475488"/>
+          </a:xfrm>
+          <a:prstGeom prst="rect">
+            <a:avLst/>
+          </a:prstGeom>
+          <a:noFill/>
+          <a:ln/>
+        </p:spPr>
+        <p:txBody>
+          <a:bodyPr wrap="square" lIns="0" tIns="0" rIns="0" bIns="0" rtlCol="0" anchor="ctr"/>
+          <a:lstStyle/>
+          <a:p>
+            <a:pPr algn="ctr" indent="0" marL="0">
+              <a:buNone/>
+            </a:pPr>
+            <a:r>
+              <a:rPr lang="en-US" sz="900" b="1" dirty="0">
+                <a:solidFill>
+                  <a:srgbClr val="9D174D"/>
+                </a:solidFill>
+                <a:latin typeface="Trebuchet MS" pitchFamily="34" charset="0"/>
+                <a:ea typeface="Trebuchet MS" pitchFamily="34" charset="-122"/>
+                <a:cs typeface="Trebuchet MS" pitchFamily="34" charset="-120"/>
+              </a:rPr>
+              <a:t>i</a:t>
+            </a:r>
+            <a:endParaRPr lang="en-US" sz="900" dirty="0"/>
+          </a:p>
+        </p:txBody>
+      </p:sp>
+      <p:sp>
+        <p:nvSpPr>
+          <p:cNvPr id="43" name="Shape 41"/>
+          <p:cNvSpPr/>
+          <p:nvPr/>
+        </p:nvSpPr>
+        <p:spPr>
+          <a:xfrm>
+            <a:off x="7447135" y="4169664"/>
+            <a:ext cx="685800" cy="475488"/>
+          </a:xfrm>
+          <a:prstGeom prst="rect">
+            <a:avLst>
+              <a:gd name="adj" fmla="val 7692"/>
+            </a:avLst>
+          </a:prstGeom>
+          <a:solidFill>
+            <a:srgbClr val="FFFFFF"/>
+          </a:solidFill>
+          <a:ln w="12700">
+            <a:solidFill>
+              <a:srgbClr val="DB2777"/>
+            </a:solidFill>
+            <a:prstDash val="solid"/>
+          </a:ln>
+        </p:spPr>
+      </p:sp>
+      <p:sp>
+        <p:nvSpPr>
+          <p:cNvPr id="44" name="Text 42"/>
+          <p:cNvSpPr/>
+          <p:nvPr/>
+        </p:nvSpPr>
+        <p:spPr>
+          <a:xfrm>
+            <a:off x="7447135" y="4169664"/>
+            <a:ext cx="685800" cy="475488"/>
+          </a:xfrm>
+          <a:prstGeom prst="rect">
+            <a:avLst/>
+          </a:prstGeom>
+          <a:noFill/>
+          <a:ln/>
+        </p:spPr>
+        <p:txBody>
+          <a:bodyPr wrap="square" lIns="0" tIns="0" rIns="0" bIns="0" rtlCol="0" anchor="ctr"/>
+          <a:lstStyle/>
+          <a:p>
+            <a:pPr algn="ctr" indent="0" marL="0">
+              <a:buNone/>
+            </a:pPr>
+            <a:r>
+              <a:rPr lang="en-US" sz="900" b="1" dirty="0">
+                <a:solidFill>
+                  <a:srgbClr val="9D174D"/>
+                </a:solidFill>
+                <a:latin typeface="Trebuchet MS" pitchFamily="34" charset="0"/>
+                <a:ea typeface="Trebuchet MS" pitchFamily="34" charset="-122"/>
+                <a:cs typeface="Trebuchet MS" pitchFamily="34" charset="-120"/>
+              </a:rPr>
+              <a:t>ng</a:t>
             </a:r>
             <a:endParaRPr lang="en-US" sz="900" dirty="0"/>
           </a:p>
@@ -10987,7 +11119,7 @@
                 <a:ea typeface="Calibri" pitchFamily="34" charset="-122"/>
                 <a:cs typeface="Calibri" pitchFamily="34" charset="-120"/>
               </a:rPr>
-              <a:t>Word Labs  •  wordlabs.app  •  Root: 'train' = to teach or draw along</a:t>
+              <a:t>Word Labs  •  wordlabs.app  •  Root: 'train' = to practise to improve; to teach</a:t>
             </a:r>
             <a:endParaRPr lang="en-US" sz="800" dirty="0"/>
           </a:p>
@@ -11126,7 +11258,7 @@
                 <a:ea typeface="Trebuchet MS" pitchFamily="34" charset="-122"/>
                 <a:cs typeface="Trebuchet MS" pitchFamily="34" charset="-120"/>
               </a:rPr>
-              <a:t>trainer</a:t>
+              <a:t>retrained</a:t>
             </a:r>
             <a:endParaRPr lang="en-US" sz="2800" dirty="0"/>
           </a:p>
@@ -11814,7 +11946,7 @@
                 <a:ea typeface="Calibri" pitchFamily="34" charset="-122"/>
                 <a:cs typeface="Calibri" pitchFamily="34" charset="-120"/>
               </a:rPr>
-              <a:t>Word Labs  •  wordlabs.app  •  Root: 'train' = to teach or draw along</a:t>
+              <a:t>Word Labs  •  wordlabs.app  •  Root: 'train' = to practise to improve; to teach</a:t>
             </a:r>
             <a:endParaRPr lang="en-US" sz="800" dirty="0"/>
           </a:p>
@@ -11953,7 +12085,7 @@
                 <a:ea typeface="Trebuchet MS" pitchFamily="34" charset="-122"/>
                 <a:cs typeface="Trebuchet MS" pitchFamily="34" charset="-120"/>
               </a:rPr>
-              <a:t>trainer</a:t>
+              <a:t>retrained</a:t>
             </a:r>
             <a:endParaRPr lang="en-US" sz="2800" dirty="0"/>
           </a:p>
@@ -12033,7 +12165,7 @@
         </p:nvSpPr>
         <p:spPr>
           <a:xfrm>
-            <a:off x="2938272" y="2258568"/>
+            <a:off x="2221992" y="2258568"/>
             <a:ext cx="1828800" cy="292608"/>
           </a:xfrm>
           <a:prstGeom prst="rect">
@@ -12042,11 +12174,11 @@
             </a:avLst>
           </a:prstGeom>
           <a:solidFill>
-            <a:srgbClr val="CCFBF1"/>
+            <a:srgbClr val="DDD6FE"/>
           </a:solidFill>
           <a:ln w="19050">
             <a:solidFill>
-              <a:srgbClr val="0D9488"/>
+              <a:srgbClr val="7C3AED"/>
             </a:solidFill>
             <a:prstDash val="solid"/>
           </a:ln>
@@ -12067,7 +12199,7 @@
         </p:nvSpPr>
         <p:spPr>
           <a:xfrm>
-            <a:off x="2938272" y="2258568"/>
+            <a:off x="2221992" y="2258568"/>
             <a:ext cx="1828800" cy="292608"/>
           </a:xfrm>
           <a:prstGeom prst="rect">
@@ -12086,13 +12218,13 @@
             <a:r>
               <a:rPr lang="en-US" sz="1300" b="1" dirty="0">
                 <a:solidFill>
-                  <a:srgbClr val="0F766E"/>
+                  <a:srgbClr val="4C1D95"/>
                 </a:solidFill>
                 <a:latin typeface="Trebuchet MS" pitchFamily="34" charset="0"/>
                 <a:ea typeface="Trebuchet MS" pitchFamily="34" charset="-122"/>
                 <a:cs typeface="Trebuchet MS" pitchFamily="34" charset="-120"/>
               </a:rPr>
-              <a:t>train</a:t>
+              <a:t>re</a:t>
             </a:r>
             <a:endParaRPr lang="en-US" sz="1300" dirty="0"/>
           </a:p>
@@ -12106,7 +12238,7 @@
         </p:nvSpPr>
         <p:spPr>
           <a:xfrm>
-            <a:off x="2938272" y="2569464"/>
+            <a:off x="2221992" y="2569464"/>
             <a:ext cx="1828800" cy="201168"/>
           </a:xfrm>
           <a:prstGeom prst="rect">
@@ -12131,7 +12263,7 @@
                 <a:ea typeface="Calibri" pitchFamily="34" charset="-122"/>
                 <a:cs typeface="Calibri" pitchFamily="34" charset="-120"/>
               </a:rPr>
-              <a:t>to teach or draw along</a:t>
+              <a:t>again</a:t>
             </a:r>
             <a:endParaRPr lang="en-US" sz="850" dirty="0"/>
           </a:p>
@@ -12145,7 +12277,7 @@
         </p:nvSpPr>
         <p:spPr>
           <a:xfrm>
-            <a:off x="5803392" y="2258568"/>
+            <a:off x="4370832" y="2258568"/>
             <a:ext cx="1828800" cy="292608"/>
           </a:xfrm>
           <a:prstGeom prst="rect">
@@ -12154,11 +12286,11 @@
             </a:avLst>
           </a:prstGeom>
           <a:solidFill>
-            <a:srgbClr val="FCE7F3"/>
+            <a:srgbClr val="CCFBF1"/>
           </a:solidFill>
           <a:ln w="19050">
             <a:solidFill>
-              <a:srgbClr val="DB2777"/>
+              <a:srgbClr val="0D9488"/>
             </a:solidFill>
             <a:prstDash val="solid"/>
           </a:ln>
@@ -12179,7 +12311,7 @@
         </p:nvSpPr>
         <p:spPr>
           <a:xfrm>
-            <a:off x="5803392" y="2258568"/>
+            <a:off x="4370832" y="2258568"/>
             <a:ext cx="1828800" cy="292608"/>
           </a:xfrm>
           <a:prstGeom prst="rect">
@@ -12198,13 +12330,13 @@
             <a:r>
               <a:rPr lang="en-US" sz="1300" b="1" dirty="0">
                 <a:solidFill>
-                  <a:srgbClr val="9D174D"/>
+                  <a:srgbClr val="0F766E"/>
                 </a:solidFill>
                 <a:latin typeface="Trebuchet MS" pitchFamily="34" charset="0"/>
                 <a:ea typeface="Trebuchet MS" pitchFamily="34" charset="-122"/>
                 <a:cs typeface="Trebuchet MS" pitchFamily="34" charset="-120"/>
               </a:rPr>
-              <a:t>er</a:t>
+              <a:t>train</a:t>
             </a:r>
             <a:endParaRPr lang="en-US" sz="1300" dirty="0"/>
           </a:p>
@@ -12218,7 +12350,7 @@
         </p:nvSpPr>
         <p:spPr>
           <a:xfrm>
-            <a:off x="5803392" y="2569464"/>
+            <a:off x="4370832" y="2569464"/>
             <a:ext cx="1828800" cy="201168"/>
           </a:xfrm>
           <a:prstGeom prst="rect">
@@ -12243,7 +12375,7 @@
                 <a:ea typeface="Calibri" pitchFamily="34" charset="-122"/>
                 <a:cs typeface="Calibri" pitchFamily="34" charset="-120"/>
               </a:rPr>
-              <a:t>a person who does the action</a:t>
+              <a:t>to practise to improve; to teach</a:t>
             </a:r>
             <a:endParaRPr lang="en-US" sz="850" dirty="0"/>
           </a:p>
@@ -12252,6 +12384,118 @@
       <p:sp>
         <p:nvSpPr>
           <p:cNvPr id="22" name="Shape 20"/>
+          <p:cNvSpPr/>
+          <p:nvPr/>
+        </p:nvSpPr>
+        <p:spPr>
+          <a:xfrm>
+            <a:off x="6519672" y="2258568"/>
+            <a:ext cx="1828800" cy="292608"/>
+          </a:xfrm>
+          <a:prstGeom prst="rect">
+            <a:avLst>
+              <a:gd name="adj" fmla="val 25000"/>
+            </a:avLst>
+          </a:prstGeom>
+          <a:solidFill>
+            <a:srgbClr val="FCE7F3"/>
+          </a:solidFill>
+          <a:ln w="19050">
+            <a:solidFill>
+              <a:srgbClr val="DB2777"/>
+            </a:solidFill>
+            <a:prstDash val="solid"/>
+          </a:ln>
+          <a:effectLst>
+            <a:outerShdw sx="100000" sy="100000" kx="0" ky="0" algn="bl" rotWithShape="0" blurRad="101600" dist="38100" dir="8100000">
+              <a:srgbClr val="000000">
+                <a:alpha val="12000"/>
+              </a:srgbClr>
+            </a:outerShdw>
+          </a:effectLst>
+        </p:spPr>
+      </p:sp>
+      <p:sp>
+        <p:nvSpPr>
+          <p:cNvPr id="23" name="Text 21"/>
+          <p:cNvSpPr/>
+          <p:nvPr/>
+        </p:nvSpPr>
+        <p:spPr>
+          <a:xfrm>
+            <a:off x="6519672" y="2258568"/>
+            <a:ext cx="1828800" cy="292608"/>
+          </a:xfrm>
+          <a:prstGeom prst="rect">
+            <a:avLst/>
+          </a:prstGeom>
+          <a:noFill/>
+          <a:ln/>
+        </p:spPr>
+        <p:txBody>
+          <a:bodyPr wrap="square" lIns="0" tIns="0" rIns="0" bIns="0" rtlCol="0" anchor="ctr"/>
+          <a:lstStyle/>
+          <a:p>
+            <a:pPr algn="ctr" indent="0" marL="0">
+              <a:buNone/>
+            </a:pPr>
+            <a:r>
+              <a:rPr lang="en-US" sz="1300" b="1" dirty="0">
+                <a:solidFill>
+                  <a:srgbClr val="9D174D"/>
+                </a:solidFill>
+                <a:latin typeface="Trebuchet MS" pitchFamily="34" charset="0"/>
+                <a:ea typeface="Trebuchet MS" pitchFamily="34" charset="-122"/>
+                <a:cs typeface="Trebuchet MS" pitchFamily="34" charset="-120"/>
+              </a:rPr>
+              <a:t>ed</a:t>
+            </a:r>
+            <a:endParaRPr lang="en-US" sz="1300" dirty="0"/>
+          </a:p>
+        </p:txBody>
+      </p:sp>
+      <p:sp>
+        <p:nvSpPr>
+          <p:cNvPr id="24" name="Text 22"/>
+          <p:cNvSpPr/>
+          <p:nvPr/>
+        </p:nvSpPr>
+        <p:spPr>
+          <a:xfrm>
+            <a:off x="6519672" y="2569464"/>
+            <a:ext cx="1828800" cy="201168"/>
+          </a:xfrm>
+          <a:prstGeom prst="rect">
+            <a:avLst/>
+          </a:prstGeom>
+          <a:noFill/>
+          <a:ln/>
+        </p:spPr>
+        <p:txBody>
+          <a:bodyPr wrap="square" lIns="0" tIns="0" rIns="0" bIns="0" rtlCol="0" anchor="t"/>
+          <a:lstStyle/>
+          <a:p>
+            <a:pPr algn="ctr" indent="0" marL="0">
+              <a:buNone/>
+            </a:pPr>
+            <a:r>
+              <a:rPr lang="en-US" sz="850" dirty="0">
+                <a:solidFill>
+                  <a:srgbClr val="475569"/>
+                </a:solidFill>
+                <a:latin typeface="Calibri" pitchFamily="34" charset="0"/>
+                <a:ea typeface="Calibri" pitchFamily="34" charset="-122"/>
+                <a:cs typeface="Calibri" pitchFamily="34" charset="-120"/>
+              </a:rPr>
+              <a:t>past tense</a:t>
+            </a:r>
+            <a:endParaRPr lang="en-US" sz="850" dirty="0"/>
+          </a:p>
+        </p:txBody>
+      </p:sp>
+      <p:sp>
+        <p:nvSpPr>
+          <p:cNvPr id="25" name="Shape 23"/>
           <p:cNvSpPr/>
           <p:nvPr/>
         </p:nvSpPr>
@@ -12278,7 +12522,7 @@
       </p:sp>
       <p:sp>
         <p:nvSpPr>
-          <p:cNvPr id="23" name="Text 21"/>
+          <p:cNvPr id="26" name="Text 24"/>
           <p:cNvSpPr/>
           <p:nvPr/>
         </p:nvSpPr>
@@ -12317,7 +12561,7 @@
       </p:sp>
       <p:sp>
         <p:nvSpPr>
-          <p:cNvPr id="24" name="Shape 22"/>
+          <p:cNvPr id="27" name="Shape 25"/>
           <p:cNvSpPr/>
           <p:nvPr/>
         </p:nvSpPr>
@@ -12344,7 +12588,7 @@
       </p:sp>
       <p:sp>
         <p:nvSpPr>
-          <p:cNvPr id="25" name="Text 23"/>
+          <p:cNvPr id="28" name="Text 26"/>
           <p:cNvSpPr/>
           <p:nvPr/>
         </p:nvSpPr>
@@ -12383,7 +12627,7 @@
       </p:sp>
       <p:sp>
         <p:nvSpPr>
-          <p:cNvPr id="26" name="Shape 24"/>
+          <p:cNvPr id="29" name="Shape 27"/>
           <p:cNvSpPr/>
           <p:nvPr/>
         </p:nvSpPr>
@@ -12410,7 +12654,7 @@
       </p:sp>
       <p:sp>
         <p:nvSpPr>
-          <p:cNvPr id="27" name="Text 25"/>
+          <p:cNvPr id="30" name="Text 28"/>
           <p:cNvSpPr/>
           <p:nvPr/>
         </p:nvSpPr>
@@ -12449,7 +12693,7 @@
       </p:sp>
       <p:sp>
         <p:nvSpPr>
-          <p:cNvPr id="28" name="Shape 26"/>
+          <p:cNvPr id="31" name="Shape 29"/>
           <p:cNvSpPr/>
           <p:nvPr/>
         </p:nvSpPr>
@@ -12476,7 +12720,7 @@
       </p:sp>
       <p:sp>
         <p:nvSpPr>
-          <p:cNvPr id="29" name="Text 27"/>
+          <p:cNvPr id="32" name="Text 30"/>
           <p:cNvSpPr/>
           <p:nvPr/>
         </p:nvSpPr>
@@ -12799,7 +13043,7 @@
                 <a:ea typeface="Calibri" pitchFamily="34" charset="-122"/>
                 <a:cs typeface="Calibri" pitchFamily="34" charset="-120"/>
               </a:rPr>
-              <a:t>Word Labs  •  wordlabs.app  •  Root: 'train' = to teach or draw along</a:t>
+              <a:t>Word Labs  •  wordlabs.app  •  Root: 'train' = to practise to improve; to teach</a:t>
             </a:r>
             <a:endParaRPr lang="en-US" sz="800" dirty="0"/>
           </a:p>
@@ -12938,7 +13182,7 @@
                 <a:ea typeface="Trebuchet MS" pitchFamily="34" charset="-122"/>
                 <a:cs typeface="Trebuchet MS" pitchFamily="34" charset="-120"/>
               </a:rPr>
-              <a:t>trainer</a:t>
+              <a:t>retrained</a:t>
             </a:r>
             <a:endParaRPr lang="en-US" sz="2800" dirty="0"/>
           </a:p>
@@ -13018,7 +13262,7 @@
         </p:nvSpPr>
         <p:spPr>
           <a:xfrm>
-            <a:off x="2938272" y="2258568"/>
+            <a:off x="2221992" y="2258568"/>
             <a:ext cx="1828800" cy="292608"/>
           </a:xfrm>
           <a:prstGeom prst="rect">
@@ -13027,11 +13271,11 @@
             </a:avLst>
           </a:prstGeom>
           <a:solidFill>
-            <a:srgbClr val="CCFBF1"/>
+            <a:srgbClr val="DDD6FE"/>
           </a:solidFill>
           <a:ln w="19050">
             <a:solidFill>
-              <a:srgbClr val="0D9488"/>
+              <a:srgbClr val="7C3AED"/>
             </a:solidFill>
             <a:prstDash val="solid"/>
           </a:ln>
@@ -13052,7 +13296,7 @@
         </p:nvSpPr>
         <p:spPr>
           <a:xfrm>
-            <a:off x="2938272" y="2258568"/>
+            <a:off x="2221992" y="2258568"/>
             <a:ext cx="1828800" cy="292608"/>
           </a:xfrm>
           <a:prstGeom prst="rect">
@@ -13071,13 +13315,13 @@
             <a:r>
               <a:rPr lang="en-US" sz="1300" b="1" dirty="0">
                 <a:solidFill>
-                  <a:srgbClr val="0F766E"/>
+                  <a:srgbClr val="4C1D95"/>
                 </a:solidFill>
                 <a:latin typeface="Trebuchet MS" pitchFamily="34" charset="0"/>
                 <a:ea typeface="Trebuchet MS" pitchFamily="34" charset="-122"/>
                 <a:cs typeface="Trebuchet MS" pitchFamily="34" charset="-120"/>
               </a:rPr>
-              <a:t>train</a:t>
+              <a:t>re</a:t>
             </a:r>
             <a:endParaRPr lang="en-US" sz="1300" dirty="0"/>
           </a:p>
@@ -13091,7 +13335,7 @@
         </p:nvSpPr>
         <p:spPr>
           <a:xfrm>
-            <a:off x="2938272" y="2569464"/>
+            <a:off x="2221992" y="2569464"/>
             <a:ext cx="1828800" cy="201168"/>
           </a:xfrm>
           <a:prstGeom prst="rect">
@@ -13116,7 +13360,7 @@
                 <a:ea typeface="Calibri" pitchFamily="34" charset="-122"/>
                 <a:cs typeface="Calibri" pitchFamily="34" charset="-120"/>
               </a:rPr>
-              <a:t>to teach or draw along</a:t>
+              <a:t>again</a:t>
             </a:r>
             <a:endParaRPr lang="en-US" sz="850" dirty="0"/>
           </a:p>
@@ -13130,7 +13374,7 @@
         </p:nvSpPr>
         <p:spPr>
           <a:xfrm>
-            <a:off x="5803392" y="2258568"/>
+            <a:off x="4370832" y="2258568"/>
             <a:ext cx="1828800" cy="292608"/>
           </a:xfrm>
           <a:prstGeom prst="rect">
@@ -13139,11 +13383,11 @@
             </a:avLst>
           </a:prstGeom>
           <a:solidFill>
-            <a:srgbClr val="FCE7F3"/>
+            <a:srgbClr val="CCFBF1"/>
           </a:solidFill>
           <a:ln w="19050">
             <a:solidFill>
-              <a:srgbClr val="DB2777"/>
+              <a:srgbClr val="0D9488"/>
             </a:solidFill>
             <a:prstDash val="solid"/>
           </a:ln>
@@ -13164,7 +13408,7 @@
         </p:nvSpPr>
         <p:spPr>
           <a:xfrm>
-            <a:off x="5803392" y="2258568"/>
+            <a:off x="4370832" y="2258568"/>
             <a:ext cx="1828800" cy="292608"/>
           </a:xfrm>
           <a:prstGeom prst="rect">
@@ -13183,13 +13427,13 @@
             <a:r>
               <a:rPr lang="en-US" sz="1300" b="1" dirty="0">
                 <a:solidFill>
-                  <a:srgbClr val="9D174D"/>
+                  <a:srgbClr val="0F766E"/>
                 </a:solidFill>
                 <a:latin typeface="Trebuchet MS" pitchFamily="34" charset="0"/>
                 <a:ea typeface="Trebuchet MS" pitchFamily="34" charset="-122"/>
                 <a:cs typeface="Trebuchet MS" pitchFamily="34" charset="-120"/>
               </a:rPr>
-              <a:t>er</a:t>
+              <a:t>train</a:t>
             </a:r>
             <a:endParaRPr lang="en-US" sz="1300" dirty="0"/>
           </a:p>
@@ -13203,7 +13447,7 @@
         </p:nvSpPr>
         <p:spPr>
           <a:xfrm>
-            <a:off x="5803392" y="2569464"/>
+            <a:off x="4370832" y="2569464"/>
             <a:ext cx="1828800" cy="201168"/>
           </a:xfrm>
           <a:prstGeom prst="rect">
@@ -13228,7 +13472,7 @@
                 <a:ea typeface="Calibri" pitchFamily="34" charset="-122"/>
                 <a:cs typeface="Calibri" pitchFamily="34" charset="-120"/>
               </a:rPr>
-              <a:t>a person who does the action</a:t>
+              <a:t>to practise to improve; to teach</a:t>
             </a:r>
             <a:endParaRPr lang="en-US" sz="850" dirty="0"/>
           </a:p>
@@ -13237,6 +13481,118 @@
       <p:sp>
         <p:nvSpPr>
           <p:cNvPr id="22" name="Shape 20"/>
+          <p:cNvSpPr/>
+          <p:nvPr/>
+        </p:nvSpPr>
+        <p:spPr>
+          <a:xfrm>
+            <a:off x="6519672" y="2258568"/>
+            <a:ext cx="1828800" cy="292608"/>
+          </a:xfrm>
+          <a:prstGeom prst="rect">
+            <a:avLst>
+              <a:gd name="adj" fmla="val 25000"/>
+            </a:avLst>
+          </a:prstGeom>
+          <a:solidFill>
+            <a:srgbClr val="FCE7F3"/>
+          </a:solidFill>
+          <a:ln w="19050">
+            <a:solidFill>
+              <a:srgbClr val="DB2777"/>
+            </a:solidFill>
+            <a:prstDash val="solid"/>
+          </a:ln>
+          <a:effectLst>
+            <a:outerShdw sx="100000" sy="100000" kx="0" ky="0" algn="bl" rotWithShape="0" blurRad="101600" dist="38100" dir="8100000">
+              <a:srgbClr val="000000">
+                <a:alpha val="12000"/>
+              </a:srgbClr>
+            </a:outerShdw>
+          </a:effectLst>
+        </p:spPr>
+      </p:sp>
+      <p:sp>
+        <p:nvSpPr>
+          <p:cNvPr id="23" name="Text 21"/>
+          <p:cNvSpPr/>
+          <p:nvPr/>
+        </p:nvSpPr>
+        <p:spPr>
+          <a:xfrm>
+            <a:off x="6519672" y="2258568"/>
+            <a:ext cx="1828800" cy="292608"/>
+          </a:xfrm>
+          <a:prstGeom prst="rect">
+            <a:avLst/>
+          </a:prstGeom>
+          <a:noFill/>
+          <a:ln/>
+        </p:spPr>
+        <p:txBody>
+          <a:bodyPr wrap="square" lIns="0" tIns="0" rIns="0" bIns="0" rtlCol="0" anchor="ctr"/>
+          <a:lstStyle/>
+          <a:p>
+            <a:pPr algn="ctr" indent="0" marL="0">
+              <a:buNone/>
+            </a:pPr>
+            <a:r>
+              <a:rPr lang="en-US" sz="1300" b="1" dirty="0">
+                <a:solidFill>
+                  <a:srgbClr val="9D174D"/>
+                </a:solidFill>
+                <a:latin typeface="Trebuchet MS" pitchFamily="34" charset="0"/>
+                <a:ea typeface="Trebuchet MS" pitchFamily="34" charset="-122"/>
+                <a:cs typeface="Trebuchet MS" pitchFamily="34" charset="-120"/>
+              </a:rPr>
+              <a:t>ed</a:t>
+            </a:r>
+            <a:endParaRPr lang="en-US" sz="1300" dirty="0"/>
+          </a:p>
+        </p:txBody>
+      </p:sp>
+      <p:sp>
+        <p:nvSpPr>
+          <p:cNvPr id="24" name="Text 22"/>
+          <p:cNvSpPr/>
+          <p:nvPr/>
+        </p:nvSpPr>
+        <p:spPr>
+          <a:xfrm>
+            <a:off x="6519672" y="2569464"/>
+            <a:ext cx="1828800" cy="201168"/>
+          </a:xfrm>
+          <a:prstGeom prst="rect">
+            <a:avLst/>
+          </a:prstGeom>
+          <a:noFill/>
+          <a:ln/>
+        </p:spPr>
+        <p:txBody>
+          <a:bodyPr wrap="square" lIns="0" tIns="0" rIns="0" bIns="0" rtlCol="0" anchor="t"/>
+          <a:lstStyle/>
+          <a:p>
+            <a:pPr algn="ctr" indent="0" marL="0">
+              <a:buNone/>
+            </a:pPr>
+            <a:r>
+              <a:rPr lang="en-US" sz="850" dirty="0">
+                <a:solidFill>
+                  <a:srgbClr val="475569"/>
+                </a:solidFill>
+                <a:latin typeface="Calibri" pitchFamily="34" charset="0"/>
+                <a:ea typeface="Calibri" pitchFamily="34" charset="-122"/>
+                <a:cs typeface="Calibri" pitchFamily="34" charset="-120"/>
+              </a:rPr>
+              <a:t>past tense</a:t>
+            </a:r>
+            <a:endParaRPr lang="en-US" sz="850" dirty="0"/>
+          </a:p>
+        </p:txBody>
+      </p:sp>
+      <p:sp>
+        <p:nvSpPr>
+          <p:cNvPr id="25" name="Shape 23"/>
           <p:cNvSpPr/>
           <p:nvPr/>
         </p:nvSpPr>
@@ -13263,7 +13619,7 @@
       </p:sp>
       <p:sp>
         <p:nvSpPr>
-          <p:cNvPr id="23" name="Text 21"/>
+          <p:cNvPr id="26" name="Text 24"/>
           <p:cNvSpPr/>
           <p:nvPr/>
         </p:nvSpPr>
@@ -13302,7 +13658,7 @@
       </p:sp>
       <p:sp>
         <p:nvSpPr>
-          <p:cNvPr id="24" name="Shape 22"/>
+          <p:cNvPr id="27" name="Shape 25"/>
           <p:cNvSpPr/>
           <p:nvPr/>
         </p:nvSpPr>
@@ -13329,7 +13685,7 @@
       </p:sp>
       <p:sp>
         <p:nvSpPr>
-          <p:cNvPr id="25" name="Shape 23"/>
+          <p:cNvPr id="28" name="Shape 26"/>
           <p:cNvSpPr/>
           <p:nvPr/>
         </p:nvSpPr>
@@ -13356,7 +13712,7 @@
       </p:sp>
       <p:sp>
         <p:nvSpPr>
-          <p:cNvPr id="26" name="Text 24"/>
+          <p:cNvPr id="29" name="Text 27"/>
           <p:cNvSpPr/>
           <p:nvPr/>
         </p:nvSpPr>
@@ -13387,7 +13743,7 @@
                 <a:ea typeface="Trebuchet MS" pitchFamily="34" charset="-122"/>
                 <a:cs typeface="Trebuchet MS" pitchFamily="34" charset="-120"/>
               </a:rPr>
-              <a:t>train</a:t>
+              <a:t>re</a:t>
             </a:r>
             <a:endParaRPr lang="en-US" sz="1400" dirty="0"/>
           </a:p>
@@ -13395,7 +13751,7 @@
       </p:sp>
       <p:sp>
         <p:nvSpPr>
-          <p:cNvPr id="27" name="Text 25"/>
+          <p:cNvPr id="30" name="Text 28"/>
           <p:cNvSpPr/>
           <p:nvPr/>
         </p:nvSpPr>
@@ -13434,7 +13790,7 @@
       </p:sp>
       <p:sp>
         <p:nvSpPr>
-          <p:cNvPr id="28" name="Shape 26"/>
+          <p:cNvPr id="31" name="Shape 29"/>
           <p:cNvSpPr/>
           <p:nvPr/>
         </p:nvSpPr>
@@ -13461,7 +13817,7 @@
       </p:sp>
       <p:sp>
         <p:nvSpPr>
-          <p:cNvPr id="29" name="Text 27"/>
+          <p:cNvPr id="32" name="Text 30"/>
           <p:cNvSpPr/>
           <p:nvPr/>
         </p:nvSpPr>
@@ -13492,7 +13848,7 @@
                 <a:ea typeface="Trebuchet MS" pitchFamily="34" charset="-122"/>
                 <a:cs typeface="Trebuchet MS" pitchFamily="34" charset="-120"/>
               </a:rPr>
-              <a:t>er</a:t>
+              <a:t>trained</a:t>
             </a:r>
             <a:endParaRPr lang="en-US" sz="1400" dirty="0"/>
           </a:p>
@@ -13500,7 +13856,7 @@
       </p:sp>
       <p:sp>
         <p:nvSpPr>
-          <p:cNvPr id="30" name="Shape 28"/>
+          <p:cNvPr id="33" name="Shape 31"/>
           <p:cNvSpPr/>
           <p:nvPr/>
         </p:nvSpPr>
@@ -13527,7 +13883,7 @@
       </p:sp>
       <p:sp>
         <p:nvSpPr>
-          <p:cNvPr id="31" name="Text 29"/>
+          <p:cNvPr id="34" name="Text 32"/>
           <p:cNvSpPr/>
           <p:nvPr/>
         </p:nvSpPr>
@@ -13566,7 +13922,7 @@
       </p:sp>
       <p:sp>
         <p:nvSpPr>
-          <p:cNvPr id="32" name="Shape 30"/>
+          <p:cNvPr id="35" name="Shape 33"/>
           <p:cNvSpPr/>
           <p:nvPr/>
         </p:nvSpPr>
@@ -13593,7 +13949,7 @@
       </p:sp>
       <p:sp>
         <p:nvSpPr>
-          <p:cNvPr id="33" name="Text 31"/>
+          <p:cNvPr id="36" name="Text 34"/>
           <p:cNvSpPr/>
           <p:nvPr/>
         </p:nvSpPr>
@@ -13825,7 +14181,7 @@
                 <a:ea typeface="Calibri" pitchFamily="34" charset="-122"/>
                 <a:cs typeface="Calibri" pitchFamily="34" charset="-120"/>
               </a:rPr>
-              <a:t>Root 'train' — to teach or draw along</a:t>
+              <a:t>Root 'train' — to practise to improve; to teach</a:t>
             </a:r>
             <a:endParaRPr lang="en-US" sz="1600" dirty="0"/>
           </a:p>
@@ -14181,7 +14537,7 @@
                 <a:ea typeface="Calibri" pitchFamily="34" charset="-122"/>
                 <a:cs typeface="Calibri" pitchFamily="34" charset="-120"/>
               </a:rPr>
-              <a:t>Word Labs  •  wordlabs.app  •  Root: 'train' = to teach or draw along</a:t>
+              <a:t>Word Labs  •  wordlabs.app  •  Root: 'train' = to practise to improve; to teach</a:t>
             </a:r>
             <a:endParaRPr lang="en-US" sz="800" dirty="0"/>
           </a:p>
@@ -14320,7 +14676,7 @@
                 <a:ea typeface="Trebuchet MS" pitchFamily="34" charset="-122"/>
                 <a:cs typeface="Trebuchet MS" pitchFamily="34" charset="-120"/>
               </a:rPr>
-              <a:t>trainer</a:t>
+              <a:t>retrained</a:t>
             </a:r>
             <a:endParaRPr lang="en-US" sz="2800" dirty="0"/>
           </a:p>
@@ -14400,7 +14756,7 @@
         </p:nvSpPr>
         <p:spPr>
           <a:xfrm>
-            <a:off x="2938272" y="2258568"/>
+            <a:off x="2221992" y="2258568"/>
             <a:ext cx="1828800" cy="292608"/>
           </a:xfrm>
           <a:prstGeom prst="rect">
@@ -14409,11 +14765,11 @@
             </a:avLst>
           </a:prstGeom>
           <a:solidFill>
-            <a:srgbClr val="CCFBF1"/>
+            <a:srgbClr val="DDD6FE"/>
           </a:solidFill>
           <a:ln w="19050">
             <a:solidFill>
-              <a:srgbClr val="0D9488"/>
+              <a:srgbClr val="7C3AED"/>
             </a:solidFill>
             <a:prstDash val="solid"/>
           </a:ln>
@@ -14434,7 +14790,7 @@
         </p:nvSpPr>
         <p:spPr>
           <a:xfrm>
-            <a:off x="2938272" y="2258568"/>
+            <a:off x="2221992" y="2258568"/>
             <a:ext cx="1828800" cy="292608"/>
           </a:xfrm>
           <a:prstGeom prst="rect">
@@ -14453,13 +14809,13 @@
             <a:r>
               <a:rPr lang="en-US" sz="1300" b="1" dirty="0">
                 <a:solidFill>
-                  <a:srgbClr val="0F766E"/>
+                  <a:srgbClr val="4C1D95"/>
                 </a:solidFill>
                 <a:latin typeface="Trebuchet MS" pitchFamily="34" charset="0"/>
                 <a:ea typeface="Trebuchet MS" pitchFamily="34" charset="-122"/>
                 <a:cs typeface="Trebuchet MS" pitchFamily="34" charset="-120"/>
               </a:rPr>
-              <a:t>train</a:t>
+              <a:t>re</a:t>
             </a:r>
             <a:endParaRPr lang="en-US" sz="1300" dirty="0"/>
           </a:p>
@@ -14473,7 +14829,7 @@
         </p:nvSpPr>
         <p:spPr>
           <a:xfrm>
-            <a:off x="2938272" y="2569464"/>
+            <a:off x="2221992" y="2569464"/>
             <a:ext cx="1828800" cy="201168"/>
           </a:xfrm>
           <a:prstGeom prst="rect">
@@ -14498,7 +14854,7 @@
                 <a:ea typeface="Calibri" pitchFamily="34" charset="-122"/>
                 <a:cs typeface="Calibri" pitchFamily="34" charset="-120"/>
               </a:rPr>
-              <a:t>to teach or draw along</a:t>
+              <a:t>again</a:t>
             </a:r>
             <a:endParaRPr lang="en-US" sz="850" dirty="0"/>
           </a:p>
@@ -14512,7 +14868,7 @@
         </p:nvSpPr>
         <p:spPr>
           <a:xfrm>
-            <a:off x="5803392" y="2258568"/>
+            <a:off x="4370832" y="2258568"/>
             <a:ext cx="1828800" cy="292608"/>
           </a:xfrm>
           <a:prstGeom prst="rect">
@@ -14521,11 +14877,11 @@
             </a:avLst>
           </a:prstGeom>
           <a:solidFill>
-            <a:srgbClr val="FCE7F3"/>
+            <a:srgbClr val="CCFBF1"/>
           </a:solidFill>
           <a:ln w="19050">
             <a:solidFill>
-              <a:srgbClr val="DB2777"/>
+              <a:srgbClr val="0D9488"/>
             </a:solidFill>
             <a:prstDash val="solid"/>
           </a:ln>
@@ -14546,7 +14902,7 @@
         </p:nvSpPr>
         <p:spPr>
           <a:xfrm>
-            <a:off x="5803392" y="2258568"/>
+            <a:off x="4370832" y="2258568"/>
             <a:ext cx="1828800" cy="292608"/>
           </a:xfrm>
           <a:prstGeom prst="rect">
@@ -14565,13 +14921,13 @@
             <a:r>
               <a:rPr lang="en-US" sz="1300" b="1" dirty="0">
                 <a:solidFill>
-                  <a:srgbClr val="9D174D"/>
+                  <a:srgbClr val="0F766E"/>
                 </a:solidFill>
                 <a:latin typeface="Trebuchet MS" pitchFamily="34" charset="0"/>
                 <a:ea typeface="Trebuchet MS" pitchFamily="34" charset="-122"/>
                 <a:cs typeface="Trebuchet MS" pitchFamily="34" charset="-120"/>
               </a:rPr>
-              <a:t>er</a:t>
+              <a:t>train</a:t>
             </a:r>
             <a:endParaRPr lang="en-US" sz="1300" dirty="0"/>
           </a:p>
@@ -14585,7 +14941,7 @@
         </p:nvSpPr>
         <p:spPr>
           <a:xfrm>
-            <a:off x="5803392" y="2569464"/>
+            <a:off x="4370832" y="2569464"/>
             <a:ext cx="1828800" cy="201168"/>
           </a:xfrm>
           <a:prstGeom prst="rect">
@@ -14610,7 +14966,7 @@
                 <a:ea typeface="Calibri" pitchFamily="34" charset="-122"/>
                 <a:cs typeface="Calibri" pitchFamily="34" charset="-120"/>
               </a:rPr>
-              <a:t>a person who does the action</a:t>
+              <a:t>to practise to improve; to teach</a:t>
             </a:r>
             <a:endParaRPr lang="en-US" sz="850" dirty="0"/>
           </a:p>
@@ -14619,6 +14975,118 @@
       <p:sp>
         <p:nvSpPr>
           <p:cNvPr id="22" name="Shape 20"/>
+          <p:cNvSpPr/>
+          <p:nvPr/>
+        </p:nvSpPr>
+        <p:spPr>
+          <a:xfrm>
+            <a:off x="6519672" y="2258568"/>
+            <a:ext cx="1828800" cy="292608"/>
+          </a:xfrm>
+          <a:prstGeom prst="rect">
+            <a:avLst>
+              <a:gd name="adj" fmla="val 25000"/>
+            </a:avLst>
+          </a:prstGeom>
+          <a:solidFill>
+            <a:srgbClr val="FCE7F3"/>
+          </a:solidFill>
+          <a:ln w="19050">
+            <a:solidFill>
+              <a:srgbClr val="DB2777"/>
+            </a:solidFill>
+            <a:prstDash val="solid"/>
+          </a:ln>
+          <a:effectLst>
+            <a:outerShdw sx="100000" sy="100000" kx="0" ky="0" algn="bl" rotWithShape="0" blurRad="101600" dist="38100" dir="8100000">
+              <a:srgbClr val="000000">
+                <a:alpha val="12000"/>
+              </a:srgbClr>
+            </a:outerShdw>
+          </a:effectLst>
+        </p:spPr>
+      </p:sp>
+      <p:sp>
+        <p:nvSpPr>
+          <p:cNvPr id="23" name="Text 21"/>
+          <p:cNvSpPr/>
+          <p:nvPr/>
+        </p:nvSpPr>
+        <p:spPr>
+          <a:xfrm>
+            <a:off x="6519672" y="2258568"/>
+            <a:ext cx="1828800" cy="292608"/>
+          </a:xfrm>
+          <a:prstGeom prst="rect">
+            <a:avLst/>
+          </a:prstGeom>
+          <a:noFill/>
+          <a:ln/>
+        </p:spPr>
+        <p:txBody>
+          <a:bodyPr wrap="square" lIns="0" tIns="0" rIns="0" bIns="0" rtlCol="0" anchor="ctr"/>
+          <a:lstStyle/>
+          <a:p>
+            <a:pPr algn="ctr" indent="0" marL="0">
+              <a:buNone/>
+            </a:pPr>
+            <a:r>
+              <a:rPr lang="en-US" sz="1300" b="1" dirty="0">
+                <a:solidFill>
+                  <a:srgbClr val="9D174D"/>
+                </a:solidFill>
+                <a:latin typeface="Trebuchet MS" pitchFamily="34" charset="0"/>
+                <a:ea typeface="Trebuchet MS" pitchFamily="34" charset="-122"/>
+                <a:cs typeface="Trebuchet MS" pitchFamily="34" charset="-120"/>
+              </a:rPr>
+              <a:t>ed</a:t>
+            </a:r>
+            <a:endParaRPr lang="en-US" sz="1300" dirty="0"/>
+          </a:p>
+        </p:txBody>
+      </p:sp>
+      <p:sp>
+        <p:nvSpPr>
+          <p:cNvPr id="24" name="Text 22"/>
+          <p:cNvSpPr/>
+          <p:nvPr/>
+        </p:nvSpPr>
+        <p:spPr>
+          <a:xfrm>
+            <a:off x="6519672" y="2569464"/>
+            <a:ext cx="1828800" cy="201168"/>
+          </a:xfrm>
+          <a:prstGeom prst="rect">
+            <a:avLst/>
+          </a:prstGeom>
+          <a:noFill/>
+          <a:ln/>
+        </p:spPr>
+        <p:txBody>
+          <a:bodyPr wrap="square" lIns="0" tIns="0" rIns="0" bIns="0" rtlCol="0" anchor="t"/>
+          <a:lstStyle/>
+          <a:p>
+            <a:pPr algn="ctr" indent="0" marL="0">
+              <a:buNone/>
+            </a:pPr>
+            <a:r>
+              <a:rPr lang="en-US" sz="850" dirty="0">
+                <a:solidFill>
+                  <a:srgbClr val="475569"/>
+                </a:solidFill>
+                <a:latin typeface="Calibri" pitchFamily="34" charset="0"/>
+                <a:ea typeface="Calibri" pitchFamily="34" charset="-122"/>
+                <a:cs typeface="Calibri" pitchFamily="34" charset="-120"/>
+              </a:rPr>
+              <a:t>past tense</a:t>
+            </a:r>
+            <a:endParaRPr lang="en-US" sz="850" dirty="0"/>
+          </a:p>
+        </p:txBody>
+      </p:sp>
+      <p:sp>
+        <p:nvSpPr>
+          <p:cNvPr id="25" name="Shape 23"/>
           <p:cNvSpPr/>
           <p:nvPr/>
         </p:nvSpPr>
@@ -14645,7 +15113,7 @@
       </p:sp>
       <p:sp>
         <p:nvSpPr>
-          <p:cNvPr id="23" name="Text 21"/>
+          <p:cNvPr id="26" name="Text 24"/>
           <p:cNvSpPr/>
           <p:nvPr/>
         </p:nvSpPr>
@@ -14684,7 +15152,7 @@
       </p:sp>
       <p:sp>
         <p:nvSpPr>
-          <p:cNvPr id="24" name="Shape 22"/>
+          <p:cNvPr id="27" name="Shape 25"/>
           <p:cNvSpPr/>
           <p:nvPr/>
         </p:nvSpPr>
@@ -14711,7 +15179,7 @@
       </p:sp>
       <p:sp>
         <p:nvSpPr>
-          <p:cNvPr id="25" name="Shape 23"/>
+          <p:cNvPr id="28" name="Shape 26"/>
           <p:cNvSpPr/>
           <p:nvPr/>
         </p:nvSpPr>
@@ -14738,7 +15206,7 @@
       </p:sp>
       <p:sp>
         <p:nvSpPr>
-          <p:cNvPr id="26" name="Text 24"/>
+          <p:cNvPr id="29" name="Text 27"/>
           <p:cNvSpPr/>
           <p:nvPr/>
         </p:nvSpPr>
@@ -14769,7 +15237,7 @@
                 <a:ea typeface="Trebuchet MS" pitchFamily="34" charset="-122"/>
                 <a:cs typeface="Trebuchet MS" pitchFamily="34" charset="-120"/>
               </a:rPr>
-              <a:t>train</a:t>
+              <a:t>re</a:t>
             </a:r>
             <a:endParaRPr lang="en-US" sz="1400" dirty="0"/>
           </a:p>
@@ -14777,7 +15245,7 @@
       </p:sp>
       <p:sp>
         <p:nvSpPr>
-          <p:cNvPr id="27" name="Text 25"/>
+          <p:cNvPr id="30" name="Text 28"/>
           <p:cNvSpPr/>
           <p:nvPr/>
         </p:nvSpPr>
@@ -14816,7 +15284,7 @@
       </p:sp>
       <p:sp>
         <p:nvSpPr>
-          <p:cNvPr id="28" name="Shape 26"/>
+          <p:cNvPr id="31" name="Shape 29"/>
           <p:cNvSpPr/>
           <p:nvPr/>
         </p:nvSpPr>
@@ -14843,7 +15311,7 @@
       </p:sp>
       <p:sp>
         <p:nvSpPr>
-          <p:cNvPr id="29" name="Text 27"/>
+          <p:cNvPr id="32" name="Text 30"/>
           <p:cNvSpPr/>
           <p:nvPr/>
         </p:nvSpPr>
@@ -14874,7 +15342,7 @@
                 <a:ea typeface="Trebuchet MS" pitchFamily="34" charset="-122"/>
                 <a:cs typeface="Trebuchet MS" pitchFamily="34" charset="-120"/>
               </a:rPr>
-              <a:t>er</a:t>
+              <a:t>trained</a:t>
             </a:r>
             <a:endParaRPr lang="en-US" sz="1400" dirty="0"/>
           </a:p>
@@ -14882,7 +15350,7 @@
       </p:sp>
       <p:sp>
         <p:nvSpPr>
-          <p:cNvPr id="30" name="Shape 28"/>
+          <p:cNvPr id="33" name="Shape 31"/>
           <p:cNvSpPr/>
           <p:nvPr/>
         </p:nvSpPr>
@@ -14909,7 +15377,7 @@
       </p:sp>
       <p:sp>
         <p:nvSpPr>
-          <p:cNvPr id="31" name="Text 29"/>
+          <p:cNvPr id="34" name="Text 32"/>
           <p:cNvSpPr/>
           <p:nvPr/>
         </p:nvSpPr>
@@ -14948,7 +15416,7 @@
       </p:sp>
       <p:sp>
         <p:nvSpPr>
-          <p:cNvPr id="32" name="Shape 30"/>
+          <p:cNvPr id="35" name="Shape 33"/>
           <p:cNvSpPr/>
           <p:nvPr/>
         </p:nvSpPr>
@@ -14975,13 +15443,13 @@
       </p:sp>
       <p:sp>
         <p:nvSpPr>
-          <p:cNvPr id="33" name="Shape 31"/>
-          <p:cNvSpPr/>
-          <p:nvPr/>
-        </p:nvSpPr>
-        <p:spPr>
-          <a:xfrm>
-            <a:off x="2670048" y="4169664"/>
+          <p:cNvPr id="36" name="Shape 34"/>
+          <p:cNvSpPr/>
+          <p:nvPr/>
+        </p:nvSpPr>
+        <p:spPr>
+          <a:xfrm>
+            <a:off x="2023872" y="4169664"/>
             <a:ext cx="685800" cy="475488"/>
           </a:xfrm>
           <a:prstGeom prst="rect">
@@ -15002,13 +15470,13 @@
       </p:sp>
       <p:sp>
         <p:nvSpPr>
-          <p:cNvPr id="34" name="Text 32"/>
-          <p:cNvSpPr/>
-          <p:nvPr/>
-        </p:nvSpPr>
-        <p:spPr>
-          <a:xfrm>
-            <a:off x="2670048" y="4169664"/>
+          <p:cNvPr id="37" name="Text 35"/>
+          <p:cNvSpPr/>
+          <p:nvPr/>
+        </p:nvSpPr>
+        <p:spPr>
+          <a:xfrm>
+            <a:off x="2023872" y="4169664"/>
             <a:ext cx="685800" cy="475488"/>
           </a:xfrm>
           <a:prstGeom prst="rect">
@@ -15033,7 +15501,7 @@
                 <a:ea typeface="Trebuchet MS" pitchFamily="34" charset="-122"/>
                 <a:cs typeface="Trebuchet MS" pitchFamily="34" charset="-120"/>
               </a:rPr>
-              <a:t>tr</a:t>
+              <a:t>r</a:t>
             </a:r>
             <a:endParaRPr lang="en-US" sz="900" dirty="0"/>
           </a:p>
@@ -15041,13 +15509,13 @@
       </p:sp>
       <p:sp>
         <p:nvSpPr>
-          <p:cNvPr id="35" name="Shape 33"/>
-          <p:cNvSpPr/>
-          <p:nvPr/>
-        </p:nvSpPr>
-        <p:spPr>
-          <a:xfrm>
-            <a:off x="4123944" y="4169664"/>
+          <p:cNvPr id="38" name="Shape 36"/>
+          <p:cNvSpPr/>
+          <p:nvPr/>
+        </p:nvSpPr>
+        <p:spPr>
+          <a:xfrm>
+            <a:off x="2831592" y="4169664"/>
             <a:ext cx="685800" cy="475488"/>
           </a:xfrm>
           <a:prstGeom prst="rect">
@@ -15068,13 +15536,13 @@
       </p:sp>
       <p:sp>
         <p:nvSpPr>
-          <p:cNvPr id="36" name="Text 34"/>
-          <p:cNvSpPr/>
-          <p:nvPr/>
-        </p:nvSpPr>
-        <p:spPr>
-          <a:xfrm>
-            <a:off x="4123944" y="4169664"/>
+          <p:cNvPr id="39" name="Text 37"/>
+          <p:cNvSpPr/>
+          <p:nvPr/>
+        </p:nvSpPr>
+        <p:spPr>
+          <a:xfrm>
+            <a:off x="2831592" y="4169664"/>
             <a:ext cx="685800" cy="475488"/>
           </a:xfrm>
           <a:prstGeom prst="rect">
@@ -15099,7 +15567,7 @@
                 <a:ea typeface="Trebuchet MS" pitchFamily="34" charset="-122"/>
                 <a:cs typeface="Trebuchet MS" pitchFamily="34" charset="-120"/>
               </a:rPr>
-              <a:t>ai</a:t>
+              <a:t>e</a:t>
             </a:r>
             <a:endParaRPr lang="en-US" sz="900" dirty="0"/>
           </a:p>
@@ -15107,13 +15575,13 @@
       </p:sp>
       <p:sp>
         <p:nvSpPr>
-          <p:cNvPr id="37" name="Shape 35"/>
-          <p:cNvSpPr/>
-          <p:nvPr/>
-        </p:nvSpPr>
-        <p:spPr>
-          <a:xfrm>
-            <a:off x="5577840" y="4169664"/>
+          <p:cNvPr id="40" name="Shape 38"/>
+          <p:cNvSpPr/>
+          <p:nvPr/>
+        </p:nvSpPr>
+        <p:spPr>
+          <a:xfrm>
+            <a:off x="3639312" y="4169664"/>
             <a:ext cx="685800" cy="475488"/>
           </a:xfrm>
           <a:prstGeom prst="rect">
@@ -15134,13 +15602,13 @@
       </p:sp>
       <p:sp>
         <p:nvSpPr>
-          <p:cNvPr id="38" name="Text 36"/>
-          <p:cNvSpPr/>
-          <p:nvPr/>
-        </p:nvSpPr>
-        <p:spPr>
-          <a:xfrm>
-            <a:off x="5577840" y="4169664"/>
+          <p:cNvPr id="41" name="Text 39"/>
+          <p:cNvSpPr/>
+          <p:nvPr/>
+        </p:nvSpPr>
+        <p:spPr>
+          <a:xfrm>
+            <a:off x="3639312" y="4169664"/>
             <a:ext cx="685800" cy="475488"/>
           </a:xfrm>
           <a:prstGeom prst="rect">
@@ -15165,7 +15633,7 @@
                 <a:ea typeface="Trebuchet MS" pitchFamily="34" charset="-122"/>
                 <a:cs typeface="Trebuchet MS" pitchFamily="34" charset="-120"/>
               </a:rPr>
-              <a:t>n</a:t>
+              <a:t>t</a:t>
             </a:r>
             <a:endParaRPr lang="en-US" sz="900" dirty="0"/>
           </a:p>
@@ -15173,13 +15641,13 @@
       </p:sp>
       <p:sp>
         <p:nvSpPr>
-          <p:cNvPr id="39" name="Shape 37"/>
-          <p:cNvSpPr/>
-          <p:nvPr/>
-        </p:nvSpPr>
-        <p:spPr>
-          <a:xfrm>
-            <a:off x="7031736" y="4169664"/>
+          <p:cNvPr id="42" name="Shape 40"/>
+          <p:cNvSpPr/>
+          <p:nvPr/>
+        </p:nvSpPr>
+        <p:spPr>
+          <a:xfrm>
+            <a:off x="4447032" y="4169664"/>
             <a:ext cx="685800" cy="475488"/>
           </a:xfrm>
           <a:prstGeom prst="rect">
@@ -15200,13 +15668,13 @@
       </p:sp>
       <p:sp>
         <p:nvSpPr>
-          <p:cNvPr id="40" name="Text 38"/>
-          <p:cNvSpPr/>
-          <p:nvPr/>
-        </p:nvSpPr>
-        <p:spPr>
-          <a:xfrm>
-            <a:off x="7031736" y="4169664"/>
+          <p:cNvPr id="43" name="Text 41"/>
+          <p:cNvSpPr/>
+          <p:nvPr/>
+        </p:nvSpPr>
+        <p:spPr>
+          <a:xfrm>
+            <a:off x="4447032" y="4169664"/>
             <a:ext cx="685800" cy="475488"/>
           </a:xfrm>
           <a:prstGeom prst="rect">
@@ -15231,7 +15699,271 @@
                 <a:ea typeface="Trebuchet MS" pitchFamily="34" charset="-122"/>
                 <a:cs typeface="Trebuchet MS" pitchFamily="34" charset="-120"/>
               </a:rPr>
-              <a:t>er</a:t>
+              <a:t>r</a:t>
+            </a:r>
+            <a:endParaRPr lang="en-US" sz="900" dirty="0"/>
+          </a:p>
+        </p:txBody>
+      </p:sp>
+      <p:sp>
+        <p:nvSpPr>
+          <p:cNvPr id="44" name="Shape 42"/>
+          <p:cNvSpPr/>
+          <p:nvPr/>
+        </p:nvSpPr>
+        <p:spPr>
+          <a:xfrm>
+            <a:off x="5254752" y="4169664"/>
+            <a:ext cx="685800" cy="475488"/>
+          </a:xfrm>
+          <a:prstGeom prst="rect">
+            <a:avLst>
+              <a:gd name="adj" fmla="val 7692"/>
+            </a:avLst>
+          </a:prstGeom>
+          <a:solidFill>
+            <a:srgbClr val="FFFFFF"/>
+          </a:solidFill>
+          <a:ln w="12700">
+            <a:solidFill>
+              <a:srgbClr val="DB2777"/>
+            </a:solidFill>
+            <a:prstDash val="solid"/>
+          </a:ln>
+        </p:spPr>
+      </p:sp>
+      <p:sp>
+        <p:nvSpPr>
+          <p:cNvPr id="45" name="Text 43"/>
+          <p:cNvSpPr/>
+          <p:nvPr/>
+        </p:nvSpPr>
+        <p:spPr>
+          <a:xfrm>
+            <a:off x="5254752" y="4169664"/>
+            <a:ext cx="685800" cy="475488"/>
+          </a:xfrm>
+          <a:prstGeom prst="rect">
+            <a:avLst/>
+          </a:prstGeom>
+          <a:noFill/>
+          <a:ln/>
+        </p:spPr>
+        <p:txBody>
+          <a:bodyPr wrap="square" lIns="0" tIns="0" rIns="0" bIns="0" rtlCol="0" anchor="ctr"/>
+          <a:lstStyle/>
+          <a:p>
+            <a:pPr algn="ctr" indent="0" marL="0">
+              <a:buNone/>
+            </a:pPr>
+            <a:r>
+              <a:rPr lang="en-US" sz="900" b="1" dirty="0">
+                <a:solidFill>
+                  <a:srgbClr val="9D174D"/>
+                </a:solidFill>
+                <a:latin typeface="Trebuchet MS" pitchFamily="34" charset="0"/>
+                <a:ea typeface="Trebuchet MS" pitchFamily="34" charset="-122"/>
+                <a:cs typeface="Trebuchet MS" pitchFamily="34" charset="-120"/>
+              </a:rPr>
+              <a:t>ai</a:t>
+            </a:r>
+            <a:endParaRPr lang="en-US" sz="900" dirty="0"/>
+          </a:p>
+        </p:txBody>
+      </p:sp>
+      <p:sp>
+        <p:nvSpPr>
+          <p:cNvPr id="46" name="Shape 44"/>
+          <p:cNvSpPr/>
+          <p:nvPr/>
+        </p:nvSpPr>
+        <p:spPr>
+          <a:xfrm>
+            <a:off x="6062472" y="4169664"/>
+            <a:ext cx="685800" cy="475488"/>
+          </a:xfrm>
+          <a:prstGeom prst="rect">
+            <a:avLst>
+              <a:gd name="adj" fmla="val 7692"/>
+            </a:avLst>
+          </a:prstGeom>
+          <a:solidFill>
+            <a:srgbClr val="FFFFFF"/>
+          </a:solidFill>
+          <a:ln w="12700">
+            <a:solidFill>
+              <a:srgbClr val="DB2777"/>
+            </a:solidFill>
+            <a:prstDash val="solid"/>
+          </a:ln>
+        </p:spPr>
+      </p:sp>
+      <p:sp>
+        <p:nvSpPr>
+          <p:cNvPr id="47" name="Text 45"/>
+          <p:cNvSpPr/>
+          <p:nvPr/>
+        </p:nvSpPr>
+        <p:spPr>
+          <a:xfrm>
+            <a:off x="6062472" y="4169664"/>
+            <a:ext cx="685800" cy="475488"/>
+          </a:xfrm>
+          <a:prstGeom prst="rect">
+            <a:avLst/>
+          </a:prstGeom>
+          <a:noFill/>
+          <a:ln/>
+        </p:spPr>
+        <p:txBody>
+          <a:bodyPr wrap="square" lIns="0" tIns="0" rIns="0" bIns="0" rtlCol="0" anchor="ctr"/>
+          <a:lstStyle/>
+          <a:p>
+            <a:pPr algn="ctr" indent="0" marL="0">
+              <a:buNone/>
+            </a:pPr>
+            <a:r>
+              <a:rPr lang="en-US" sz="900" b="1" dirty="0">
+                <a:solidFill>
+                  <a:srgbClr val="9D174D"/>
+                </a:solidFill>
+                <a:latin typeface="Trebuchet MS" pitchFamily="34" charset="0"/>
+                <a:ea typeface="Trebuchet MS" pitchFamily="34" charset="-122"/>
+                <a:cs typeface="Trebuchet MS" pitchFamily="34" charset="-120"/>
+              </a:rPr>
+              <a:t>n</a:t>
+            </a:r>
+            <a:endParaRPr lang="en-US" sz="900" dirty="0"/>
+          </a:p>
+        </p:txBody>
+      </p:sp>
+      <p:sp>
+        <p:nvSpPr>
+          <p:cNvPr id="48" name="Shape 46"/>
+          <p:cNvSpPr/>
+          <p:nvPr/>
+        </p:nvSpPr>
+        <p:spPr>
+          <a:xfrm>
+            <a:off x="6870192" y="4169664"/>
+            <a:ext cx="685800" cy="475488"/>
+          </a:xfrm>
+          <a:prstGeom prst="rect">
+            <a:avLst>
+              <a:gd name="adj" fmla="val 7692"/>
+            </a:avLst>
+          </a:prstGeom>
+          <a:solidFill>
+            <a:srgbClr val="FFFFFF"/>
+          </a:solidFill>
+          <a:ln w="12700">
+            <a:solidFill>
+              <a:srgbClr val="DB2777"/>
+            </a:solidFill>
+            <a:prstDash val="solid"/>
+          </a:ln>
+        </p:spPr>
+      </p:sp>
+      <p:sp>
+        <p:nvSpPr>
+          <p:cNvPr id="49" name="Text 47"/>
+          <p:cNvSpPr/>
+          <p:nvPr/>
+        </p:nvSpPr>
+        <p:spPr>
+          <a:xfrm>
+            <a:off x="6870192" y="4169664"/>
+            <a:ext cx="685800" cy="475488"/>
+          </a:xfrm>
+          <a:prstGeom prst="rect">
+            <a:avLst/>
+          </a:prstGeom>
+          <a:noFill/>
+          <a:ln/>
+        </p:spPr>
+        <p:txBody>
+          <a:bodyPr wrap="square" lIns="0" tIns="0" rIns="0" bIns="0" rtlCol="0" anchor="ctr"/>
+          <a:lstStyle/>
+          <a:p>
+            <a:pPr algn="ctr" indent="0" marL="0">
+              <a:buNone/>
+            </a:pPr>
+            <a:r>
+              <a:rPr lang="en-US" sz="900" b="1" dirty="0">
+                <a:solidFill>
+                  <a:srgbClr val="9D174D"/>
+                </a:solidFill>
+                <a:latin typeface="Trebuchet MS" pitchFamily="34" charset="0"/>
+                <a:ea typeface="Trebuchet MS" pitchFamily="34" charset="-122"/>
+                <a:cs typeface="Trebuchet MS" pitchFamily="34" charset="-120"/>
+              </a:rPr>
+              <a:t>e</a:t>
+            </a:r>
+            <a:endParaRPr lang="en-US" sz="900" dirty="0"/>
+          </a:p>
+        </p:txBody>
+      </p:sp>
+      <p:sp>
+        <p:nvSpPr>
+          <p:cNvPr id="50" name="Shape 48"/>
+          <p:cNvSpPr/>
+          <p:nvPr/>
+        </p:nvSpPr>
+        <p:spPr>
+          <a:xfrm>
+            <a:off x="7677912" y="4169664"/>
+            <a:ext cx="685800" cy="475488"/>
+          </a:xfrm>
+          <a:prstGeom prst="rect">
+            <a:avLst>
+              <a:gd name="adj" fmla="val 7692"/>
+            </a:avLst>
+          </a:prstGeom>
+          <a:solidFill>
+            <a:srgbClr val="FFFFFF"/>
+          </a:solidFill>
+          <a:ln w="12700">
+            <a:solidFill>
+              <a:srgbClr val="DB2777"/>
+            </a:solidFill>
+            <a:prstDash val="solid"/>
+          </a:ln>
+        </p:spPr>
+      </p:sp>
+      <p:sp>
+        <p:nvSpPr>
+          <p:cNvPr id="51" name="Text 49"/>
+          <p:cNvSpPr/>
+          <p:nvPr/>
+        </p:nvSpPr>
+        <p:spPr>
+          <a:xfrm>
+            <a:off x="7677912" y="4169664"/>
+            <a:ext cx="685800" cy="475488"/>
+          </a:xfrm>
+          <a:prstGeom prst="rect">
+            <a:avLst/>
+          </a:prstGeom>
+          <a:noFill/>
+          <a:ln/>
+        </p:spPr>
+        <p:txBody>
+          <a:bodyPr wrap="square" lIns="0" tIns="0" rIns="0" bIns="0" rtlCol="0" anchor="ctr"/>
+          <a:lstStyle/>
+          <a:p>
+            <a:pPr algn="ctr" indent="0" marL="0">
+              <a:buNone/>
+            </a:pPr>
+            <a:r>
+              <a:rPr lang="en-US" sz="900" b="1" dirty="0">
+                <a:solidFill>
+                  <a:srgbClr val="9D174D"/>
+                </a:solidFill>
+                <a:latin typeface="Trebuchet MS" pitchFamily="34" charset="0"/>
+                <a:ea typeface="Trebuchet MS" pitchFamily="34" charset="-122"/>
+                <a:cs typeface="Trebuchet MS" pitchFamily="34" charset="-120"/>
+              </a:rPr>
+              <a:t>d</a:t>
             </a:r>
             <a:endParaRPr lang="en-US" sz="900" dirty="0"/>
           </a:p>
@@ -15805,7 +16537,7 @@
                 <a:ea typeface="Calibri" pitchFamily="34" charset="-122"/>
                 <a:cs typeface="Calibri" pitchFamily="34" charset="-120"/>
               </a:rPr>
-              <a:t>Word Labs  •  wordlabs.app  •  Root: 'train' = to teach or draw along</a:t>
+              <a:t>Word Labs  •  wordlabs.app  •  Root: 'train' = to practise to improve; to teach</a:t>
             </a:r>
             <a:endParaRPr lang="en-US" sz="800" dirty="0"/>
           </a:p>
@@ -16139,7 +16871,7 @@
                 <a:ea typeface="Trebuchet MS" pitchFamily="34" charset="-122"/>
                 <a:cs typeface="Trebuchet MS" pitchFamily="34" charset="-120"/>
               </a:rPr>
-              <a:t>1</a:t>
+              <a:t>0</a:t>
             </a:r>
             <a:pPr algn="ctr" indent="0" marL="0">
               <a:buNone/>
@@ -16445,7 +17177,7 @@
                 <a:ea typeface="Calibri" pitchFamily="34" charset="-122"/>
                 <a:cs typeface="Calibri" pitchFamily="34" charset="-120"/>
               </a:rPr>
-              <a:t>Word Labs  •  wordlabs.app  •  Root: 'train' = to teach or draw along</a:t>
+              <a:t>Word Labs  •  wordlabs.app  •  Root: 'train' = to practise to improve; to teach</a:t>
             </a:r>
             <a:endParaRPr lang="en-US" sz="800" dirty="0"/>
           </a:p>
@@ -16557,7 +17289,7 @@
                 <a:ea typeface="Calibri" pitchFamily="34" charset="-122"/>
                 <a:cs typeface="Calibri" pitchFamily="34" charset="-120"/>
               </a:rPr>
-              <a:t>The coach used </a:t>
+              <a:t>The factory workers needed </a:t>
             </a:r>
             <a:pPr algn="l" indent="0" marL="0">
               <a:buNone/>
@@ -16588,7 +17320,7 @@
                 <a:ea typeface="Calibri" pitchFamily="34" charset="-122"/>
                 <a:cs typeface="Calibri" pitchFamily="34" charset="-120"/>
               </a:rPr>
-              <a:t> to help players overcome the </a:t>
+              <a:t> to use the new machines. The </a:t>
             </a:r>
             <a:pPr algn="l" indent="0" marL="0">
               <a:buNone/>
@@ -16605,7 +17337,7 @@
                 <a:ea typeface="Calibri" pitchFamily="34" charset="-122"/>
                 <a:cs typeface="Calibri" pitchFamily="34" charset="-120"/>
               </a:rPr>
-              <a:t>constraint</a:t>
+              <a:t>trainee</a:t>
             </a:r>
             <a:pPr algn="l" indent="0" marL="0">
               <a:buNone/>
@@ -16619,7 +17351,7 @@
                 <a:ea typeface="Calibri" pitchFamily="34" charset="-122"/>
                 <a:cs typeface="Calibri" pitchFamily="34" charset="-120"/>
               </a:rPr>
-              <a:t> of bad habits, which required real </a:t>
+              <a:t> nurse shadowed a senior doctor during her first week. The </a:t>
             </a:r>
             <a:pPr algn="l" indent="0" marL="0">
               <a:buNone/>
@@ -16636,7 +17368,7 @@
                 <a:ea typeface="Calibri" pitchFamily="34" charset="-122"/>
                 <a:cs typeface="Calibri" pitchFamily="34" charset="-120"/>
               </a:rPr>
-              <a:t>restraint</a:t>
+              <a:t>trainees</a:t>
             </a:r>
             <a:pPr algn="l" indent="0" marL="0">
               <a:buNone/>
@@ -16650,7 +17382,7 @@
                 <a:ea typeface="Calibri" pitchFamily="34" charset="-122"/>
                 <a:cs typeface="Calibri" pitchFamily="34" charset="-120"/>
               </a:rPr>
-              <a:t>.</a:t>
+              <a:t> practised their new skills under close supervision.</a:t>
             </a:r>
             <a:endParaRPr lang="en-US" sz="1800" dirty="0"/>
           </a:p>
@@ -16933,7 +17665,7 @@
                 <a:ea typeface="Trebuchet MS" pitchFamily="34" charset="-122"/>
                 <a:cs typeface="Trebuchet MS" pitchFamily="34" charset="-120"/>
               </a:rPr>
-              <a:t>constraint</a:t>
+              <a:t>trainee</a:t>
             </a:r>
             <a:endParaRPr lang="en-US" sz="1400" dirty="0"/>
           </a:p>
@@ -17061,7 +17793,7 @@
                 <a:ea typeface="Trebuchet MS" pitchFamily="34" charset="-122"/>
                 <a:cs typeface="Trebuchet MS" pitchFamily="34" charset="-120"/>
               </a:rPr>
-              <a:t>restraint</a:t>
+              <a:t>trainees</a:t>
             </a:r>
             <a:endParaRPr lang="en-US" sz="1400" dirty="0"/>
           </a:p>
@@ -17392,7 +18124,7 @@
                 <a:ea typeface="Calibri" pitchFamily="34" charset="-122"/>
                 <a:cs typeface="Calibri" pitchFamily="34" charset="-120"/>
               </a:rPr>
-              <a:t>Word Labs  •  wordlabs.app  •  Root: 'train' = to teach or draw along</a:t>
+              <a:t>Word Labs  •  wordlabs.app  •  Root: 'train' = to practise to improve; to teach</a:t>
             </a:r>
             <a:endParaRPr lang="en-US" sz="800" dirty="0"/>
           </a:p>
@@ -18219,7 +18951,7 @@
                 <a:ea typeface="Calibri" pitchFamily="34" charset="-122"/>
                 <a:cs typeface="Calibri" pitchFamily="34" charset="-120"/>
               </a:rPr>
-              <a:t>Word Labs  •  wordlabs.app  •  Root: 'train' = to teach or draw along</a:t>
+              <a:t>Word Labs  •  wordlabs.app  •  Root: 'train' = to practise to improve; to teach</a:t>
             </a:r>
             <a:endParaRPr lang="en-US" sz="800" dirty="0"/>
           </a:p>
@@ -18648,7 +19380,7 @@
                 <a:ea typeface="Calibri" pitchFamily="34" charset="-122"/>
                 <a:cs typeface="Calibri" pitchFamily="34" charset="-120"/>
               </a:rPr>
-              <a:t>to teach or draw along</a:t>
+              <a:t>to practise to improve; to teach</a:t>
             </a:r>
             <a:endParaRPr lang="en-US" sz="850" dirty="0"/>
           </a:p>
@@ -18760,7 +19492,7 @@
                 <a:ea typeface="Calibri" pitchFamily="34" charset="-122"/>
                 <a:cs typeface="Calibri" pitchFamily="34" charset="-120"/>
               </a:rPr>
-              <a:t>action happening now</a:t>
+              <a:t>happening now</a:t>
             </a:r>
             <a:endParaRPr lang="en-US" sz="850" dirty="0"/>
           </a:p>
@@ -19316,7 +20048,7 @@
                 <a:ea typeface="Calibri" pitchFamily="34" charset="-122"/>
                 <a:cs typeface="Calibri" pitchFamily="34" charset="-120"/>
               </a:rPr>
-              <a:t>Word Labs  •  wordlabs.app  •  Root: 'train' = to teach or draw along</a:t>
+              <a:t>Word Labs  •  wordlabs.app  •  Root: 'train' = to practise to improve; to teach</a:t>
             </a:r>
             <a:endParaRPr lang="en-US" sz="800" dirty="0"/>
           </a:p>
@@ -19745,7 +20477,7 @@
                 <a:ea typeface="Calibri" pitchFamily="34" charset="-122"/>
                 <a:cs typeface="Calibri" pitchFamily="34" charset="-120"/>
               </a:rPr>
-              <a:t>to teach or draw along</a:t>
+              <a:t>to practise to improve; to teach</a:t>
             </a:r>
             <a:endParaRPr lang="en-US" sz="850" dirty="0"/>
           </a:p>
@@ -19857,7 +20589,7 @@
                 <a:ea typeface="Calibri" pitchFamily="34" charset="-122"/>
                 <a:cs typeface="Calibri" pitchFamily="34" charset="-120"/>
               </a:rPr>
-              <a:t>action happening now</a:t>
+              <a:t>happening now</a:t>
             </a:r>
             <a:endParaRPr lang="en-US" sz="850" dirty="0"/>
           </a:p>
@@ -20650,7 +21382,7 @@
                 <a:ea typeface="Calibri" pitchFamily="34" charset="-122"/>
                 <a:cs typeface="Calibri" pitchFamily="34" charset="-120"/>
               </a:rPr>
-              <a:t>Word Labs  •  wordlabs.app  •  Root: 'train' = to teach or draw along</a:t>
+              <a:t>Word Labs  •  wordlabs.app  •  Root: 'train' = to practise to improve; to teach</a:t>
             </a:r>
             <a:endParaRPr lang="en-US" sz="800" dirty="0"/>
           </a:p>
@@ -21079,7 +21811,7 @@
                 <a:ea typeface="Calibri" pitchFamily="34" charset="-122"/>
                 <a:cs typeface="Calibri" pitchFamily="34" charset="-120"/>
               </a:rPr>
-              <a:t>to teach or draw along</a:t>
+              <a:t>to practise to improve; to teach</a:t>
             </a:r>
             <a:endParaRPr lang="en-US" sz="850" dirty="0"/>
           </a:p>
@@ -21191,7 +21923,7 @@
                 <a:ea typeface="Calibri" pitchFamily="34" charset="-122"/>
                 <a:cs typeface="Calibri" pitchFamily="34" charset="-120"/>
               </a:rPr>
-              <a:t>action happening now</a:t>
+              <a:t>happening now</a:t>
             </a:r>
             <a:endParaRPr lang="en-US" sz="850" dirty="0"/>
           </a:p>
@@ -21667,7 +22399,7 @@
         </p:nvSpPr>
         <p:spPr>
           <a:xfrm>
-            <a:off x="2254649" y="4169664"/>
+            <a:off x="2023872" y="4169664"/>
             <a:ext cx="685800" cy="475488"/>
           </a:xfrm>
           <a:prstGeom prst="rect">
@@ -21694,7 +22426,7 @@
         </p:nvSpPr>
         <p:spPr>
           <a:xfrm>
-            <a:off x="2254649" y="4169664"/>
+            <a:off x="2023872" y="4169664"/>
             <a:ext cx="685800" cy="475488"/>
           </a:xfrm>
           <a:prstGeom prst="rect">
@@ -21733,7 +22465,7 @@
         </p:nvSpPr>
         <p:spPr>
           <a:xfrm>
-            <a:off x="3293146" y="4169664"/>
+            <a:off x="2831592" y="4169664"/>
             <a:ext cx="685800" cy="475488"/>
           </a:xfrm>
           <a:prstGeom prst="rect">
@@ -21760,7 +22492,7 @@
         </p:nvSpPr>
         <p:spPr>
           <a:xfrm>
-            <a:off x="3293146" y="4169664"/>
+            <a:off x="2831592" y="4169664"/>
             <a:ext cx="685800" cy="475488"/>
           </a:xfrm>
           <a:prstGeom prst="rect">
@@ -21799,7 +22531,7 @@
         </p:nvSpPr>
         <p:spPr>
           <a:xfrm>
-            <a:off x="4331643" y="4169664"/>
+            <a:off x="3639312" y="4169664"/>
             <a:ext cx="685800" cy="475488"/>
           </a:xfrm>
           <a:prstGeom prst="rect">
@@ -21826,7 +22558,7 @@
         </p:nvSpPr>
         <p:spPr>
           <a:xfrm>
-            <a:off x="4331643" y="4169664"/>
+            <a:off x="3639312" y="4169664"/>
             <a:ext cx="685800" cy="475488"/>
           </a:xfrm>
           <a:prstGeom prst="rect">
@@ -21851,7 +22583,7 @@
                 <a:ea typeface="Trebuchet MS" pitchFamily="34" charset="-122"/>
                 <a:cs typeface="Trebuchet MS" pitchFamily="34" charset="-120"/>
               </a:rPr>
-              <a:t>tr</a:t>
+              <a:t>t</a:t>
             </a:r>
             <a:endParaRPr lang="en-US" sz="900" dirty="0"/>
           </a:p>
@@ -21865,7 +22597,7 @@
         </p:nvSpPr>
         <p:spPr>
           <a:xfrm>
-            <a:off x="5370141" y="4169664"/>
+            <a:off x="4447032" y="4169664"/>
             <a:ext cx="685800" cy="475488"/>
           </a:xfrm>
           <a:prstGeom prst="rect">
@@ -21892,7 +22624,7 @@
         </p:nvSpPr>
         <p:spPr>
           <a:xfrm>
-            <a:off x="5370141" y="4169664"/>
+            <a:off x="4447032" y="4169664"/>
             <a:ext cx="685800" cy="475488"/>
           </a:xfrm>
           <a:prstGeom prst="rect">
@@ -21917,7 +22649,7 @@
                 <a:ea typeface="Trebuchet MS" pitchFamily="34" charset="-122"/>
                 <a:cs typeface="Trebuchet MS" pitchFamily="34" charset="-120"/>
               </a:rPr>
-              <a:t>ai</a:t>
+              <a:t>r</a:t>
             </a:r>
             <a:endParaRPr lang="en-US" sz="900" dirty="0"/>
           </a:p>
@@ -21931,7 +22663,7 @@
         </p:nvSpPr>
         <p:spPr>
           <a:xfrm>
-            <a:off x="6408638" y="4169664"/>
+            <a:off x="5254752" y="4169664"/>
             <a:ext cx="685800" cy="475488"/>
           </a:xfrm>
           <a:prstGeom prst="rect">
@@ -21958,7 +22690,7 @@
         </p:nvSpPr>
         <p:spPr>
           <a:xfrm>
-            <a:off x="6408638" y="4169664"/>
+            <a:off x="5254752" y="4169664"/>
             <a:ext cx="685800" cy="475488"/>
           </a:xfrm>
           <a:prstGeom prst="rect">
@@ -21983,7 +22715,7 @@
                 <a:ea typeface="Trebuchet MS" pitchFamily="34" charset="-122"/>
                 <a:cs typeface="Trebuchet MS" pitchFamily="34" charset="-120"/>
               </a:rPr>
-              <a:t>n</a:t>
+              <a:t>ai</a:t>
             </a:r>
             <a:endParaRPr lang="en-US" sz="900" dirty="0"/>
           </a:p>
@@ -21997,7 +22729,7 @@
         </p:nvSpPr>
         <p:spPr>
           <a:xfrm>
-            <a:off x="7447135" y="4169664"/>
+            <a:off x="6062472" y="4169664"/>
             <a:ext cx="685800" cy="475488"/>
           </a:xfrm>
           <a:prstGeom prst="rect">
@@ -22024,7 +22756,7 @@
         </p:nvSpPr>
         <p:spPr>
           <a:xfrm>
-            <a:off x="7447135" y="4169664"/>
+            <a:off x="6062472" y="4169664"/>
             <a:ext cx="685800" cy="475488"/>
           </a:xfrm>
           <a:prstGeom prst="rect">
@@ -22049,7 +22781,139 @@
                 <a:ea typeface="Trebuchet MS" pitchFamily="34" charset="-122"/>
                 <a:cs typeface="Trebuchet MS" pitchFamily="34" charset="-120"/>
               </a:rPr>
-              <a:t>ing</a:t>
+              <a:t>n</a:t>
+            </a:r>
+            <a:endParaRPr lang="en-US" sz="900" dirty="0"/>
+          </a:p>
+        </p:txBody>
+      </p:sp>
+      <p:sp>
+        <p:nvSpPr>
+          <p:cNvPr id="51" name="Shape 49"/>
+          <p:cNvSpPr/>
+          <p:nvPr/>
+        </p:nvSpPr>
+        <p:spPr>
+          <a:xfrm>
+            <a:off x="6870192" y="4169664"/>
+            <a:ext cx="685800" cy="475488"/>
+          </a:xfrm>
+          <a:prstGeom prst="rect">
+            <a:avLst>
+              <a:gd name="adj" fmla="val 7692"/>
+            </a:avLst>
+          </a:prstGeom>
+          <a:solidFill>
+            <a:srgbClr val="FFFFFF"/>
+          </a:solidFill>
+          <a:ln w="12700">
+            <a:solidFill>
+              <a:srgbClr val="DB2777"/>
+            </a:solidFill>
+            <a:prstDash val="solid"/>
+          </a:ln>
+        </p:spPr>
+      </p:sp>
+      <p:sp>
+        <p:nvSpPr>
+          <p:cNvPr id="52" name="Text 50"/>
+          <p:cNvSpPr/>
+          <p:nvPr/>
+        </p:nvSpPr>
+        <p:spPr>
+          <a:xfrm>
+            <a:off x="6870192" y="4169664"/>
+            <a:ext cx="685800" cy="475488"/>
+          </a:xfrm>
+          <a:prstGeom prst="rect">
+            <a:avLst/>
+          </a:prstGeom>
+          <a:noFill/>
+          <a:ln/>
+        </p:spPr>
+        <p:txBody>
+          <a:bodyPr wrap="square" lIns="0" tIns="0" rIns="0" bIns="0" rtlCol="0" anchor="ctr"/>
+          <a:lstStyle/>
+          <a:p>
+            <a:pPr algn="ctr" indent="0" marL="0">
+              <a:buNone/>
+            </a:pPr>
+            <a:r>
+              <a:rPr lang="en-US" sz="900" b="1" dirty="0">
+                <a:solidFill>
+                  <a:srgbClr val="9D174D"/>
+                </a:solidFill>
+                <a:latin typeface="Trebuchet MS" pitchFamily="34" charset="0"/>
+                <a:ea typeface="Trebuchet MS" pitchFamily="34" charset="-122"/>
+                <a:cs typeface="Trebuchet MS" pitchFamily="34" charset="-120"/>
+              </a:rPr>
+              <a:t>i</a:t>
+            </a:r>
+            <a:endParaRPr lang="en-US" sz="900" dirty="0"/>
+          </a:p>
+        </p:txBody>
+      </p:sp>
+      <p:sp>
+        <p:nvSpPr>
+          <p:cNvPr id="53" name="Shape 51"/>
+          <p:cNvSpPr/>
+          <p:nvPr/>
+        </p:nvSpPr>
+        <p:spPr>
+          <a:xfrm>
+            <a:off x="7677912" y="4169664"/>
+            <a:ext cx="685800" cy="475488"/>
+          </a:xfrm>
+          <a:prstGeom prst="rect">
+            <a:avLst>
+              <a:gd name="adj" fmla="val 7692"/>
+            </a:avLst>
+          </a:prstGeom>
+          <a:solidFill>
+            <a:srgbClr val="FFFFFF"/>
+          </a:solidFill>
+          <a:ln w="12700">
+            <a:solidFill>
+              <a:srgbClr val="DB2777"/>
+            </a:solidFill>
+            <a:prstDash val="solid"/>
+          </a:ln>
+        </p:spPr>
+      </p:sp>
+      <p:sp>
+        <p:nvSpPr>
+          <p:cNvPr id="54" name="Text 52"/>
+          <p:cNvSpPr/>
+          <p:nvPr/>
+        </p:nvSpPr>
+        <p:spPr>
+          <a:xfrm>
+            <a:off x="7677912" y="4169664"/>
+            <a:ext cx="685800" cy="475488"/>
+          </a:xfrm>
+          <a:prstGeom prst="rect">
+            <a:avLst/>
+          </a:prstGeom>
+          <a:noFill/>
+          <a:ln/>
+        </p:spPr>
+        <p:txBody>
+          <a:bodyPr wrap="square" lIns="0" tIns="0" rIns="0" bIns="0" rtlCol="0" anchor="ctr"/>
+          <a:lstStyle/>
+          <a:p>
+            <a:pPr algn="ctr" indent="0" marL="0">
+              <a:buNone/>
+            </a:pPr>
+            <a:r>
+              <a:rPr lang="en-US" sz="900" b="1" dirty="0">
+                <a:solidFill>
+                  <a:srgbClr val="9D174D"/>
+                </a:solidFill>
+                <a:latin typeface="Trebuchet MS" pitchFamily="34" charset="0"/>
+                <a:ea typeface="Trebuchet MS" pitchFamily="34" charset="-122"/>
+                <a:cs typeface="Trebuchet MS" pitchFamily="34" charset="-120"/>
+              </a:rPr>
+              <a:t>ng</a:t>
             </a:r>
             <a:endParaRPr lang="en-US" sz="900" dirty="0"/>
           </a:p>
@@ -22341,7 +23205,7 @@
                 <a:ea typeface="Calibri" pitchFamily="34" charset="-122"/>
                 <a:cs typeface="Calibri" pitchFamily="34" charset="-120"/>
               </a:rPr>
-              <a:t>Word Labs  •  wordlabs.app  •  Root: 'train' = to teach or draw along</a:t>
+              <a:t>Word Labs  •  wordlabs.app  •  Root: 'train' = to practise to improve; to teach</a:t>
             </a:r>
             <a:endParaRPr lang="en-US" sz="800" dirty="0"/>
           </a:p>
@@ -22480,7 +23344,7 @@
                 <a:ea typeface="Trebuchet MS" pitchFamily="34" charset="-122"/>
                 <a:cs typeface="Trebuchet MS" pitchFamily="34" charset="-120"/>
               </a:rPr>
-              <a:t>constraint</a:t>
+              <a:t>trainee</a:t>
             </a:r>
             <a:endParaRPr lang="en-US" sz="2800" dirty="0"/>
           </a:p>
@@ -23168,7 +24032,7 @@
                 <a:ea typeface="Calibri" pitchFamily="34" charset="-122"/>
                 <a:cs typeface="Calibri" pitchFamily="34" charset="-120"/>
               </a:rPr>
-              <a:t>Word Labs  •  wordlabs.app  •  Root: 'train' = to teach or draw along</a:t>
+              <a:t>Word Labs  •  wordlabs.app  •  Root: 'train' = to practise to improve; to teach</a:t>
             </a:r>
             <a:endParaRPr lang="en-US" sz="800" dirty="0"/>
           </a:p>
@@ -23307,7 +24171,7 @@
                 <a:ea typeface="Trebuchet MS" pitchFamily="34" charset="-122"/>
                 <a:cs typeface="Trebuchet MS" pitchFamily="34" charset="-120"/>
               </a:rPr>
-              <a:t>constraint</a:t>
+              <a:t>trainee</a:t>
             </a:r>
             <a:endParaRPr lang="en-US" sz="2800" dirty="0"/>
           </a:p>
@@ -23387,7 +24251,7 @@
         </p:nvSpPr>
         <p:spPr>
           <a:xfrm>
-            <a:off x="2221992" y="2258568"/>
+            <a:off x="2938272" y="2258568"/>
             <a:ext cx="1828800" cy="292608"/>
           </a:xfrm>
           <a:prstGeom prst="rect">
@@ -23396,11 +24260,11 @@
             </a:avLst>
           </a:prstGeom>
           <a:solidFill>
-            <a:srgbClr val="DDD6FE"/>
+            <a:srgbClr val="CCFBF1"/>
           </a:solidFill>
           <a:ln w="19050">
             <a:solidFill>
-              <a:srgbClr val="7C3AED"/>
+              <a:srgbClr val="0D9488"/>
             </a:solidFill>
             <a:prstDash val="solid"/>
           </a:ln>
@@ -23421,7 +24285,7 @@
         </p:nvSpPr>
         <p:spPr>
           <a:xfrm>
-            <a:off x="2221992" y="2258568"/>
+            <a:off x="2938272" y="2258568"/>
             <a:ext cx="1828800" cy="292608"/>
           </a:xfrm>
           <a:prstGeom prst="rect">
@@ -23440,13 +24304,13 @@
             <a:r>
               <a:rPr lang="en-US" sz="1300" b="1" dirty="0">
                 <a:solidFill>
-                  <a:srgbClr val="4C1D95"/>
+                  <a:srgbClr val="0F766E"/>
                 </a:solidFill>
                 <a:latin typeface="Trebuchet MS" pitchFamily="34" charset="0"/>
                 <a:ea typeface="Trebuchet MS" pitchFamily="34" charset="-122"/>
                 <a:cs typeface="Trebuchet MS" pitchFamily="34" charset="-120"/>
               </a:rPr>
-              <a:t>con</a:t>
+              <a:t>train</a:t>
             </a:r>
             <a:endParaRPr lang="en-US" sz="1300" dirty="0"/>
           </a:p>
@@ -23460,7 +24324,7 @@
         </p:nvSpPr>
         <p:spPr>
           <a:xfrm>
-            <a:off x="2221992" y="2569464"/>
+            <a:off x="2938272" y="2569464"/>
             <a:ext cx="1828800" cy="201168"/>
           </a:xfrm>
           <a:prstGeom prst="rect">
@@ -23485,7 +24349,7 @@
                 <a:ea typeface="Calibri" pitchFamily="34" charset="-122"/>
                 <a:cs typeface="Calibri" pitchFamily="34" charset="-120"/>
               </a:rPr>
-              <a:t>together or completely</a:t>
+              <a:t>to practise to improve; to teach</a:t>
             </a:r>
             <a:endParaRPr lang="en-US" sz="850" dirty="0"/>
           </a:p>
@@ -23499,7 +24363,7 @@
         </p:nvSpPr>
         <p:spPr>
           <a:xfrm>
-            <a:off x="4370832" y="2258568"/>
+            <a:off x="5803392" y="2258568"/>
             <a:ext cx="1828800" cy="292608"/>
           </a:xfrm>
           <a:prstGeom prst="rect">
@@ -23533,7 +24397,7 @@
         </p:nvSpPr>
         <p:spPr>
           <a:xfrm>
-            <a:off x="4370832" y="2258568"/>
+            <a:off x="5803392" y="2258568"/>
             <a:ext cx="1828800" cy="292608"/>
           </a:xfrm>
           <a:prstGeom prst="rect">
@@ -23558,7 +24422,7 @@
                 <a:ea typeface="Trebuchet MS" pitchFamily="34" charset="-122"/>
                 <a:cs typeface="Trebuchet MS" pitchFamily="34" charset="-120"/>
               </a:rPr>
-              <a:t>strain</a:t>
+              <a:t>ee</a:t>
             </a:r>
             <a:endParaRPr lang="en-US" sz="1300" dirty="0"/>
           </a:p>
@@ -23572,7 +24436,7 @@
         </p:nvSpPr>
         <p:spPr>
           <a:xfrm>
-            <a:off x="4370832" y="2569464"/>
+            <a:off x="5803392" y="2569464"/>
             <a:ext cx="1828800" cy="201168"/>
           </a:xfrm>
           <a:prstGeom prst="rect">
@@ -23597,7 +24461,7 @@
                 <a:ea typeface="Calibri" pitchFamily="34" charset="-122"/>
                 <a:cs typeface="Calibri" pitchFamily="34" charset="-120"/>
               </a:rPr>
-              <a:t>draw tight or pull</a:t>
+              <a:t>person who receives</a:t>
             </a:r>
             <a:endParaRPr lang="en-US" sz="850" dirty="0"/>
           </a:p>
@@ -23611,30 +24475,23 @@
         </p:nvSpPr>
         <p:spPr>
           <a:xfrm>
-            <a:off x="6519672" y="2258568"/>
-            <a:ext cx="1828800" cy="292608"/>
+            <a:off x="365760" y="3273552"/>
+            <a:ext cx="1371600" cy="658368"/>
           </a:xfrm>
           <a:prstGeom prst="rect">
             <a:avLst>
-              <a:gd name="adj" fmla="val 25000"/>
+              <a:gd name="adj" fmla="val 8333"/>
             </a:avLst>
           </a:prstGeom>
           <a:solidFill>
-            <a:srgbClr val="FCE7F3"/>
-          </a:solidFill>
-          <a:ln w="19050">
-            <a:solidFill>
-              <a:srgbClr val="DB2777"/>
-            </a:solidFill>
-            <a:prstDash val="solid"/>
-          </a:ln>
-          <a:effectLst>
-            <a:outerShdw sx="100000" sy="100000" kx="0" ky="0" algn="bl" rotWithShape="0" blurRad="101600" dist="38100" dir="8100000">
-              <a:srgbClr val="000000">
-                <a:alpha val="12000"/>
-              </a:srgbClr>
-            </a:outerShdw>
-          </a:effectLst>
+            <a:srgbClr val="E2E8F0"/>
+          </a:solidFill>
+          <a:ln w="12700">
+            <a:solidFill>
+              <a:srgbClr val="E2E8F0"/>
+            </a:solidFill>
+            <a:prstDash val="solid"/>
+          </a:ln>
         </p:spPr>
       </p:sp>
       <p:sp>
@@ -23645,8 +24502,8 @@
         </p:nvSpPr>
         <p:spPr>
           <a:xfrm>
-            <a:off x="6519672" y="2258568"/>
-            <a:ext cx="1828800" cy="292608"/>
+            <a:off x="365760" y="3273552"/>
+            <a:ext cx="1371600" cy="658368"/>
           </a:xfrm>
           <a:prstGeom prst="rect">
             <a:avLst/>
@@ -23662,73 +24519,100 @@
               <a:buNone/>
             </a:pPr>
             <a:r>
-              <a:rPr lang="en-US" sz="1300" b="1" dirty="0">
-                <a:solidFill>
-                  <a:srgbClr val="9D174D"/>
+              <a:rPr lang="en-US" sz="1100" b="1" dirty="0">
+                <a:solidFill>
+                  <a:srgbClr val="475569"/>
                 </a:solidFill>
                 <a:latin typeface="Trebuchet MS" pitchFamily="34" charset="0"/>
                 <a:ea typeface="Trebuchet MS" pitchFamily="34" charset="-122"/>
                 <a:cs typeface="Trebuchet MS" pitchFamily="34" charset="-120"/>
               </a:rPr>
-              <a:t>t</a:t>
-            </a:r>
-            <a:endParaRPr lang="en-US" sz="1300" dirty="0"/>
-          </a:p>
-        </p:txBody>
-      </p:sp>
-      <p:sp>
-        <p:nvSpPr>
-          <p:cNvPr id="24" name="Text 22"/>
-          <p:cNvSpPr/>
-          <p:nvPr/>
-        </p:nvSpPr>
-        <p:spPr>
-          <a:xfrm>
-            <a:off x="6519672" y="2569464"/>
-            <a:ext cx="1828800" cy="201168"/>
-          </a:xfrm>
-          <a:prstGeom prst="rect">
-            <a:avLst/>
-          </a:prstGeom>
-          <a:noFill/>
-          <a:ln/>
-        </p:spPr>
-        <p:txBody>
-          <a:bodyPr wrap="square" lIns="0" tIns="0" rIns="0" bIns="0" rtlCol="0" anchor="t"/>
-          <a:lstStyle/>
-          <a:p>
-            <a:pPr algn="ctr" indent="0" marL="0">
-              <a:buNone/>
-            </a:pPr>
-            <a:r>
-              <a:rPr lang="en-US" sz="850" dirty="0">
-                <a:solidFill>
-                  <a:srgbClr val="475569"/>
+              <a:t>Syllables</a:t>
+            </a:r>
+            <a:endParaRPr lang="en-US" sz="1100" dirty="0"/>
+          </a:p>
+        </p:txBody>
+      </p:sp>
+      <p:sp>
+        <p:nvSpPr>
+          <p:cNvPr id="24" name="Shape 22"/>
+          <p:cNvSpPr/>
+          <p:nvPr/>
+        </p:nvSpPr>
+        <p:spPr>
+          <a:xfrm>
+            <a:off x="1874520" y="3273552"/>
+            <a:ext cx="6903720" cy="658368"/>
+          </a:xfrm>
+          <a:prstGeom prst="rect">
+            <a:avLst>
+              <a:gd name="adj" fmla="val 8333"/>
+            </a:avLst>
+          </a:prstGeom>
+          <a:solidFill>
+            <a:srgbClr val="F8FAFC"/>
+          </a:solidFill>
+          <a:ln w="12700">
+            <a:solidFill>
+              <a:srgbClr val="E2E8F0"/>
+            </a:solidFill>
+            <a:prstDash val="dash"/>
+          </a:ln>
+        </p:spPr>
+      </p:sp>
+      <p:sp>
+        <p:nvSpPr>
+          <p:cNvPr id="25" name="Text 23"/>
+          <p:cNvSpPr/>
+          <p:nvPr/>
+        </p:nvSpPr>
+        <p:spPr>
+          <a:xfrm>
+            <a:off x="1874520" y="3273552"/>
+            <a:ext cx="6903720" cy="658368"/>
+          </a:xfrm>
+          <a:prstGeom prst="rect">
+            <a:avLst/>
+          </a:prstGeom>
+          <a:noFill/>
+          <a:ln/>
+        </p:spPr>
+        <p:txBody>
+          <a:bodyPr wrap="square" rtlCol="0" anchor="ctr"/>
+          <a:lstStyle/>
+          <a:p>
+            <a:pPr algn="ctr" indent="0" marL="0">
+              <a:buNone/>
+            </a:pPr>
+            <a:r>
+              <a:rPr lang="en-US" sz="1100" i="1" dirty="0">
+                <a:solidFill>
+                  <a:srgbClr val="CBD5E1"/>
                 </a:solidFill>
                 <a:latin typeface="Calibri" pitchFamily="34" charset="0"/>
                 <a:ea typeface="Calibri" pitchFamily="34" charset="-122"/>
                 <a:cs typeface="Calibri" pitchFamily="34" charset="-120"/>
               </a:rPr>
-              <a:t>noun-forming ending</a:t>
-            </a:r>
-            <a:endParaRPr lang="en-US" sz="850" dirty="0"/>
-          </a:p>
-        </p:txBody>
-      </p:sp>
-      <p:sp>
-        <p:nvSpPr>
-          <p:cNvPr id="25" name="Shape 23"/>
-          <p:cNvSpPr/>
-          <p:nvPr/>
-        </p:nvSpPr>
-        <p:spPr>
-          <a:xfrm>
-            <a:off x="365760" y="3273552"/>
-            <a:ext cx="1371600" cy="658368"/>
+              <a:t>Write here...</a:t>
+            </a:r>
+            <a:endParaRPr lang="en-US" sz="1100" dirty="0"/>
+          </a:p>
+        </p:txBody>
+      </p:sp>
+      <p:sp>
+        <p:nvSpPr>
+          <p:cNvPr id="26" name="Shape 24"/>
+          <p:cNvSpPr/>
+          <p:nvPr/>
+        </p:nvSpPr>
+        <p:spPr>
+          <a:xfrm>
+            <a:off x="365760" y="4096512"/>
+            <a:ext cx="1371600" cy="804672"/>
           </a:xfrm>
           <a:prstGeom prst="rect">
             <a:avLst>
-              <a:gd name="adj" fmla="val 8333"/>
+              <a:gd name="adj" fmla="val 6818"/>
             </a:avLst>
           </a:prstGeom>
           <a:solidFill>
@@ -23744,14 +24628,14 @@
       </p:sp>
       <p:sp>
         <p:nvSpPr>
-          <p:cNvPr id="26" name="Text 24"/>
-          <p:cNvSpPr/>
-          <p:nvPr/>
-        </p:nvSpPr>
-        <p:spPr>
-          <a:xfrm>
-            <a:off x="365760" y="3273552"/>
-            <a:ext cx="1371600" cy="658368"/>
+          <p:cNvPr id="27" name="Text 25"/>
+          <p:cNvSpPr/>
+          <p:nvPr/>
+        </p:nvSpPr>
+        <p:spPr>
+          <a:xfrm>
+            <a:off x="365760" y="4096512"/>
+            <a:ext cx="1371600" cy="804672"/>
           </a:xfrm>
           <a:prstGeom prst="rect">
             <a:avLst/>
@@ -23775,7 +24659,7 @@
                 <a:ea typeface="Trebuchet MS" pitchFamily="34" charset="-122"/>
                 <a:cs typeface="Trebuchet MS" pitchFamily="34" charset="-120"/>
               </a:rPr>
-              <a:t>Syllables</a:t>
+              <a:t>Phonemes</a:t>
             </a:r>
             <a:endParaRPr lang="en-US" sz="1100" dirty="0"/>
           </a:p>
@@ -23783,80 +24667,14 @@
       </p:sp>
       <p:sp>
         <p:nvSpPr>
-          <p:cNvPr id="27" name="Shape 25"/>
-          <p:cNvSpPr/>
-          <p:nvPr/>
-        </p:nvSpPr>
-        <p:spPr>
-          <a:xfrm>
-            <a:off x="1874520" y="3273552"/>
-            <a:ext cx="6903720" cy="658368"/>
-          </a:xfrm>
-          <a:prstGeom prst="rect">
-            <a:avLst>
-              <a:gd name="adj" fmla="val 8333"/>
-            </a:avLst>
-          </a:prstGeom>
-          <a:solidFill>
-            <a:srgbClr val="F8FAFC"/>
-          </a:solidFill>
-          <a:ln w="12700">
-            <a:solidFill>
-              <a:srgbClr val="E2E8F0"/>
-            </a:solidFill>
-            <a:prstDash val="dash"/>
-          </a:ln>
-        </p:spPr>
-      </p:sp>
-      <p:sp>
-        <p:nvSpPr>
-          <p:cNvPr id="28" name="Text 26"/>
-          <p:cNvSpPr/>
-          <p:nvPr/>
-        </p:nvSpPr>
-        <p:spPr>
-          <a:xfrm>
-            <a:off x="1874520" y="3273552"/>
-            <a:ext cx="6903720" cy="658368"/>
-          </a:xfrm>
-          <a:prstGeom prst="rect">
-            <a:avLst/>
-          </a:prstGeom>
-          <a:noFill/>
-          <a:ln/>
-        </p:spPr>
-        <p:txBody>
-          <a:bodyPr wrap="square" rtlCol="0" anchor="ctr"/>
-          <a:lstStyle/>
-          <a:p>
-            <a:pPr algn="ctr" indent="0" marL="0">
-              <a:buNone/>
-            </a:pPr>
-            <a:r>
-              <a:rPr lang="en-US" sz="1100" i="1" dirty="0">
-                <a:solidFill>
-                  <a:srgbClr val="CBD5E1"/>
-                </a:solidFill>
-                <a:latin typeface="Calibri" pitchFamily="34" charset="0"/>
-                <a:ea typeface="Calibri" pitchFamily="34" charset="-122"/>
-                <a:cs typeface="Calibri" pitchFamily="34" charset="-120"/>
-              </a:rPr>
-              <a:t>Write here...</a:t>
-            </a:r>
-            <a:endParaRPr lang="en-US" sz="1100" dirty="0"/>
-          </a:p>
-        </p:txBody>
-      </p:sp>
-      <p:sp>
-        <p:nvSpPr>
-          <p:cNvPr id="29" name="Shape 27"/>
-          <p:cNvSpPr/>
-          <p:nvPr/>
-        </p:nvSpPr>
-        <p:spPr>
-          <a:xfrm>
-            <a:off x="365760" y="4096512"/>
-            <a:ext cx="1371600" cy="804672"/>
+          <p:cNvPr id="28" name="Shape 26"/>
+          <p:cNvSpPr/>
+          <p:nvPr/>
+        </p:nvSpPr>
+        <p:spPr>
+          <a:xfrm>
+            <a:off x="1874520" y="4096512"/>
+            <a:ext cx="6903720" cy="804672"/>
           </a:xfrm>
           <a:prstGeom prst="rect">
             <a:avLst>
@@ -23864,85 +24682,19 @@
             </a:avLst>
           </a:prstGeom>
           <a:solidFill>
-            <a:srgbClr val="E2E8F0"/>
+            <a:srgbClr val="F8FAFC"/>
           </a:solidFill>
           <a:ln w="12700">
             <a:solidFill>
               <a:srgbClr val="E2E8F0"/>
             </a:solidFill>
-            <a:prstDash val="solid"/>
-          </a:ln>
-        </p:spPr>
-      </p:sp>
-      <p:sp>
-        <p:nvSpPr>
-          <p:cNvPr id="30" name="Text 28"/>
-          <p:cNvSpPr/>
-          <p:nvPr/>
-        </p:nvSpPr>
-        <p:spPr>
-          <a:xfrm>
-            <a:off x="365760" y="4096512"/>
-            <a:ext cx="1371600" cy="804672"/>
-          </a:xfrm>
-          <a:prstGeom prst="rect">
-            <a:avLst/>
-          </a:prstGeom>
-          <a:noFill/>
-          <a:ln/>
-        </p:spPr>
-        <p:txBody>
-          <a:bodyPr wrap="square" lIns="0" tIns="0" rIns="0" bIns="0" rtlCol="0" anchor="ctr"/>
-          <a:lstStyle/>
-          <a:p>
-            <a:pPr algn="ctr" indent="0" marL="0">
-              <a:buNone/>
-            </a:pPr>
-            <a:r>
-              <a:rPr lang="en-US" sz="1100" b="1" dirty="0">
-                <a:solidFill>
-                  <a:srgbClr val="475569"/>
-                </a:solidFill>
-                <a:latin typeface="Trebuchet MS" pitchFamily="34" charset="0"/>
-                <a:ea typeface="Trebuchet MS" pitchFamily="34" charset="-122"/>
-                <a:cs typeface="Trebuchet MS" pitchFamily="34" charset="-120"/>
-              </a:rPr>
-              <a:t>Phonemes</a:t>
-            </a:r>
-            <a:endParaRPr lang="en-US" sz="1100" dirty="0"/>
-          </a:p>
-        </p:txBody>
-      </p:sp>
-      <p:sp>
-        <p:nvSpPr>
-          <p:cNvPr id="31" name="Shape 29"/>
-          <p:cNvSpPr/>
-          <p:nvPr/>
-        </p:nvSpPr>
-        <p:spPr>
-          <a:xfrm>
-            <a:off x="1874520" y="4096512"/>
-            <a:ext cx="6903720" cy="804672"/>
-          </a:xfrm>
-          <a:prstGeom prst="rect">
-            <a:avLst>
-              <a:gd name="adj" fmla="val 6818"/>
-            </a:avLst>
-          </a:prstGeom>
-          <a:solidFill>
-            <a:srgbClr val="F8FAFC"/>
-          </a:solidFill>
-          <a:ln w="12700">
-            <a:solidFill>
-              <a:srgbClr val="E2E8F0"/>
-            </a:solidFill>
             <a:prstDash val="dash"/>
           </a:ln>
         </p:spPr>
       </p:sp>
       <p:sp>
         <p:nvSpPr>
-          <p:cNvPr id="32" name="Text 30"/>
+          <p:cNvPr id="29" name="Text 27"/>
           <p:cNvSpPr/>
           <p:nvPr/>
         </p:nvSpPr>
@@ -24265,7 +25017,7 @@
                 <a:ea typeface="Calibri" pitchFamily="34" charset="-122"/>
                 <a:cs typeface="Calibri" pitchFamily="34" charset="-120"/>
               </a:rPr>
-              <a:t>Word Labs  •  wordlabs.app  •  Root: 'train' = to teach or draw along</a:t>
+              <a:t>Word Labs  •  wordlabs.app  •  Root: 'train' = to practise to improve; to teach</a:t>
             </a:r>
             <a:endParaRPr lang="en-US" sz="800" dirty="0"/>
           </a:p>
@@ -24338,7 +25090,7 @@
                 <a:ea typeface="Trebuchet MS" pitchFamily="34" charset="-122"/>
                 <a:cs typeface="Trebuchet MS" pitchFamily="34" charset="-120"/>
               </a:rPr>
-              <a:t>We are learning that the root 'train' means 'to teach or draw along'.</a:t>
+              <a:t>We are learning that the root 'train' means 'to practise to improve; to teach'.</a:t>
             </a:r>
             <a:endParaRPr lang="en-US" sz="2000" dirty="0"/>
           </a:p>
@@ -24984,7 +25736,7 @@
                 <a:ea typeface="Calibri" pitchFamily="34" charset="-122"/>
                 <a:cs typeface="Calibri" pitchFamily="34" charset="-120"/>
               </a:rPr>
-              <a:t>Word Labs  •  wordlabs.app  •  Root: 'train' = to teach or draw along</a:t>
+              <a:t>Word Labs  •  wordlabs.app  •  Root: 'train' = to practise to improve; to teach</a:t>
             </a:r>
             <a:endParaRPr lang="en-US" sz="800" dirty="0"/>
           </a:p>
@@ -25123,7 +25875,7 @@
                 <a:ea typeface="Trebuchet MS" pitchFamily="34" charset="-122"/>
                 <a:cs typeface="Trebuchet MS" pitchFamily="34" charset="-120"/>
               </a:rPr>
-              <a:t>constraint</a:t>
+              <a:t>trainee</a:t>
             </a:r>
             <a:endParaRPr lang="en-US" sz="2800" dirty="0"/>
           </a:p>
@@ -25203,7 +25955,7 @@
         </p:nvSpPr>
         <p:spPr>
           <a:xfrm>
-            <a:off x="2221992" y="2258568"/>
+            <a:off x="2938272" y="2258568"/>
             <a:ext cx="1828800" cy="292608"/>
           </a:xfrm>
           <a:prstGeom prst="rect">
@@ -25212,11 +25964,11 @@
             </a:avLst>
           </a:prstGeom>
           <a:solidFill>
-            <a:srgbClr val="DDD6FE"/>
+            <a:srgbClr val="CCFBF1"/>
           </a:solidFill>
           <a:ln w="19050">
             <a:solidFill>
-              <a:srgbClr val="7C3AED"/>
+              <a:srgbClr val="0D9488"/>
             </a:solidFill>
             <a:prstDash val="solid"/>
           </a:ln>
@@ -25237,7 +25989,7 @@
         </p:nvSpPr>
         <p:spPr>
           <a:xfrm>
-            <a:off x="2221992" y="2258568"/>
+            <a:off x="2938272" y="2258568"/>
             <a:ext cx="1828800" cy="292608"/>
           </a:xfrm>
           <a:prstGeom prst="rect">
@@ -25256,13 +26008,13 @@
             <a:r>
               <a:rPr lang="en-US" sz="1300" b="1" dirty="0">
                 <a:solidFill>
-                  <a:srgbClr val="4C1D95"/>
+                  <a:srgbClr val="0F766E"/>
                 </a:solidFill>
                 <a:latin typeface="Trebuchet MS" pitchFamily="34" charset="0"/>
                 <a:ea typeface="Trebuchet MS" pitchFamily="34" charset="-122"/>
                 <a:cs typeface="Trebuchet MS" pitchFamily="34" charset="-120"/>
               </a:rPr>
-              <a:t>con</a:t>
+              <a:t>train</a:t>
             </a:r>
             <a:endParaRPr lang="en-US" sz="1300" dirty="0"/>
           </a:p>
@@ -25276,7 +26028,7 @@
         </p:nvSpPr>
         <p:spPr>
           <a:xfrm>
-            <a:off x="2221992" y="2569464"/>
+            <a:off x="2938272" y="2569464"/>
             <a:ext cx="1828800" cy="201168"/>
           </a:xfrm>
           <a:prstGeom prst="rect">
@@ -25301,7 +26053,7 @@
                 <a:ea typeface="Calibri" pitchFamily="34" charset="-122"/>
                 <a:cs typeface="Calibri" pitchFamily="34" charset="-120"/>
               </a:rPr>
-              <a:t>together or completely</a:t>
+              <a:t>to practise to improve; to teach</a:t>
             </a:r>
             <a:endParaRPr lang="en-US" sz="850" dirty="0"/>
           </a:p>
@@ -25315,7 +26067,7 @@
         </p:nvSpPr>
         <p:spPr>
           <a:xfrm>
-            <a:off x="4370832" y="2258568"/>
+            <a:off x="5803392" y="2258568"/>
             <a:ext cx="1828800" cy="292608"/>
           </a:xfrm>
           <a:prstGeom prst="rect">
@@ -25349,7 +26101,7 @@
         </p:nvSpPr>
         <p:spPr>
           <a:xfrm>
-            <a:off x="4370832" y="2258568"/>
+            <a:off x="5803392" y="2258568"/>
             <a:ext cx="1828800" cy="292608"/>
           </a:xfrm>
           <a:prstGeom prst="rect">
@@ -25374,7 +26126,7 @@
                 <a:ea typeface="Trebuchet MS" pitchFamily="34" charset="-122"/>
                 <a:cs typeface="Trebuchet MS" pitchFamily="34" charset="-120"/>
               </a:rPr>
-              <a:t>strain</a:t>
+              <a:t>ee</a:t>
             </a:r>
             <a:endParaRPr lang="en-US" sz="1300" dirty="0"/>
           </a:p>
@@ -25388,7 +26140,7 @@
         </p:nvSpPr>
         <p:spPr>
           <a:xfrm>
-            <a:off x="4370832" y="2569464"/>
+            <a:off x="5803392" y="2569464"/>
             <a:ext cx="1828800" cy="201168"/>
           </a:xfrm>
           <a:prstGeom prst="rect">
@@ -25413,7 +26165,7 @@
                 <a:ea typeface="Calibri" pitchFamily="34" charset="-122"/>
                 <a:cs typeface="Calibri" pitchFamily="34" charset="-120"/>
               </a:rPr>
-              <a:t>draw tight or pull</a:t>
+              <a:t>person who receives</a:t>
             </a:r>
             <a:endParaRPr lang="en-US" sz="850" dirty="0"/>
           </a:p>
@@ -25427,30 +26179,23 @@
         </p:nvSpPr>
         <p:spPr>
           <a:xfrm>
-            <a:off x="6519672" y="2258568"/>
-            <a:ext cx="1828800" cy="292608"/>
+            <a:off x="365760" y="3273552"/>
+            <a:ext cx="1371600" cy="658368"/>
           </a:xfrm>
           <a:prstGeom prst="rect">
             <a:avLst>
-              <a:gd name="adj" fmla="val 25000"/>
+              <a:gd name="adj" fmla="val 8333"/>
             </a:avLst>
           </a:prstGeom>
           <a:solidFill>
-            <a:srgbClr val="FCE7F3"/>
-          </a:solidFill>
-          <a:ln w="19050">
-            <a:solidFill>
-              <a:srgbClr val="DB2777"/>
-            </a:solidFill>
-            <a:prstDash val="solid"/>
-          </a:ln>
-          <a:effectLst>
-            <a:outerShdw sx="100000" sy="100000" kx="0" ky="0" algn="bl" rotWithShape="0" blurRad="101600" dist="38100" dir="8100000">
-              <a:srgbClr val="000000">
-                <a:alpha val="12000"/>
-              </a:srgbClr>
-            </a:outerShdw>
-          </a:effectLst>
+            <a:srgbClr val="E2E8F0"/>
+          </a:solidFill>
+          <a:ln w="12700">
+            <a:solidFill>
+              <a:srgbClr val="E2E8F0"/>
+            </a:solidFill>
+            <a:prstDash val="solid"/>
+          </a:ln>
         </p:spPr>
       </p:sp>
       <p:sp>
@@ -25461,8 +26206,8 @@
         </p:nvSpPr>
         <p:spPr>
           <a:xfrm>
-            <a:off x="6519672" y="2258568"/>
-            <a:ext cx="1828800" cy="292608"/>
+            <a:off x="365760" y="3273552"/>
+            <a:ext cx="1371600" cy="658368"/>
           </a:xfrm>
           <a:prstGeom prst="rect">
             <a:avLst/>
@@ -25478,69 +26223,30 @@
               <a:buNone/>
             </a:pPr>
             <a:r>
-              <a:rPr lang="en-US" sz="1300" b="1" dirty="0">
-                <a:solidFill>
-                  <a:srgbClr val="9D174D"/>
+              <a:rPr lang="en-US" sz="1100" b="1" dirty="0">
+                <a:solidFill>
+                  <a:srgbClr val="475569"/>
                 </a:solidFill>
                 <a:latin typeface="Trebuchet MS" pitchFamily="34" charset="0"/>
                 <a:ea typeface="Trebuchet MS" pitchFamily="34" charset="-122"/>
                 <a:cs typeface="Trebuchet MS" pitchFamily="34" charset="-120"/>
               </a:rPr>
-              <a:t>t</a:t>
-            </a:r>
-            <a:endParaRPr lang="en-US" sz="1300" dirty="0"/>
-          </a:p>
-        </p:txBody>
-      </p:sp>
-      <p:sp>
-        <p:nvSpPr>
-          <p:cNvPr id="24" name="Text 22"/>
-          <p:cNvSpPr/>
-          <p:nvPr/>
-        </p:nvSpPr>
-        <p:spPr>
-          <a:xfrm>
-            <a:off x="6519672" y="2569464"/>
-            <a:ext cx="1828800" cy="201168"/>
-          </a:xfrm>
-          <a:prstGeom prst="rect">
-            <a:avLst/>
-          </a:prstGeom>
-          <a:noFill/>
-          <a:ln/>
-        </p:spPr>
-        <p:txBody>
-          <a:bodyPr wrap="square" lIns="0" tIns="0" rIns="0" bIns="0" rtlCol="0" anchor="t"/>
-          <a:lstStyle/>
-          <a:p>
-            <a:pPr algn="ctr" indent="0" marL="0">
-              <a:buNone/>
-            </a:pPr>
-            <a:r>
-              <a:rPr lang="en-US" sz="850" dirty="0">
-                <a:solidFill>
-                  <a:srgbClr val="475569"/>
-                </a:solidFill>
-                <a:latin typeface="Calibri" pitchFamily="34" charset="0"/>
-                <a:ea typeface="Calibri" pitchFamily="34" charset="-122"/>
-                <a:cs typeface="Calibri" pitchFamily="34" charset="-120"/>
-              </a:rPr>
-              <a:t>noun-forming ending</a:t>
-            </a:r>
-            <a:endParaRPr lang="en-US" sz="850" dirty="0"/>
-          </a:p>
-        </p:txBody>
-      </p:sp>
-      <p:sp>
-        <p:nvSpPr>
-          <p:cNvPr id="25" name="Shape 23"/>
-          <p:cNvSpPr/>
-          <p:nvPr/>
-        </p:nvSpPr>
-        <p:spPr>
-          <a:xfrm>
-            <a:off x="365760" y="3273552"/>
-            <a:ext cx="1371600" cy="658368"/>
+              <a:t>Syllables</a:t>
+            </a:r>
+            <a:endParaRPr lang="en-US" sz="1100" dirty="0"/>
+          </a:p>
+        </p:txBody>
+      </p:sp>
+      <p:sp>
+        <p:nvSpPr>
+          <p:cNvPr id="24" name="Shape 22"/>
+          <p:cNvSpPr/>
+          <p:nvPr/>
+        </p:nvSpPr>
+        <p:spPr>
+          <a:xfrm>
+            <a:off x="1874520" y="3273552"/>
+            <a:ext cx="6903720" cy="658368"/>
           </a:xfrm>
           <a:prstGeom prst="rect">
             <a:avLst>
@@ -25548,11 +26254,38 @@
             </a:avLst>
           </a:prstGeom>
           <a:solidFill>
-            <a:srgbClr val="E2E8F0"/>
-          </a:solidFill>
-          <a:ln w="12700">
-            <a:solidFill>
-              <a:srgbClr val="E2E8F0"/>
+            <a:srgbClr val="CCFBF1"/>
+          </a:solidFill>
+          <a:ln w="12700">
+            <a:solidFill>
+              <a:srgbClr val="0D9488"/>
+            </a:solidFill>
+            <a:prstDash val="solid"/>
+          </a:ln>
+        </p:spPr>
+      </p:sp>
+      <p:sp>
+        <p:nvSpPr>
+          <p:cNvPr id="25" name="Shape 23"/>
+          <p:cNvSpPr/>
+          <p:nvPr/>
+        </p:nvSpPr>
+        <p:spPr>
+          <a:xfrm>
+            <a:off x="2999232" y="3364992"/>
+            <a:ext cx="1645920" cy="475488"/>
+          </a:xfrm>
+          <a:prstGeom prst="rect">
+            <a:avLst>
+              <a:gd name="adj" fmla="val 9615"/>
+            </a:avLst>
+          </a:prstGeom>
+          <a:solidFill>
+            <a:srgbClr val="FFFFFF"/>
+          </a:solidFill>
+          <a:ln w="12700">
+            <a:solidFill>
+              <a:srgbClr val="0D9488"/>
             </a:solidFill>
             <a:prstDash val="solid"/>
           </a:ln>
@@ -25566,8 +26299,8 @@
         </p:nvSpPr>
         <p:spPr>
           <a:xfrm>
-            <a:off x="365760" y="3273552"/>
-            <a:ext cx="1371600" cy="658368"/>
+            <a:off x="2999232" y="3364992"/>
+            <a:ext cx="1645920" cy="475488"/>
           </a:xfrm>
           <a:prstGeom prst="rect">
             <a:avLst/>
@@ -25583,46 +26316,58 @@
               <a:buNone/>
             </a:pPr>
             <a:r>
-              <a:rPr lang="en-US" sz="1100" b="1" dirty="0">
-                <a:solidFill>
-                  <a:srgbClr val="475569"/>
+              <a:rPr lang="en-US" sz="1400" b="1" dirty="0">
+                <a:solidFill>
+                  <a:srgbClr val="0D9488"/>
                 </a:solidFill>
                 <a:latin typeface="Trebuchet MS" pitchFamily="34" charset="0"/>
                 <a:ea typeface="Trebuchet MS" pitchFamily="34" charset="-122"/>
                 <a:cs typeface="Trebuchet MS" pitchFamily="34" charset="-120"/>
               </a:rPr>
-              <a:t>Syllables</a:t>
-            </a:r>
-            <a:endParaRPr lang="en-US" sz="1100" dirty="0"/>
-          </a:p>
-        </p:txBody>
-      </p:sp>
-      <p:sp>
-        <p:nvSpPr>
-          <p:cNvPr id="27" name="Shape 25"/>
-          <p:cNvSpPr/>
-          <p:nvPr/>
-        </p:nvSpPr>
-        <p:spPr>
-          <a:xfrm>
-            <a:off x="1874520" y="3273552"/>
-            <a:ext cx="6903720" cy="658368"/>
-          </a:xfrm>
-          <a:prstGeom prst="rect">
-            <a:avLst>
-              <a:gd name="adj" fmla="val 8333"/>
-            </a:avLst>
-          </a:prstGeom>
-          <a:solidFill>
-            <a:srgbClr val="CCFBF1"/>
-          </a:solidFill>
-          <a:ln w="12700">
-            <a:solidFill>
-              <a:srgbClr val="0D9488"/>
-            </a:solidFill>
-            <a:prstDash val="solid"/>
-          </a:ln>
-        </p:spPr>
+              <a:t>train</a:t>
+            </a:r>
+            <a:endParaRPr lang="en-US" sz="1400" dirty="0"/>
+          </a:p>
+        </p:txBody>
+      </p:sp>
+      <p:sp>
+        <p:nvSpPr>
+          <p:cNvPr id="27" name="Text 25"/>
+          <p:cNvSpPr/>
+          <p:nvPr/>
+        </p:nvSpPr>
+        <p:spPr>
+          <a:xfrm>
+            <a:off x="4645152" y="3364992"/>
+            <a:ext cx="1097280" cy="475488"/>
+          </a:xfrm>
+          <a:prstGeom prst="rect">
+            <a:avLst/>
+          </a:prstGeom>
+          <a:noFill/>
+          <a:ln/>
+        </p:spPr>
+        <p:txBody>
+          <a:bodyPr wrap="square" lIns="0" tIns="0" rIns="0" bIns="0" rtlCol="0" anchor="ctr"/>
+          <a:lstStyle/>
+          <a:p>
+            <a:pPr algn="ctr" indent="0" marL="0">
+              <a:buNone/>
+            </a:pPr>
+            <a:r>
+              <a:rPr lang="en-US" sz="1600" b="1" dirty="0">
+                <a:solidFill>
+                  <a:srgbClr val="0D9488"/>
+                </a:solidFill>
+                <a:latin typeface="Trebuchet MS" pitchFamily="34" charset="0"/>
+                <a:ea typeface="Trebuchet MS" pitchFamily="34" charset="-122"/>
+                <a:cs typeface="Trebuchet MS" pitchFamily="34" charset="-120"/>
+              </a:rPr>
+              <a:t>·</a:t>
+            </a:r>
+            <a:endParaRPr lang="en-US" sz="1600" dirty="0"/>
+          </a:p>
+        </p:txBody>
       </p:sp>
       <p:sp>
         <p:nvSpPr>
@@ -25632,7 +26377,7 @@
         </p:nvSpPr>
         <p:spPr>
           <a:xfrm>
-            <a:off x="2999232" y="3364992"/>
+            <a:off x="5742432" y="3364992"/>
             <a:ext cx="1645920" cy="475488"/>
           </a:xfrm>
           <a:prstGeom prst="rect">
@@ -25659,7 +26404,7 @@
         </p:nvSpPr>
         <p:spPr>
           <a:xfrm>
-            <a:off x="2999232" y="3364992"/>
+            <a:off x="5742432" y="3364992"/>
             <a:ext cx="1645920" cy="475488"/>
           </a:xfrm>
           <a:prstGeom prst="rect">
@@ -25684,7 +26429,7 @@
                 <a:ea typeface="Trebuchet MS" pitchFamily="34" charset="-122"/>
                 <a:cs typeface="Trebuchet MS" pitchFamily="34" charset="-120"/>
               </a:rPr>
-              <a:t>con</a:t>
+              <a:t>ee</a:t>
             </a:r>
             <a:endParaRPr lang="en-US" sz="1400" dirty="0"/>
           </a:p>
@@ -25692,14 +26437,41 @@
       </p:sp>
       <p:sp>
         <p:nvSpPr>
-          <p:cNvPr id="30" name="Text 28"/>
-          <p:cNvSpPr/>
-          <p:nvPr/>
-        </p:nvSpPr>
-        <p:spPr>
-          <a:xfrm>
-            <a:off x="4645152" y="3364992"/>
-            <a:ext cx="1097280" cy="475488"/>
+          <p:cNvPr id="30" name="Shape 28"/>
+          <p:cNvSpPr/>
+          <p:nvPr/>
+        </p:nvSpPr>
+        <p:spPr>
+          <a:xfrm>
+            <a:off x="365760" y="4096512"/>
+            <a:ext cx="1371600" cy="804672"/>
+          </a:xfrm>
+          <a:prstGeom prst="rect">
+            <a:avLst>
+              <a:gd name="adj" fmla="val 6818"/>
+            </a:avLst>
+          </a:prstGeom>
+          <a:solidFill>
+            <a:srgbClr val="E2E8F0"/>
+          </a:solidFill>
+          <a:ln w="12700">
+            <a:solidFill>
+              <a:srgbClr val="E2E8F0"/>
+            </a:solidFill>
+            <a:prstDash val="solid"/>
+          </a:ln>
+        </p:spPr>
+      </p:sp>
+      <p:sp>
+        <p:nvSpPr>
+          <p:cNvPr id="31" name="Text 29"/>
+          <p:cNvSpPr/>
+          <p:nvPr/>
+        </p:nvSpPr>
+        <p:spPr>
+          <a:xfrm>
+            <a:off x="365760" y="4096512"/>
+            <a:ext cx="1371600" cy="804672"/>
           </a:xfrm>
           <a:prstGeom prst="rect">
             <a:avLst/>
@@ -25715,96 +26487,30 @@
               <a:buNone/>
             </a:pPr>
             <a:r>
-              <a:rPr lang="en-US" sz="1600" b="1" dirty="0">
-                <a:solidFill>
-                  <a:srgbClr val="0D9488"/>
+              <a:rPr lang="en-US" sz="1100" b="1" dirty="0">
+                <a:solidFill>
+                  <a:srgbClr val="475569"/>
                 </a:solidFill>
                 <a:latin typeface="Trebuchet MS" pitchFamily="34" charset="0"/>
                 <a:ea typeface="Trebuchet MS" pitchFamily="34" charset="-122"/>
                 <a:cs typeface="Trebuchet MS" pitchFamily="34" charset="-120"/>
               </a:rPr>
-              <a:t>·</a:t>
-            </a:r>
-            <a:endParaRPr lang="en-US" sz="1600" dirty="0"/>
-          </a:p>
-        </p:txBody>
-      </p:sp>
-      <p:sp>
-        <p:nvSpPr>
-          <p:cNvPr id="31" name="Shape 29"/>
-          <p:cNvSpPr/>
-          <p:nvPr/>
-        </p:nvSpPr>
-        <p:spPr>
-          <a:xfrm>
-            <a:off x="5742432" y="3364992"/>
-            <a:ext cx="1645920" cy="475488"/>
-          </a:xfrm>
-          <a:prstGeom prst="rect">
-            <a:avLst>
-              <a:gd name="adj" fmla="val 9615"/>
-            </a:avLst>
-          </a:prstGeom>
-          <a:solidFill>
-            <a:srgbClr val="FFFFFF"/>
-          </a:solidFill>
-          <a:ln w="12700">
-            <a:solidFill>
-              <a:srgbClr val="0D9488"/>
-            </a:solidFill>
-            <a:prstDash val="solid"/>
-          </a:ln>
-        </p:spPr>
-      </p:sp>
-      <p:sp>
-        <p:nvSpPr>
-          <p:cNvPr id="32" name="Text 30"/>
-          <p:cNvSpPr/>
-          <p:nvPr/>
-        </p:nvSpPr>
-        <p:spPr>
-          <a:xfrm>
-            <a:off x="5742432" y="3364992"/>
-            <a:ext cx="1645920" cy="475488"/>
-          </a:xfrm>
-          <a:prstGeom prst="rect">
-            <a:avLst/>
-          </a:prstGeom>
-          <a:noFill/>
-          <a:ln/>
-        </p:spPr>
-        <p:txBody>
-          <a:bodyPr wrap="square" lIns="0" tIns="0" rIns="0" bIns="0" rtlCol="0" anchor="ctr"/>
-          <a:lstStyle/>
-          <a:p>
-            <a:pPr algn="ctr" indent="0" marL="0">
-              <a:buNone/>
-            </a:pPr>
-            <a:r>
-              <a:rPr lang="en-US" sz="1400" b="1" dirty="0">
-                <a:solidFill>
-                  <a:srgbClr val="0D9488"/>
-                </a:solidFill>
-                <a:latin typeface="Trebuchet MS" pitchFamily="34" charset="0"/>
-                <a:ea typeface="Trebuchet MS" pitchFamily="34" charset="-122"/>
-                <a:cs typeface="Trebuchet MS" pitchFamily="34" charset="-120"/>
-              </a:rPr>
-              <a:t>straint</a:t>
-            </a:r>
-            <a:endParaRPr lang="en-US" sz="1400" dirty="0"/>
-          </a:p>
-        </p:txBody>
-      </p:sp>
-      <p:sp>
-        <p:nvSpPr>
-          <p:cNvPr id="33" name="Shape 31"/>
-          <p:cNvSpPr/>
-          <p:nvPr/>
-        </p:nvSpPr>
-        <p:spPr>
-          <a:xfrm>
-            <a:off x="365760" y="4096512"/>
-            <a:ext cx="1371600" cy="804672"/>
+              <a:t>Phonemes</a:t>
+            </a:r>
+            <a:endParaRPr lang="en-US" sz="1100" dirty="0"/>
+          </a:p>
+        </p:txBody>
+      </p:sp>
+      <p:sp>
+        <p:nvSpPr>
+          <p:cNvPr id="32" name="Shape 30"/>
+          <p:cNvSpPr/>
+          <p:nvPr/>
+        </p:nvSpPr>
+        <p:spPr>
+          <a:xfrm>
+            <a:off x="1874520" y="4096512"/>
+            <a:ext cx="6903720" cy="804672"/>
           </a:xfrm>
           <a:prstGeom prst="rect">
             <a:avLst>
@@ -25812,85 +26518,19 @@
             </a:avLst>
           </a:prstGeom>
           <a:solidFill>
-            <a:srgbClr val="E2E8F0"/>
+            <a:srgbClr val="F8FAFC"/>
           </a:solidFill>
           <a:ln w="12700">
             <a:solidFill>
               <a:srgbClr val="E2E8F0"/>
             </a:solidFill>
-            <a:prstDash val="solid"/>
-          </a:ln>
-        </p:spPr>
-      </p:sp>
-      <p:sp>
-        <p:nvSpPr>
-          <p:cNvPr id="34" name="Text 32"/>
-          <p:cNvSpPr/>
-          <p:nvPr/>
-        </p:nvSpPr>
-        <p:spPr>
-          <a:xfrm>
-            <a:off x="365760" y="4096512"/>
-            <a:ext cx="1371600" cy="804672"/>
-          </a:xfrm>
-          <a:prstGeom prst="rect">
-            <a:avLst/>
-          </a:prstGeom>
-          <a:noFill/>
-          <a:ln/>
-        </p:spPr>
-        <p:txBody>
-          <a:bodyPr wrap="square" lIns="0" tIns="0" rIns="0" bIns="0" rtlCol="0" anchor="ctr"/>
-          <a:lstStyle/>
-          <a:p>
-            <a:pPr algn="ctr" indent="0" marL="0">
-              <a:buNone/>
-            </a:pPr>
-            <a:r>
-              <a:rPr lang="en-US" sz="1100" b="1" dirty="0">
-                <a:solidFill>
-                  <a:srgbClr val="475569"/>
-                </a:solidFill>
-                <a:latin typeface="Trebuchet MS" pitchFamily="34" charset="0"/>
-                <a:ea typeface="Trebuchet MS" pitchFamily="34" charset="-122"/>
-                <a:cs typeface="Trebuchet MS" pitchFamily="34" charset="-120"/>
-              </a:rPr>
-              <a:t>Phonemes</a:t>
-            </a:r>
-            <a:endParaRPr lang="en-US" sz="1100" dirty="0"/>
-          </a:p>
-        </p:txBody>
-      </p:sp>
-      <p:sp>
-        <p:nvSpPr>
-          <p:cNvPr id="35" name="Shape 33"/>
-          <p:cNvSpPr/>
-          <p:nvPr/>
-        </p:nvSpPr>
-        <p:spPr>
-          <a:xfrm>
-            <a:off x="1874520" y="4096512"/>
-            <a:ext cx="6903720" cy="804672"/>
-          </a:xfrm>
-          <a:prstGeom prst="rect">
-            <a:avLst>
-              <a:gd name="adj" fmla="val 6818"/>
-            </a:avLst>
-          </a:prstGeom>
-          <a:solidFill>
-            <a:srgbClr val="F8FAFC"/>
-          </a:solidFill>
-          <a:ln w="12700">
-            <a:solidFill>
-              <a:srgbClr val="E2E8F0"/>
-            </a:solidFill>
             <a:prstDash val="dash"/>
           </a:ln>
         </p:spPr>
       </p:sp>
       <p:sp>
         <p:nvSpPr>
-          <p:cNvPr id="36" name="Text 34"/>
+          <p:cNvPr id="33" name="Text 31"/>
           <p:cNvSpPr/>
           <p:nvPr/>
         </p:nvSpPr>
@@ -26213,7 +26853,7 @@
                 <a:ea typeface="Calibri" pitchFamily="34" charset="-122"/>
                 <a:cs typeface="Calibri" pitchFamily="34" charset="-120"/>
               </a:rPr>
-              <a:t>Word Labs  •  wordlabs.app  •  Root: 'train' = to teach or draw along</a:t>
+              <a:t>Word Labs  •  wordlabs.app  •  Root: 'train' = to practise to improve; to teach</a:t>
             </a:r>
             <a:endParaRPr lang="en-US" sz="800" dirty="0"/>
           </a:p>
@@ -26352,7 +26992,7 @@
                 <a:ea typeface="Trebuchet MS" pitchFamily="34" charset="-122"/>
                 <a:cs typeface="Trebuchet MS" pitchFamily="34" charset="-120"/>
               </a:rPr>
-              <a:t>constraint</a:t>
+              <a:t>trainee</a:t>
             </a:r>
             <a:endParaRPr lang="en-US" sz="2800" dirty="0"/>
           </a:p>
@@ -26432,7 +27072,7 @@
         </p:nvSpPr>
         <p:spPr>
           <a:xfrm>
-            <a:off x="2221992" y="2258568"/>
+            <a:off x="2938272" y="2258568"/>
             <a:ext cx="1828800" cy="292608"/>
           </a:xfrm>
           <a:prstGeom prst="rect">
@@ -26441,11 +27081,11 @@
             </a:avLst>
           </a:prstGeom>
           <a:solidFill>
-            <a:srgbClr val="DDD6FE"/>
+            <a:srgbClr val="CCFBF1"/>
           </a:solidFill>
           <a:ln w="19050">
             <a:solidFill>
-              <a:srgbClr val="7C3AED"/>
+              <a:srgbClr val="0D9488"/>
             </a:solidFill>
             <a:prstDash val="solid"/>
           </a:ln>
@@ -26466,7 +27106,7 @@
         </p:nvSpPr>
         <p:spPr>
           <a:xfrm>
-            <a:off x="2221992" y="2258568"/>
+            <a:off x="2938272" y="2258568"/>
             <a:ext cx="1828800" cy="292608"/>
           </a:xfrm>
           <a:prstGeom prst="rect">
@@ -26485,13 +27125,13 @@
             <a:r>
               <a:rPr lang="en-US" sz="1300" b="1" dirty="0">
                 <a:solidFill>
-                  <a:srgbClr val="4C1D95"/>
+                  <a:srgbClr val="0F766E"/>
                 </a:solidFill>
                 <a:latin typeface="Trebuchet MS" pitchFamily="34" charset="0"/>
                 <a:ea typeface="Trebuchet MS" pitchFamily="34" charset="-122"/>
                 <a:cs typeface="Trebuchet MS" pitchFamily="34" charset="-120"/>
               </a:rPr>
-              <a:t>con</a:t>
+              <a:t>train</a:t>
             </a:r>
             <a:endParaRPr lang="en-US" sz="1300" dirty="0"/>
           </a:p>
@@ -26505,7 +27145,7 @@
         </p:nvSpPr>
         <p:spPr>
           <a:xfrm>
-            <a:off x="2221992" y="2569464"/>
+            <a:off x="2938272" y="2569464"/>
             <a:ext cx="1828800" cy="201168"/>
           </a:xfrm>
           <a:prstGeom prst="rect">
@@ -26530,7 +27170,7 @@
                 <a:ea typeface="Calibri" pitchFamily="34" charset="-122"/>
                 <a:cs typeface="Calibri" pitchFamily="34" charset="-120"/>
               </a:rPr>
-              <a:t>together or completely</a:t>
+              <a:t>to practise to improve; to teach</a:t>
             </a:r>
             <a:endParaRPr lang="en-US" sz="850" dirty="0"/>
           </a:p>
@@ -26544,7 +27184,7 @@
         </p:nvSpPr>
         <p:spPr>
           <a:xfrm>
-            <a:off x="4370832" y="2258568"/>
+            <a:off x="5803392" y="2258568"/>
             <a:ext cx="1828800" cy="292608"/>
           </a:xfrm>
           <a:prstGeom prst="rect">
@@ -26578,7 +27218,7 @@
         </p:nvSpPr>
         <p:spPr>
           <a:xfrm>
-            <a:off x="4370832" y="2258568"/>
+            <a:off x="5803392" y="2258568"/>
             <a:ext cx="1828800" cy="292608"/>
           </a:xfrm>
           <a:prstGeom prst="rect">
@@ -26603,7 +27243,7 @@
                 <a:ea typeface="Trebuchet MS" pitchFamily="34" charset="-122"/>
                 <a:cs typeface="Trebuchet MS" pitchFamily="34" charset="-120"/>
               </a:rPr>
-              <a:t>strain</a:t>
+              <a:t>ee</a:t>
             </a:r>
             <a:endParaRPr lang="en-US" sz="1300" dirty="0"/>
           </a:p>
@@ -26617,7 +27257,7 @@
         </p:nvSpPr>
         <p:spPr>
           <a:xfrm>
-            <a:off x="4370832" y="2569464"/>
+            <a:off x="5803392" y="2569464"/>
             <a:ext cx="1828800" cy="201168"/>
           </a:xfrm>
           <a:prstGeom prst="rect">
@@ -26642,7 +27282,7 @@
                 <a:ea typeface="Calibri" pitchFamily="34" charset="-122"/>
                 <a:cs typeface="Calibri" pitchFamily="34" charset="-120"/>
               </a:rPr>
-              <a:t>draw tight or pull</a:t>
+              <a:t>person who receives</a:t>
             </a:r>
             <a:endParaRPr lang="en-US" sz="850" dirty="0"/>
           </a:p>
@@ -26656,30 +27296,23 @@
         </p:nvSpPr>
         <p:spPr>
           <a:xfrm>
-            <a:off x="6519672" y="2258568"/>
-            <a:ext cx="1828800" cy="292608"/>
+            <a:off x="365760" y="3273552"/>
+            <a:ext cx="1371600" cy="658368"/>
           </a:xfrm>
           <a:prstGeom prst="rect">
             <a:avLst>
-              <a:gd name="adj" fmla="val 25000"/>
+              <a:gd name="adj" fmla="val 8333"/>
             </a:avLst>
           </a:prstGeom>
           <a:solidFill>
-            <a:srgbClr val="FCE7F3"/>
-          </a:solidFill>
-          <a:ln w="19050">
-            <a:solidFill>
-              <a:srgbClr val="DB2777"/>
-            </a:solidFill>
-            <a:prstDash val="solid"/>
-          </a:ln>
-          <a:effectLst>
-            <a:outerShdw sx="100000" sy="100000" kx="0" ky="0" algn="bl" rotWithShape="0" blurRad="101600" dist="38100" dir="8100000">
-              <a:srgbClr val="000000">
-                <a:alpha val="12000"/>
-              </a:srgbClr>
-            </a:outerShdw>
-          </a:effectLst>
+            <a:srgbClr val="E2E8F0"/>
+          </a:solidFill>
+          <a:ln w="12700">
+            <a:solidFill>
+              <a:srgbClr val="E2E8F0"/>
+            </a:solidFill>
+            <a:prstDash val="solid"/>
+          </a:ln>
         </p:spPr>
       </p:sp>
       <p:sp>
@@ -26690,8 +27323,8 @@
         </p:nvSpPr>
         <p:spPr>
           <a:xfrm>
-            <a:off x="6519672" y="2258568"/>
-            <a:ext cx="1828800" cy="292608"/>
+            <a:off x="365760" y="3273552"/>
+            <a:ext cx="1371600" cy="658368"/>
           </a:xfrm>
           <a:prstGeom prst="rect">
             <a:avLst/>
@@ -26707,69 +27340,30 @@
               <a:buNone/>
             </a:pPr>
             <a:r>
-              <a:rPr lang="en-US" sz="1300" b="1" dirty="0">
-                <a:solidFill>
-                  <a:srgbClr val="9D174D"/>
+              <a:rPr lang="en-US" sz="1100" b="1" dirty="0">
+                <a:solidFill>
+                  <a:srgbClr val="475569"/>
                 </a:solidFill>
                 <a:latin typeface="Trebuchet MS" pitchFamily="34" charset="0"/>
                 <a:ea typeface="Trebuchet MS" pitchFamily="34" charset="-122"/>
                 <a:cs typeface="Trebuchet MS" pitchFamily="34" charset="-120"/>
               </a:rPr>
-              <a:t>t</a:t>
-            </a:r>
-            <a:endParaRPr lang="en-US" sz="1300" dirty="0"/>
-          </a:p>
-        </p:txBody>
-      </p:sp>
-      <p:sp>
-        <p:nvSpPr>
-          <p:cNvPr id="24" name="Text 22"/>
-          <p:cNvSpPr/>
-          <p:nvPr/>
-        </p:nvSpPr>
-        <p:spPr>
-          <a:xfrm>
-            <a:off x="6519672" y="2569464"/>
-            <a:ext cx="1828800" cy="201168"/>
-          </a:xfrm>
-          <a:prstGeom prst="rect">
-            <a:avLst/>
-          </a:prstGeom>
-          <a:noFill/>
-          <a:ln/>
-        </p:spPr>
-        <p:txBody>
-          <a:bodyPr wrap="square" lIns="0" tIns="0" rIns="0" bIns="0" rtlCol="0" anchor="t"/>
-          <a:lstStyle/>
-          <a:p>
-            <a:pPr algn="ctr" indent="0" marL="0">
-              <a:buNone/>
-            </a:pPr>
-            <a:r>
-              <a:rPr lang="en-US" sz="850" dirty="0">
-                <a:solidFill>
-                  <a:srgbClr val="475569"/>
-                </a:solidFill>
-                <a:latin typeface="Calibri" pitchFamily="34" charset="0"/>
-                <a:ea typeface="Calibri" pitchFamily="34" charset="-122"/>
-                <a:cs typeface="Calibri" pitchFamily="34" charset="-120"/>
-              </a:rPr>
-              <a:t>noun-forming ending</a:t>
-            </a:r>
-            <a:endParaRPr lang="en-US" sz="850" dirty="0"/>
-          </a:p>
-        </p:txBody>
-      </p:sp>
-      <p:sp>
-        <p:nvSpPr>
-          <p:cNvPr id="25" name="Shape 23"/>
-          <p:cNvSpPr/>
-          <p:nvPr/>
-        </p:nvSpPr>
-        <p:spPr>
-          <a:xfrm>
-            <a:off x="365760" y="3273552"/>
-            <a:ext cx="1371600" cy="658368"/>
+              <a:t>Syllables</a:t>
+            </a:r>
+            <a:endParaRPr lang="en-US" sz="1100" dirty="0"/>
+          </a:p>
+        </p:txBody>
+      </p:sp>
+      <p:sp>
+        <p:nvSpPr>
+          <p:cNvPr id="24" name="Shape 22"/>
+          <p:cNvSpPr/>
+          <p:nvPr/>
+        </p:nvSpPr>
+        <p:spPr>
+          <a:xfrm>
+            <a:off x="1874520" y="3273552"/>
+            <a:ext cx="6903720" cy="658368"/>
           </a:xfrm>
           <a:prstGeom prst="rect">
             <a:avLst>
@@ -26777,11 +27371,38 @@
             </a:avLst>
           </a:prstGeom>
           <a:solidFill>
-            <a:srgbClr val="E2E8F0"/>
-          </a:solidFill>
-          <a:ln w="12700">
-            <a:solidFill>
-              <a:srgbClr val="E2E8F0"/>
+            <a:srgbClr val="CCFBF1"/>
+          </a:solidFill>
+          <a:ln w="12700">
+            <a:solidFill>
+              <a:srgbClr val="0D9488"/>
+            </a:solidFill>
+            <a:prstDash val="solid"/>
+          </a:ln>
+        </p:spPr>
+      </p:sp>
+      <p:sp>
+        <p:nvSpPr>
+          <p:cNvPr id="25" name="Shape 23"/>
+          <p:cNvSpPr/>
+          <p:nvPr/>
+        </p:nvSpPr>
+        <p:spPr>
+          <a:xfrm>
+            <a:off x="2999232" y="3364992"/>
+            <a:ext cx="1645920" cy="475488"/>
+          </a:xfrm>
+          <a:prstGeom prst="rect">
+            <a:avLst>
+              <a:gd name="adj" fmla="val 9615"/>
+            </a:avLst>
+          </a:prstGeom>
+          <a:solidFill>
+            <a:srgbClr val="FFFFFF"/>
+          </a:solidFill>
+          <a:ln w="12700">
+            <a:solidFill>
+              <a:srgbClr val="0D9488"/>
             </a:solidFill>
             <a:prstDash val="solid"/>
           </a:ln>
@@ -26795,8 +27416,8 @@
         </p:nvSpPr>
         <p:spPr>
           <a:xfrm>
-            <a:off x="365760" y="3273552"/>
-            <a:ext cx="1371600" cy="658368"/>
+            <a:off x="2999232" y="3364992"/>
+            <a:ext cx="1645920" cy="475488"/>
           </a:xfrm>
           <a:prstGeom prst="rect">
             <a:avLst/>
@@ -26812,15 +27433,186 @@
               <a:buNone/>
             </a:pPr>
             <a:r>
-              <a:rPr lang="en-US" sz="1100" b="1" dirty="0">
-                <a:solidFill>
-                  <a:srgbClr val="475569"/>
+              <a:rPr lang="en-US" sz="1400" b="1" dirty="0">
+                <a:solidFill>
+                  <a:srgbClr val="0D9488"/>
                 </a:solidFill>
                 <a:latin typeface="Trebuchet MS" pitchFamily="34" charset="0"/>
                 <a:ea typeface="Trebuchet MS" pitchFamily="34" charset="-122"/>
                 <a:cs typeface="Trebuchet MS" pitchFamily="34" charset="-120"/>
               </a:rPr>
-              <a:t>Syllables</a:t>
+              <a:t>train</a:t>
+            </a:r>
+            <a:endParaRPr lang="en-US" sz="1400" dirty="0"/>
+          </a:p>
+        </p:txBody>
+      </p:sp>
+      <p:sp>
+        <p:nvSpPr>
+          <p:cNvPr id="27" name="Text 25"/>
+          <p:cNvSpPr/>
+          <p:nvPr/>
+        </p:nvSpPr>
+        <p:spPr>
+          <a:xfrm>
+            <a:off x="4645152" y="3364992"/>
+            <a:ext cx="1097280" cy="475488"/>
+          </a:xfrm>
+          <a:prstGeom prst="rect">
+            <a:avLst/>
+          </a:prstGeom>
+          <a:noFill/>
+          <a:ln/>
+        </p:spPr>
+        <p:txBody>
+          <a:bodyPr wrap="square" lIns="0" tIns="0" rIns="0" bIns="0" rtlCol="0" anchor="ctr"/>
+          <a:lstStyle/>
+          <a:p>
+            <a:pPr algn="ctr" indent="0" marL="0">
+              <a:buNone/>
+            </a:pPr>
+            <a:r>
+              <a:rPr lang="en-US" sz="1600" b="1" dirty="0">
+                <a:solidFill>
+                  <a:srgbClr val="0D9488"/>
+                </a:solidFill>
+                <a:latin typeface="Trebuchet MS" pitchFamily="34" charset="0"/>
+                <a:ea typeface="Trebuchet MS" pitchFamily="34" charset="-122"/>
+                <a:cs typeface="Trebuchet MS" pitchFamily="34" charset="-120"/>
+              </a:rPr>
+              <a:t>·</a:t>
+            </a:r>
+            <a:endParaRPr lang="en-US" sz="1600" dirty="0"/>
+          </a:p>
+        </p:txBody>
+      </p:sp>
+      <p:sp>
+        <p:nvSpPr>
+          <p:cNvPr id="28" name="Shape 26"/>
+          <p:cNvSpPr/>
+          <p:nvPr/>
+        </p:nvSpPr>
+        <p:spPr>
+          <a:xfrm>
+            <a:off x="5742432" y="3364992"/>
+            <a:ext cx="1645920" cy="475488"/>
+          </a:xfrm>
+          <a:prstGeom prst="rect">
+            <a:avLst>
+              <a:gd name="adj" fmla="val 9615"/>
+            </a:avLst>
+          </a:prstGeom>
+          <a:solidFill>
+            <a:srgbClr val="FFFFFF"/>
+          </a:solidFill>
+          <a:ln w="12700">
+            <a:solidFill>
+              <a:srgbClr val="0D9488"/>
+            </a:solidFill>
+            <a:prstDash val="solid"/>
+          </a:ln>
+        </p:spPr>
+      </p:sp>
+      <p:sp>
+        <p:nvSpPr>
+          <p:cNvPr id="29" name="Text 27"/>
+          <p:cNvSpPr/>
+          <p:nvPr/>
+        </p:nvSpPr>
+        <p:spPr>
+          <a:xfrm>
+            <a:off x="5742432" y="3364992"/>
+            <a:ext cx="1645920" cy="475488"/>
+          </a:xfrm>
+          <a:prstGeom prst="rect">
+            <a:avLst/>
+          </a:prstGeom>
+          <a:noFill/>
+          <a:ln/>
+        </p:spPr>
+        <p:txBody>
+          <a:bodyPr wrap="square" lIns="0" tIns="0" rIns="0" bIns="0" rtlCol="0" anchor="ctr"/>
+          <a:lstStyle/>
+          <a:p>
+            <a:pPr algn="ctr" indent="0" marL="0">
+              <a:buNone/>
+            </a:pPr>
+            <a:r>
+              <a:rPr lang="en-US" sz="1400" b="1" dirty="0">
+                <a:solidFill>
+                  <a:srgbClr val="0D9488"/>
+                </a:solidFill>
+                <a:latin typeface="Trebuchet MS" pitchFamily="34" charset="0"/>
+                <a:ea typeface="Trebuchet MS" pitchFamily="34" charset="-122"/>
+                <a:cs typeface="Trebuchet MS" pitchFamily="34" charset="-120"/>
+              </a:rPr>
+              <a:t>ee</a:t>
+            </a:r>
+            <a:endParaRPr lang="en-US" sz="1400" dirty="0"/>
+          </a:p>
+        </p:txBody>
+      </p:sp>
+      <p:sp>
+        <p:nvSpPr>
+          <p:cNvPr id="30" name="Shape 28"/>
+          <p:cNvSpPr/>
+          <p:nvPr/>
+        </p:nvSpPr>
+        <p:spPr>
+          <a:xfrm>
+            <a:off x="365760" y="4096512"/>
+            <a:ext cx="1371600" cy="804672"/>
+          </a:xfrm>
+          <a:prstGeom prst="rect">
+            <a:avLst>
+              <a:gd name="adj" fmla="val 6818"/>
+            </a:avLst>
+          </a:prstGeom>
+          <a:solidFill>
+            <a:srgbClr val="E2E8F0"/>
+          </a:solidFill>
+          <a:ln w="12700">
+            <a:solidFill>
+              <a:srgbClr val="E2E8F0"/>
+            </a:solidFill>
+            <a:prstDash val="solid"/>
+          </a:ln>
+        </p:spPr>
+      </p:sp>
+      <p:sp>
+        <p:nvSpPr>
+          <p:cNvPr id="31" name="Text 29"/>
+          <p:cNvSpPr/>
+          <p:nvPr/>
+        </p:nvSpPr>
+        <p:spPr>
+          <a:xfrm>
+            <a:off x="365760" y="4096512"/>
+            <a:ext cx="1371600" cy="804672"/>
+          </a:xfrm>
+          <a:prstGeom prst="rect">
+            <a:avLst/>
+          </a:prstGeom>
+          <a:noFill/>
+          <a:ln/>
+        </p:spPr>
+        <p:txBody>
+          <a:bodyPr wrap="square" lIns="0" tIns="0" rIns="0" bIns="0" rtlCol="0" anchor="ctr"/>
+          <a:lstStyle/>
+          <a:p>
+            <a:pPr algn="ctr" indent="0" marL="0">
+              <a:buNone/>
+            </a:pPr>
+            <a:r>
+              <a:rPr lang="en-US" sz="1100" b="1" dirty="0">
+                <a:solidFill>
+                  <a:srgbClr val="475569"/>
+                </a:solidFill>
+                <a:latin typeface="Trebuchet MS" pitchFamily="34" charset="0"/>
+                <a:ea typeface="Trebuchet MS" pitchFamily="34" charset="-122"/>
+                <a:cs typeface="Trebuchet MS" pitchFamily="34" charset="-120"/>
+              </a:rPr>
+              <a:t>Phonemes</a:t>
             </a:r>
             <a:endParaRPr lang="en-US" sz="1100" dirty="0"/>
           </a:p>
@@ -26828,13 +27620,13 @@
       </p:sp>
       <p:sp>
         <p:nvSpPr>
-          <p:cNvPr id="27" name="Shape 25"/>
-          <p:cNvSpPr/>
-          <p:nvPr/>
-        </p:nvSpPr>
-        <p:spPr>
-          <a:xfrm>
-            <a:off x="1874520" y="3273552"/>
+          <p:cNvPr id="32" name="Shape 30"/>
+          <p:cNvSpPr/>
+          <p:nvPr/>
+        </p:nvSpPr>
+        <p:spPr>
+          <a:xfrm>
+            <a:off x="1874520" y="4096512"/>
             <a:ext cx="6903720" cy="658368"/>
           </a:xfrm>
           <a:prstGeom prst="rect">
@@ -26843,30 +27635,30 @@
             </a:avLst>
           </a:prstGeom>
           <a:solidFill>
-            <a:srgbClr val="CCFBF1"/>
-          </a:solidFill>
-          <a:ln w="12700">
-            <a:solidFill>
-              <a:srgbClr val="0D9488"/>
-            </a:solidFill>
-            <a:prstDash val="solid"/>
-          </a:ln>
-        </p:spPr>
-      </p:sp>
-      <p:sp>
-        <p:nvSpPr>
-          <p:cNvPr id="28" name="Shape 26"/>
-          <p:cNvSpPr/>
-          <p:nvPr/>
-        </p:nvSpPr>
-        <p:spPr>
-          <a:xfrm>
-            <a:off x="2999232" y="3364992"/>
-            <a:ext cx="1645920" cy="475488"/>
+            <a:srgbClr val="FCE7F3"/>
+          </a:solidFill>
+          <a:ln w="12700">
+            <a:solidFill>
+              <a:srgbClr val="DB2777"/>
+            </a:solidFill>
+            <a:prstDash val="solid"/>
+          </a:ln>
+        </p:spPr>
+      </p:sp>
+      <p:sp>
+        <p:nvSpPr>
+          <p:cNvPr id="33" name="Shape 31"/>
+          <p:cNvSpPr/>
+          <p:nvPr/>
+        </p:nvSpPr>
+        <p:spPr>
+          <a:xfrm>
+            <a:off x="2427732" y="4169664"/>
+            <a:ext cx="685800" cy="475488"/>
           </a:xfrm>
           <a:prstGeom prst="rect">
             <a:avLst>
-              <a:gd name="adj" fmla="val 9615"/>
+              <a:gd name="adj" fmla="val 7692"/>
             </a:avLst>
           </a:prstGeom>
           <a:solidFill>
@@ -26874,22 +27666,22 @@
           </a:solidFill>
           <a:ln w="12700">
             <a:solidFill>
-              <a:srgbClr val="0D9488"/>
-            </a:solidFill>
-            <a:prstDash val="solid"/>
-          </a:ln>
-        </p:spPr>
-      </p:sp>
-      <p:sp>
-        <p:nvSpPr>
-          <p:cNvPr id="29" name="Text 27"/>
-          <p:cNvSpPr/>
-          <p:nvPr/>
-        </p:nvSpPr>
-        <p:spPr>
-          <a:xfrm>
-            <a:off x="2999232" y="3364992"/>
-            <a:ext cx="1645920" cy="475488"/>
+              <a:srgbClr val="DB2777"/>
+            </a:solidFill>
+            <a:prstDash val="solid"/>
+          </a:ln>
+        </p:spPr>
+      </p:sp>
+      <p:sp>
+        <p:nvSpPr>
+          <p:cNvPr id="34" name="Text 32"/>
+          <p:cNvSpPr/>
+          <p:nvPr/>
+        </p:nvSpPr>
+        <p:spPr>
+          <a:xfrm>
+            <a:off x="2427732" y="4169664"/>
+            <a:ext cx="685800" cy="475488"/>
           </a:xfrm>
           <a:prstGeom prst="rect">
             <a:avLst/>
@@ -26905,30 +27697,57 @@
               <a:buNone/>
             </a:pPr>
             <a:r>
-              <a:rPr lang="en-US" sz="1400" b="1" dirty="0">
-                <a:solidFill>
-                  <a:srgbClr val="0D9488"/>
+              <a:rPr lang="en-US" sz="900" b="1" dirty="0">
+                <a:solidFill>
+                  <a:srgbClr val="9D174D"/>
                 </a:solidFill>
                 <a:latin typeface="Trebuchet MS" pitchFamily="34" charset="0"/>
                 <a:ea typeface="Trebuchet MS" pitchFamily="34" charset="-122"/>
                 <a:cs typeface="Trebuchet MS" pitchFamily="34" charset="-120"/>
               </a:rPr>
-              <a:t>con</a:t>
-            </a:r>
-            <a:endParaRPr lang="en-US" sz="1400" dirty="0"/>
-          </a:p>
-        </p:txBody>
-      </p:sp>
-      <p:sp>
-        <p:nvSpPr>
-          <p:cNvPr id="30" name="Text 28"/>
-          <p:cNvSpPr/>
-          <p:nvPr/>
-        </p:nvSpPr>
-        <p:spPr>
-          <a:xfrm>
-            <a:off x="4645152" y="3364992"/>
-            <a:ext cx="1097280" cy="475488"/>
+              <a:t>t</a:t>
+            </a:r>
+            <a:endParaRPr lang="en-US" sz="900" dirty="0"/>
+          </a:p>
+        </p:txBody>
+      </p:sp>
+      <p:sp>
+        <p:nvSpPr>
+          <p:cNvPr id="35" name="Shape 33"/>
+          <p:cNvSpPr/>
+          <p:nvPr/>
+        </p:nvSpPr>
+        <p:spPr>
+          <a:xfrm>
+            <a:off x="3639312" y="4169664"/>
+            <a:ext cx="685800" cy="475488"/>
+          </a:xfrm>
+          <a:prstGeom prst="rect">
+            <a:avLst>
+              <a:gd name="adj" fmla="val 7692"/>
+            </a:avLst>
+          </a:prstGeom>
+          <a:solidFill>
+            <a:srgbClr val="FFFFFF"/>
+          </a:solidFill>
+          <a:ln w="12700">
+            <a:solidFill>
+              <a:srgbClr val="DB2777"/>
+            </a:solidFill>
+            <a:prstDash val="solid"/>
+          </a:ln>
+        </p:spPr>
+      </p:sp>
+      <p:sp>
+        <p:nvSpPr>
+          <p:cNvPr id="36" name="Text 34"/>
+          <p:cNvSpPr/>
+          <p:nvPr/>
+        </p:nvSpPr>
+        <p:spPr>
+          <a:xfrm>
+            <a:off x="3639312" y="4169664"/>
+            <a:ext cx="685800" cy="475488"/>
           </a:xfrm>
           <a:prstGeom prst="rect">
             <a:avLst/>
@@ -26944,34 +27763,34 @@
               <a:buNone/>
             </a:pPr>
             <a:r>
-              <a:rPr lang="en-US" sz="1600" b="1" dirty="0">
-                <a:solidFill>
-                  <a:srgbClr val="0D9488"/>
+              <a:rPr lang="en-US" sz="900" b="1" dirty="0">
+                <a:solidFill>
+                  <a:srgbClr val="9D174D"/>
                 </a:solidFill>
                 <a:latin typeface="Trebuchet MS" pitchFamily="34" charset="0"/>
                 <a:ea typeface="Trebuchet MS" pitchFamily="34" charset="-122"/>
                 <a:cs typeface="Trebuchet MS" pitchFamily="34" charset="-120"/>
               </a:rPr>
-              <a:t>·</a:t>
-            </a:r>
-            <a:endParaRPr lang="en-US" sz="1600" dirty="0"/>
-          </a:p>
-        </p:txBody>
-      </p:sp>
-      <p:sp>
-        <p:nvSpPr>
-          <p:cNvPr id="31" name="Shape 29"/>
-          <p:cNvSpPr/>
-          <p:nvPr/>
-        </p:nvSpPr>
-        <p:spPr>
-          <a:xfrm>
-            <a:off x="5742432" y="3364992"/>
-            <a:ext cx="1645920" cy="475488"/>
+              <a:t>r</a:t>
+            </a:r>
+            <a:endParaRPr lang="en-US" sz="900" dirty="0"/>
+          </a:p>
+        </p:txBody>
+      </p:sp>
+      <p:sp>
+        <p:nvSpPr>
+          <p:cNvPr id="37" name="Shape 35"/>
+          <p:cNvSpPr/>
+          <p:nvPr/>
+        </p:nvSpPr>
+        <p:spPr>
+          <a:xfrm>
+            <a:off x="4850892" y="4169664"/>
+            <a:ext cx="685800" cy="475488"/>
           </a:xfrm>
           <a:prstGeom prst="rect">
             <a:avLst>
-              <a:gd name="adj" fmla="val 9615"/>
+              <a:gd name="adj" fmla="val 7692"/>
             </a:avLst>
           </a:prstGeom>
           <a:solidFill>
@@ -26979,22 +27798,22 @@
           </a:solidFill>
           <a:ln w="12700">
             <a:solidFill>
-              <a:srgbClr val="0D9488"/>
-            </a:solidFill>
-            <a:prstDash val="solid"/>
-          </a:ln>
-        </p:spPr>
-      </p:sp>
-      <p:sp>
-        <p:nvSpPr>
-          <p:cNvPr id="32" name="Text 30"/>
-          <p:cNvSpPr/>
-          <p:nvPr/>
-        </p:nvSpPr>
-        <p:spPr>
-          <a:xfrm>
-            <a:off x="5742432" y="3364992"/>
-            <a:ext cx="1645920" cy="475488"/>
+              <a:srgbClr val="DB2777"/>
+            </a:solidFill>
+            <a:prstDash val="solid"/>
+          </a:ln>
+        </p:spPr>
+      </p:sp>
+      <p:sp>
+        <p:nvSpPr>
+          <p:cNvPr id="38" name="Text 36"/>
+          <p:cNvSpPr/>
+          <p:nvPr/>
+        </p:nvSpPr>
+        <p:spPr>
+          <a:xfrm>
+            <a:off x="4850892" y="4169664"/>
+            <a:ext cx="685800" cy="475488"/>
           </a:xfrm>
           <a:prstGeom prst="rect">
             <a:avLst/>
@@ -27010,57 +27829,57 @@
               <a:buNone/>
             </a:pPr>
             <a:r>
-              <a:rPr lang="en-US" sz="1400" b="1" dirty="0">
-                <a:solidFill>
-                  <a:srgbClr val="0D9488"/>
+              <a:rPr lang="en-US" sz="900" b="1" dirty="0">
+                <a:solidFill>
+                  <a:srgbClr val="9D174D"/>
                 </a:solidFill>
                 <a:latin typeface="Trebuchet MS" pitchFamily="34" charset="0"/>
                 <a:ea typeface="Trebuchet MS" pitchFamily="34" charset="-122"/>
                 <a:cs typeface="Trebuchet MS" pitchFamily="34" charset="-120"/>
               </a:rPr>
-              <a:t>straint</a:t>
-            </a:r>
-            <a:endParaRPr lang="en-US" sz="1400" dirty="0"/>
-          </a:p>
-        </p:txBody>
-      </p:sp>
-      <p:sp>
-        <p:nvSpPr>
-          <p:cNvPr id="33" name="Shape 31"/>
-          <p:cNvSpPr/>
-          <p:nvPr/>
-        </p:nvSpPr>
-        <p:spPr>
-          <a:xfrm>
-            <a:off x="365760" y="4096512"/>
-            <a:ext cx="1371600" cy="804672"/>
+              <a:t>ai</a:t>
+            </a:r>
+            <a:endParaRPr lang="en-US" sz="900" dirty="0"/>
+          </a:p>
+        </p:txBody>
+      </p:sp>
+      <p:sp>
+        <p:nvSpPr>
+          <p:cNvPr id="39" name="Shape 37"/>
+          <p:cNvSpPr/>
+          <p:nvPr/>
+        </p:nvSpPr>
+        <p:spPr>
+          <a:xfrm>
+            <a:off x="6062472" y="4169664"/>
+            <a:ext cx="685800" cy="475488"/>
           </a:xfrm>
           <a:prstGeom prst="rect">
             <a:avLst>
-              <a:gd name="adj" fmla="val 6818"/>
+              <a:gd name="adj" fmla="val 7692"/>
             </a:avLst>
           </a:prstGeom>
           <a:solidFill>
-            <a:srgbClr val="E2E8F0"/>
-          </a:solidFill>
-          <a:ln w="12700">
-            <a:solidFill>
-              <a:srgbClr val="E2E8F0"/>
-            </a:solidFill>
-            <a:prstDash val="solid"/>
-          </a:ln>
-        </p:spPr>
-      </p:sp>
-      <p:sp>
-        <p:nvSpPr>
-          <p:cNvPr id="34" name="Text 32"/>
-          <p:cNvSpPr/>
-          <p:nvPr/>
-        </p:nvSpPr>
-        <p:spPr>
-          <a:xfrm>
-            <a:off x="365760" y="4096512"/>
-            <a:ext cx="1371600" cy="804672"/>
+            <a:srgbClr val="FFFFFF"/>
+          </a:solidFill>
+          <a:ln w="12700">
+            <a:solidFill>
+              <a:srgbClr val="DB2777"/>
+            </a:solidFill>
+            <a:prstDash val="solid"/>
+          </a:ln>
+        </p:spPr>
+      </p:sp>
+      <p:sp>
+        <p:nvSpPr>
+          <p:cNvPr id="40" name="Text 38"/>
+          <p:cNvSpPr/>
+          <p:nvPr/>
+        </p:nvSpPr>
+        <p:spPr>
+          <a:xfrm>
+            <a:off x="6062472" y="4169664"/>
+            <a:ext cx="685800" cy="475488"/>
           </a:xfrm>
           <a:prstGeom prst="rect">
             <a:avLst/>
@@ -27076,38 +27895,38 @@
               <a:buNone/>
             </a:pPr>
             <a:r>
-              <a:rPr lang="en-US" sz="1100" b="1" dirty="0">
-                <a:solidFill>
-                  <a:srgbClr val="475569"/>
+              <a:rPr lang="en-US" sz="900" b="1" dirty="0">
+                <a:solidFill>
+                  <a:srgbClr val="9D174D"/>
                 </a:solidFill>
                 <a:latin typeface="Trebuchet MS" pitchFamily="34" charset="0"/>
                 <a:ea typeface="Trebuchet MS" pitchFamily="34" charset="-122"/>
                 <a:cs typeface="Trebuchet MS" pitchFamily="34" charset="-120"/>
               </a:rPr>
-              <a:t>Phonemes</a:t>
-            </a:r>
-            <a:endParaRPr lang="en-US" sz="1100" dirty="0"/>
-          </a:p>
-        </p:txBody>
-      </p:sp>
-      <p:sp>
-        <p:nvSpPr>
-          <p:cNvPr id="35" name="Shape 33"/>
-          <p:cNvSpPr/>
-          <p:nvPr/>
-        </p:nvSpPr>
-        <p:spPr>
-          <a:xfrm>
-            <a:off x="1874520" y="4096512"/>
-            <a:ext cx="6903720" cy="804672"/>
+              <a:t>n</a:t>
+            </a:r>
+            <a:endParaRPr lang="en-US" sz="900" dirty="0"/>
+          </a:p>
+        </p:txBody>
+      </p:sp>
+      <p:sp>
+        <p:nvSpPr>
+          <p:cNvPr id="41" name="Shape 39"/>
+          <p:cNvSpPr/>
+          <p:nvPr/>
+        </p:nvSpPr>
+        <p:spPr>
+          <a:xfrm>
+            <a:off x="7274052" y="4169664"/>
+            <a:ext cx="685800" cy="475488"/>
           </a:xfrm>
           <a:prstGeom prst="rect">
             <a:avLst>
-              <a:gd name="adj" fmla="val 6818"/>
+              <a:gd name="adj" fmla="val 7692"/>
             </a:avLst>
           </a:prstGeom>
           <a:solidFill>
-            <a:srgbClr val="FCE7F3"/>
+            <a:srgbClr val="FFFFFF"/>
           </a:solidFill>
           <a:ln w="12700">
             <a:solidFill>
@@ -27119,41 +27938,14 @@
       </p:sp>
       <p:sp>
         <p:nvSpPr>
-          <p:cNvPr id="36" name="Shape 34"/>
-          <p:cNvSpPr/>
-          <p:nvPr/>
-        </p:nvSpPr>
-        <p:spPr>
-          <a:xfrm>
-            <a:off x="2124837" y="4169664"/>
-            <a:ext cx="685800" cy="384048"/>
-          </a:xfrm>
-          <a:prstGeom prst="rect">
-            <a:avLst>
-              <a:gd name="adj" fmla="val 9524"/>
-            </a:avLst>
-          </a:prstGeom>
-          <a:solidFill>
-            <a:srgbClr val="FFFFFF"/>
-          </a:solidFill>
-          <a:ln w="12700">
-            <a:solidFill>
-              <a:srgbClr val="DB2777"/>
-            </a:solidFill>
-            <a:prstDash val="solid"/>
-          </a:ln>
-        </p:spPr>
-      </p:sp>
-      <p:sp>
-        <p:nvSpPr>
-          <p:cNvPr id="37" name="Text 35"/>
-          <p:cNvSpPr/>
-          <p:nvPr/>
-        </p:nvSpPr>
-        <p:spPr>
-          <a:xfrm>
-            <a:off x="2124837" y="4169664"/>
-            <a:ext cx="685800" cy="384048"/>
+          <p:cNvPr id="42" name="Text 40"/>
+          <p:cNvSpPr/>
+          <p:nvPr/>
+        </p:nvSpPr>
+        <p:spPr>
+          <a:xfrm>
+            <a:off x="7274052" y="4169664"/>
+            <a:ext cx="685800" cy="475488"/>
           </a:xfrm>
           <a:prstGeom prst="rect">
             <a:avLst/>
@@ -27177,442 +27969,7 @@
                 <a:ea typeface="Trebuchet MS" pitchFamily="34" charset="-122"/>
                 <a:cs typeface="Trebuchet MS" pitchFamily="34" charset="-120"/>
               </a:rPr>
-              <a:t>c</a:t>
-            </a:r>
-            <a:endParaRPr lang="en-US" sz="900" dirty="0"/>
-          </a:p>
-        </p:txBody>
-      </p:sp>
-      <p:sp>
-        <p:nvSpPr>
-          <p:cNvPr id="38" name="Text 36"/>
-          <p:cNvSpPr/>
-          <p:nvPr/>
-        </p:nvSpPr>
-        <p:spPr>
-          <a:xfrm>
-            <a:off x="2124837" y="4572000"/>
-            <a:ext cx="685800" cy="219456"/>
-          </a:xfrm>
-          <a:prstGeom prst="rect">
-            <a:avLst/>
-          </a:prstGeom>
-          <a:noFill/>
-          <a:ln/>
-        </p:spPr>
-        <p:txBody>
-          <a:bodyPr wrap="square" lIns="0" tIns="0" rIns="0" bIns="0" rtlCol="0" anchor="t"/>
-          <a:lstStyle/>
-          <a:p>
-            <a:pPr algn="ctr" indent="0" marL="0">
-              <a:buNone/>
-            </a:pPr>
-            <a:r>
-              <a:rPr lang="en-US" sz="750" i="1" dirty="0">
-                <a:solidFill>
-                  <a:srgbClr val="94A3B8"/>
-                </a:solidFill>
-                <a:latin typeface="Calibri" pitchFamily="34" charset="0"/>
-                <a:ea typeface="Calibri" pitchFamily="34" charset="-122"/>
-                <a:cs typeface="Calibri" pitchFamily="34" charset="-120"/>
-              </a:rPr>
-              <a:t>/k/</a:t>
-            </a:r>
-            <a:endParaRPr lang="en-US" sz="750" dirty="0"/>
-          </a:p>
-        </p:txBody>
-      </p:sp>
-      <p:sp>
-        <p:nvSpPr>
-          <p:cNvPr id="39" name="Shape 37"/>
-          <p:cNvSpPr/>
-          <p:nvPr/>
-        </p:nvSpPr>
-        <p:spPr>
-          <a:xfrm>
-            <a:off x="3033522" y="4169664"/>
-            <a:ext cx="685800" cy="384048"/>
-          </a:xfrm>
-          <a:prstGeom prst="rect">
-            <a:avLst>
-              <a:gd name="adj" fmla="val 9524"/>
-            </a:avLst>
-          </a:prstGeom>
-          <a:solidFill>
-            <a:srgbClr val="FFFFFF"/>
-          </a:solidFill>
-          <a:ln w="12700">
-            <a:solidFill>
-              <a:srgbClr val="DB2777"/>
-            </a:solidFill>
-            <a:prstDash val="solid"/>
-          </a:ln>
-        </p:spPr>
-      </p:sp>
-      <p:sp>
-        <p:nvSpPr>
-          <p:cNvPr id="40" name="Text 38"/>
-          <p:cNvSpPr/>
-          <p:nvPr/>
-        </p:nvSpPr>
-        <p:spPr>
-          <a:xfrm>
-            <a:off x="3033522" y="4169664"/>
-            <a:ext cx="685800" cy="384048"/>
-          </a:xfrm>
-          <a:prstGeom prst="rect">
-            <a:avLst/>
-          </a:prstGeom>
-          <a:noFill/>
-          <a:ln/>
-        </p:spPr>
-        <p:txBody>
-          <a:bodyPr wrap="square" lIns="0" tIns="0" rIns="0" bIns="0" rtlCol="0" anchor="ctr"/>
-          <a:lstStyle/>
-          <a:p>
-            <a:pPr algn="ctr" indent="0" marL="0">
-              <a:buNone/>
-            </a:pPr>
-            <a:r>
-              <a:rPr lang="en-US" sz="900" b="1" dirty="0">
-                <a:solidFill>
-                  <a:srgbClr val="9D174D"/>
-                </a:solidFill>
-                <a:latin typeface="Trebuchet MS" pitchFamily="34" charset="0"/>
-                <a:ea typeface="Trebuchet MS" pitchFamily="34" charset="-122"/>
-                <a:cs typeface="Trebuchet MS" pitchFamily="34" charset="-120"/>
-              </a:rPr>
-              <a:t>o</a:t>
-            </a:r>
-            <a:endParaRPr lang="en-US" sz="900" dirty="0"/>
-          </a:p>
-        </p:txBody>
-      </p:sp>
-      <p:sp>
-        <p:nvSpPr>
-          <p:cNvPr id="41" name="Shape 39"/>
-          <p:cNvSpPr/>
-          <p:nvPr/>
-        </p:nvSpPr>
-        <p:spPr>
-          <a:xfrm>
-            <a:off x="3942207" y="4169664"/>
-            <a:ext cx="685800" cy="384048"/>
-          </a:xfrm>
-          <a:prstGeom prst="rect">
-            <a:avLst>
-              <a:gd name="adj" fmla="val 9524"/>
-            </a:avLst>
-          </a:prstGeom>
-          <a:solidFill>
-            <a:srgbClr val="FFFFFF"/>
-          </a:solidFill>
-          <a:ln w="12700">
-            <a:solidFill>
-              <a:srgbClr val="DB2777"/>
-            </a:solidFill>
-            <a:prstDash val="solid"/>
-          </a:ln>
-        </p:spPr>
-      </p:sp>
-      <p:sp>
-        <p:nvSpPr>
-          <p:cNvPr id="42" name="Text 40"/>
-          <p:cNvSpPr/>
-          <p:nvPr/>
-        </p:nvSpPr>
-        <p:spPr>
-          <a:xfrm>
-            <a:off x="3942207" y="4169664"/>
-            <a:ext cx="685800" cy="384048"/>
-          </a:xfrm>
-          <a:prstGeom prst="rect">
-            <a:avLst/>
-          </a:prstGeom>
-          <a:noFill/>
-          <a:ln/>
-        </p:spPr>
-        <p:txBody>
-          <a:bodyPr wrap="square" lIns="0" tIns="0" rIns="0" bIns="0" rtlCol="0" anchor="ctr"/>
-          <a:lstStyle/>
-          <a:p>
-            <a:pPr algn="ctr" indent="0" marL="0">
-              <a:buNone/>
-            </a:pPr>
-            <a:r>
-              <a:rPr lang="en-US" sz="900" b="1" dirty="0">
-                <a:solidFill>
-                  <a:srgbClr val="9D174D"/>
-                </a:solidFill>
-                <a:latin typeface="Trebuchet MS" pitchFamily="34" charset="0"/>
-                <a:ea typeface="Trebuchet MS" pitchFamily="34" charset="-122"/>
-                <a:cs typeface="Trebuchet MS" pitchFamily="34" charset="-120"/>
-              </a:rPr>
-              <a:t>n</a:t>
-            </a:r>
-            <a:endParaRPr lang="en-US" sz="900" dirty="0"/>
-          </a:p>
-        </p:txBody>
-      </p:sp>
-      <p:sp>
-        <p:nvSpPr>
-          <p:cNvPr id="43" name="Shape 41"/>
-          <p:cNvSpPr/>
-          <p:nvPr/>
-        </p:nvSpPr>
-        <p:spPr>
-          <a:xfrm>
-            <a:off x="4850892" y="4169664"/>
-            <a:ext cx="685800" cy="384048"/>
-          </a:xfrm>
-          <a:prstGeom prst="rect">
-            <a:avLst>
-              <a:gd name="adj" fmla="val 9524"/>
-            </a:avLst>
-          </a:prstGeom>
-          <a:solidFill>
-            <a:srgbClr val="FFFFFF"/>
-          </a:solidFill>
-          <a:ln w="12700">
-            <a:solidFill>
-              <a:srgbClr val="DB2777"/>
-            </a:solidFill>
-            <a:prstDash val="solid"/>
-          </a:ln>
-        </p:spPr>
-      </p:sp>
-      <p:sp>
-        <p:nvSpPr>
-          <p:cNvPr id="44" name="Text 42"/>
-          <p:cNvSpPr/>
-          <p:nvPr/>
-        </p:nvSpPr>
-        <p:spPr>
-          <a:xfrm>
-            <a:off x="4850892" y="4169664"/>
-            <a:ext cx="685800" cy="384048"/>
-          </a:xfrm>
-          <a:prstGeom prst="rect">
-            <a:avLst/>
-          </a:prstGeom>
-          <a:noFill/>
-          <a:ln/>
-        </p:spPr>
-        <p:txBody>
-          <a:bodyPr wrap="square" lIns="0" tIns="0" rIns="0" bIns="0" rtlCol="0" anchor="ctr"/>
-          <a:lstStyle/>
-          <a:p>
-            <a:pPr algn="ctr" indent="0" marL="0">
-              <a:buNone/>
-            </a:pPr>
-            <a:r>
-              <a:rPr lang="en-US" sz="900" b="1" dirty="0">
-                <a:solidFill>
-                  <a:srgbClr val="9D174D"/>
-                </a:solidFill>
-                <a:latin typeface="Trebuchet MS" pitchFamily="34" charset="0"/>
-                <a:ea typeface="Trebuchet MS" pitchFamily="34" charset="-122"/>
-                <a:cs typeface="Trebuchet MS" pitchFamily="34" charset="-120"/>
-              </a:rPr>
-              <a:t>str</a:t>
-            </a:r>
-            <a:endParaRPr lang="en-US" sz="900" dirty="0"/>
-          </a:p>
-        </p:txBody>
-      </p:sp>
-      <p:sp>
-        <p:nvSpPr>
-          <p:cNvPr id="45" name="Shape 43"/>
-          <p:cNvSpPr/>
-          <p:nvPr/>
-        </p:nvSpPr>
-        <p:spPr>
-          <a:xfrm>
-            <a:off x="5759577" y="4169664"/>
-            <a:ext cx="685800" cy="384048"/>
-          </a:xfrm>
-          <a:prstGeom prst="rect">
-            <a:avLst>
-              <a:gd name="adj" fmla="val 9524"/>
-            </a:avLst>
-          </a:prstGeom>
-          <a:solidFill>
-            <a:srgbClr val="FFFFFF"/>
-          </a:solidFill>
-          <a:ln w="12700">
-            <a:solidFill>
-              <a:srgbClr val="DB2777"/>
-            </a:solidFill>
-            <a:prstDash val="solid"/>
-          </a:ln>
-        </p:spPr>
-      </p:sp>
-      <p:sp>
-        <p:nvSpPr>
-          <p:cNvPr id="46" name="Text 44"/>
-          <p:cNvSpPr/>
-          <p:nvPr/>
-        </p:nvSpPr>
-        <p:spPr>
-          <a:xfrm>
-            <a:off x="5759577" y="4169664"/>
-            <a:ext cx="685800" cy="384048"/>
-          </a:xfrm>
-          <a:prstGeom prst="rect">
-            <a:avLst/>
-          </a:prstGeom>
-          <a:noFill/>
-          <a:ln/>
-        </p:spPr>
-        <p:txBody>
-          <a:bodyPr wrap="square" lIns="0" tIns="0" rIns="0" bIns="0" rtlCol="0" anchor="ctr"/>
-          <a:lstStyle/>
-          <a:p>
-            <a:pPr algn="ctr" indent="0" marL="0">
-              <a:buNone/>
-            </a:pPr>
-            <a:r>
-              <a:rPr lang="en-US" sz="900" b="1" dirty="0">
-                <a:solidFill>
-                  <a:srgbClr val="9D174D"/>
-                </a:solidFill>
-                <a:latin typeface="Trebuchet MS" pitchFamily="34" charset="0"/>
-                <a:ea typeface="Trebuchet MS" pitchFamily="34" charset="-122"/>
-                <a:cs typeface="Trebuchet MS" pitchFamily="34" charset="-120"/>
-              </a:rPr>
-              <a:t>ai</a:t>
-            </a:r>
-            <a:endParaRPr lang="en-US" sz="900" dirty="0"/>
-          </a:p>
-        </p:txBody>
-      </p:sp>
-      <p:sp>
-        <p:nvSpPr>
-          <p:cNvPr id="47" name="Shape 45"/>
-          <p:cNvSpPr/>
-          <p:nvPr/>
-        </p:nvSpPr>
-        <p:spPr>
-          <a:xfrm>
-            <a:off x="6668262" y="4169664"/>
-            <a:ext cx="685800" cy="384048"/>
-          </a:xfrm>
-          <a:prstGeom prst="rect">
-            <a:avLst>
-              <a:gd name="adj" fmla="val 9524"/>
-            </a:avLst>
-          </a:prstGeom>
-          <a:solidFill>
-            <a:srgbClr val="FFFFFF"/>
-          </a:solidFill>
-          <a:ln w="12700">
-            <a:solidFill>
-              <a:srgbClr val="DB2777"/>
-            </a:solidFill>
-            <a:prstDash val="solid"/>
-          </a:ln>
-        </p:spPr>
-      </p:sp>
-      <p:sp>
-        <p:nvSpPr>
-          <p:cNvPr id="48" name="Text 46"/>
-          <p:cNvSpPr/>
-          <p:nvPr/>
-        </p:nvSpPr>
-        <p:spPr>
-          <a:xfrm>
-            <a:off x="6668262" y="4169664"/>
-            <a:ext cx="685800" cy="384048"/>
-          </a:xfrm>
-          <a:prstGeom prst="rect">
-            <a:avLst/>
-          </a:prstGeom>
-          <a:noFill/>
-          <a:ln/>
-        </p:spPr>
-        <p:txBody>
-          <a:bodyPr wrap="square" lIns="0" tIns="0" rIns="0" bIns="0" rtlCol="0" anchor="ctr"/>
-          <a:lstStyle/>
-          <a:p>
-            <a:pPr algn="ctr" indent="0" marL="0">
-              <a:buNone/>
-            </a:pPr>
-            <a:r>
-              <a:rPr lang="en-US" sz="900" b="1" dirty="0">
-                <a:solidFill>
-                  <a:srgbClr val="9D174D"/>
-                </a:solidFill>
-                <a:latin typeface="Trebuchet MS" pitchFamily="34" charset="0"/>
-                <a:ea typeface="Trebuchet MS" pitchFamily="34" charset="-122"/>
-                <a:cs typeface="Trebuchet MS" pitchFamily="34" charset="-120"/>
-              </a:rPr>
-              <a:t>n</a:t>
-            </a:r>
-            <a:endParaRPr lang="en-US" sz="900" dirty="0"/>
-          </a:p>
-        </p:txBody>
-      </p:sp>
-      <p:sp>
-        <p:nvSpPr>
-          <p:cNvPr id="49" name="Shape 47"/>
-          <p:cNvSpPr/>
-          <p:nvPr/>
-        </p:nvSpPr>
-        <p:spPr>
-          <a:xfrm>
-            <a:off x="7576947" y="4169664"/>
-            <a:ext cx="685800" cy="384048"/>
-          </a:xfrm>
-          <a:prstGeom prst="rect">
-            <a:avLst>
-              <a:gd name="adj" fmla="val 9524"/>
-            </a:avLst>
-          </a:prstGeom>
-          <a:solidFill>
-            <a:srgbClr val="FFFFFF"/>
-          </a:solidFill>
-          <a:ln w="12700">
-            <a:solidFill>
-              <a:srgbClr val="DB2777"/>
-            </a:solidFill>
-            <a:prstDash val="solid"/>
-          </a:ln>
-        </p:spPr>
-      </p:sp>
-      <p:sp>
-        <p:nvSpPr>
-          <p:cNvPr id="50" name="Text 48"/>
-          <p:cNvSpPr/>
-          <p:nvPr/>
-        </p:nvSpPr>
-        <p:spPr>
-          <a:xfrm>
-            <a:off x="7576947" y="4169664"/>
-            <a:ext cx="685800" cy="384048"/>
-          </a:xfrm>
-          <a:prstGeom prst="rect">
-            <a:avLst/>
-          </a:prstGeom>
-          <a:noFill/>
-          <a:ln/>
-        </p:spPr>
-        <p:txBody>
-          <a:bodyPr wrap="square" lIns="0" tIns="0" rIns="0" bIns="0" rtlCol="0" anchor="ctr"/>
-          <a:lstStyle/>
-          <a:p>
-            <a:pPr algn="ctr" indent="0" marL="0">
-              <a:buNone/>
-            </a:pPr>
-            <a:r>
-              <a:rPr lang="en-US" sz="900" b="1" dirty="0">
-                <a:solidFill>
-                  <a:srgbClr val="9D174D"/>
-                </a:solidFill>
-                <a:latin typeface="Trebuchet MS" pitchFamily="34" charset="0"/>
-                <a:ea typeface="Trebuchet MS" pitchFamily="34" charset="-122"/>
-                <a:cs typeface="Trebuchet MS" pitchFamily="34" charset="-120"/>
-              </a:rPr>
-              <a:t>t</a:t>
+              <a:t>ee</a:t>
             </a:r>
             <a:endParaRPr lang="en-US" sz="900" dirty="0"/>
           </a:p>
@@ -27904,7 +28261,7 @@
                 <a:ea typeface="Calibri" pitchFamily="34" charset="-122"/>
                 <a:cs typeface="Calibri" pitchFamily="34" charset="-120"/>
               </a:rPr>
-              <a:t>Word Labs  •  wordlabs.app  •  Root: 'train' = to teach or draw along</a:t>
+              <a:t>Word Labs  •  wordlabs.app  •  Root: 'train' = to practise to improve; to teach</a:t>
             </a:r>
             <a:endParaRPr lang="en-US" sz="800" dirty="0"/>
           </a:p>
@@ -28043,7 +28400,7 @@
                 <a:ea typeface="Trebuchet MS" pitchFamily="34" charset="-122"/>
                 <a:cs typeface="Trebuchet MS" pitchFamily="34" charset="-120"/>
               </a:rPr>
-              <a:t>restraint</a:t>
+              <a:t>trainees</a:t>
             </a:r>
             <a:endParaRPr lang="en-US" sz="2800" dirty="0"/>
           </a:p>
@@ -28731,7 +29088,7 @@
                 <a:ea typeface="Calibri" pitchFamily="34" charset="-122"/>
                 <a:cs typeface="Calibri" pitchFamily="34" charset="-120"/>
               </a:rPr>
-              <a:t>Word Labs  •  wordlabs.app  •  Root: 'train' = to teach or draw along</a:t>
+              <a:t>Word Labs  •  wordlabs.app  •  Root: 'train' = to practise to improve; to teach</a:t>
             </a:r>
             <a:endParaRPr lang="en-US" sz="800" dirty="0"/>
           </a:p>
@@ -28870,7 +29227,7 @@
                 <a:ea typeface="Trebuchet MS" pitchFamily="34" charset="-122"/>
                 <a:cs typeface="Trebuchet MS" pitchFamily="34" charset="-120"/>
               </a:rPr>
-              <a:t>restraint</a:t>
+              <a:t>trainees</a:t>
             </a:r>
             <a:endParaRPr lang="en-US" sz="2800" dirty="0"/>
           </a:p>
@@ -28959,11 +29316,11 @@
             </a:avLst>
           </a:prstGeom>
           <a:solidFill>
-            <a:srgbClr val="DDD6FE"/>
+            <a:srgbClr val="CCFBF1"/>
           </a:solidFill>
           <a:ln w="19050">
             <a:solidFill>
-              <a:srgbClr val="7C3AED"/>
+              <a:srgbClr val="0D9488"/>
             </a:solidFill>
             <a:prstDash val="solid"/>
           </a:ln>
@@ -29003,13 +29360,13 @@
             <a:r>
               <a:rPr lang="en-US" sz="1300" b="1" dirty="0">
                 <a:solidFill>
-                  <a:srgbClr val="4C1D95"/>
+                  <a:srgbClr val="0F766E"/>
                 </a:solidFill>
                 <a:latin typeface="Trebuchet MS" pitchFamily="34" charset="0"/>
                 <a:ea typeface="Trebuchet MS" pitchFamily="34" charset="-122"/>
                 <a:cs typeface="Trebuchet MS" pitchFamily="34" charset="-120"/>
               </a:rPr>
-              <a:t>re</a:t>
+              <a:t>train</a:t>
             </a:r>
             <a:endParaRPr lang="en-US" sz="1300" dirty="0"/>
           </a:p>
@@ -29048,7 +29405,7 @@
                 <a:ea typeface="Calibri" pitchFamily="34" charset="-122"/>
                 <a:cs typeface="Calibri" pitchFamily="34" charset="-120"/>
               </a:rPr>
-              <a:t>back or again</a:t>
+              <a:t>to practise to improve; to teach</a:t>
             </a:r>
             <a:endParaRPr lang="en-US" sz="850" dirty="0"/>
           </a:p>
@@ -29121,7 +29478,7 @@
                 <a:ea typeface="Trebuchet MS" pitchFamily="34" charset="-122"/>
                 <a:cs typeface="Trebuchet MS" pitchFamily="34" charset="-120"/>
               </a:rPr>
-              <a:t>strain</a:t>
+              <a:t>ee</a:t>
             </a:r>
             <a:endParaRPr lang="en-US" sz="1300" dirty="0"/>
           </a:p>
@@ -29160,7 +29517,7 @@
                 <a:ea typeface="Calibri" pitchFamily="34" charset="-122"/>
                 <a:cs typeface="Calibri" pitchFamily="34" charset="-120"/>
               </a:rPr>
-              <a:t>draw tight or pull</a:t>
+              <a:t>person who receives</a:t>
             </a:r>
             <a:endParaRPr lang="en-US" sz="850" dirty="0"/>
           </a:p>
@@ -29233,7 +29590,7 @@
                 <a:ea typeface="Trebuchet MS" pitchFamily="34" charset="-122"/>
                 <a:cs typeface="Trebuchet MS" pitchFamily="34" charset="-120"/>
               </a:rPr>
-              <a:t>t</a:t>
+              <a:t>s</a:t>
             </a:r>
             <a:endParaRPr lang="en-US" sz="1300" dirty="0"/>
           </a:p>
@@ -29272,7 +29629,7 @@
                 <a:ea typeface="Calibri" pitchFamily="34" charset="-122"/>
                 <a:cs typeface="Calibri" pitchFamily="34" charset="-120"/>
               </a:rPr>
-              <a:t>noun-forming ending</a:t>
+              <a:t>plural or present tense</a:t>
             </a:r>
             <a:endParaRPr lang="en-US" sz="850" dirty="0"/>
           </a:p>
@@ -29828,7 +30185,7 @@
                 <a:ea typeface="Calibri" pitchFamily="34" charset="-122"/>
                 <a:cs typeface="Calibri" pitchFamily="34" charset="-120"/>
               </a:rPr>
-              <a:t>Word Labs  •  wordlabs.app  •  Root: 'train' = to teach or draw along</a:t>
+              <a:t>Word Labs  •  wordlabs.app  •  Root: 'train' = to practise to improve; to teach</a:t>
             </a:r>
             <a:endParaRPr lang="en-US" sz="800" dirty="0"/>
           </a:p>
@@ -29967,7 +30324,7 @@
                 <a:ea typeface="Trebuchet MS" pitchFamily="34" charset="-122"/>
                 <a:cs typeface="Trebuchet MS" pitchFamily="34" charset="-120"/>
               </a:rPr>
-              <a:t>restraint</a:t>
+              <a:t>trainees</a:t>
             </a:r>
             <a:endParaRPr lang="en-US" sz="2800" dirty="0"/>
           </a:p>
@@ -30056,11 +30413,11 @@
             </a:avLst>
           </a:prstGeom>
           <a:solidFill>
-            <a:srgbClr val="DDD6FE"/>
+            <a:srgbClr val="CCFBF1"/>
           </a:solidFill>
           <a:ln w="19050">
             <a:solidFill>
-              <a:srgbClr val="7C3AED"/>
+              <a:srgbClr val="0D9488"/>
             </a:solidFill>
             <a:prstDash val="solid"/>
           </a:ln>
@@ -30100,13 +30457,13 @@
             <a:r>
               <a:rPr lang="en-US" sz="1300" b="1" dirty="0">
                 <a:solidFill>
-                  <a:srgbClr val="4C1D95"/>
+                  <a:srgbClr val="0F766E"/>
                 </a:solidFill>
                 <a:latin typeface="Trebuchet MS" pitchFamily="34" charset="0"/>
                 <a:ea typeface="Trebuchet MS" pitchFamily="34" charset="-122"/>
                 <a:cs typeface="Trebuchet MS" pitchFamily="34" charset="-120"/>
               </a:rPr>
-              <a:t>re</a:t>
+              <a:t>train</a:t>
             </a:r>
             <a:endParaRPr lang="en-US" sz="1300" dirty="0"/>
           </a:p>
@@ -30145,7 +30502,7 @@
                 <a:ea typeface="Calibri" pitchFamily="34" charset="-122"/>
                 <a:cs typeface="Calibri" pitchFamily="34" charset="-120"/>
               </a:rPr>
-              <a:t>back or again</a:t>
+              <a:t>to practise to improve; to teach</a:t>
             </a:r>
             <a:endParaRPr lang="en-US" sz="850" dirty="0"/>
           </a:p>
@@ -30218,7 +30575,7 @@
                 <a:ea typeface="Trebuchet MS" pitchFamily="34" charset="-122"/>
                 <a:cs typeface="Trebuchet MS" pitchFamily="34" charset="-120"/>
               </a:rPr>
-              <a:t>strain</a:t>
+              <a:t>ee</a:t>
             </a:r>
             <a:endParaRPr lang="en-US" sz="1300" dirty="0"/>
           </a:p>
@@ -30257,7 +30614,7 @@
                 <a:ea typeface="Calibri" pitchFamily="34" charset="-122"/>
                 <a:cs typeface="Calibri" pitchFamily="34" charset="-120"/>
               </a:rPr>
-              <a:t>draw tight or pull</a:t>
+              <a:t>person who receives</a:t>
             </a:r>
             <a:endParaRPr lang="en-US" sz="850" dirty="0"/>
           </a:p>
@@ -30330,7 +30687,7 @@
                 <a:ea typeface="Trebuchet MS" pitchFamily="34" charset="-122"/>
                 <a:cs typeface="Trebuchet MS" pitchFamily="34" charset="-120"/>
               </a:rPr>
-              <a:t>t</a:t>
+              <a:t>s</a:t>
             </a:r>
             <a:endParaRPr lang="en-US" sz="1300" dirty="0"/>
           </a:p>
@@ -30369,7 +30726,7 @@
                 <a:ea typeface="Calibri" pitchFamily="34" charset="-122"/>
                 <a:cs typeface="Calibri" pitchFamily="34" charset="-120"/>
               </a:rPr>
-              <a:t>noun-forming ending</a:t>
+              <a:t>plural or present tense</a:t>
             </a:r>
             <a:endParaRPr lang="en-US" sz="850" dirty="0"/>
           </a:p>
@@ -30528,7 +30885,7 @@
                 <a:ea typeface="Trebuchet MS" pitchFamily="34" charset="-122"/>
                 <a:cs typeface="Trebuchet MS" pitchFamily="34" charset="-120"/>
               </a:rPr>
-              <a:t>re</a:t>
+              <a:t>train</a:t>
             </a:r>
             <a:endParaRPr lang="en-US" sz="1400" dirty="0"/>
           </a:p>
@@ -30633,7 +30990,7 @@
                 <a:ea typeface="Trebuchet MS" pitchFamily="34" charset="-122"/>
                 <a:cs typeface="Trebuchet MS" pitchFamily="34" charset="-120"/>
               </a:rPr>
-              <a:t>straint</a:t>
+              <a:t>ees</a:t>
             </a:r>
             <a:endParaRPr lang="en-US" sz="1400" dirty="0"/>
           </a:p>
@@ -31057,7 +31414,7 @@
                 <a:ea typeface="Calibri" pitchFamily="34" charset="-122"/>
                 <a:cs typeface="Calibri" pitchFamily="34" charset="-120"/>
               </a:rPr>
-              <a:t>Word Labs  •  wordlabs.app  •  Root: 'train' = to teach or draw along</a:t>
+              <a:t>Word Labs  •  wordlabs.app  •  Root: 'train' = to practise to improve; to teach</a:t>
             </a:r>
             <a:endParaRPr lang="en-US" sz="800" dirty="0"/>
           </a:p>
@@ -31196,7 +31553,7 @@
                 <a:ea typeface="Trebuchet MS" pitchFamily="34" charset="-122"/>
                 <a:cs typeface="Trebuchet MS" pitchFamily="34" charset="-120"/>
               </a:rPr>
-              <a:t>restraint</a:t>
+              <a:t>trainees</a:t>
             </a:r>
             <a:endParaRPr lang="en-US" sz="2800" dirty="0"/>
           </a:p>
@@ -31285,11 +31642,11 @@
             </a:avLst>
           </a:prstGeom>
           <a:solidFill>
-            <a:srgbClr val="DDD6FE"/>
+            <a:srgbClr val="CCFBF1"/>
           </a:solidFill>
           <a:ln w="19050">
             <a:solidFill>
-              <a:srgbClr val="7C3AED"/>
+              <a:srgbClr val="0D9488"/>
             </a:solidFill>
             <a:prstDash val="solid"/>
           </a:ln>
@@ -31329,13 +31686,13 @@
             <a:r>
               <a:rPr lang="en-US" sz="1300" b="1" dirty="0">
                 <a:solidFill>
-                  <a:srgbClr val="4C1D95"/>
+                  <a:srgbClr val="0F766E"/>
                 </a:solidFill>
                 <a:latin typeface="Trebuchet MS" pitchFamily="34" charset="0"/>
                 <a:ea typeface="Trebuchet MS" pitchFamily="34" charset="-122"/>
                 <a:cs typeface="Trebuchet MS" pitchFamily="34" charset="-120"/>
               </a:rPr>
-              <a:t>re</a:t>
+              <a:t>train</a:t>
             </a:r>
             <a:endParaRPr lang="en-US" sz="1300" dirty="0"/>
           </a:p>
@@ -31374,7 +31731,7 @@
                 <a:ea typeface="Calibri" pitchFamily="34" charset="-122"/>
                 <a:cs typeface="Calibri" pitchFamily="34" charset="-120"/>
               </a:rPr>
-              <a:t>back or again</a:t>
+              <a:t>to practise to improve; to teach</a:t>
             </a:r>
             <a:endParaRPr lang="en-US" sz="850" dirty="0"/>
           </a:p>
@@ -31447,7 +31804,7 @@
                 <a:ea typeface="Trebuchet MS" pitchFamily="34" charset="-122"/>
                 <a:cs typeface="Trebuchet MS" pitchFamily="34" charset="-120"/>
               </a:rPr>
-              <a:t>strain</a:t>
+              <a:t>ee</a:t>
             </a:r>
             <a:endParaRPr lang="en-US" sz="1300" dirty="0"/>
           </a:p>
@@ -31486,7 +31843,7 @@
                 <a:ea typeface="Calibri" pitchFamily="34" charset="-122"/>
                 <a:cs typeface="Calibri" pitchFamily="34" charset="-120"/>
               </a:rPr>
-              <a:t>draw tight or pull</a:t>
+              <a:t>person who receives</a:t>
             </a:r>
             <a:endParaRPr lang="en-US" sz="850" dirty="0"/>
           </a:p>
@@ -31559,7 +31916,7 @@
                 <a:ea typeface="Trebuchet MS" pitchFamily="34" charset="-122"/>
                 <a:cs typeface="Trebuchet MS" pitchFamily="34" charset="-120"/>
               </a:rPr>
-              <a:t>t</a:t>
+              <a:t>s</a:t>
             </a:r>
             <a:endParaRPr lang="en-US" sz="1300" dirty="0"/>
           </a:p>
@@ -31598,7 +31955,7 @@
                 <a:ea typeface="Calibri" pitchFamily="34" charset="-122"/>
                 <a:cs typeface="Calibri" pitchFamily="34" charset="-120"/>
               </a:rPr>
-              <a:t>noun-forming ending</a:t>
+              <a:t>plural or present tense</a:t>
             </a:r>
             <a:endParaRPr lang="en-US" sz="850" dirty="0"/>
           </a:p>
@@ -31757,7 +32114,7 @@
                 <a:ea typeface="Trebuchet MS" pitchFamily="34" charset="-122"/>
                 <a:cs typeface="Trebuchet MS" pitchFamily="34" charset="-120"/>
               </a:rPr>
-              <a:t>re</a:t>
+              <a:t>train</a:t>
             </a:r>
             <a:endParaRPr lang="en-US" sz="1400" dirty="0"/>
           </a:p>
@@ -31862,7 +32219,7 @@
                 <a:ea typeface="Trebuchet MS" pitchFamily="34" charset="-122"/>
                 <a:cs typeface="Trebuchet MS" pitchFamily="34" charset="-120"/>
               </a:rPr>
-              <a:t>straint</a:t>
+              <a:t>ees</a:t>
             </a:r>
             <a:endParaRPr lang="en-US" sz="1400" dirty="0"/>
           </a:p>
@@ -32021,7 +32378,7 @@
                 <a:ea typeface="Trebuchet MS" pitchFamily="34" charset="-122"/>
                 <a:cs typeface="Trebuchet MS" pitchFamily="34" charset="-120"/>
               </a:rPr>
-              <a:t>r</a:t>
+              <a:t>t</a:t>
             </a:r>
             <a:endParaRPr lang="en-US" sz="900" dirty="0"/>
           </a:p>
@@ -32087,7 +32444,7 @@
                 <a:ea typeface="Trebuchet MS" pitchFamily="34" charset="-122"/>
                 <a:cs typeface="Trebuchet MS" pitchFamily="34" charset="-120"/>
               </a:rPr>
-              <a:t>e</a:t>
+              <a:t>r</a:t>
             </a:r>
             <a:endParaRPr lang="en-US" sz="900" dirty="0"/>
           </a:p>
@@ -32153,7 +32510,7 @@
                 <a:ea typeface="Trebuchet MS" pitchFamily="34" charset="-122"/>
                 <a:cs typeface="Trebuchet MS" pitchFamily="34" charset="-120"/>
               </a:rPr>
-              <a:t>str</a:t>
+              <a:t>ai</a:t>
             </a:r>
             <a:endParaRPr lang="en-US" sz="900" dirty="0"/>
           </a:p>
@@ -32219,7 +32576,7 @@
                 <a:ea typeface="Trebuchet MS" pitchFamily="34" charset="-122"/>
                 <a:cs typeface="Trebuchet MS" pitchFamily="34" charset="-120"/>
               </a:rPr>
-              <a:t>ai</a:t>
+              <a:t>n</a:t>
             </a:r>
             <a:endParaRPr lang="en-US" sz="900" dirty="0"/>
           </a:p>
@@ -32285,7 +32642,7 @@
                 <a:ea typeface="Trebuchet MS" pitchFamily="34" charset="-122"/>
                 <a:cs typeface="Trebuchet MS" pitchFamily="34" charset="-120"/>
               </a:rPr>
-              <a:t>n</a:t>
+              <a:t>ee</a:t>
             </a:r>
             <a:endParaRPr lang="en-US" sz="900" dirty="0"/>
           </a:p>
@@ -32351,7 +32708,7 @@
                 <a:ea typeface="Trebuchet MS" pitchFamily="34" charset="-122"/>
                 <a:cs typeface="Trebuchet MS" pitchFamily="34" charset="-120"/>
               </a:rPr>
-              <a:t>t</a:t>
+              <a:t>s</a:t>
             </a:r>
             <a:endParaRPr lang="en-US" sz="900" dirty="0"/>
           </a:p>
@@ -32643,7 +33000,7 @@
                 <a:ea typeface="Calibri" pitchFamily="34" charset="-122"/>
                 <a:cs typeface="Calibri" pitchFamily="34" charset="-120"/>
               </a:rPr>
-              <a:t>Word Labs  •  wordlabs.app  •  Root: 'train' = to teach or draw along</a:t>
+              <a:t>Word Labs  •  wordlabs.app  •  Root: 'train' = to practise to improve; to teach</a:t>
             </a:r>
             <a:endParaRPr lang="en-US" sz="800" dirty="0"/>
           </a:p>
@@ -33812,7 +34169,7 @@
                 <a:ea typeface="Calibri" pitchFamily="34" charset="-122"/>
                 <a:cs typeface="Calibri" pitchFamily="34" charset="-120"/>
               </a:rPr>
-              <a:t>Word Labs  •  wordlabs.app  •  Root: 'train' = to teach or draw along</a:t>
+              <a:t>Word Labs  •  wordlabs.app  •  Root: 'train' = to practise to improve; to teach</a:t>
             </a:r>
             <a:endParaRPr lang="en-US" sz="800" dirty="0"/>
           </a:p>
@@ -34241,7 +34598,7 @@
                 <a:ea typeface="Trebuchet MS" pitchFamily="34" charset="-122"/>
                 <a:cs typeface="Trebuchet MS" pitchFamily="34" charset="-120"/>
               </a:rPr>
-              <a:t>-ing</a:t>
+              <a:t>-ed</a:t>
             </a:r>
             <a:endParaRPr lang="en-US" sz="1300" dirty="0"/>
           </a:p>
@@ -34262,7 +34619,7 @@
             <a:avLst/>
           </a:prstGeom>
           <a:solidFill>
-            <a:srgbClr val="DDD6FE"/>
+            <a:srgbClr val="F1F5F9"/>
           </a:solidFill>
           <a:ln w="12700">
             <a:solidFill>
@@ -34274,14 +34631,64 @@
       </p:sp>
       <p:sp>
         <p:nvSpPr>
-          <p:cNvPr id="24" name="Text 22"/>
-          <p:cNvSpPr/>
-          <p:nvPr/>
-        </p:nvSpPr>
-        <p:spPr>
-          <a:xfrm>
-            <a:off x="365760" y="1984248"/>
-            <a:ext cx="2468880" cy="402336"/>
+          <p:cNvPr id="24" name="Shape 22"/>
+          <p:cNvSpPr/>
+          <p:nvPr/>
+        </p:nvSpPr>
+        <p:spPr>
+          <a:xfrm>
+            <a:off x="2971800" y="1984248"/>
+            <a:ext cx="2834640" cy="402336"/>
+          </a:xfrm>
+          <a:prstGeom prst="rect">
+            <a:avLst/>
+          </a:prstGeom>
+          <a:solidFill>
+            <a:srgbClr val="F1F5F9"/>
+          </a:solidFill>
+          <a:ln w="12700">
+            <a:solidFill>
+              <a:srgbClr val="E2E8F0"/>
+            </a:solidFill>
+            <a:prstDash val="solid"/>
+          </a:ln>
+        </p:spPr>
+      </p:sp>
+      <p:sp>
+        <p:nvSpPr>
+          <p:cNvPr id="25" name="Shape 23"/>
+          <p:cNvSpPr/>
+          <p:nvPr/>
+        </p:nvSpPr>
+        <p:spPr>
+          <a:xfrm>
+            <a:off x="5943600" y="1984248"/>
+            <a:ext cx="2834640" cy="402336"/>
+          </a:xfrm>
+          <a:prstGeom prst="rect">
+            <a:avLst/>
+          </a:prstGeom>
+          <a:solidFill>
+            <a:srgbClr val="FCE7F3"/>
+          </a:solidFill>
+          <a:ln w="12700">
+            <a:solidFill>
+              <a:srgbClr val="E2E8F0"/>
+            </a:solidFill>
+            <a:prstDash val="solid"/>
+          </a:ln>
+        </p:spPr>
+      </p:sp>
+      <p:sp>
+        <p:nvSpPr>
+          <p:cNvPr id="26" name="Text 24"/>
+          <p:cNvSpPr/>
+          <p:nvPr/>
+        </p:nvSpPr>
+        <p:spPr>
+          <a:xfrm>
+            <a:off x="5943600" y="1984248"/>
+            <a:ext cx="2834640" cy="402336"/>
           </a:xfrm>
           <a:prstGeom prst="rect">
             <a:avLst/>
@@ -34299,13 +34706,13 @@
             <a:r>
               <a:rPr lang="en-US" sz="1300" b="1" dirty="0">
                 <a:solidFill>
-                  <a:srgbClr val="4C1D95"/>
+                  <a:srgbClr val="9D174D"/>
                 </a:solidFill>
                 <a:latin typeface="Trebuchet MS" pitchFamily="34" charset="0"/>
                 <a:ea typeface="Trebuchet MS" pitchFamily="34" charset="-122"/>
                 <a:cs typeface="Trebuchet MS" pitchFamily="34" charset="-120"/>
               </a:rPr>
-              <a:t>con-</a:t>
+              <a:t>-ing</a:t>
             </a:r>
             <a:endParaRPr lang="en-US" sz="1300" dirty="0"/>
           </a:p>
@@ -34313,20 +34720,45 @@
       </p:sp>
       <p:sp>
         <p:nvSpPr>
-          <p:cNvPr id="25" name="Shape 23"/>
-          <p:cNvSpPr/>
-          <p:nvPr/>
-        </p:nvSpPr>
-        <p:spPr>
-          <a:xfrm>
-            <a:off x="2971800" y="1984248"/>
+          <p:cNvPr id="27" name="Shape 25"/>
+          <p:cNvSpPr/>
+          <p:nvPr/>
+        </p:nvSpPr>
+        <p:spPr>
+          <a:xfrm>
+            <a:off x="365760" y="2404872"/>
+            <a:ext cx="2468880" cy="402336"/>
+          </a:xfrm>
+          <a:prstGeom prst="rect">
+            <a:avLst/>
+          </a:prstGeom>
+          <a:solidFill>
+            <a:srgbClr val="F8FAFC"/>
+          </a:solidFill>
+          <a:ln w="12700">
+            <a:solidFill>
+              <a:srgbClr val="E2E8F0"/>
+            </a:solidFill>
+            <a:prstDash val="solid"/>
+          </a:ln>
+        </p:spPr>
+      </p:sp>
+      <p:sp>
+        <p:nvSpPr>
+          <p:cNvPr id="28" name="Shape 26"/>
+          <p:cNvSpPr/>
+          <p:nvPr/>
+        </p:nvSpPr>
+        <p:spPr>
+          <a:xfrm>
+            <a:off x="2971800" y="2404872"/>
             <a:ext cx="2834640" cy="402336"/>
           </a:xfrm>
           <a:prstGeom prst="rect">
             <a:avLst/>
           </a:prstGeom>
           <a:solidFill>
-            <a:srgbClr val="F1F5F9"/>
+            <a:srgbClr val="F8FAFC"/>
           </a:solidFill>
           <a:ln w="12700">
             <a:solidFill>
@@ -34338,13 +34770,13 @@
       </p:sp>
       <p:sp>
         <p:nvSpPr>
-          <p:cNvPr id="26" name="Shape 24"/>
-          <p:cNvSpPr/>
-          <p:nvPr/>
-        </p:nvSpPr>
-        <p:spPr>
-          <a:xfrm>
-            <a:off x="5943600" y="1984248"/>
+          <p:cNvPr id="29" name="Shape 27"/>
+          <p:cNvSpPr/>
+          <p:nvPr/>
+        </p:nvSpPr>
+        <p:spPr>
+          <a:xfrm>
+            <a:off x="5943600" y="2404872"/>
             <a:ext cx="2834640" cy="402336"/>
           </a:xfrm>
           <a:prstGeom prst="rect">
@@ -34363,13 +34795,13 @@
       </p:sp>
       <p:sp>
         <p:nvSpPr>
-          <p:cNvPr id="27" name="Text 25"/>
-          <p:cNvSpPr/>
-          <p:nvPr/>
-        </p:nvSpPr>
-        <p:spPr>
-          <a:xfrm>
-            <a:off x="5943600" y="1984248"/>
+          <p:cNvPr id="30" name="Text 28"/>
+          <p:cNvSpPr/>
+          <p:nvPr/>
+        </p:nvSpPr>
+        <p:spPr>
+          <a:xfrm>
+            <a:off x="5943600" y="2404872"/>
             <a:ext cx="2834640" cy="402336"/>
           </a:xfrm>
           <a:prstGeom prst="rect">
@@ -34394,7 +34826,7 @@
                 <a:ea typeface="Trebuchet MS" pitchFamily="34" charset="-122"/>
                 <a:cs typeface="Trebuchet MS" pitchFamily="34" charset="-120"/>
               </a:rPr>
-              <a:t>-ed</a:t>
+              <a:t>-ee</a:t>
             </a:r>
             <a:endParaRPr lang="en-US" sz="1300" dirty="0"/>
           </a:p>
@@ -34402,20 +34834,20 @@
       </p:sp>
       <p:sp>
         <p:nvSpPr>
-          <p:cNvPr id="28" name="Shape 26"/>
-          <p:cNvSpPr/>
-          <p:nvPr/>
-        </p:nvSpPr>
-        <p:spPr>
-          <a:xfrm>
-            <a:off x="365760" y="2404872"/>
+          <p:cNvPr id="31" name="Shape 29"/>
+          <p:cNvSpPr/>
+          <p:nvPr/>
+        </p:nvSpPr>
+        <p:spPr>
+          <a:xfrm>
+            <a:off x="365760" y="2825496"/>
             <a:ext cx="2468880" cy="402336"/>
           </a:xfrm>
           <a:prstGeom prst="rect">
             <a:avLst/>
           </a:prstGeom>
           <a:solidFill>
-            <a:srgbClr val="DDD6FE"/>
+            <a:srgbClr val="F1F5F9"/>
           </a:solidFill>
           <a:ln w="12700">
             <a:solidFill>
@@ -34427,14 +34859,64 @@
       </p:sp>
       <p:sp>
         <p:nvSpPr>
-          <p:cNvPr id="29" name="Text 27"/>
-          <p:cNvSpPr/>
-          <p:nvPr/>
-        </p:nvSpPr>
-        <p:spPr>
-          <a:xfrm>
-            <a:off x="365760" y="2404872"/>
-            <a:ext cx="2468880" cy="402336"/>
+          <p:cNvPr id="32" name="Shape 30"/>
+          <p:cNvSpPr/>
+          <p:nvPr/>
+        </p:nvSpPr>
+        <p:spPr>
+          <a:xfrm>
+            <a:off x="2971800" y="2825496"/>
+            <a:ext cx="2834640" cy="402336"/>
+          </a:xfrm>
+          <a:prstGeom prst="rect">
+            <a:avLst/>
+          </a:prstGeom>
+          <a:solidFill>
+            <a:srgbClr val="F1F5F9"/>
+          </a:solidFill>
+          <a:ln w="12700">
+            <a:solidFill>
+              <a:srgbClr val="E2E8F0"/>
+            </a:solidFill>
+            <a:prstDash val="solid"/>
+          </a:ln>
+        </p:spPr>
+      </p:sp>
+      <p:sp>
+        <p:nvSpPr>
+          <p:cNvPr id="33" name="Shape 31"/>
+          <p:cNvSpPr/>
+          <p:nvPr/>
+        </p:nvSpPr>
+        <p:spPr>
+          <a:xfrm>
+            <a:off x="5943600" y="2825496"/>
+            <a:ext cx="2834640" cy="402336"/>
+          </a:xfrm>
+          <a:prstGeom prst="rect">
+            <a:avLst/>
+          </a:prstGeom>
+          <a:solidFill>
+            <a:srgbClr val="FCE7F3"/>
+          </a:solidFill>
+          <a:ln w="12700">
+            <a:solidFill>
+              <a:srgbClr val="E2E8F0"/>
+            </a:solidFill>
+            <a:prstDash val="solid"/>
+          </a:ln>
+        </p:spPr>
+      </p:sp>
+      <p:sp>
+        <p:nvSpPr>
+          <p:cNvPr id="34" name="Text 32"/>
+          <p:cNvSpPr/>
+          <p:nvPr/>
+        </p:nvSpPr>
+        <p:spPr>
+          <a:xfrm>
+            <a:off x="5943600" y="2825496"/>
+            <a:ext cx="2834640" cy="402336"/>
           </a:xfrm>
           <a:prstGeom prst="rect">
             <a:avLst/>
@@ -34452,13 +34934,13 @@
             <a:r>
               <a:rPr lang="en-US" sz="1300" b="1" dirty="0">
                 <a:solidFill>
-                  <a:srgbClr val="4C1D95"/>
+                  <a:srgbClr val="9D174D"/>
                 </a:solidFill>
                 <a:latin typeface="Trebuchet MS" pitchFamily="34" charset="0"/>
                 <a:ea typeface="Trebuchet MS" pitchFamily="34" charset="-122"/>
                 <a:cs typeface="Trebuchet MS" pitchFamily="34" charset="-120"/>
               </a:rPr>
-              <a:t>en-</a:t>
+              <a:t>-er</a:t>
             </a:r>
             <a:endParaRPr lang="en-US" sz="1300" dirty="0"/>
           </a:p>
@@ -34466,13 +34948,38 @@
       </p:sp>
       <p:sp>
         <p:nvSpPr>
-          <p:cNvPr id="30" name="Shape 28"/>
-          <p:cNvSpPr/>
-          <p:nvPr/>
-        </p:nvSpPr>
-        <p:spPr>
-          <a:xfrm>
-            <a:off x="2971800" y="2404872"/>
+          <p:cNvPr id="35" name="Shape 33"/>
+          <p:cNvSpPr/>
+          <p:nvPr/>
+        </p:nvSpPr>
+        <p:spPr>
+          <a:xfrm>
+            <a:off x="365760" y="3246120"/>
+            <a:ext cx="2468880" cy="402336"/>
+          </a:xfrm>
+          <a:prstGeom prst="rect">
+            <a:avLst/>
+          </a:prstGeom>
+          <a:solidFill>
+            <a:srgbClr val="F8FAFC"/>
+          </a:solidFill>
+          <a:ln w="12700">
+            <a:solidFill>
+              <a:srgbClr val="E2E8F0"/>
+            </a:solidFill>
+            <a:prstDash val="solid"/>
+          </a:ln>
+        </p:spPr>
+      </p:sp>
+      <p:sp>
+        <p:nvSpPr>
+          <p:cNvPr id="36" name="Shape 34"/>
+          <p:cNvSpPr/>
+          <p:nvPr/>
+        </p:nvSpPr>
+        <p:spPr>
+          <a:xfrm>
+            <a:off x="2971800" y="3246120"/>
             <a:ext cx="2834640" cy="402336"/>
           </a:xfrm>
           <a:prstGeom prst="rect">
@@ -34491,13 +34998,13 @@
       </p:sp>
       <p:sp>
         <p:nvSpPr>
-          <p:cNvPr id="31" name="Shape 29"/>
-          <p:cNvSpPr/>
-          <p:nvPr/>
-        </p:nvSpPr>
-        <p:spPr>
-          <a:xfrm>
-            <a:off x="5943600" y="2404872"/>
+          <p:cNvPr id="37" name="Shape 35"/>
+          <p:cNvSpPr/>
+          <p:nvPr/>
+        </p:nvSpPr>
+        <p:spPr>
+          <a:xfrm>
+            <a:off x="5943600" y="3246120"/>
             <a:ext cx="2834640" cy="402336"/>
           </a:xfrm>
           <a:prstGeom prst="rect">
@@ -34516,13 +35023,13 @@
       </p:sp>
       <p:sp>
         <p:nvSpPr>
-          <p:cNvPr id="32" name="Text 30"/>
-          <p:cNvSpPr/>
-          <p:nvPr/>
-        </p:nvSpPr>
-        <p:spPr>
-          <a:xfrm>
-            <a:off x="5943600" y="2404872"/>
+          <p:cNvPr id="38" name="Text 36"/>
+          <p:cNvSpPr/>
+          <p:nvPr/>
+        </p:nvSpPr>
+        <p:spPr>
+          <a:xfrm>
+            <a:off x="5943600" y="3246120"/>
             <a:ext cx="2834640" cy="402336"/>
           </a:xfrm>
           <a:prstGeom prst="rect">
@@ -34547,7 +35054,7 @@
                 <a:ea typeface="Trebuchet MS" pitchFamily="34" charset="-122"/>
                 <a:cs typeface="Trebuchet MS" pitchFamily="34" charset="-120"/>
               </a:rPr>
-              <a:t>-er</a:t>
+              <a:t>-s</a:t>
             </a:r>
             <a:endParaRPr lang="en-US" sz="1300" dirty="0"/>
           </a:p>
@@ -34555,39 +35062,14 @@
       </p:sp>
       <p:sp>
         <p:nvSpPr>
-          <p:cNvPr id="33" name="Shape 31"/>
-          <p:cNvSpPr/>
-          <p:nvPr/>
-        </p:nvSpPr>
-        <p:spPr>
-          <a:xfrm>
-            <a:off x="365760" y="2825496"/>
-            <a:ext cx="2468880" cy="402336"/>
-          </a:xfrm>
-          <a:prstGeom prst="rect">
-            <a:avLst/>
-          </a:prstGeom>
-          <a:solidFill>
-            <a:srgbClr val="DDD6FE"/>
-          </a:solidFill>
-          <a:ln w="12700">
-            <a:solidFill>
-              <a:srgbClr val="E2E8F0"/>
-            </a:solidFill>
-            <a:prstDash val="solid"/>
-          </a:ln>
-        </p:spPr>
-      </p:sp>
-      <p:sp>
-        <p:nvSpPr>
-          <p:cNvPr id="34" name="Text 32"/>
-          <p:cNvSpPr/>
-          <p:nvPr/>
-        </p:nvSpPr>
-        <p:spPr>
-          <a:xfrm>
-            <a:off x="365760" y="2825496"/>
-            <a:ext cx="2468880" cy="402336"/>
+          <p:cNvPr id="39" name="Text 37"/>
+          <p:cNvSpPr/>
+          <p:nvPr/>
+        </p:nvSpPr>
+        <p:spPr>
+          <a:xfrm>
+            <a:off x="365760" y="3611880"/>
+            <a:ext cx="1828800" cy="347472"/>
           </a:xfrm>
           <a:prstGeom prst="rect">
             <a:avLst/>
@@ -34599,84 +35081,61 @@
           <a:bodyPr wrap="square" lIns="0" tIns="0" rIns="0" bIns="0" rtlCol="0" anchor="ctr"/>
           <a:lstStyle/>
           <a:p>
-            <a:pPr algn="ctr" indent="0" marL="0">
-              <a:buNone/>
-            </a:pPr>
-            <a:r>
-              <a:rPr lang="en-US" sz="1300" b="1" dirty="0">
-                <a:solidFill>
-                  <a:srgbClr val="4C1D95"/>
+            <a:pPr algn="l" indent="0" marL="0">
+              <a:buNone/>
+            </a:pPr>
+            <a:r>
+              <a:rPr lang="en-US" sz="1200" b="1" dirty="0">
+                <a:solidFill>
+                  <a:srgbClr val="0F172A"/>
                 </a:solidFill>
                 <a:latin typeface="Trebuchet MS" pitchFamily="34" charset="0"/>
                 <a:ea typeface="Trebuchet MS" pitchFamily="34" charset="-122"/>
                 <a:cs typeface="Trebuchet MS" pitchFamily="34" charset="-120"/>
               </a:rPr>
-              <a:t>de-</a:t>
-            </a:r>
-            <a:endParaRPr lang="en-US" sz="1300" dirty="0"/>
-          </a:p>
-        </p:txBody>
-      </p:sp>
-      <p:sp>
-        <p:nvSpPr>
-          <p:cNvPr id="35" name="Shape 33"/>
-          <p:cNvSpPr/>
-          <p:nvPr/>
-        </p:nvSpPr>
-        <p:spPr>
-          <a:xfrm>
-            <a:off x="2971800" y="2825496"/>
-            <a:ext cx="2834640" cy="402336"/>
-          </a:xfrm>
-          <a:prstGeom prst="rect">
-            <a:avLst/>
-          </a:prstGeom>
-          <a:solidFill>
-            <a:srgbClr val="F1F5F9"/>
-          </a:solidFill>
-          <a:ln w="12700">
-            <a:solidFill>
-              <a:srgbClr val="E2E8F0"/>
-            </a:solidFill>
-            <a:prstDash val="solid"/>
-          </a:ln>
-        </p:spPr>
-      </p:sp>
-      <p:sp>
-        <p:nvSpPr>
-          <p:cNvPr id="36" name="Shape 34"/>
-          <p:cNvSpPr/>
-          <p:nvPr/>
-        </p:nvSpPr>
-        <p:spPr>
-          <a:xfrm>
-            <a:off x="5943600" y="2825496"/>
-            <a:ext cx="2834640" cy="402336"/>
-          </a:xfrm>
-          <a:prstGeom prst="rect">
-            <a:avLst/>
-          </a:prstGeom>
-          <a:solidFill>
-            <a:srgbClr val="FCE7F3"/>
-          </a:solidFill>
-          <a:ln w="12700">
-            <a:solidFill>
-              <a:srgbClr val="E2E8F0"/>
-            </a:solidFill>
-            <a:prstDash val="solid"/>
-          </a:ln>
-        </p:spPr>
-      </p:sp>
-      <p:sp>
-        <p:nvSpPr>
-          <p:cNvPr id="37" name="Text 35"/>
-          <p:cNvSpPr/>
-          <p:nvPr/>
-        </p:nvSpPr>
-        <p:spPr>
-          <a:xfrm>
-            <a:off x="5943600" y="2825496"/>
-            <a:ext cx="2834640" cy="402336"/>
+              <a:t>Sample words:</a:t>
+            </a:r>
+            <a:endParaRPr lang="en-US" sz="1200" dirty="0"/>
+          </a:p>
+        </p:txBody>
+      </p:sp>
+      <p:sp>
+        <p:nvSpPr>
+          <p:cNvPr id="40" name="Shape 38"/>
+          <p:cNvSpPr/>
+          <p:nvPr/>
+        </p:nvSpPr>
+        <p:spPr>
+          <a:xfrm>
+            <a:off x="365760" y="4023360"/>
+            <a:ext cx="2011680" cy="402336"/>
+          </a:xfrm>
+          <a:prstGeom prst="rect">
+            <a:avLst>
+              <a:gd name="adj" fmla="val 13636"/>
+            </a:avLst>
+          </a:prstGeom>
+          <a:solidFill>
+            <a:srgbClr val="EEF2FF"/>
+          </a:solidFill>
+          <a:ln w="12700">
+            <a:solidFill>
+              <a:srgbClr val="6366F1"/>
+            </a:solidFill>
+            <a:prstDash val="solid"/>
+          </a:ln>
+        </p:spPr>
+      </p:sp>
+      <p:sp>
+        <p:nvSpPr>
+          <p:cNvPr id="41" name="Text 39"/>
+          <p:cNvSpPr/>
+          <p:nvPr/>
+        </p:nvSpPr>
+        <p:spPr>
+          <a:xfrm>
+            <a:off x="365760" y="4023360"/>
+            <a:ext cx="2011680" cy="402336"/>
           </a:xfrm>
           <a:prstGeom prst="rect">
             <a:avLst/>
@@ -34692,55 +35151,57 @@
               <a:buNone/>
             </a:pPr>
             <a:r>
-              <a:rPr lang="en-US" sz="1300" b="1" dirty="0">
-                <a:solidFill>
-                  <a:srgbClr val="9D174D"/>
+              <a:rPr lang="en-US" sz="1200" b="1" dirty="0">
+                <a:solidFill>
+                  <a:srgbClr val="4338CA"/>
                 </a:solidFill>
                 <a:latin typeface="Trebuchet MS" pitchFamily="34" charset="0"/>
                 <a:ea typeface="Trebuchet MS" pitchFamily="34" charset="-122"/>
                 <a:cs typeface="Trebuchet MS" pitchFamily="34" charset="-120"/>
               </a:rPr>
-              <a:t>-ee</a:t>
-            </a:r>
-            <a:endParaRPr lang="en-US" sz="1300" dirty="0"/>
-          </a:p>
-        </p:txBody>
-      </p:sp>
-      <p:sp>
-        <p:nvSpPr>
-          <p:cNvPr id="38" name="Shape 36"/>
-          <p:cNvSpPr/>
-          <p:nvPr/>
-        </p:nvSpPr>
-        <p:spPr>
-          <a:xfrm>
-            <a:off x="365760" y="3246120"/>
-            <a:ext cx="2468880" cy="402336"/>
-          </a:xfrm>
-          <a:prstGeom prst="rect">
-            <a:avLst/>
-          </a:prstGeom>
-          <a:solidFill>
-            <a:srgbClr val="DDD6FE"/>
-          </a:solidFill>
-          <a:ln w="12700">
-            <a:solidFill>
-              <a:srgbClr val="E2E8F0"/>
-            </a:solidFill>
-            <a:prstDash val="solid"/>
-          </a:ln>
-        </p:spPr>
-      </p:sp>
-      <p:sp>
-        <p:nvSpPr>
-          <p:cNvPr id="39" name="Text 37"/>
-          <p:cNvSpPr/>
-          <p:nvPr/>
-        </p:nvSpPr>
-        <p:spPr>
-          <a:xfrm>
-            <a:off x="365760" y="3246120"/>
-            <a:ext cx="2468880" cy="402336"/>
+              <a:t>train</a:t>
+            </a:r>
+            <a:endParaRPr lang="en-US" sz="1200" dirty="0"/>
+          </a:p>
+        </p:txBody>
+      </p:sp>
+      <p:sp>
+        <p:nvSpPr>
+          <p:cNvPr id="42" name="Shape 40"/>
+          <p:cNvSpPr/>
+          <p:nvPr/>
+        </p:nvSpPr>
+        <p:spPr>
+          <a:xfrm>
+            <a:off x="2542032" y="4023360"/>
+            <a:ext cx="2011680" cy="402336"/>
+          </a:xfrm>
+          <a:prstGeom prst="rect">
+            <a:avLst>
+              <a:gd name="adj" fmla="val 13636"/>
+            </a:avLst>
+          </a:prstGeom>
+          <a:solidFill>
+            <a:srgbClr val="EEF2FF"/>
+          </a:solidFill>
+          <a:ln w="12700">
+            <a:solidFill>
+              <a:srgbClr val="6366F1"/>
+            </a:solidFill>
+            <a:prstDash val="solid"/>
+          </a:ln>
+        </p:spPr>
+      </p:sp>
+      <p:sp>
+        <p:nvSpPr>
+          <p:cNvPr id="43" name="Text 41"/>
+          <p:cNvSpPr/>
+          <p:nvPr/>
+        </p:nvSpPr>
+        <p:spPr>
+          <a:xfrm>
+            <a:off x="2542032" y="4023360"/>
+            <a:ext cx="2011680" cy="402336"/>
           </a:xfrm>
           <a:prstGeom prst="rect">
             <a:avLst/>
@@ -34756,80 +35217,57 @@
               <a:buNone/>
             </a:pPr>
             <a:r>
-              <a:rPr lang="en-US" sz="1300" b="1" dirty="0">
-                <a:solidFill>
-                  <a:srgbClr val="4C1D95"/>
+              <a:rPr lang="en-US" sz="1200" b="1" dirty="0">
+                <a:solidFill>
+                  <a:srgbClr val="4338CA"/>
                 </a:solidFill>
                 <a:latin typeface="Trebuchet MS" pitchFamily="34" charset="0"/>
                 <a:ea typeface="Trebuchet MS" pitchFamily="34" charset="-122"/>
                 <a:cs typeface="Trebuchet MS" pitchFamily="34" charset="-120"/>
               </a:rPr>
-              <a:t>over-</a:t>
-            </a:r>
-            <a:endParaRPr lang="en-US" sz="1300" dirty="0"/>
-          </a:p>
-        </p:txBody>
-      </p:sp>
-      <p:sp>
-        <p:nvSpPr>
-          <p:cNvPr id="40" name="Shape 38"/>
-          <p:cNvSpPr/>
-          <p:nvPr/>
-        </p:nvSpPr>
-        <p:spPr>
-          <a:xfrm>
-            <a:off x="2971800" y="3246120"/>
-            <a:ext cx="2834640" cy="402336"/>
-          </a:xfrm>
-          <a:prstGeom prst="rect">
-            <a:avLst/>
-          </a:prstGeom>
-          <a:solidFill>
-            <a:srgbClr val="F8FAFC"/>
-          </a:solidFill>
-          <a:ln w="12700">
-            <a:solidFill>
-              <a:srgbClr val="E2E8F0"/>
-            </a:solidFill>
-            <a:prstDash val="solid"/>
-          </a:ln>
-        </p:spPr>
-      </p:sp>
-      <p:sp>
-        <p:nvSpPr>
-          <p:cNvPr id="41" name="Shape 39"/>
-          <p:cNvSpPr/>
-          <p:nvPr/>
-        </p:nvSpPr>
-        <p:spPr>
-          <a:xfrm>
-            <a:off x="5943600" y="3246120"/>
-            <a:ext cx="2834640" cy="402336"/>
-          </a:xfrm>
-          <a:prstGeom prst="rect">
-            <a:avLst/>
-          </a:prstGeom>
-          <a:solidFill>
-            <a:srgbClr val="FCE7F3"/>
-          </a:solidFill>
-          <a:ln w="12700">
-            <a:solidFill>
-              <a:srgbClr val="E2E8F0"/>
-            </a:solidFill>
-            <a:prstDash val="solid"/>
-          </a:ln>
-        </p:spPr>
-      </p:sp>
-      <p:sp>
-        <p:nvSpPr>
-          <p:cNvPr id="42" name="Text 40"/>
-          <p:cNvSpPr/>
-          <p:nvPr/>
-        </p:nvSpPr>
-        <p:spPr>
-          <a:xfrm>
-            <a:off x="5943600" y="3246120"/>
-            <a:ext cx="2834640" cy="402336"/>
+              <a:t>trains</a:t>
+            </a:r>
+            <a:endParaRPr lang="en-US" sz="1200" dirty="0"/>
+          </a:p>
+        </p:txBody>
+      </p:sp>
+      <p:sp>
+        <p:nvSpPr>
+          <p:cNvPr id="44" name="Shape 42"/>
+          <p:cNvSpPr/>
+          <p:nvPr/>
+        </p:nvSpPr>
+        <p:spPr>
+          <a:xfrm>
+            <a:off x="4718304" y="4023360"/>
+            <a:ext cx="2011680" cy="402336"/>
+          </a:xfrm>
+          <a:prstGeom prst="rect">
+            <a:avLst>
+              <a:gd name="adj" fmla="val 13636"/>
+            </a:avLst>
+          </a:prstGeom>
+          <a:solidFill>
+            <a:srgbClr val="EEF2FF"/>
+          </a:solidFill>
+          <a:ln w="12700">
+            <a:solidFill>
+              <a:srgbClr val="6366F1"/>
+            </a:solidFill>
+            <a:prstDash val="solid"/>
+          </a:ln>
+        </p:spPr>
+      </p:sp>
+      <p:sp>
+        <p:nvSpPr>
+          <p:cNvPr id="45" name="Text 43"/>
+          <p:cNvSpPr/>
+          <p:nvPr/>
+        </p:nvSpPr>
+        <p:spPr>
+          <a:xfrm>
+            <a:off x="4718304" y="4023360"/>
+            <a:ext cx="2011680" cy="402336"/>
           </a:xfrm>
           <a:prstGeom prst="rect">
             <a:avLst/>
@@ -34845,30 +35283,57 @@
               <a:buNone/>
             </a:pPr>
             <a:r>
-              <a:rPr lang="en-US" sz="1300" b="1" dirty="0">
-                <a:solidFill>
-                  <a:srgbClr val="9D174D"/>
+              <a:rPr lang="en-US" sz="1200" b="1" dirty="0">
+                <a:solidFill>
+                  <a:srgbClr val="4338CA"/>
                 </a:solidFill>
                 <a:latin typeface="Trebuchet MS" pitchFamily="34" charset="0"/>
                 <a:ea typeface="Trebuchet MS" pitchFamily="34" charset="-122"/>
                 <a:cs typeface="Trebuchet MS" pitchFamily="34" charset="-120"/>
               </a:rPr>
-              <a:t>-ing</a:t>
-            </a:r>
-            <a:endParaRPr lang="en-US" sz="1300" dirty="0"/>
-          </a:p>
-        </p:txBody>
-      </p:sp>
-      <p:sp>
-        <p:nvSpPr>
-          <p:cNvPr id="43" name="Text 41"/>
-          <p:cNvSpPr/>
-          <p:nvPr/>
-        </p:nvSpPr>
-        <p:spPr>
-          <a:xfrm>
-            <a:off x="365760" y="3611880"/>
-            <a:ext cx="1828800" cy="347472"/>
+              <a:t>retrain</a:t>
+            </a:r>
+            <a:endParaRPr lang="en-US" sz="1200" dirty="0"/>
+          </a:p>
+        </p:txBody>
+      </p:sp>
+      <p:sp>
+        <p:nvSpPr>
+          <p:cNvPr id="46" name="Shape 44"/>
+          <p:cNvSpPr/>
+          <p:nvPr/>
+        </p:nvSpPr>
+        <p:spPr>
+          <a:xfrm>
+            <a:off x="6894576" y="4023360"/>
+            <a:ext cx="2011680" cy="402336"/>
+          </a:xfrm>
+          <a:prstGeom prst="rect">
+            <a:avLst>
+              <a:gd name="adj" fmla="val 13636"/>
+            </a:avLst>
+          </a:prstGeom>
+          <a:solidFill>
+            <a:srgbClr val="EEF2FF"/>
+          </a:solidFill>
+          <a:ln w="12700">
+            <a:solidFill>
+              <a:srgbClr val="6366F1"/>
+            </a:solidFill>
+            <a:prstDash val="solid"/>
+          </a:ln>
+        </p:spPr>
+      </p:sp>
+      <p:sp>
+        <p:nvSpPr>
+          <p:cNvPr id="47" name="Text 45"/>
+          <p:cNvSpPr/>
+          <p:nvPr/>
+        </p:nvSpPr>
+        <p:spPr>
+          <a:xfrm>
+            <a:off x="6894576" y="4023360"/>
+            <a:ext cx="2011680" cy="402336"/>
           </a:xfrm>
           <a:prstGeom prst="rect">
             <a:avLst/>
@@ -34880,19 +35345,19 @@
           <a:bodyPr wrap="square" lIns="0" tIns="0" rIns="0" bIns="0" rtlCol="0" anchor="ctr"/>
           <a:lstStyle/>
           <a:p>
-            <a:pPr algn="l" indent="0" marL="0">
+            <a:pPr algn="ctr" indent="0" marL="0">
               <a:buNone/>
             </a:pPr>
             <a:r>
               <a:rPr lang="en-US" sz="1200" b="1" dirty="0">
                 <a:solidFill>
-                  <a:srgbClr val="0F172A"/>
+                  <a:srgbClr val="4338CA"/>
                 </a:solidFill>
                 <a:latin typeface="Trebuchet MS" pitchFamily="34" charset="0"/>
                 <a:ea typeface="Trebuchet MS" pitchFamily="34" charset="-122"/>
                 <a:cs typeface="Trebuchet MS" pitchFamily="34" charset="-120"/>
               </a:rPr>
-              <a:t>Sample words:</a:t>
+              <a:t>trained</a:t>
             </a:r>
             <a:endParaRPr lang="en-US" sz="1200" dirty="0"/>
           </a:p>
@@ -34900,13 +35365,13 @@
       </p:sp>
       <p:sp>
         <p:nvSpPr>
-          <p:cNvPr id="44" name="Shape 42"/>
-          <p:cNvSpPr/>
-          <p:nvPr/>
-        </p:nvSpPr>
-        <p:spPr>
-          <a:xfrm>
-            <a:off x="365760" y="4023360"/>
+          <p:cNvPr id="48" name="Shape 46"/>
+          <p:cNvSpPr/>
+          <p:nvPr/>
+        </p:nvSpPr>
+        <p:spPr>
+          <a:xfrm>
+            <a:off x="365760" y="4498848"/>
             <a:ext cx="2011680" cy="402336"/>
           </a:xfrm>
           <a:prstGeom prst="rect">
@@ -34927,13 +35392,13 @@
       </p:sp>
       <p:sp>
         <p:nvSpPr>
-          <p:cNvPr id="45" name="Text 43"/>
-          <p:cNvSpPr/>
-          <p:nvPr/>
-        </p:nvSpPr>
-        <p:spPr>
-          <a:xfrm>
-            <a:off x="365760" y="4023360"/>
+          <p:cNvPr id="49" name="Text 47"/>
+          <p:cNvSpPr/>
+          <p:nvPr/>
+        </p:nvSpPr>
+        <p:spPr>
+          <a:xfrm>
+            <a:off x="365760" y="4498848"/>
             <a:ext cx="2011680" cy="402336"/>
           </a:xfrm>
           <a:prstGeom prst="rect">
@@ -34958,7 +35423,7 @@
                 <a:ea typeface="Trebuchet MS" pitchFamily="34" charset="-122"/>
                 <a:cs typeface="Trebuchet MS" pitchFamily="34" charset="-120"/>
               </a:rPr>
-              <a:t>training</a:t>
+              <a:t>trainer</a:t>
             </a:r>
             <a:endParaRPr lang="en-US" sz="1200" dirty="0"/>
           </a:p>
@@ -34966,13 +35431,13 @@
       </p:sp>
       <p:sp>
         <p:nvSpPr>
-          <p:cNvPr id="46" name="Shape 44"/>
-          <p:cNvSpPr/>
-          <p:nvPr/>
-        </p:nvSpPr>
-        <p:spPr>
-          <a:xfrm>
-            <a:off x="2542032" y="4023360"/>
+          <p:cNvPr id="50" name="Shape 48"/>
+          <p:cNvSpPr/>
+          <p:nvPr/>
+        </p:nvSpPr>
+        <p:spPr>
+          <a:xfrm>
+            <a:off x="2542032" y="4498848"/>
             <a:ext cx="2011680" cy="402336"/>
           </a:xfrm>
           <a:prstGeom prst="rect">
@@ -34993,13 +35458,13 @@
       </p:sp>
       <p:sp>
         <p:nvSpPr>
-          <p:cNvPr id="47" name="Text 45"/>
-          <p:cNvSpPr/>
-          <p:nvPr/>
-        </p:nvSpPr>
-        <p:spPr>
-          <a:xfrm>
-            <a:off x="2542032" y="4023360"/>
+          <p:cNvPr id="51" name="Text 49"/>
+          <p:cNvSpPr/>
+          <p:nvPr/>
+        </p:nvSpPr>
+        <p:spPr>
+          <a:xfrm>
+            <a:off x="2542032" y="4498848"/>
             <a:ext cx="2011680" cy="402336"/>
           </a:xfrm>
           <a:prstGeom prst="rect">
@@ -35024,403 +35489,7 @@
                 <a:ea typeface="Trebuchet MS" pitchFamily="34" charset="-122"/>
                 <a:cs typeface="Trebuchet MS" pitchFamily="34" charset="-120"/>
               </a:rPr>
-              <a:t>trainer</a:t>
-            </a:r>
-            <a:endParaRPr lang="en-US" sz="1200" dirty="0"/>
-          </a:p>
-        </p:txBody>
-      </p:sp>
-      <p:sp>
-        <p:nvSpPr>
-          <p:cNvPr id="48" name="Shape 46"/>
-          <p:cNvSpPr/>
-          <p:nvPr/>
-        </p:nvSpPr>
-        <p:spPr>
-          <a:xfrm>
-            <a:off x="4718304" y="4023360"/>
-            <a:ext cx="2011680" cy="402336"/>
-          </a:xfrm>
-          <a:prstGeom prst="rect">
-            <a:avLst>
-              <a:gd name="adj" fmla="val 13636"/>
-            </a:avLst>
-          </a:prstGeom>
-          <a:solidFill>
-            <a:srgbClr val="EEF2FF"/>
-          </a:solidFill>
-          <a:ln w="12700">
-            <a:solidFill>
-              <a:srgbClr val="6366F1"/>
-            </a:solidFill>
-            <a:prstDash val="solid"/>
-          </a:ln>
-        </p:spPr>
-      </p:sp>
-      <p:sp>
-        <p:nvSpPr>
-          <p:cNvPr id="49" name="Text 47"/>
-          <p:cNvSpPr/>
-          <p:nvPr/>
-        </p:nvSpPr>
-        <p:spPr>
-          <a:xfrm>
-            <a:off x="4718304" y="4023360"/>
-            <a:ext cx="2011680" cy="402336"/>
-          </a:xfrm>
-          <a:prstGeom prst="rect">
-            <a:avLst/>
-          </a:prstGeom>
-          <a:noFill/>
-          <a:ln/>
-        </p:spPr>
-        <p:txBody>
-          <a:bodyPr wrap="square" lIns="0" tIns="0" rIns="0" bIns="0" rtlCol="0" anchor="ctr"/>
-          <a:lstStyle/>
-          <a:p>
-            <a:pPr algn="ctr" indent="0" marL="0">
-              <a:buNone/>
-            </a:pPr>
-            <a:r>
-              <a:rPr lang="en-US" sz="1200" b="1" dirty="0">
-                <a:solidFill>
-                  <a:srgbClr val="4338CA"/>
-                </a:solidFill>
-                <a:latin typeface="Trebuchet MS" pitchFamily="34" charset="0"/>
-                <a:ea typeface="Trebuchet MS" pitchFamily="34" charset="-122"/>
-                <a:cs typeface="Trebuchet MS" pitchFamily="34" charset="-120"/>
-              </a:rPr>
-              <a:t>trainee</a:t>
-            </a:r>
-            <a:endParaRPr lang="en-US" sz="1200" dirty="0"/>
-          </a:p>
-        </p:txBody>
-      </p:sp>
-      <p:sp>
-        <p:nvSpPr>
-          <p:cNvPr id="50" name="Shape 48"/>
-          <p:cNvSpPr/>
-          <p:nvPr/>
-        </p:nvSpPr>
-        <p:spPr>
-          <a:xfrm>
-            <a:off x="6894576" y="4023360"/>
-            <a:ext cx="2011680" cy="402336"/>
-          </a:xfrm>
-          <a:prstGeom prst="rect">
-            <a:avLst>
-              <a:gd name="adj" fmla="val 13636"/>
-            </a:avLst>
-          </a:prstGeom>
-          <a:solidFill>
-            <a:srgbClr val="EEF2FF"/>
-          </a:solidFill>
-          <a:ln w="12700">
-            <a:solidFill>
-              <a:srgbClr val="6366F1"/>
-            </a:solidFill>
-            <a:prstDash val="solid"/>
-          </a:ln>
-        </p:spPr>
-      </p:sp>
-      <p:sp>
-        <p:nvSpPr>
-          <p:cNvPr id="51" name="Text 49"/>
-          <p:cNvSpPr/>
-          <p:nvPr/>
-        </p:nvSpPr>
-        <p:spPr>
-          <a:xfrm>
-            <a:off x="6894576" y="4023360"/>
-            <a:ext cx="2011680" cy="402336"/>
-          </a:xfrm>
-          <a:prstGeom prst="rect">
-            <a:avLst/>
-          </a:prstGeom>
-          <a:noFill/>
-          <a:ln/>
-        </p:spPr>
-        <p:txBody>
-          <a:bodyPr wrap="square" lIns="0" tIns="0" rIns="0" bIns="0" rtlCol="0" anchor="ctr"/>
-          <a:lstStyle/>
-          <a:p>
-            <a:pPr algn="ctr" indent="0" marL="0">
-              <a:buNone/>
-            </a:pPr>
-            <a:r>
-              <a:rPr lang="en-US" sz="1200" b="1" dirty="0">
-                <a:solidFill>
-                  <a:srgbClr val="4338CA"/>
-                </a:solidFill>
-                <a:latin typeface="Trebuchet MS" pitchFamily="34" charset="0"/>
-                <a:ea typeface="Trebuchet MS" pitchFamily="34" charset="-122"/>
-                <a:cs typeface="Trebuchet MS" pitchFamily="34" charset="-120"/>
-              </a:rPr>
-              <a:t>retraining</a:t>
-            </a:r>
-            <a:endParaRPr lang="en-US" sz="1200" dirty="0"/>
-          </a:p>
-        </p:txBody>
-      </p:sp>
-      <p:sp>
-        <p:nvSpPr>
-          <p:cNvPr id="52" name="Shape 50"/>
-          <p:cNvSpPr/>
-          <p:nvPr/>
-        </p:nvSpPr>
-        <p:spPr>
-          <a:xfrm>
-            <a:off x="365760" y="4498848"/>
-            <a:ext cx="2011680" cy="402336"/>
-          </a:xfrm>
-          <a:prstGeom prst="rect">
-            <a:avLst>
-              <a:gd name="adj" fmla="val 13636"/>
-            </a:avLst>
-          </a:prstGeom>
-          <a:solidFill>
-            <a:srgbClr val="EEF2FF"/>
-          </a:solidFill>
-          <a:ln w="12700">
-            <a:solidFill>
-              <a:srgbClr val="6366F1"/>
-            </a:solidFill>
-            <a:prstDash val="solid"/>
-          </a:ln>
-        </p:spPr>
-      </p:sp>
-      <p:sp>
-        <p:nvSpPr>
-          <p:cNvPr id="53" name="Text 51"/>
-          <p:cNvSpPr/>
-          <p:nvPr/>
-        </p:nvSpPr>
-        <p:spPr>
-          <a:xfrm>
-            <a:off x="365760" y="4498848"/>
-            <a:ext cx="2011680" cy="402336"/>
-          </a:xfrm>
-          <a:prstGeom prst="rect">
-            <a:avLst/>
-          </a:prstGeom>
-          <a:noFill/>
-          <a:ln/>
-        </p:spPr>
-        <p:txBody>
-          <a:bodyPr wrap="square" lIns="0" tIns="0" rIns="0" bIns="0" rtlCol="0" anchor="ctr"/>
-          <a:lstStyle/>
-          <a:p>
-            <a:pPr algn="ctr" indent="0" marL="0">
-              <a:buNone/>
-            </a:pPr>
-            <a:r>
-              <a:rPr lang="en-US" sz="1200" b="1" dirty="0">
-                <a:solidFill>
-                  <a:srgbClr val="4338CA"/>
-                </a:solidFill>
-                <a:latin typeface="Trebuchet MS" pitchFamily="34" charset="0"/>
-                <a:ea typeface="Trebuchet MS" pitchFamily="34" charset="-122"/>
-                <a:cs typeface="Trebuchet MS" pitchFamily="34" charset="-120"/>
-              </a:rPr>
-              <a:t>restraint</a:t>
-            </a:r>
-            <a:endParaRPr lang="en-US" sz="1200" dirty="0"/>
-          </a:p>
-        </p:txBody>
-      </p:sp>
-      <p:sp>
-        <p:nvSpPr>
-          <p:cNvPr id="54" name="Shape 52"/>
-          <p:cNvSpPr/>
-          <p:nvPr/>
-        </p:nvSpPr>
-        <p:spPr>
-          <a:xfrm>
-            <a:off x="2542032" y="4498848"/>
-            <a:ext cx="2011680" cy="402336"/>
-          </a:xfrm>
-          <a:prstGeom prst="rect">
-            <a:avLst>
-              <a:gd name="adj" fmla="val 13636"/>
-            </a:avLst>
-          </a:prstGeom>
-          <a:solidFill>
-            <a:srgbClr val="EEF2FF"/>
-          </a:solidFill>
-          <a:ln w="12700">
-            <a:solidFill>
-              <a:srgbClr val="6366F1"/>
-            </a:solidFill>
-            <a:prstDash val="solid"/>
-          </a:ln>
-        </p:spPr>
-      </p:sp>
-      <p:sp>
-        <p:nvSpPr>
-          <p:cNvPr id="55" name="Text 53"/>
-          <p:cNvSpPr/>
-          <p:nvPr/>
-        </p:nvSpPr>
-        <p:spPr>
-          <a:xfrm>
-            <a:off x="2542032" y="4498848"/>
-            <a:ext cx="2011680" cy="402336"/>
-          </a:xfrm>
-          <a:prstGeom prst="rect">
-            <a:avLst/>
-          </a:prstGeom>
-          <a:noFill/>
-          <a:ln/>
-        </p:spPr>
-        <p:txBody>
-          <a:bodyPr wrap="square" lIns="0" tIns="0" rIns="0" bIns="0" rtlCol="0" anchor="ctr"/>
-          <a:lstStyle/>
-          <a:p>
-            <a:pPr algn="ctr" indent="0" marL="0">
-              <a:buNone/>
-            </a:pPr>
-            <a:r>
-              <a:rPr lang="en-US" sz="1200" b="1" dirty="0">
-                <a:solidFill>
-                  <a:srgbClr val="4338CA"/>
-                </a:solidFill>
-                <a:latin typeface="Trebuchet MS" pitchFamily="34" charset="0"/>
-                <a:ea typeface="Trebuchet MS" pitchFamily="34" charset="-122"/>
-                <a:cs typeface="Trebuchet MS" pitchFamily="34" charset="-120"/>
-              </a:rPr>
-              <a:t>constrain</a:t>
-            </a:r>
-            <a:endParaRPr lang="en-US" sz="1200" dirty="0"/>
-          </a:p>
-        </p:txBody>
-      </p:sp>
-      <p:sp>
-        <p:nvSpPr>
-          <p:cNvPr id="56" name="Shape 54"/>
-          <p:cNvSpPr/>
-          <p:nvPr/>
-        </p:nvSpPr>
-        <p:spPr>
-          <a:xfrm>
-            <a:off x="4718304" y="4498848"/>
-            <a:ext cx="2011680" cy="402336"/>
-          </a:xfrm>
-          <a:prstGeom prst="rect">
-            <a:avLst>
-              <a:gd name="adj" fmla="val 13636"/>
-            </a:avLst>
-          </a:prstGeom>
-          <a:solidFill>
-            <a:srgbClr val="EEF2FF"/>
-          </a:solidFill>
-          <a:ln w="12700">
-            <a:solidFill>
-              <a:srgbClr val="6366F1"/>
-            </a:solidFill>
-            <a:prstDash val="solid"/>
-          </a:ln>
-        </p:spPr>
-      </p:sp>
-      <p:sp>
-        <p:nvSpPr>
-          <p:cNvPr id="57" name="Text 55"/>
-          <p:cNvSpPr/>
-          <p:nvPr/>
-        </p:nvSpPr>
-        <p:spPr>
-          <a:xfrm>
-            <a:off x="4718304" y="4498848"/>
-            <a:ext cx="2011680" cy="402336"/>
-          </a:xfrm>
-          <a:prstGeom prst="rect">
-            <a:avLst/>
-          </a:prstGeom>
-          <a:noFill/>
-          <a:ln/>
-        </p:spPr>
-        <p:txBody>
-          <a:bodyPr wrap="square" lIns="0" tIns="0" rIns="0" bIns="0" rtlCol="0" anchor="ctr"/>
-          <a:lstStyle/>
-          <a:p>
-            <a:pPr algn="ctr" indent="0" marL="0">
-              <a:buNone/>
-            </a:pPr>
-            <a:r>
-              <a:rPr lang="en-US" sz="1200" b="1" dirty="0">
-                <a:solidFill>
-                  <a:srgbClr val="4338CA"/>
-                </a:solidFill>
-                <a:latin typeface="Trebuchet MS" pitchFamily="34" charset="0"/>
-                <a:ea typeface="Trebuchet MS" pitchFamily="34" charset="-122"/>
-                <a:cs typeface="Trebuchet MS" pitchFamily="34" charset="-120"/>
-              </a:rPr>
-              <a:t>constraint</a:t>
-            </a:r>
-            <a:endParaRPr lang="en-US" sz="1200" dirty="0"/>
-          </a:p>
-        </p:txBody>
-      </p:sp>
-      <p:sp>
-        <p:nvSpPr>
-          <p:cNvPr id="58" name="Shape 56"/>
-          <p:cNvSpPr/>
-          <p:nvPr/>
-        </p:nvSpPr>
-        <p:spPr>
-          <a:xfrm>
-            <a:off x="6894576" y="4498848"/>
-            <a:ext cx="2011680" cy="402336"/>
-          </a:xfrm>
-          <a:prstGeom prst="rect">
-            <a:avLst>
-              <a:gd name="adj" fmla="val 13636"/>
-            </a:avLst>
-          </a:prstGeom>
-          <a:solidFill>
-            <a:srgbClr val="EEF2FF"/>
-          </a:solidFill>
-          <a:ln w="12700">
-            <a:solidFill>
-              <a:srgbClr val="6366F1"/>
-            </a:solidFill>
-            <a:prstDash val="solid"/>
-          </a:ln>
-        </p:spPr>
-      </p:sp>
-      <p:sp>
-        <p:nvSpPr>
-          <p:cNvPr id="59" name="Text 57"/>
-          <p:cNvSpPr/>
-          <p:nvPr/>
-        </p:nvSpPr>
-        <p:spPr>
-          <a:xfrm>
-            <a:off x="6894576" y="4498848"/>
-            <a:ext cx="2011680" cy="402336"/>
-          </a:xfrm>
-          <a:prstGeom prst="rect">
-            <a:avLst/>
-          </a:prstGeom>
-          <a:noFill/>
-          <a:ln/>
-        </p:spPr>
-        <p:txBody>
-          <a:bodyPr wrap="square" lIns="0" tIns="0" rIns="0" bIns="0" rtlCol="0" anchor="ctr"/>
-          <a:lstStyle/>
-          <a:p>
-            <a:pPr algn="ctr" indent="0" marL="0">
-              <a:buNone/>
-            </a:pPr>
-            <a:r>
-              <a:rPr lang="en-US" sz="1200" b="1" dirty="0">
-                <a:solidFill>
-                  <a:srgbClr val="4338CA"/>
-                </a:solidFill>
-                <a:latin typeface="Trebuchet MS" pitchFamily="34" charset="0"/>
-                <a:ea typeface="Trebuchet MS" pitchFamily="34" charset="-122"/>
-                <a:cs typeface="Trebuchet MS" pitchFamily="34" charset="-120"/>
-              </a:rPr>
-              <a:t>entraining</a:t>
+              <a:t>trainers</a:t>
             </a:r>
             <a:endParaRPr lang="en-US" sz="1200" dirty="0"/>
           </a:p>
@@ -35712,7 +35781,7 @@
                 <a:ea typeface="Calibri" pitchFamily="34" charset="-122"/>
                 <a:cs typeface="Calibri" pitchFamily="34" charset="-120"/>
               </a:rPr>
-              <a:t>Word Labs  •  wordlabs.app  •  Root: 'train' = to teach or draw along</a:t>
+              <a:t>Word Labs  •  wordlabs.app  •  Root: 'train' = to practise to improve; to teach</a:t>
             </a:r>
             <a:endParaRPr lang="en-US" sz="800" dirty="0"/>
           </a:p>
@@ -35876,7 +35945,7 @@
                 <a:ea typeface="Calibri" pitchFamily="34" charset="-122"/>
                 <a:cs typeface="Calibri" pitchFamily="34" charset="-120"/>
               </a:rPr>
-              <a:t>The core part of a word carrying its basic meaning. For example, 'train' means 'to teach or draw along'.</a:t>
+              <a:t>The core part of a word carrying its basic meaning. For example, 'train' means 'to practise to improve; to teach'.</a:t>
             </a:r>
             <a:endParaRPr lang="en-US" sz="1350" dirty="0"/>
           </a:p>
@@ -36496,7 +36565,7 @@
                 <a:ea typeface="Calibri" pitchFamily="34" charset="-122"/>
                 <a:cs typeface="Calibri" pitchFamily="34" charset="-120"/>
               </a:rPr>
-              <a:t>Word Labs  •  wordlabs.app  •  Root: 'train' = to teach or draw along</a:t>
+              <a:t>Word Labs  •  wordlabs.app  •  Root: 'train' = to practise to improve; to teach</a:t>
             </a:r>
             <a:endParaRPr lang="en-US" sz="800" dirty="0"/>
           </a:p>
@@ -36608,7 +36677,7 @@
                 <a:ea typeface="Calibri" pitchFamily="34" charset="-122"/>
                 <a:cs typeface="Calibri" pitchFamily="34" charset="-120"/>
               </a:rPr>
-              <a:t>1.  A 'constraint' is something that limits or restricts what you can do.</a:t>
+              <a:t>1.  'train' means 'a small furry pet kept in a cage'.</a:t>
             </a:r>
             <a:endParaRPr lang="en-US" sz="1300" dirty="0"/>
           </a:p>
@@ -36631,11 +36700,11 @@
             </a:avLst>
           </a:prstGeom>
           <a:solidFill>
-            <a:srgbClr val="DCFCE7"/>
-          </a:solidFill>
-          <a:ln w="12700">
-            <a:solidFill>
-              <a:srgbClr val="16A34A"/>
+            <a:srgbClr val="FEE2E2"/>
+          </a:solidFill>
+          <a:ln w="12700">
+            <a:solidFill>
+              <a:srgbClr val="DC2626"/>
             </a:solidFill>
             <a:prstDash val="solid"/>
           </a:ln>
@@ -36668,13 +36737,13 @@
             <a:r>
               <a:rPr lang="en-US" sz="1100" b="1" dirty="0">
                 <a:solidFill>
-                  <a:srgbClr val="16A34A"/>
+                  <a:srgbClr val="DC2626"/>
                 </a:solidFill>
                 <a:latin typeface="Trebuchet MS" pitchFamily="34" charset="0"/>
                 <a:ea typeface="Trebuchet MS" pitchFamily="34" charset="-122"/>
                 <a:cs typeface="Trebuchet MS" pitchFamily="34" charset="-120"/>
               </a:rPr>
-              <a:t>TRUE</a:t>
+              <a:t>FALSE</a:t>
             </a:r>
             <a:endParaRPr lang="en-US" sz="1100" dirty="0"/>
           </a:p>
@@ -36747,7 +36816,7 @@
                 <a:ea typeface="Calibri" pitchFamily="34" charset="-122"/>
                 <a:cs typeface="Calibri" pitchFamily="34" charset="-120"/>
               </a:rPr>
-              <a:t>2.  The root 'train' comes from a Latin word meaning to draw or pull along.</a:t>
+              <a:t>2.  'trains' means 'lines of connected carriages that run on a railway'.</a:t>
             </a:r>
             <a:endParaRPr lang="en-US" sz="1300" dirty="0"/>
           </a:p>
@@ -36886,7 +36955,7 @@
                 <a:ea typeface="Calibri" pitchFamily="34" charset="-122"/>
                 <a:cs typeface="Calibri" pitchFamily="34" charset="-120"/>
               </a:rPr>
-              <a:t>3.  Adding the prefix 're-' to 'train' makes the word 'retrain', meaning to train again.</a:t>
+              <a:t>3.  'train' means 'a line of connected carriages that runs on a railway'.</a:t>
             </a:r>
             <a:endParaRPr lang="en-US" sz="1300" dirty="0"/>
           </a:p>
@@ -37025,7 +37094,7 @@
                 <a:ea typeface="Calibri" pitchFamily="34" charset="-122"/>
                 <a:cs typeface="Calibri" pitchFamily="34" charset="-120"/>
               </a:rPr>
-              <a:t>4.  The root 'train' originally comes from a Greek word.</a:t>
+              <a:t>4.  'train' means 'to practise to improve; to teach'.</a:t>
             </a:r>
             <a:endParaRPr lang="en-US" sz="1300" dirty="0"/>
           </a:p>
@@ -37048,11 +37117,11 @@
             </a:avLst>
           </a:prstGeom>
           <a:solidFill>
-            <a:srgbClr val="FEE2E2"/>
-          </a:solidFill>
-          <a:ln w="12700">
-            <a:solidFill>
-              <a:srgbClr val="DC2626"/>
+            <a:srgbClr val="DCFCE7"/>
+          </a:solidFill>
+          <a:ln w="12700">
+            <a:solidFill>
+              <a:srgbClr val="16A34A"/>
             </a:solidFill>
             <a:prstDash val="solid"/>
           </a:ln>
@@ -37085,13 +37154,13 @@
             <a:r>
               <a:rPr lang="en-US" sz="1100" b="1" dirty="0">
                 <a:solidFill>
-                  <a:srgbClr val="DC2626"/>
+                  <a:srgbClr val="16A34A"/>
                 </a:solidFill>
                 <a:latin typeface="Trebuchet MS" pitchFamily="34" charset="0"/>
                 <a:ea typeface="Trebuchet MS" pitchFamily="34" charset="-122"/>
                 <a:cs typeface="Trebuchet MS" pitchFamily="34" charset="-120"/>
               </a:rPr>
-              <a:t>FALSE</a:t>
+              <a:t>TRUE</a:t>
             </a:r>
             <a:endParaRPr lang="en-US" sz="1100" dirty="0"/>
           </a:p>
@@ -37164,7 +37233,7 @@
                 <a:ea typeface="Calibri" pitchFamily="34" charset="-122"/>
                 <a:cs typeface="Calibri" pitchFamily="34" charset="-120"/>
               </a:rPr>
-              <a:t>5.  The word 'trainee' means someone who teaches others a new skill.</a:t>
+              <a:t>5.  'trains' means 'small furry pets kept in cages'.</a:t>
             </a:r>
             <a:endParaRPr lang="en-US" sz="1300" dirty="0"/>
           </a:p>
@@ -37522,7 +37591,7 @@
                 <a:ea typeface="Calibri" pitchFamily="34" charset="-122"/>
                 <a:cs typeface="Calibri" pitchFamily="34" charset="-120"/>
               </a:rPr>
-              <a:t>Word Labs  •  wordlabs.app  •  Root: 'train' = to teach or draw along</a:t>
+              <a:t>Word Labs  •  wordlabs.app  •  Root: 'train' = to practise to improve; to teach</a:t>
             </a:r>
             <a:endParaRPr lang="en-US" sz="800" dirty="0"/>
           </a:p>
@@ -37659,7 +37728,7 @@
                 <a:ea typeface="Trebuchet MS" pitchFamily="34" charset="-122"/>
                 <a:cs typeface="Trebuchet MS" pitchFamily="34" charset="-120"/>
               </a:rPr>
-              <a:t>to teach or draw along</a:t>
+              <a:t>to practise to improve; to teach</a:t>
             </a:r>
             <a:endParaRPr lang="en-US" sz="2000" dirty="0"/>
           </a:p>
@@ -37698,7 +37767,7 @@
                 <a:ea typeface="Calibri" pitchFamily="34" charset="-122"/>
                 <a:cs typeface="Calibri" pitchFamily="34" charset="-120"/>
               </a:rPr>
-              <a:t>Origin: Latin: trahere</a:t>
+              <a:t>Origin: Anglo-Saxon (Old English) root</a:t>
             </a:r>
             <a:endParaRPr lang="en-US" sz="1100" dirty="0"/>
           </a:p>
@@ -37803,7 +37872,7 @@
                 <a:ea typeface="Trebuchet MS" pitchFamily="34" charset="-122"/>
                 <a:cs typeface="Trebuchet MS" pitchFamily="34" charset="-120"/>
               </a:rPr>
-              <a:t>training</a:t>
+              <a:t>train</a:t>
             </a:r>
             <a:endParaRPr lang="en-US" sz="1300" dirty="0"/>
           </a:p>
@@ -37869,7 +37938,7 @@
                 <a:ea typeface="Trebuchet MS" pitchFamily="34" charset="-122"/>
                 <a:cs typeface="Trebuchet MS" pitchFamily="34" charset="-120"/>
               </a:rPr>
-              <a:t>trainer</a:t>
+              <a:t>trains</a:t>
             </a:r>
             <a:endParaRPr lang="en-US" sz="1300" dirty="0"/>
           </a:p>
@@ -37935,7 +38004,7 @@
                 <a:ea typeface="Trebuchet MS" pitchFamily="34" charset="-122"/>
                 <a:cs typeface="Trebuchet MS" pitchFamily="34" charset="-120"/>
               </a:rPr>
-              <a:t>trainee</a:t>
+              <a:t>retrain</a:t>
             </a:r>
             <a:endParaRPr lang="en-US" sz="1300" dirty="0"/>
           </a:p>
@@ -38001,7 +38070,7 @@
                 <a:ea typeface="Trebuchet MS" pitchFamily="34" charset="-122"/>
                 <a:cs typeface="Trebuchet MS" pitchFamily="34" charset="-120"/>
               </a:rPr>
-              <a:t>retraining</a:t>
+              <a:t>trained</a:t>
             </a:r>
             <a:endParaRPr lang="en-US" sz="1300" dirty="0"/>
           </a:p>
@@ -38067,7 +38136,7 @@
                 <a:ea typeface="Trebuchet MS" pitchFamily="34" charset="-122"/>
                 <a:cs typeface="Trebuchet MS" pitchFamily="34" charset="-120"/>
               </a:rPr>
-              <a:t>restraint</a:t>
+              <a:t>trainer</a:t>
             </a:r>
             <a:endParaRPr lang="en-US" sz="1300" dirty="0"/>
           </a:p>
@@ -38133,73 +38202,7 @@
                 <a:ea typeface="Trebuchet MS" pitchFamily="34" charset="-122"/>
                 <a:cs typeface="Trebuchet MS" pitchFamily="34" charset="-120"/>
               </a:rPr>
-              <a:t>constrain</a:t>
-            </a:r>
-            <a:endParaRPr lang="en-US" sz="1300" dirty="0"/>
-          </a:p>
-        </p:txBody>
-      </p:sp>
-      <p:sp>
-        <p:nvSpPr>
-          <p:cNvPr id="28" name="Shape 26"/>
-          <p:cNvSpPr/>
-          <p:nvPr/>
-        </p:nvSpPr>
-        <p:spPr>
-          <a:xfrm>
-            <a:off x="4663440" y="3401568"/>
-            <a:ext cx="2011680" cy="502920"/>
-          </a:xfrm>
-          <a:prstGeom prst="rect">
-            <a:avLst>
-              <a:gd name="adj" fmla="val 14545"/>
-            </a:avLst>
-          </a:prstGeom>
-          <a:solidFill>
-            <a:srgbClr val="EEF2FF"/>
-          </a:solidFill>
-          <a:ln w="12700">
-            <a:solidFill>
-              <a:srgbClr val="6366F1"/>
-            </a:solidFill>
-            <a:prstDash val="solid"/>
-          </a:ln>
-        </p:spPr>
-      </p:sp>
-      <p:sp>
-        <p:nvSpPr>
-          <p:cNvPr id="29" name="Text 27"/>
-          <p:cNvSpPr/>
-          <p:nvPr/>
-        </p:nvSpPr>
-        <p:spPr>
-          <a:xfrm>
-            <a:off x="4663440" y="3401568"/>
-            <a:ext cx="2011680" cy="502920"/>
-          </a:xfrm>
-          <a:prstGeom prst="rect">
-            <a:avLst/>
-          </a:prstGeom>
-          <a:noFill/>
-          <a:ln/>
-        </p:spPr>
-        <p:txBody>
-          <a:bodyPr wrap="square" lIns="0" tIns="0" rIns="0" bIns="0" rtlCol="0" anchor="ctr"/>
-          <a:lstStyle/>
-          <a:p>
-            <a:pPr algn="ctr" indent="0" marL="0">
-              <a:buNone/>
-            </a:pPr>
-            <a:r>
-              <a:rPr lang="en-US" sz="1300" b="1" dirty="0">
-                <a:solidFill>
-                  <a:srgbClr val="4338CA"/>
-                </a:solidFill>
-                <a:latin typeface="Trebuchet MS" pitchFamily="34" charset="0"/>
-                <a:ea typeface="Trebuchet MS" pitchFamily="34" charset="-122"/>
-                <a:cs typeface="Trebuchet MS" pitchFamily="34" charset="-120"/>
-              </a:rPr>
-              <a:t>constraint</a:t>
+              <a:t>trainers</a:t>
             </a:r>
             <a:endParaRPr lang="en-US" sz="1300" dirty="0"/>
           </a:p>
@@ -38491,7 +38494,7 @@
                 <a:ea typeface="Calibri" pitchFamily="34" charset="-122"/>
                 <a:cs typeface="Calibri" pitchFamily="34" charset="-120"/>
               </a:rPr>
-              <a:t>Word Labs  •  wordlabs.app  •  Root: 'train' = to teach or draw along</a:t>
+              <a:t>Word Labs  •  wordlabs.app  •  Root: 'train' = to practise to improve; to teach</a:t>
             </a:r>
             <a:endParaRPr lang="en-US" sz="800" dirty="0"/>
           </a:p>
@@ -38920,7 +38923,7 @@
                 <a:ea typeface="Trebuchet MS" pitchFamily="34" charset="-122"/>
                 <a:cs typeface="Trebuchet MS" pitchFamily="34" charset="-120"/>
               </a:rPr>
-              <a:t>-ing</a:t>
+              <a:t>-ed</a:t>
             </a:r>
             <a:endParaRPr lang="en-US" sz="1300" dirty="0"/>
           </a:p>
@@ -38941,7 +38944,7 @@
             <a:avLst/>
           </a:prstGeom>
           <a:solidFill>
-            <a:srgbClr val="DDD6FE"/>
+            <a:srgbClr val="F1F5F9"/>
           </a:solidFill>
           <a:ln w="12700">
             <a:solidFill>
@@ -38953,18 +38956,68 @@
       </p:sp>
       <p:sp>
         <p:nvSpPr>
-          <p:cNvPr id="24" name="Text 22"/>
-          <p:cNvSpPr/>
-          <p:nvPr/>
-        </p:nvSpPr>
-        <p:spPr>
-          <a:xfrm>
-            <a:off x="640080" y="2212848"/>
+          <p:cNvPr id="24" name="Shape 22"/>
+          <p:cNvSpPr/>
+          <p:nvPr/>
+        </p:nvSpPr>
+        <p:spPr>
+          <a:xfrm>
+            <a:off x="3291840" y="2212848"/>
+            <a:ext cx="1645920" cy="420624"/>
+          </a:xfrm>
+          <a:prstGeom prst="rect">
+            <a:avLst/>
+          </a:prstGeom>
+          <a:solidFill>
+            <a:srgbClr val="F1F5F9"/>
+          </a:solidFill>
+          <a:ln w="12700">
+            <a:solidFill>
+              <a:srgbClr val="E5E7EB"/>
+            </a:solidFill>
+            <a:prstDash val="solid"/>
+          </a:ln>
+        </p:spPr>
+      </p:sp>
+      <p:sp>
+        <p:nvSpPr>
+          <p:cNvPr id="25" name="Shape 23"/>
+          <p:cNvSpPr/>
+          <p:nvPr/>
+        </p:nvSpPr>
+        <p:spPr>
+          <a:xfrm>
+            <a:off x="5943600" y="2212848"/>
             <a:ext cx="1463040" cy="420624"/>
           </a:xfrm>
           <a:prstGeom prst="rect">
             <a:avLst/>
           </a:prstGeom>
+          <a:solidFill>
+            <a:srgbClr val="FCE7F3"/>
+          </a:solidFill>
+          <a:ln w="12700">
+            <a:solidFill>
+              <a:srgbClr val="E5E7EB"/>
+            </a:solidFill>
+            <a:prstDash val="solid"/>
+          </a:ln>
+        </p:spPr>
+      </p:sp>
+      <p:sp>
+        <p:nvSpPr>
+          <p:cNvPr id="26" name="Text 24"/>
+          <p:cNvSpPr/>
+          <p:nvPr/>
+        </p:nvSpPr>
+        <p:spPr>
+          <a:xfrm>
+            <a:off x="5943600" y="2212848"/>
+            <a:ext cx="1463040" cy="420624"/>
+          </a:xfrm>
+          <a:prstGeom prst="rect">
+            <a:avLst/>
+          </a:prstGeom>
           <a:noFill/>
           <a:ln/>
         </p:spPr>
@@ -38978,13 +39031,13 @@
             <a:r>
               <a:rPr lang="en-US" sz="1300" b="1" dirty="0">
                 <a:solidFill>
-                  <a:srgbClr val="4C1D95"/>
+                  <a:srgbClr val="9D174D"/>
                 </a:solidFill>
                 <a:latin typeface="Trebuchet MS" pitchFamily="34" charset="0"/>
                 <a:ea typeface="Trebuchet MS" pitchFamily="34" charset="-122"/>
                 <a:cs typeface="Trebuchet MS" pitchFamily="34" charset="-120"/>
               </a:rPr>
-              <a:t>con-</a:t>
+              <a:t>-ing</a:t>
             </a:r>
             <a:endParaRPr lang="en-US" sz="1300" dirty="0"/>
           </a:p>
@@ -38992,20 +39045,45 @@
       </p:sp>
       <p:sp>
         <p:nvSpPr>
-          <p:cNvPr id="25" name="Shape 23"/>
-          <p:cNvSpPr/>
-          <p:nvPr/>
-        </p:nvSpPr>
-        <p:spPr>
-          <a:xfrm>
-            <a:off x="3291840" y="2212848"/>
+          <p:cNvPr id="27" name="Shape 25"/>
+          <p:cNvSpPr/>
+          <p:nvPr/>
+        </p:nvSpPr>
+        <p:spPr>
+          <a:xfrm>
+            <a:off x="640080" y="2670048"/>
+            <a:ext cx="1463040" cy="420624"/>
+          </a:xfrm>
+          <a:prstGeom prst="rect">
+            <a:avLst/>
+          </a:prstGeom>
+          <a:solidFill>
+            <a:srgbClr val="F8FAFC"/>
+          </a:solidFill>
+          <a:ln w="12700">
+            <a:solidFill>
+              <a:srgbClr val="E5E7EB"/>
+            </a:solidFill>
+            <a:prstDash val="solid"/>
+          </a:ln>
+        </p:spPr>
+      </p:sp>
+      <p:sp>
+        <p:nvSpPr>
+          <p:cNvPr id="28" name="Shape 26"/>
+          <p:cNvSpPr/>
+          <p:nvPr/>
+        </p:nvSpPr>
+        <p:spPr>
+          <a:xfrm>
+            <a:off x="3291840" y="2670048"/>
             <a:ext cx="1645920" cy="420624"/>
           </a:xfrm>
           <a:prstGeom prst="rect">
             <a:avLst/>
           </a:prstGeom>
           <a:solidFill>
-            <a:srgbClr val="F1F5F9"/>
+            <a:srgbClr val="F8FAFC"/>
           </a:solidFill>
           <a:ln w="12700">
             <a:solidFill>
@@ -39017,13 +39095,13 @@
       </p:sp>
       <p:sp>
         <p:nvSpPr>
-          <p:cNvPr id="26" name="Shape 24"/>
-          <p:cNvSpPr/>
-          <p:nvPr/>
-        </p:nvSpPr>
-        <p:spPr>
-          <a:xfrm>
-            <a:off x="5943600" y="2212848"/>
+          <p:cNvPr id="29" name="Shape 27"/>
+          <p:cNvSpPr/>
+          <p:nvPr/>
+        </p:nvSpPr>
+        <p:spPr>
+          <a:xfrm>
+            <a:off x="5943600" y="2670048"/>
             <a:ext cx="1463040" cy="420624"/>
           </a:xfrm>
           <a:prstGeom prst="rect">
@@ -39042,13 +39120,13 @@
       </p:sp>
       <p:sp>
         <p:nvSpPr>
-          <p:cNvPr id="27" name="Text 25"/>
-          <p:cNvSpPr/>
-          <p:nvPr/>
-        </p:nvSpPr>
-        <p:spPr>
-          <a:xfrm>
-            <a:off x="5943600" y="2212848"/>
+          <p:cNvPr id="30" name="Text 28"/>
+          <p:cNvSpPr/>
+          <p:nvPr/>
+        </p:nvSpPr>
+        <p:spPr>
+          <a:xfrm>
+            <a:off x="5943600" y="2670048"/>
             <a:ext cx="1463040" cy="420624"/>
           </a:xfrm>
           <a:prstGeom prst="rect">
@@ -39073,7 +39151,7 @@
                 <a:ea typeface="Trebuchet MS" pitchFamily="34" charset="-122"/>
                 <a:cs typeface="Trebuchet MS" pitchFamily="34" charset="-120"/>
               </a:rPr>
-              <a:t>-ed</a:t>
+              <a:t>-ee</a:t>
             </a:r>
             <a:endParaRPr lang="en-US" sz="1300" dirty="0"/>
           </a:p>
@@ -39081,20 +39159,20 @@
       </p:sp>
       <p:sp>
         <p:nvSpPr>
-          <p:cNvPr id="28" name="Shape 26"/>
-          <p:cNvSpPr/>
-          <p:nvPr/>
-        </p:nvSpPr>
-        <p:spPr>
-          <a:xfrm>
-            <a:off x="640080" y="2670048"/>
+          <p:cNvPr id="31" name="Shape 29"/>
+          <p:cNvSpPr/>
+          <p:nvPr/>
+        </p:nvSpPr>
+        <p:spPr>
+          <a:xfrm>
+            <a:off x="640080" y="3127248"/>
             <a:ext cx="1463040" cy="420624"/>
           </a:xfrm>
           <a:prstGeom prst="rect">
             <a:avLst/>
           </a:prstGeom>
           <a:solidFill>
-            <a:srgbClr val="DDD6FE"/>
+            <a:srgbClr val="F1F5F9"/>
           </a:solidFill>
           <a:ln w="12700">
             <a:solidFill>
@@ -39106,18 +39184,68 @@
       </p:sp>
       <p:sp>
         <p:nvSpPr>
-          <p:cNvPr id="29" name="Text 27"/>
-          <p:cNvSpPr/>
-          <p:nvPr/>
-        </p:nvSpPr>
-        <p:spPr>
-          <a:xfrm>
-            <a:off x="640080" y="2670048"/>
+          <p:cNvPr id="32" name="Shape 30"/>
+          <p:cNvSpPr/>
+          <p:nvPr/>
+        </p:nvSpPr>
+        <p:spPr>
+          <a:xfrm>
+            <a:off x="3291840" y="3127248"/>
+            <a:ext cx="1645920" cy="420624"/>
+          </a:xfrm>
+          <a:prstGeom prst="rect">
+            <a:avLst/>
+          </a:prstGeom>
+          <a:solidFill>
+            <a:srgbClr val="F1F5F9"/>
+          </a:solidFill>
+          <a:ln w="12700">
+            <a:solidFill>
+              <a:srgbClr val="E5E7EB"/>
+            </a:solidFill>
+            <a:prstDash val="solid"/>
+          </a:ln>
+        </p:spPr>
+      </p:sp>
+      <p:sp>
+        <p:nvSpPr>
+          <p:cNvPr id="33" name="Shape 31"/>
+          <p:cNvSpPr/>
+          <p:nvPr/>
+        </p:nvSpPr>
+        <p:spPr>
+          <a:xfrm>
+            <a:off x="5943600" y="3127248"/>
             <a:ext cx="1463040" cy="420624"/>
           </a:xfrm>
           <a:prstGeom prst="rect">
             <a:avLst/>
           </a:prstGeom>
+          <a:solidFill>
+            <a:srgbClr val="FCE7F3"/>
+          </a:solidFill>
+          <a:ln w="12700">
+            <a:solidFill>
+              <a:srgbClr val="E5E7EB"/>
+            </a:solidFill>
+            <a:prstDash val="solid"/>
+          </a:ln>
+        </p:spPr>
+      </p:sp>
+      <p:sp>
+        <p:nvSpPr>
+          <p:cNvPr id="34" name="Text 32"/>
+          <p:cNvSpPr/>
+          <p:nvPr/>
+        </p:nvSpPr>
+        <p:spPr>
+          <a:xfrm>
+            <a:off x="5943600" y="3127248"/>
+            <a:ext cx="1463040" cy="420624"/>
+          </a:xfrm>
+          <a:prstGeom prst="rect">
+            <a:avLst/>
+          </a:prstGeom>
           <a:noFill/>
           <a:ln/>
         </p:spPr>
@@ -39131,13 +39259,13 @@
             <a:r>
               <a:rPr lang="en-US" sz="1300" b="1" dirty="0">
                 <a:solidFill>
-                  <a:srgbClr val="4C1D95"/>
+                  <a:srgbClr val="9D174D"/>
                 </a:solidFill>
                 <a:latin typeface="Trebuchet MS" pitchFamily="34" charset="0"/>
                 <a:ea typeface="Trebuchet MS" pitchFamily="34" charset="-122"/>
                 <a:cs typeface="Trebuchet MS" pitchFamily="34" charset="-120"/>
               </a:rPr>
-              <a:t>en-</a:t>
+              <a:t>-er</a:t>
             </a:r>
             <a:endParaRPr lang="en-US" sz="1300" dirty="0"/>
           </a:p>
@@ -39145,13 +39273,38 @@
       </p:sp>
       <p:sp>
         <p:nvSpPr>
-          <p:cNvPr id="30" name="Shape 28"/>
-          <p:cNvSpPr/>
-          <p:nvPr/>
-        </p:nvSpPr>
-        <p:spPr>
-          <a:xfrm>
-            <a:off x="3291840" y="2670048"/>
+          <p:cNvPr id="35" name="Shape 33"/>
+          <p:cNvSpPr/>
+          <p:nvPr/>
+        </p:nvSpPr>
+        <p:spPr>
+          <a:xfrm>
+            <a:off x="640080" y="3584448"/>
+            <a:ext cx="1463040" cy="420624"/>
+          </a:xfrm>
+          <a:prstGeom prst="rect">
+            <a:avLst/>
+          </a:prstGeom>
+          <a:solidFill>
+            <a:srgbClr val="F8FAFC"/>
+          </a:solidFill>
+          <a:ln w="12700">
+            <a:solidFill>
+              <a:srgbClr val="E5E7EB"/>
+            </a:solidFill>
+            <a:prstDash val="solid"/>
+          </a:ln>
+        </p:spPr>
+      </p:sp>
+      <p:sp>
+        <p:nvSpPr>
+          <p:cNvPr id="36" name="Shape 34"/>
+          <p:cNvSpPr/>
+          <p:nvPr/>
+        </p:nvSpPr>
+        <p:spPr>
+          <a:xfrm>
+            <a:off x="3291840" y="3584448"/>
             <a:ext cx="1645920" cy="420624"/>
           </a:xfrm>
           <a:prstGeom prst="rect">
@@ -39170,13 +39323,13 @@
       </p:sp>
       <p:sp>
         <p:nvSpPr>
-          <p:cNvPr id="31" name="Shape 29"/>
-          <p:cNvSpPr/>
-          <p:nvPr/>
-        </p:nvSpPr>
-        <p:spPr>
-          <a:xfrm>
-            <a:off x="5943600" y="2670048"/>
+          <p:cNvPr id="37" name="Shape 35"/>
+          <p:cNvSpPr/>
+          <p:nvPr/>
+        </p:nvSpPr>
+        <p:spPr>
+          <a:xfrm>
+            <a:off x="5943600" y="3584448"/>
             <a:ext cx="1463040" cy="420624"/>
           </a:xfrm>
           <a:prstGeom prst="rect">
@@ -39195,13 +39348,13 @@
       </p:sp>
       <p:sp>
         <p:nvSpPr>
-          <p:cNvPr id="32" name="Text 30"/>
-          <p:cNvSpPr/>
-          <p:nvPr/>
-        </p:nvSpPr>
-        <p:spPr>
-          <a:xfrm>
-            <a:off x="5943600" y="2670048"/>
+          <p:cNvPr id="38" name="Text 36"/>
+          <p:cNvSpPr/>
+          <p:nvPr/>
+        </p:nvSpPr>
+        <p:spPr>
+          <a:xfrm>
+            <a:off x="5943600" y="3584448"/>
             <a:ext cx="1463040" cy="420624"/>
           </a:xfrm>
           <a:prstGeom prst="rect">
@@ -39226,7 +39379,7 @@
                 <a:ea typeface="Trebuchet MS" pitchFamily="34" charset="-122"/>
                 <a:cs typeface="Trebuchet MS" pitchFamily="34" charset="-120"/>
               </a:rPr>
-              <a:t>-er</a:t>
+              <a:t>-s</a:t>
             </a:r>
             <a:endParaRPr lang="en-US" sz="1300" dirty="0"/>
           </a:p>
@@ -39234,313 +39387,7 @@
       </p:sp>
       <p:sp>
         <p:nvSpPr>
-          <p:cNvPr id="33" name="Shape 31"/>
-          <p:cNvSpPr/>
-          <p:nvPr/>
-        </p:nvSpPr>
-        <p:spPr>
-          <a:xfrm>
-            <a:off x="640080" y="3127248"/>
-            <a:ext cx="1463040" cy="420624"/>
-          </a:xfrm>
-          <a:prstGeom prst="rect">
-            <a:avLst/>
-          </a:prstGeom>
-          <a:solidFill>
-            <a:srgbClr val="DDD6FE"/>
-          </a:solidFill>
-          <a:ln w="12700">
-            <a:solidFill>
-              <a:srgbClr val="E5E7EB"/>
-            </a:solidFill>
-            <a:prstDash val="solid"/>
-          </a:ln>
-        </p:spPr>
-      </p:sp>
-      <p:sp>
-        <p:nvSpPr>
-          <p:cNvPr id="34" name="Text 32"/>
-          <p:cNvSpPr/>
-          <p:nvPr/>
-        </p:nvSpPr>
-        <p:spPr>
-          <a:xfrm>
-            <a:off x="640080" y="3127248"/>
-            <a:ext cx="1463040" cy="420624"/>
-          </a:xfrm>
-          <a:prstGeom prst="rect">
-            <a:avLst/>
-          </a:prstGeom>
-          <a:noFill/>
-          <a:ln/>
-        </p:spPr>
-        <p:txBody>
-          <a:bodyPr wrap="square" lIns="0" tIns="0" rIns="0" bIns="0" rtlCol="0" anchor="ctr"/>
-          <a:lstStyle/>
-          <a:p>
-            <a:pPr algn="ctr" indent="0" marL="0">
-              <a:buNone/>
-            </a:pPr>
-            <a:r>
-              <a:rPr lang="en-US" sz="1300" b="1" dirty="0">
-                <a:solidFill>
-                  <a:srgbClr val="4C1D95"/>
-                </a:solidFill>
-                <a:latin typeface="Trebuchet MS" pitchFamily="34" charset="0"/>
-                <a:ea typeface="Trebuchet MS" pitchFamily="34" charset="-122"/>
-                <a:cs typeface="Trebuchet MS" pitchFamily="34" charset="-120"/>
-              </a:rPr>
-              <a:t>de-</a:t>
-            </a:r>
-            <a:endParaRPr lang="en-US" sz="1300" dirty="0"/>
-          </a:p>
-        </p:txBody>
-      </p:sp>
-      <p:sp>
-        <p:nvSpPr>
-          <p:cNvPr id="35" name="Shape 33"/>
-          <p:cNvSpPr/>
-          <p:nvPr/>
-        </p:nvSpPr>
-        <p:spPr>
-          <a:xfrm>
-            <a:off x="3291840" y="3127248"/>
-            <a:ext cx="1645920" cy="420624"/>
-          </a:xfrm>
-          <a:prstGeom prst="rect">
-            <a:avLst/>
-          </a:prstGeom>
-          <a:solidFill>
-            <a:srgbClr val="F1F5F9"/>
-          </a:solidFill>
-          <a:ln w="12700">
-            <a:solidFill>
-              <a:srgbClr val="E5E7EB"/>
-            </a:solidFill>
-            <a:prstDash val="solid"/>
-          </a:ln>
-        </p:spPr>
-      </p:sp>
-      <p:sp>
-        <p:nvSpPr>
-          <p:cNvPr id="36" name="Shape 34"/>
-          <p:cNvSpPr/>
-          <p:nvPr/>
-        </p:nvSpPr>
-        <p:spPr>
-          <a:xfrm>
-            <a:off x="5943600" y="3127248"/>
-            <a:ext cx="1463040" cy="420624"/>
-          </a:xfrm>
-          <a:prstGeom prst="rect">
-            <a:avLst/>
-          </a:prstGeom>
-          <a:solidFill>
-            <a:srgbClr val="FCE7F3"/>
-          </a:solidFill>
-          <a:ln w="12700">
-            <a:solidFill>
-              <a:srgbClr val="E5E7EB"/>
-            </a:solidFill>
-            <a:prstDash val="solid"/>
-          </a:ln>
-        </p:spPr>
-      </p:sp>
-      <p:sp>
-        <p:nvSpPr>
-          <p:cNvPr id="37" name="Text 35"/>
-          <p:cNvSpPr/>
-          <p:nvPr/>
-        </p:nvSpPr>
-        <p:spPr>
-          <a:xfrm>
-            <a:off x="5943600" y="3127248"/>
-            <a:ext cx="1463040" cy="420624"/>
-          </a:xfrm>
-          <a:prstGeom prst="rect">
-            <a:avLst/>
-          </a:prstGeom>
-          <a:noFill/>
-          <a:ln/>
-        </p:spPr>
-        <p:txBody>
-          <a:bodyPr wrap="square" lIns="0" tIns="0" rIns="0" bIns="0" rtlCol="0" anchor="ctr"/>
-          <a:lstStyle/>
-          <a:p>
-            <a:pPr algn="ctr" indent="0" marL="0">
-              <a:buNone/>
-            </a:pPr>
-            <a:r>
-              <a:rPr lang="en-US" sz="1300" b="1" dirty="0">
-                <a:solidFill>
-                  <a:srgbClr val="9D174D"/>
-                </a:solidFill>
-                <a:latin typeface="Trebuchet MS" pitchFamily="34" charset="0"/>
-                <a:ea typeface="Trebuchet MS" pitchFamily="34" charset="-122"/>
-                <a:cs typeface="Trebuchet MS" pitchFamily="34" charset="-120"/>
-              </a:rPr>
-              <a:t>-ee</a:t>
-            </a:r>
-            <a:endParaRPr lang="en-US" sz="1300" dirty="0"/>
-          </a:p>
-        </p:txBody>
-      </p:sp>
-      <p:sp>
-        <p:nvSpPr>
-          <p:cNvPr id="38" name="Shape 36"/>
-          <p:cNvSpPr/>
-          <p:nvPr/>
-        </p:nvSpPr>
-        <p:spPr>
-          <a:xfrm>
-            <a:off x="640080" y="3584448"/>
-            <a:ext cx="1463040" cy="420624"/>
-          </a:xfrm>
-          <a:prstGeom prst="rect">
-            <a:avLst/>
-          </a:prstGeom>
-          <a:solidFill>
-            <a:srgbClr val="DDD6FE"/>
-          </a:solidFill>
-          <a:ln w="12700">
-            <a:solidFill>
-              <a:srgbClr val="E5E7EB"/>
-            </a:solidFill>
-            <a:prstDash val="solid"/>
-          </a:ln>
-        </p:spPr>
-      </p:sp>
-      <p:sp>
-        <p:nvSpPr>
           <p:cNvPr id="39" name="Text 37"/>
-          <p:cNvSpPr/>
-          <p:nvPr/>
-        </p:nvSpPr>
-        <p:spPr>
-          <a:xfrm>
-            <a:off x="640080" y="3584448"/>
-            <a:ext cx="1463040" cy="420624"/>
-          </a:xfrm>
-          <a:prstGeom prst="rect">
-            <a:avLst/>
-          </a:prstGeom>
-          <a:noFill/>
-          <a:ln/>
-        </p:spPr>
-        <p:txBody>
-          <a:bodyPr wrap="square" lIns="0" tIns="0" rIns="0" bIns="0" rtlCol="0" anchor="ctr"/>
-          <a:lstStyle/>
-          <a:p>
-            <a:pPr algn="ctr" indent="0" marL="0">
-              <a:buNone/>
-            </a:pPr>
-            <a:r>
-              <a:rPr lang="en-US" sz="1300" b="1" dirty="0">
-                <a:solidFill>
-                  <a:srgbClr val="4C1D95"/>
-                </a:solidFill>
-                <a:latin typeface="Trebuchet MS" pitchFamily="34" charset="0"/>
-                <a:ea typeface="Trebuchet MS" pitchFamily="34" charset="-122"/>
-                <a:cs typeface="Trebuchet MS" pitchFamily="34" charset="-120"/>
-              </a:rPr>
-              <a:t>over-</a:t>
-            </a:r>
-            <a:endParaRPr lang="en-US" sz="1300" dirty="0"/>
-          </a:p>
-        </p:txBody>
-      </p:sp>
-      <p:sp>
-        <p:nvSpPr>
-          <p:cNvPr id="40" name="Shape 38"/>
-          <p:cNvSpPr/>
-          <p:nvPr/>
-        </p:nvSpPr>
-        <p:spPr>
-          <a:xfrm>
-            <a:off x="3291840" y="3584448"/>
-            <a:ext cx="1645920" cy="420624"/>
-          </a:xfrm>
-          <a:prstGeom prst="rect">
-            <a:avLst/>
-          </a:prstGeom>
-          <a:solidFill>
-            <a:srgbClr val="F8FAFC"/>
-          </a:solidFill>
-          <a:ln w="12700">
-            <a:solidFill>
-              <a:srgbClr val="E5E7EB"/>
-            </a:solidFill>
-            <a:prstDash val="solid"/>
-          </a:ln>
-        </p:spPr>
-      </p:sp>
-      <p:sp>
-        <p:nvSpPr>
-          <p:cNvPr id="41" name="Shape 39"/>
-          <p:cNvSpPr/>
-          <p:nvPr/>
-        </p:nvSpPr>
-        <p:spPr>
-          <a:xfrm>
-            <a:off x="5943600" y="3584448"/>
-            <a:ext cx="1463040" cy="420624"/>
-          </a:xfrm>
-          <a:prstGeom prst="rect">
-            <a:avLst/>
-          </a:prstGeom>
-          <a:solidFill>
-            <a:srgbClr val="FCE7F3"/>
-          </a:solidFill>
-          <a:ln w="12700">
-            <a:solidFill>
-              <a:srgbClr val="E5E7EB"/>
-            </a:solidFill>
-            <a:prstDash val="solid"/>
-          </a:ln>
-        </p:spPr>
-      </p:sp>
-      <p:sp>
-        <p:nvSpPr>
-          <p:cNvPr id="42" name="Text 40"/>
-          <p:cNvSpPr/>
-          <p:nvPr/>
-        </p:nvSpPr>
-        <p:spPr>
-          <a:xfrm>
-            <a:off x="5943600" y="3584448"/>
-            <a:ext cx="1463040" cy="420624"/>
-          </a:xfrm>
-          <a:prstGeom prst="rect">
-            <a:avLst/>
-          </a:prstGeom>
-          <a:noFill/>
-          <a:ln/>
-        </p:spPr>
-        <p:txBody>
-          <a:bodyPr wrap="square" lIns="0" tIns="0" rIns="0" bIns="0" rtlCol="0" anchor="ctr"/>
-          <a:lstStyle/>
-          <a:p>
-            <a:pPr algn="ctr" indent="0" marL="0">
-              <a:buNone/>
-            </a:pPr>
-            <a:r>
-              <a:rPr lang="en-US" sz="1300" b="1" dirty="0">
-                <a:solidFill>
-                  <a:srgbClr val="9D174D"/>
-                </a:solidFill>
-                <a:latin typeface="Trebuchet MS" pitchFamily="34" charset="0"/>
-                <a:ea typeface="Trebuchet MS" pitchFamily="34" charset="-122"/>
-                <a:cs typeface="Trebuchet MS" pitchFamily="34" charset="-120"/>
-              </a:rPr>
-              <a:t>-ing</a:t>
-            </a:r>
-            <a:endParaRPr lang="en-US" sz="1300" dirty="0"/>
-          </a:p>
-        </p:txBody>
-      </p:sp>
-      <p:sp>
-        <p:nvSpPr>
-          <p:cNvPr id="43" name="Text 41"/>
           <p:cNvSpPr/>
           <p:nvPr/>
         </p:nvSpPr>
@@ -39579,7 +39426,7 @@
       </p:sp>
       <p:sp>
         <p:nvSpPr>
-          <p:cNvPr id="44" name="Shape 42"/>
+          <p:cNvPr id="40" name="Shape 38"/>
           <p:cNvSpPr/>
           <p:nvPr/>
         </p:nvSpPr>
@@ -39613,7 +39460,7 @@
       </p:sp>
       <p:sp>
         <p:nvSpPr>
-          <p:cNvPr id="45" name="Text 43"/>
+          <p:cNvPr id="41" name="Text 39"/>
           <p:cNvSpPr/>
           <p:nvPr/>
         </p:nvSpPr>
@@ -39652,7 +39499,7 @@
       </p:sp>
       <p:sp>
         <p:nvSpPr>
-          <p:cNvPr id="46" name="Text 44"/>
+          <p:cNvPr id="42" name="Text 40"/>
           <p:cNvSpPr/>
           <p:nvPr/>
         </p:nvSpPr>
@@ -39691,7 +39538,7 @@
       </p:sp>
       <p:sp>
         <p:nvSpPr>
-          <p:cNvPr id="47" name="Shape 45"/>
+          <p:cNvPr id="43" name="Shape 41"/>
           <p:cNvSpPr/>
           <p:nvPr/>
         </p:nvSpPr>
@@ -39725,7 +39572,7 @@
       </p:sp>
       <p:sp>
         <p:nvSpPr>
-          <p:cNvPr id="48" name="Text 46"/>
+          <p:cNvPr id="44" name="Text 42"/>
           <p:cNvSpPr/>
           <p:nvPr/>
         </p:nvSpPr>
@@ -39764,7 +39611,7 @@
       </p:sp>
       <p:sp>
         <p:nvSpPr>
-          <p:cNvPr id="49" name="Text 47"/>
+          <p:cNvPr id="45" name="Text 43"/>
           <p:cNvSpPr/>
           <p:nvPr/>
         </p:nvSpPr>
@@ -39803,14 +39650,14 @@
       </p:sp>
       <p:sp>
         <p:nvSpPr>
-          <p:cNvPr id="50" name="Shape 48"/>
+          <p:cNvPr id="46" name="Shape 44"/>
           <p:cNvSpPr/>
           <p:nvPr/>
         </p:nvSpPr>
         <p:spPr>
           <a:xfrm>
             <a:off x="4471416" y="4178808"/>
-            <a:ext cx="950976" cy="420624"/>
+            <a:ext cx="822960" cy="420624"/>
           </a:xfrm>
           <a:prstGeom prst="rect">
             <a:avLst>
@@ -39837,14 +39684,14 @@
       </p:sp>
       <p:sp>
         <p:nvSpPr>
-          <p:cNvPr id="51" name="Text 49"/>
+          <p:cNvPr id="47" name="Text 45"/>
           <p:cNvSpPr/>
           <p:nvPr/>
         </p:nvSpPr>
         <p:spPr>
           <a:xfrm>
             <a:off x="4471416" y="4178808"/>
-            <a:ext cx="950976" cy="420624"/>
+            <a:ext cx="822960" cy="420624"/>
           </a:xfrm>
           <a:prstGeom prst="rect">
             <a:avLst/>
@@ -39868,7 +39715,7 @@
                 <a:ea typeface="Trebuchet MS" pitchFamily="34" charset="-122"/>
                 <a:cs typeface="Trebuchet MS" pitchFamily="34" charset="-120"/>
               </a:rPr>
-              <a:t>-ing</a:t>
+              <a:t>-ed</a:t>
             </a:r>
             <a:endParaRPr lang="en-US" sz="1300" dirty="0"/>
           </a:p>
@@ -39876,13 +39723,13 @@
       </p:sp>
       <p:sp>
         <p:nvSpPr>
-          <p:cNvPr id="52" name="Text 50"/>
-          <p:cNvSpPr/>
-          <p:nvPr/>
-        </p:nvSpPr>
-        <p:spPr>
-          <a:xfrm>
-            <a:off x="5495544" y="4178808"/>
+          <p:cNvPr id="48" name="Text 46"/>
+          <p:cNvSpPr/>
+          <p:nvPr/>
+        </p:nvSpPr>
+        <p:spPr>
+          <a:xfrm>
+            <a:off x="5367528" y="4178808"/>
             <a:ext cx="365760" cy="420624"/>
           </a:xfrm>
           <a:prstGeom prst="rect">
@@ -39915,13 +39762,13 @@
       </p:sp>
       <p:sp>
         <p:nvSpPr>
-          <p:cNvPr id="53" name="Shape 51"/>
-          <p:cNvSpPr/>
-          <p:nvPr/>
-        </p:nvSpPr>
-        <p:spPr>
-          <a:xfrm>
-            <a:off x="5907024" y="4178808"/>
+          <p:cNvPr id="49" name="Shape 47"/>
+          <p:cNvSpPr/>
+          <p:nvPr/>
+        </p:nvSpPr>
+        <p:spPr>
+          <a:xfrm>
+            <a:off x="5779008" y="4178808"/>
             <a:ext cx="2194560" cy="420624"/>
           </a:xfrm>
           <a:prstGeom prst="rect">
@@ -39942,13 +39789,13 @@
       </p:sp>
       <p:sp>
         <p:nvSpPr>
-          <p:cNvPr id="54" name="Text 52"/>
-          <p:cNvSpPr/>
-          <p:nvPr/>
-        </p:nvSpPr>
-        <p:spPr>
-          <a:xfrm>
-            <a:off x="5907024" y="4178808"/>
+          <p:cNvPr id="50" name="Text 48"/>
+          <p:cNvSpPr/>
+          <p:nvPr/>
+        </p:nvSpPr>
+        <p:spPr>
+          <a:xfrm>
+            <a:off x="5779008" y="4178808"/>
             <a:ext cx="2194560" cy="420624"/>
           </a:xfrm>
           <a:prstGeom prst="rect">
@@ -39973,7 +39820,7 @@
                 <a:ea typeface="Trebuchet MS" pitchFamily="34" charset="-122"/>
                 <a:cs typeface="Trebuchet MS" pitchFamily="34" charset="-120"/>
               </a:rPr>
-              <a:t>training</a:t>
+              <a:t>train</a:t>
             </a:r>
             <a:endParaRPr lang="en-US" sz="1400" dirty="0"/>
           </a:p>
@@ -40265,7 +40112,7 @@
                 <a:ea typeface="Calibri" pitchFamily="34" charset="-122"/>
                 <a:cs typeface="Calibri" pitchFamily="34" charset="-120"/>
               </a:rPr>
-              <a:t>Word Labs  •  wordlabs.app  •  Root: 'train' = to teach or draw along</a:t>
+              <a:t>Word Labs  •  wordlabs.app  •  Root: 'train' = to practise to improve; to teach</a:t>
             </a:r>
             <a:endParaRPr lang="en-US" sz="800" dirty="0"/>
           </a:p>
@@ -40377,7 +40224,7 @@
                 <a:ea typeface="Trebuchet MS" pitchFamily="34" charset="-122"/>
                 <a:cs typeface="Trebuchet MS" pitchFamily="34" charset="-120"/>
               </a:rPr>
-              <a:t>training</a:t>
+              <a:t>train</a:t>
             </a:r>
             <a:endParaRPr lang="en-US" sz="1200" dirty="0"/>
           </a:p>
@@ -40443,7 +40290,7 @@
                 <a:ea typeface="Calibri" pitchFamily="34" charset="-122"/>
                 <a:cs typeface="Calibri" pitchFamily="34" charset="-120"/>
               </a:rPr>
-              <a:t>The process of learning skills or getting fit by practising regularly.</a:t>
+              <a:t>a line of connected carriages that runs on a railway</a:t>
             </a:r>
             <a:endParaRPr lang="en-US" sz="1200" dirty="0"/>
           </a:p>
@@ -40516,7 +40363,7 @@
                 <a:ea typeface="Trebuchet MS" pitchFamily="34" charset="-122"/>
                 <a:cs typeface="Trebuchet MS" pitchFamily="34" charset="-120"/>
               </a:rPr>
-              <a:t>trainer</a:t>
+              <a:t>trains</a:t>
             </a:r>
             <a:endParaRPr lang="en-US" sz="1200" dirty="0"/>
           </a:p>
@@ -40582,7 +40429,7 @@
                 <a:ea typeface="Calibri" pitchFamily="34" charset="-122"/>
                 <a:cs typeface="Calibri" pitchFamily="34" charset="-120"/>
               </a:rPr>
-              <a:t>Someone who is learning a new job or skill from someone more experienced.</a:t>
+              <a:t>to train again, often to learn new skills for a different job</a:t>
             </a:r>
             <a:endParaRPr lang="en-US" sz="1200" dirty="0"/>
           </a:p>
@@ -40655,7 +40502,7 @@
                 <a:ea typeface="Trebuchet MS" pitchFamily="34" charset="-122"/>
                 <a:cs typeface="Trebuchet MS" pitchFamily="34" charset="-120"/>
               </a:rPr>
-              <a:t>trainee</a:t>
+              <a:t>retrain</a:t>
             </a:r>
             <a:endParaRPr lang="en-US" sz="1200" dirty="0"/>
           </a:p>
@@ -40721,7 +40568,7 @@
                 <a:ea typeface="Calibri" pitchFamily="34" charset="-122"/>
                 <a:cs typeface="Calibri" pitchFamily="34" charset="-120"/>
               </a:rPr>
-              <a:t>To limit or restrict what someone is able to do.</a:t>
+              <a:t>shoes designed for sport and exercise, or people who coach others</a:t>
             </a:r>
             <a:endParaRPr lang="en-US" sz="1200" dirty="0"/>
           </a:p>
@@ -40794,7 +40641,7 @@
                 <a:ea typeface="Trebuchet MS" pitchFamily="34" charset="-122"/>
                 <a:cs typeface="Trebuchet MS" pitchFamily="34" charset="-120"/>
               </a:rPr>
-              <a:t>retraining</a:t>
+              <a:t>trained</a:t>
             </a:r>
             <a:endParaRPr lang="en-US" sz="1200" dirty="0"/>
           </a:p>
@@ -40860,7 +40707,7 @@
                 <a:ea typeface="Calibri" pitchFamily="34" charset="-122"/>
                 <a:cs typeface="Calibri" pitchFamily="34" charset="-120"/>
               </a:rPr>
-              <a:t>Learning new skills again, often for a different job.</a:t>
+              <a:t>taught or practised to do something well</a:t>
             </a:r>
             <a:endParaRPr lang="en-US" sz="1200" dirty="0"/>
           </a:p>
@@ -40933,7 +40780,7 @@
                 <a:ea typeface="Trebuchet MS" pitchFamily="34" charset="-122"/>
                 <a:cs typeface="Trebuchet MS" pitchFamily="34" charset="-120"/>
               </a:rPr>
-              <a:t>restraint</a:t>
+              <a:t>trainer</a:t>
             </a:r>
             <a:endParaRPr lang="en-US" sz="1200" dirty="0"/>
           </a:p>
@@ -40999,7 +40846,7 @@
                 <a:ea typeface="Calibri" pitchFamily="34" charset="-122"/>
                 <a:cs typeface="Calibri" pitchFamily="34" charset="-120"/>
               </a:rPr>
-              <a:t>Something that holds you back or stops you from doing something freely.</a:t>
+              <a:t>a person who teaches or coaches someone in a skill or sport</a:t>
             </a:r>
             <a:endParaRPr lang="en-US" sz="1200" dirty="0"/>
           </a:p>
@@ -41072,7 +40919,7 @@
                 <a:ea typeface="Trebuchet MS" pitchFamily="34" charset="-122"/>
                 <a:cs typeface="Trebuchet MS" pitchFamily="34" charset="-120"/>
               </a:rPr>
-              <a:t>constrain</a:t>
+              <a:t>trainers</a:t>
             </a:r>
             <a:endParaRPr lang="en-US" sz="1200" dirty="0"/>
           </a:p>
@@ -41138,146 +40985,7 @@
                 <a:ea typeface="Calibri" pitchFamily="34" charset="-122"/>
                 <a:cs typeface="Calibri" pitchFamily="34" charset="-120"/>
               </a:rPr>
-              <a:t>A rule or situation that limits what you can do.</a:t>
-            </a:r>
-            <a:endParaRPr lang="en-US" sz="1200" dirty="0"/>
-          </a:p>
-        </p:txBody>
-      </p:sp>
-      <p:sp>
-        <p:nvSpPr>
-          <p:cNvPr id="35" name="Shape 33"/>
-          <p:cNvSpPr/>
-          <p:nvPr/>
-        </p:nvSpPr>
-        <p:spPr>
-          <a:xfrm>
-            <a:off x="365760" y="4370832"/>
-            <a:ext cx="2011680" cy="457200"/>
-          </a:xfrm>
-          <a:prstGeom prst="rect">
-            <a:avLst>
-              <a:gd name="adj" fmla="val 12000"/>
-            </a:avLst>
-          </a:prstGeom>
-          <a:solidFill>
-            <a:srgbClr val="EEF2FF"/>
-          </a:solidFill>
-          <a:ln w="12700">
-            <a:solidFill>
-              <a:srgbClr val="6366F1"/>
-            </a:solidFill>
-            <a:prstDash val="solid"/>
-          </a:ln>
-          <a:effectLst>
-            <a:outerShdw sx="100000" sy="100000" kx="0" ky="0" algn="bl" rotWithShape="0" blurRad="101600" dist="38100" dir="8100000">
-              <a:srgbClr val="000000">
-                <a:alpha val="12000"/>
-              </a:srgbClr>
-            </a:outerShdw>
-          </a:effectLst>
-        </p:spPr>
-      </p:sp>
-      <p:sp>
-        <p:nvSpPr>
-          <p:cNvPr id="36" name="Text 34"/>
-          <p:cNvSpPr/>
-          <p:nvPr/>
-        </p:nvSpPr>
-        <p:spPr>
-          <a:xfrm>
-            <a:off x="365760" y="4370832"/>
-            <a:ext cx="2011680" cy="457200"/>
-          </a:xfrm>
-          <a:prstGeom prst="rect">
-            <a:avLst/>
-          </a:prstGeom>
-          <a:noFill/>
-          <a:ln/>
-        </p:spPr>
-        <p:txBody>
-          <a:bodyPr wrap="square" lIns="0" tIns="0" rIns="0" bIns="0" rtlCol="0" anchor="ctr"/>
-          <a:lstStyle/>
-          <a:p>
-            <a:pPr algn="ctr" indent="0" marL="0">
-              <a:buNone/>
-            </a:pPr>
-            <a:r>
-              <a:rPr lang="en-US" sz="1200" b="1" dirty="0">
-                <a:solidFill>
-                  <a:srgbClr val="4338CA"/>
-                </a:solidFill>
-                <a:latin typeface="Trebuchet MS" pitchFamily="34" charset="0"/>
-                <a:ea typeface="Trebuchet MS" pitchFamily="34" charset="-122"/>
-                <a:cs typeface="Trebuchet MS" pitchFamily="34" charset="-120"/>
-              </a:rPr>
-              <a:t>constraint</a:t>
-            </a:r>
-            <a:endParaRPr lang="en-US" sz="1200" dirty="0"/>
-          </a:p>
-        </p:txBody>
-      </p:sp>
-      <p:sp>
-        <p:nvSpPr>
-          <p:cNvPr id="37" name="Shape 35"/>
-          <p:cNvSpPr/>
-          <p:nvPr/>
-        </p:nvSpPr>
-        <p:spPr>
-          <a:xfrm>
-            <a:off x="2514600" y="4370832"/>
-            <a:ext cx="6263640" cy="457200"/>
-          </a:xfrm>
-          <a:prstGeom prst="rect">
-            <a:avLst>
-              <a:gd name="adj" fmla="val 12000"/>
-            </a:avLst>
-          </a:prstGeom>
-          <a:solidFill>
-            <a:srgbClr val="F8FAFC"/>
-          </a:solidFill>
-          <a:ln w="12700">
-            <a:solidFill>
-              <a:srgbClr val="E2E8F0"/>
-            </a:solidFill>
-            <a:prstDash val="solid"/>
-          </a:ln>
-        </p:spPr>
-      </p:sp>
-      <p:sp>
-        <p:nvSpPr>
-          <p:cNvPr id="38" name="Text 36"/>
-          <p:cNvSpPr/>
-          <p:nvPr/>
-        </p:nvSpPr>
-        <p:spPr>
-          <a:xfrm>
-            <a:off x="2651760" y="4370832"/>
-            <a:ext cx="6035040" cy="457200"/>
-          </a:xfrm>
-          <a:prstGeom prst="rect">
-            <a:avLst/>
-          </a:prstGeom>
-          <a:noFill/>
-          <a:ln/>
-        </p:spPr>
-        <p:txBody>
-          <a:bodyPr wrap="square" rtlCol="0" anchor="ctr"/>
-          <a:lstStyle/>
-          <a:p>
-            <a:pPr algn="l" indent="0" marL="0">
-              <a:buNone/>
-            </a:pPr>
-            <a:r>
-              <a:rPr lang="en-US" sz="1200" dirty="0">
-                <a:solidFill>
-                  <a:srgbClr val="0F172A"/>
-                </a:solidFill>
-                <a:latin typeface="Calibri" pitchFamily="34" charset="0"/>
-                <a:ea typeface="Calibri" pitchFamily="34" charset="-122"/>
-                <a:cs typeface="Calibri" pitchFamily="34" charset="-120"/>
-              </a:rPr>
-              <a:t>A person who teaches others skills or helps them get fit.</a:t>
+              <a:t>lines of connected carriages that run on a railway</a:t>
             </a:r>
             <a:endParaRPr lang="en-US" sz="1200" dirty="0"/>
           </a:p>
@@ -41569,7 +41277,7 @@
                 <a:ea typeface="Calibri" pitchFamily="34" charset="-122"/>
                 <a:cs typeface="Calibri" pitchFamily="34" charset="-120"/>
               </a:rPr>
-              <a:t>Word Labs  •  wordlabs.app  •  Root: 'train' = to teach or draw along</a:t>
+              <a:t>Word Labs  •  wordlabs.app  •  Root: 'train' = to practise to improve; to teach</a:t>
             </a:r>
             <a:endParaRPr lang="en-US" sz="800" dirty="0"/>
           </a:p>
@@ -41772,7 +41480,7 @@
                 <a:ea typeface="Calibri" pitchFamily="34" charset="-122"/>
                 <a:cs typeface="Calibri" pitchFamily="34" charset="-120"/>
               </a:rPr>
-              <a:t>The trainer worked with the athletes every morning to help them prepare for the big race.</a:t>
+              <a:t>We caught the train into the city on Saturday morning.</a:t>
             </a:r>
             <a:endParaRPr lang="en-US" sz="1500" dirty="0"/>
           </a:p>
@@ -41936,7 +41644,7 @@
                 <a:ea typeface="Calibri" pitchFamily="34" charset="-122"/>
                 <a:cs typeface="Calibri" pitchFamily="34" charset="-120"/>
               </a:rPr>
-              <a:t>The new trainee watched carefully as the chef showed her how to prepare the meal.</a:t>
+              <a:t>The trains arrived at the station right on time.</a:t>
             </a:r>
             <a:endParaRPr lang="en-US" sz="1500" dirty="0"/>
           </a:p>
@@ -42100,7 +41808,7 @@
                 <a:ea typeface="Calibri" pitchFamily="34" charset="-122"/>
                 <a:cs typeface="Calibri" pitchFamily="34" charset="-120"/>
               </a:rPr>
-              <a:t>Without proper training, it can be very hard to learn a difficult new skill.</a:t>
+              <a:t>Many factory workers had to retrain when the machines changed.</a:t>
             </a:r>
             <a:endParaRPr lang="en-US" sz="1500" dirty="0"/>
           </a:p>
